--- a/output/wordlabs-bright-3day.pptx
+++ b/output/wordlabs-bright-3day.pptx
@@ -6057,7 +6057,7 @@
                 <a:ea typeface="Calibri" pitchFamily="34" charset="-122"/>
                 <a:cs typeface="Calibri" pitchFamily="34" charset="-120"/>
               </a:rPr>
-              <a:t>brightness</a:t>
+              <a:t>brightest</a:t>
             </a:r>
             <a:pPr algn="l" indent="0" marL="0">
               <a:buNone/>
@@ -6071,7 +6071,7 @@
                 <a:ea typeface="Calibri" pitchFamily="34" charset="-122"/>
                 <a:cs typeface="Calibri" pitchFamily="34" charset="-120"/>
               </a:rPr>
-              <a:t> of the summer sun made everything </a:t>
+              <a:t> star in the sky shone </a:t>
             </a:r>
             <a:pPr algn="l" indent="0" marL="0">
               <a:buNone/>
@@ -6102,7 +6102,7 @@
                 <a:ea typeface="Calibri" pitchFamily="34" charset="-122"/>
                 <a:cs typeface="Calibri" pitchFamily="34" charset="-120"/>
               </a:rPr>
-              <a:t> coloured and beautiful.</a:t>
+              <a:t> over the quiet town.</a:t>
             </a:r>
             <a:endParaRPr lang="en-US" sz="1800" dirty="0"/>
           </a:p>
@@ -6257,7 +6257,7 @@
                 <a:ea typeface="Trebuchet MS" pitchFamily="34" charset="-122"/>
                 <a:cs typeface="Trebuchet MS" pitchFamily="34" charset="-120"/>
               </a:rPr>
-              <a:t>brightness</a:t>
+              <a:t>brightest</a:t>
             </a:r>
             <a:endParaRPr lang="en-US" sz="1400" dirty="0"/>
           </a:p>
@@ -6855,7 +6855,7 @@
                 <a:ea typeface="Trebuchet MS" pitchFamily="34" charset="-122"/>
                 <a:cs typeface="Trebuchet MS" pitchFamily="34" charset="-120"/>
               </a:rPr>
-              <a:t>brightness</a:t>
+              <a:t>brightest</a:t>
             </a:r>
             <a:endParaRPr lang="en-US" sz="2800" dirty="0"/>
           </a:p>
@@ -7682,7 +7682,7 @@
                 <a:ea typeface="Trebuchet MS" pitchFamily="34" charset="-122"/>
                 <a:cs typeface="Trebuchet MS" pitchFamily="34" charset="-120"/>
               </a:rPr>
-              <a:t>brightness</a:t>
+              <a:t>brightest</a:t>
             </a:r>
             <a:endParaRPr lang="en-US" sz="2800" dirty="0"/>
           </a:p>
@@ -7933,7 +7933,7 @@
                 <a:ea typeface="Trebuchet MS" pitchFamily="34" charset="-122"/>
                 <a:cs typeface="Trebuchet MS" pitchFamily="34" charset="-120"/>
               </a:rPr>
-              <a:t>ness</a:t>
+              <a:t>est</a:t>
             </a:r>
             <a:endParaRPr lang="en-US" sz="1300" dirty="0"/>
           </a:p>
@@ -7972,7 +7972,7 @@
                 <a:ea typeface="Calibri" pitchFamily="34" charset="-122"/>
                 <a:cs typeface="Calibri" pitchFamily="34" charset="-120"/>
               </a:rPr>
-              <a:t>state or quality of</a:t>
+              <a:t>the most</a:t>
             </a:r>
             <a:endParaRPr lang="en-US" sz="850" dirty="0"/>
           </a:p>
@@ -8667,7 +8667,7 @@
                 <a:ea typeface="Trebuchet MS" pitchFamily="34" charset="-122"/>
                 <a:cs typeface="Trebuchet MS" pitchFamily="34" charset="-120"/>
               </a:rPr>
-              <a:t>brightness</a:t>
+              <a:t>brightest</a:t>
             </a:r>
             <a:endParaRPr lang="en-US" sz="2800" dirty="0"/>
           </a:p>
@@ -8918,7 +8918,7 @@
                 <a:ea typeface="Trebuchet MS" pitchFamily="34" charset="-122"/>
                 <a:cs typeface="Trebuchet MS" pitchFamily="34" charset="-120"/>
               </a:rPr>
-              <a:t>ness</a:t>
+              <a:t>est</a:t>
             </a:r>
             <a:endParaRPr lang="en-US" sz="1300" dirty="0"/>
           </a:p>
@@ -8957,7 +8957,7 @@
                 <a:ea typeface="Calibri" pitchFamily="34" charset="-122"/>
                 <a:cs typeface="Calibri" pitchFamily="34" charset="-120"/>
               </a:rPr>
-              <a:t>state or quality of</a:t>
+              <a:t>the most</a:t>
             </a:r>
             <a:endParaRPr lang="en-US" sz="850" dirty="0"/>
           </a:p>
@@ -9221,7 +9221,7 @@
                 <a:ea typeface="Trebuchet MS" pitchFamily="34" charset="-122"/>
                 <a:cs typeface="Trebuchet MS" pitchFamily="34" charset="-120"/>
               </a:rPr>
-              <a:t>ness</a:t>
+              <a:t>est</a:t>
             </a:r>
             <a:endParaRPr lang="en-US" sz="1400" dirty="0"/>
           </a:p>
@@ -9784,7 +9784,7 @@
                 <a:ea typeface="Trebuchet MS" pitchFamily="34" charset="-122"/>
                 <a:cs typeface="Trebuchet MS" pitchFamily="34" charset="-120"/>
               </a:rPr>
-              <a:t>brightness</a:t>
+              <a:t>brightest</a:t>
             </a:r>
             <a:endParaRPr lang="en-US" sz="2800" dirty="0"/>
           </a:p>
@@ -10035,7 +10035,7 @@
                 <a:ea typeface="Trebuchet MS" pitchFamily="34" charset="-122"/>
                 <a:cs typeface="Trebuchet MS" pitchFamily="34" charset="-120"/>
               </a:rPr>
-              <a:t>ness</a:t>
+              <a:t>est</a:t>
             </a:r>
             <a:endParaRPr lang="en-US" sz="1300" dirty="0"/>
           </a:p>
@@ -10074,7 +10074,7 @@
                 <a:ea typeface="Calibri" pitchFamily="34" charset="-122"/>
                 <a:cs typeface="Calibri" pitchFamily="34" charset="-120"/>
               </a:rPr>
-              <a:t>state or quality of</a:t>
+              <a:t>the most</a:t>
             </a:r>
             <a:endParaRPr lang="en-US" sz="850" dirty="0"/>
           </a:p>
@@ -10338,7 +10338,7 @@
                 <a:ea typeface="Trebuchet MS" pitchFamily="34" charset="-122"/>
                 <a:cs typeface="Trebuchet MS" pitchFamily="34" charset="-120"/>
               </a:rPr>
-              <a:t>ness</a:t>
+              <a:t>est</a:t>
             </a:r>
             <a:endParaRPr lang="en-US" sz="1400" dirty="0"/>
           </a:p>
@@ -10445,7 +10445,7 @@
         </p:nvSpPr>
         <p:spPr>
           <a:xfrm>
-            <a:off x="2254649" y="4169664"/>
+            <a:off x="2124837" y="4169664"/>
             <a:ext cx="685800" cy="384048"/>
           </a:xfrm>
           <a:prstGeom prst="rect">
@@ -10472,7 +10472,7 @@
         </p:nvSpPr>
         <p:spPr>
           <a:xfrm>
-            <a:off x="2254649" y="4169664"/>
+            <a:off x="2124837" y="4169664"/>
             <a:ext cx="685800" cy="384048"/>
           </a:xfrm>
           <a:prstGeom prst="rect">
@@ -10497,7 +10497,7 @@
                 <a:ea typeface="Trebuchet MS" pitchFamily="34" charset="-122"/>
                 <a:cs typeface="Trebuchet MS" pitchFamily="34" charset="-120"/>
               </a:rPr>
-              <a:t>br</a:t>
+              <a:t>b</a:t>
             </a:r>
             <a:endParaRPr lang="en-US" sz="900" dirty="0"/>
           </a:p>
@@ -10511,7 +10511,7 @@
         </p:nvSpPr>
         <p:spPr>
           <a:xfrm>
-            <a:off x="3293146" y="4169664"/>
+            <a:off x="3033522" y="4169664"/>
             <a:ext cx="685800" cy="384048"/>
           </a:xfrm>
           <a:prstGeom prst="rect">
@@ -10538,7 +10538,7 @@
         </p:nvSpPr>
         <p:spPr>
           <a:xfrm>
-            <a:off x="3293146" y="4169664"/>
+            <a:off x="3033522" y="4169664"/>
             <a:ext cx="685800" cy="384048"/>
           </a:xfrm>
           <a:prstGeom prst="rect">
@@ -10563,6 +10563,72 @@
                 <a:ea typeface="Trebuchet MS" pitchFamily="34" charset="-122"/>
                 <a:cs typeface="Trebuchet MS" pitchFamily="34" charset="-120"/>
               </a:rPr>
+              <a:t>r</a:t>
+            </a:r>
+            <a:endParaRPr lang="en-US" sz="900" dirty="0"/>
+          </a:p>
+        </p:txBody>
+      </p:sp>
+      <p:sp>
+        <p:nvSpPr>
+          <p:cNvPr id="37" name="Shape 35"/>
+          <p:cNvSpPr/>
+          <p:nvPr/>
+        </p:nvSpPr>
+        <p:spPr>
+          <a:xfrm>
+            <a:off x="3942207" y="4169664"/>
+            <a:ext cx="685800" cy="384048"/>
+          </a:xfrm>
+          <a:prstGeom prst="rect">
+            <a:avLst>
+              <a:gd name="adj" fmla="val 9524"/>
+            </a:avLst>
+          </a:prstGeom>
+          <a:solidFill>
+            <a:srgbClr val="FFFFFF"/>
+          </a:solidFill>
+          <a:ln w="12700">
+            <a:solidFill>
+              <a:srgbClr val="DB2777"/>
+            </a:solidFill>
+            <a:prstDash val="solid"/>
+          </a:ln>
+        </p:spPr>
+      </p:sp>
+      <p:sp>
+        <p:nvSpPr>
+          <p:cNvPr id="38" name="Text 36"/>
+          <p:cNvSpPr/>
+          <p:nvPr/>
+        </p:nvSpPr>
+        <p:spPr>
+          <a:xfrm>
+            <a:off x="3942207" y="4169664"/>
+            <a:ext cx="685800" cy="384048"/>
+          </a:xfrm>
+          <a:prstGeom prst="rect">
+            <a:avLst/>
+          </a:prstGeom>
+          <a:noFill/>
+          <a:ln/>
+        </p:spPr>
+        <p:txBody>
+          <a:bodyPr wrap="square" lIns="0" tIns="0" rIns="0" bIns="0" rtlCol="0" anchor="ctr"/>
+          <a:lstStyle/>
+          <a:p>
+            <a:pPr algn="ctr" indent="0" marL="0">
+              <a:buNone/>
+            </a:pPr>
+            <a:r>
+              <a:rPr lang="en-US" sz="900" b="1" dirty="0">
+                <a:solidFill>
+                  <a:srgbClr val="9D174D"/>
+                </a:solidFill>
+                <a:latin typeface="Trebuchet MS" pitchFamily="34" charset="0"/>
+                <a:ea typeface="Trebuchet MS" pitchFamily="34" charset="-122"/>
+                <a:cs typeface="Trebuchet MS" pitchFamily="34" charset="-120"/>
+              </a:rPr>
               <a:t>igh</a:t>
             </a:r>
             <a:endParaRPr lang="en-US" sz="900" dirty="0"/>
@@ -10571,13 +10637,13 @@
       </p:sp>
       <p:sp>
         <p:nvSpPr>
-          <p:cNvPr id="37" name="Text 35"/>
-          <p:cNvSpPr/>
-          <p:nvPr/>
-        </p:nvSpPr>
-        <p:spPr>
-          <a:xfrm>
-            <a:off x="3293146" y="4572000"/>
+          <p:cNvPr id="39" name="Text 37"/>
+          <p:cNvSpPr/>
+          <p:nvPr/>
+        </p:nvSpPr>
+        <p:spPr>
+          <a:xfrm>
+            <a:off x="3942207" y="4572000"/>
             <a:ext cx="685800" cy="219456"/>
           </a:xfrm>
           <a:prstGeom prst="rect">
@@ -10610,13 +10676,13 @@
       </p:sp>
       <p:sp>
         <p:nvSpPr>
-          <p:cNvPr id="38" name="Shape 36"/>
-          <p:cNvSpPr/>
-          <p:nvPr/>
-        </p:nvSpPr>
-        <p:spPr>
-          <a:xfrm>
-            <a:off x="4331643" y="4169664"/>
+          <p:cNvPr id="40" name="Shape 38"/>
+          <p:cNvSpPr/>
+          <p:nvPr/>
+        </p:nvSpPr>
+        <p:spPr>
+          <a:xfrm>
+            <a:off x="4850892" y="4169664"/>
             <a:ext cx="685800" cy="384048"/>
           </a:xfrm>
           <a:prstGeom prst="rect">
@@ -10637,13 +10703,13 @@
       </p:sp>
       <p:sp>
         <p:nvSpPr>
-          <p:cNvPr id="39" name="Text 37"/>
-          <p:cNvSpPr/>
-          <p:nvPr/>
-        </p:nvSpPr>
-        <p:spPr>
-          <a:xfrm>
-            <a:off x="4331643" y="4169664"/>
+          <p:cNvPr id="41" name="Text 39"/>
+          <p:cNvSpPr/>
+          <p:nvPr/>
+        </p:nvSpPr>
+        <p:spPr>
+          <a:xfrm>
+            <a:off x="4850892" y="4169664"/>
             <a:ext cx="685800" cy="384048"/>
           </a:xfrm>
           <a:prstGeom prst="rect">
@@ -10676,13 +10742,13 @@
       </p:sp>
       <p:sp>
         <p:nvSpPr>
-          <p:cNvPr id="40" name="Shape 38"/>
-          <p:cNvSpPr/>
-          <p:nvPr/>
-        </p:nvSpPr>
-        <p:spPr>
-          <a:xfrm>
-            <a:off x="5370141" y="4169664"/>
+          <p:cNvPr id="42" name="Shape 40"/>
+          <p:cNvSpPr/>
+          <p:nvPr/>
+        </p:nvSpPr>
+        <p:spPr>
+          <a:xfrm>
+            <a:off x="5759577" y="4169664"/>
             <a:ext cx="685800" cy="384048"/>
           </a:xfrm>
           <a:prstGeom prst="rect">
@@ -10703,13 +10769,13 @@
       </p:sp>
       <p:sp>
         <p:nvSpPr>
-          <p:cNvPr id="41" name="Text 39"/>
-          <p:cNvSpPr/>
-          <p:nvPr/>
-        </p:nvSpPr>
-        <p:spPr>
-          <a:xfrm>
-            <a:off x="5370141" y="4169664"/>
+          <p:cNvPr id="43" name="Text 41"/>
+          <p:cNvSpPr/>
+          <p:nvPr/>
+        </p:nvSpPr>
+        <p:spPr>
+          <a:xfrm>
+            <a:off x="5759577" y="4169664"/>
             <a:ext cx="685800" cy="384048"/>
           </a:xfrm>
           <a:prstGeom prst="rect">
@@ -10734,7 +10800,7 @@
                 <a:ea typeface="Trebuchet MS" pitchFamily="34" charset="-122"/>
                 <a:cs typeface="Trebuchet MS" pitchFamily="34" charset="-120"/>
               </a:rPr>
-              <a:t>n</a:t>
+              <a:t>e</a:t>
             </a:r>
             <a:endParaRPr lang="en-US" sz="900" dirty="0"/>
           </a:p>
@@ -10742,13 +10808,13 @@
       </p:sp>
       <p:sp>
         <p:nvSpPr>
-          <p:cNvPr id="42" name="Shape 40"/>
-          <p:cNvSpPr/>
-          <p:nvPr/>
-        </p:nvSpPr>
-        <p:spPr>
-          <a:xfrm>
-            <a:off x="6408638" y="4169664"/>
+          <p:cNvPr id="44" name="Shape 42"/>
+          <p:cNvSpPr/>
+          <p:nvPr/>
+        </p:nvSpPr>
+        <p:spPr>
+          <a:xfrm>
+            <a:off x="6668262" y="4169664"/>
             <a:ext cx="685800" cy="384048"/>
           </a:xfrm>
           <a:prstGeom prst="rect">
@@ -10769,13 +10835,13 @@
       </p:sp>
       <p:sp>
         <p:nvSpPr>
-          <p:cNvPr id="43" name="Text 41"/>
-          <p:cNvSpPr/>
-          <p:nvPr/>
-        </p:nvSpPr>
-        <p:spPr>
-          <a:xfrm>
-            <a:off x="6408638" y="4169664"/>
+          <p:cNvPr id="45" name="Text 43"/>
+          <p:cNvSpPr/>
+          <p:nvPr/>
+        </p:nvSpPr>
+        <p:spPr>
+          <a:xfrm>
+            <a:off x="6668262" y="4169664"/>
             <a:ext cx="685800" cy="384048"/>
           </a:xfrm>
           <a:prstGeom prst="rect">
@@ -10800,7 +10866,7 @@
                 <a:ea typeface="Trebuchet MS" pitchFamily="34" charset="-122"/>
                 <a:cs typeface="Trebuchet MS" pitchFamily="34" charset="-120"/>
               </a:rPr>
-              <a:t>e</a:t>
+              <a:t>s</a:t>
             </a:r>
             <a:endParaRPr lang="en-US" sz="900" dirty="0"/>
           </a:p>
@@ -10808,13 +10874,13 @@
       </p:sp>
       <p:sp>
         <p:nvSpPr>
-          <p:cNvPr id="44" name="Shape 42"/>
-          <p:cNvSpPr/>
-          <p:nvPr/>
-        </p:nvSpPr>
-        <p:spPr>
-          <a:xfrm>
-            <a:off x="7447135" y="4169664"/>
+          <p:cNvPr id="46" name="Shape 44"/>
+          <p:cNvSpPr/>
+          <p:nvPr/>
+        </p:nvSpPr>
+        <p:spPr>
+          <a:xfrm>
+            <a:off x="7576947" y="4169664"/>
             <a:ext cx="685800" cy="384048"/>
           </a:xfrm>
           <a:prstGeom prst="rect">
@@ -10835,13 +10901,13 @@
       </p:sp>
       <p:sp>
         <p:nvSpPr>
-          <p:cNvPr id="45" name="Text 43"/>
-          <p:cNvSpPr/>
-          <p:nvPr/>
-        </p:nvSpPr>
-        <p:spPr>
-          <a:xfrm>
-            <a:off x="7447135" y="4169664"/>
+          <p:cNvPr id="47" name="Text 45"/>
+          <p:cNvSpPr/>
+          <p:nvPr/>
+        </p:nvSpPr>
+        <p:spPr>
+          <a:xfrm>
+            <a:off x="7576947" y="4169664"/>
             <a:ext cx="685800" cy="384048"/>
           </a:xfrm>
           <a:prstGeom prst="rect">
@@ -10866,7 +10932,7 @@
                 <a:ea typeface="Trebuchet MS" pitchFamily="34" charset="-122"/>
                 <a:cs typeface="Trebuchet MS" pitchFamily="34" charset="-120"/>
               </a:rPr>
-              <a:t>ss</a:t>
+              <a:t>t</a:t>
             </a:r>
             <a:endParaRPr lang="en-US" sz="900" dirty="0"/>
           </a:p>
@@ -12414,7 +12480,7 @@
                 <a:ea typeface="Calibri" pitchFamily="34" charset="-122"/>
                 <a:cs typeface="Calibri" pitchFamily="34" charset="-120"/>
               </a:rPr>
-              <a:t>in a certain way</a:t>
+              <a:t>in a way that is</a:t>
             </a:r>
             <a:endParaRPr lang="en-US" sz="850" dirty="0"/>
           </a:p>
@@ -13399,7 +13465,7 @@
                 <a:ea typeface="Calibri" pitchFamily="34" charset="-122"/>
                 <a:cs typeface="Calibri" pitchFamily="34" charset="-120"/>
               </a:rPr>
-              <a:t>in a certain way</a:t>
+              <a:t>in a way that is</a:t>
             </a:r>
             <a:endParaRPr lang="en-US" sz="850" dirty="0"/>
           </a:p>
@@ -14781,7 +14847,7 @@
                 <a:ea typeface="Calibri" pitchFamily="34" charset="-122"/>
                 <a:cs typeface="Calibri" pitchFamily="34" charset="-120"/>
               </a:rPr>
-              <a:t>in a certain way</a:t>
+              <a:t>in a way that is</a:t>
             </a:r>
             <a:endParaRPr lang="en-US" sz="850" dirty="0"/>
           </a:p>
@@ -15152,7 +15218,7 @@
         </p:nvSpPr>
         <p:spPr>
           <a:xfrm>
-            <a:off x="2427732" y="4169664"/>
+            <a:off x="2254649" y="4169664"/>
             <a:ext cx="685800" cy="384048"/>
           </a:xfrm>
           <a:prstGeom prst="rect">
@@ -15179,7 +15245,7 @@
         </p:nvSpPr>
         <p:spPr>
           <a:xfrm>
-            <a:off x="2427732" y="4169664"/>
+            <a:off x="2254649" y="4169664"/>
             <a:ext cx="685800" cy="384048"/>
           </a:xfrm>
           <a:prstGeom prst="rect">
@@ -15204,7 +15270,7 @@
                 <a:ea typeface="Trebuchet MS" pitchFamily="34" charset="-122"/>
                 <a:cs typeface="Trebuchet MS" pitchFamily="34" charset="-120"/>
               </a:rPr>
-              <a:t>br</a:t>
+              <a:t>b</a:t>
             </a:r>
             <a:endParaRPr lang="en-US" sz="900" dirty="0"/>
           </a:p>
@@ -15218,7 +15284,7 @@
         </p:nvSpPr>
         <p:spPr>
           <a:xfrm>
-            <a:off x="3639312" y="4169664"/>
+            <a:off x="3293146" y="4169664"/>
             <a:ext cx="685800" cy="384048"/>
           </a:xfrm>
           <a:prstGeom prst="rect">
@@ -15245,7 +15311,7 @@
         </p:nvSpPr>
         <p:spPr>
           <a:xfrm>
-            <a:off x="3639312" y="4169664"/>
+            <a:off x="3293146" y="4169664"/>
             <a:ext cx="685800" cy="384048"/>
           </a:xfrm>
           <a:prstGeom prst="rect">
@@ -15270,6 +15336,72 @@
                 <a:ea typeface="Trebuchet MS" pitchFamily="34" charset="-122"/>
                 <a:cs typeface="Trebuchet MS" pitchFamily="34" charset="-120"/>
               </a:rPr>
+              <a:t>r</a:t>
+            </a:r>
+            <a:endParaRPr lang="en-US" sz="900" dirty="0"/>
+          </a:p>
+        </p:txBody>
+      </p:sp>
+      <p:sp>
+        <p:nvSpPr>
+          <p:cNvPr id="37" name="Shape 35"/>
+          <p:cNvSpPr/>
+          <p:nvPr/>
+        </p:nvSpPr>
+        <p:spPr>
+          <a:xfrm>
+            <a:off x="4331643" y="4169664"/>
+            <a:ext cx="685800" cy="384048"/>
+          </a:xfrm>
+          <a:prstGeom prst="rect">
+            <a:avLst>
+              <a:gd name="adj" fmla="val 9524"/>
+            </a:avLst>
+          </a:prstGeom>
+          <a:solidFill>
+            <a:srgbClr val="FFFFFF"/>
+          </a:solidFill>
+          <a:ln w="12700">
+            <a:solidFill>
+              <a:srgbClr val="DB2777"/>
+            </a:solidFill>
+            <a:prstDash val="solid"/>
+          </a:ln>
+        </p:spPr>
+      </p:sp>
+      <p:sp>
+        <p:nvSpPr>
+          <p:cNvPr id="38" name="Text 36"/>
+          <p:cNvSpPr/>
+          <p:nvPr/>
+        </p:nvSpPr>
+        <p:spPr>
+          <a:xfrm>
+            <a:off x="4331643" y="4169664"/>
+            <a:ext cx="685800" cy="384048"/>
+          </a:xfrm>
+          <a:prstGeom prst="rect">
+            <a:avLst/>
+          </a:prstGeom>
+          <a:noFill/>
+          <a:ln/>
+        </p:spPr>
+        <p:txBody>
+          <a:bodyPr wrap="square" lIns="0" tIns="0" rIns="0" bIns="0" rtlCol="0" anchor="ctr"/>
+          <a:lstStyle/>
+          <a:p>
+            <a:pPr algn="ctr" indent="0" marL="0">
+              <a:buNone/>
+            </a:pPr>
+            <a:r>
+              <a:rPr lang="en-US" sz="900" b="1" dirty="0">
+                <a:solidFill>
+                  <a:srgbClr val="9D174D"/>
+                </a:solidFill>
+                <a:latin typeface="Trebuchet MS" pitchFamily="34" charset="0"/>
+                <a:ea typeface="Trebuchet MS" pitchFamily="34" charset="-122"/>
+                <a:cs typeface="Trebuchet MS" pitchFamily="34" charset="-120"/>
+              </a:rPr>
               <a:t>igh</a:t>
             </a:r>
             <a:endParaRPr lang="en-US" sz="900" dirty="0"/>
@@ -15278,13 +15410,13 @@
       </p:sp>
       <p:sp>
         <p:nvSpPr>
-          <p:cNvPr id="37" name="Text 35"/>
-          <p:cNvSpPr/>
-          <p:nvPr/>
-        </p:nvSpPr>
-        <p:spPr>
-          <a:xfrm>
-            <a:off x="3639312" y="4572000"/>
+          <p:cNvPr id="39" name="Text 37"/>
+          <p:cNvSpPr/>
+          <p:nvPr/>
+        </p:nvSpPr>
+        <p:spPr>
+          <a:xfrm>
+            <a:off x="4331643" y="4572000"/>
             <a:ext cx="685800" cy="219456"/>
           </a:xfrm>
           <a:prstGeom prst="rect">
@@ -15317,13 +15449,13 @@
       </p:sp>
       <p:sp>
         <p:nvSpPr>
-          <p:cNvPr id="38" name="Shape 36"/>
-          <p:cNvSpPr/>
-          <p:nvPr/>
-        </p:nvSpPr>
-        <p:spPr>
-          <a:xfrm>
-            <a:off x="4850892" y="4169664"/>
+          <p:cNvPr id="40" name="Shape 38"/>
+          <p:cNvSpPr/>
+          <p:nvPr/>
+        </p:nvSpPr>
+        <p:spPr>
+          <a:xfrm>
+            <a:off x="5370141" y="4169664"/>
             <a:ext cx="685800" cy="384048"/>
           </a:xfrm>
           <a:prstGeom prst="rect">
@@ -15344,13 +15476,13 @@
       </p:sp>
       <p:sp>
         <p:nvSpPr>
-          <p:cNvPr id="39" name="Text 37"/>
-          <p:cNvSpPr/>
-          <p:nvPr/>
-        </p:nvSpPr>
-        <p:spPr>
-          <a:xfrm>
-            <a:off x="4850892" y="4169664"/>
+          <p:cNvPr id="41" name="Text 39"/>
+          <p:cNvSpPr/>
+          <p:nvPr/>
+        </p:nvSpPr>
+        <p:spPr>
+          <a:xfrm>
+            <a:off x="5370141" y="4169664"/>
             <a:ext cx="685800" cy="384048"/>
           </a:xfrm>
           <a:prstGeom prst="rect">
@@ -15383,13 +15515,13 @@
       </p:sp>
       <p:sp>
         <p:nvSpPr>
-          <p:cNvPr id="40" name="Shape 38"/>
-          <p:cNvSpPr/>
-          <p:nvPr/>
-        </p:nvSpPr>
-        <p:spPr>
-          <a:xfrm>
-            <a:off x="6062472" y="4169664"/>
+          <p:cNvPr id="42" name="Shape 40"/>
+          <p:cNvSpPr/>
+          <p:nvPr/>
+        </p:nvSpPr>
+        <p:spPr>
+          <a:xfrm>
+            <a:off x="6408638" y="4169664"/>
             <a:ext cx="685800" cy="384048"/>
           </a:xfrm>
           <a:prstGeom prst="rect">
@@ -15410,13 +15542,13 @@
       </p:sp>
       <p:sp>
         <p:nvSpPr>
-          <p:cNvPr id="41" name="Text 39"/>
-          <p:cNvSpPr/>
-          <p:nvPr/>
-        </p:nvSpPr>
-        <p:spPr>
-          <a:xfrm>
-            <a:off x="6062472" y="4169664"/>
+          <p:cNvPr id="43" name="Text 41"/>
+          <p:cNvSpPr/>
+          <p:nvPr/>
+        </p:nvSpPr>
+        <p:spPr>
+          <a:xfrm>
+            <a:off x="6408638" y="4169664"/>
             <a:ext cx="685800" cy="384048"/>
           </a:xfrm>
           <a:prstGeom prst="rect">
@@ -15449,13 +15581,13 @@
       </p:sp>
       <p:sp>
         <p:nvSpPr>
-          <p:cNvPr id="42" name="Shape 40"/>
-          <p:cNvSpPr/>
-          <p:nvPr/>
-        </p:nvSpPr>
-        <p:spPr>
-          <a:xfrm>
-            <a:off x="7274052" y="4169664"/>
+          <p:cNvPr id="44" name="Shape 42"/>
+          <p:cNvSpPr/>
+          <p:nvPr/>
+        </p:nvSpPr>
+        <p:spPr>
+          <a:xfrm>
+            <a:off x="7447135" y="4169664"/>
             <a:ext cx="685800" cy="384048"/>
           </a:xfrm>
           <a:prstGeom prst="rect">
@@ -15476,13 +15608,13 @@
       </p:sp>
       <p:sp>
         <p:nvSpPr>
-          <p:cNvPr id="43" name="Text 41"/>
-          <p:cNvSpPr/>
-          <p:nvPr/>
-        </p:nvSpPr>
-        <p:spPr>
-          <a:xfrm>
-            <a:off x="7274052" y="4169664"/>
+          <p:cNvPr id="45" name="Text 43"/>
+          <p:cNvSpPr/>
+          <p:nvPr/>
+        </p:nvSpPr>
+        <p:spPr>
+          <a:xfrm>
+            <a:off x="7447135" y="4169664"/>
             <a:ext cx="685800" cy="384048"/>
           </a:xfrm>
           <a:prstGeom prst="rect">
@@ -16833,7 +16965,7 @@
                 <a:ea typeface="Calibri" pitchFamily="34" charset="-122"/>
                 <a:cs typeface="Calibri" pitchFamily="34" charset="-120"/>
               </a:rPr>
-              <a:t>The </a:t>
+              <a:t>When she used the torch to </a:t>
             </a:r>
             <a:pPr algn="l" indent="0" marL="0">
               <a:buNone/>
@@ -16850,7 +16982,7 @@
                 <a:ea typeface="Calibri" pitchFamily="34" charset="-122"/>
                 <a:cs typeface="Calibri" pitchFamily="34" charset="-120"/>
               </a:rPr>
-              <a:t>brightest</a:t>
+              <a:t>brighten</a:t>
             </a:r>
             <a:pPr algn="l" indent="0" marL="0">
               <a:buNone/>
@@ -16864,7 +16996,7 @@
                 <a:ea typeface="Calibri" pitchFamily="34" charset="-122"/>
                 <a:cs typeface="Calibri" pitchFamily="34" charset="-120"/>
               </a:rPr>
-              <a:t> lamp in the room helped to </a:t>
+              <a:t> the room, the </a:t>
             </a:r>
             <a:pPr algn="l" indent="0" marL="0">
               <a:buNone/>
@@ -16881,7 +17013,7 @@
                 <a:ea typeface="Calibri" pitchFamily="34" charset="-122"/>
                 <a:cs typeface="Calibri" pitchFamily="34" charset="-120"/>
               </a:rPr>
-              <a:t>brighten</a:t>
+              <a:t>brightness</a:t>
             </a:r>
             <a:pPr algn="l" indent="0" marL="0">
               <a:buNone/>
@@ -16895,118 +17027,343 @@
                 <a:ea typeface="Calibri" pitchFamily="34" charset="-122"/>
                 <a:cs typeface="Calibri" pitchFamily="34" charset="-120"/>
               </a:rPr>
-              <a:t> the corner, and its </a:t>
-            </a:r>
+              <a:t> made everyone smile!</a:t>
+            </a:r>
+            <a:endParaRPr lang="en-US" sz="1800" dirty="0"/>
+          </a:p>
+        </p:txBody>
+      </p:sp>
+      <p:sp>
+        <p:nvSpPr>
+          <p:cNvPr id="13" name="Shape 11"/>
+          <p:cNvSpPr/>
+          <p:nvPr/>
+        </p:nvSpPr>
+        <p:spPr>
+          <a:xfrm>
+            <a:off x="365760" y="2852928"/>
+            <a:ext cx="8412480" cy="475488"/>
+          </a:xfrm>
+          <a:prstGeom prst="rect">
+            <a:avLst>
+              <a:gd name="adj" fmla="val 15385"/>
+            </a:avLst>
+          </a:prstGeom>
+          <a:solidFill>
+            <a:srgbClr val="CCFBF1"/>
+          </a:solidFill>
+          <a:ln w="12700">
+            <a:solidFill>
+              <a:srgbClr val="0D9488"/>
+            </a:solidFill>
+            <a:prstDash val="solid"/>
+          </a:ln>
+        </p:spPr>
+      </p:sp>
+      <p:sp>
+        <p:nvSpPr>
+          <p:cNvPr id="14" name="Text 12"/>
+          <p:cNvSpPr/>
+          <p:nvPr/>
+        </p:nvSpPr>
+        <p:spPr>
+          <a:xfrm>
+            <a:off x="502920" y="2852928"/>
+            <a:ext cx="8229600" cy="475488"/>
+          </a:xfrm>
+          <a:prstGeom prst="rect">
+            <a:avLst/>
+          </a:prstGeom>
+          <a:noFill/>
+          <a:ln/>
+        </p:spPr>
+        <p:txBody>
+          <a:bodyPr wrap="square" rtlCol="0" anchor="ctr"/>
+          <a:lstStyle/>
+          <a:p>
             <a:pPr algn="l" indent="0" marL="0">
               <a:buNone/>
             </a:pPr>
             <a:r>
-              <a:rPr lang="en-US" sz="1800" b="1" dirty="0">
-                <a:solidFill>
-                  <a:srgbClr val="0D9488"/>
-                </a:solidFill>
-                <a:highlight>
-                  <a:srgbClr val="CCFBF1"/>
-                </a:highlight>
+              <a:rPr lang="en-US" sz="1200" b="1" dirty="0">
+                <a:solidFill>
+                  <a:srgbClr val="0F766E"/>
+                </a:solidFill>
                 <a:latin typeface="Calibri" pitchFamily="34" charset="0"/>
                 <a:ea typeface="Calibri" pitchFamily="34" charset="-122"/>
                 <a:cs typeface="Calibri" pitchFamily="34" charset="-120"/>
               </a:rPr>
-              <a:t>brightness</a:t>
-            </a:r>
-            <a:pPr algn="l" indent="0" marL="0">
-              <a:buNone/>
-            </a:pPr>
-            <a:r>
-              <a:rPr lang="en-US" sz="1800" dirty="0">
-                <a:solidFill>
-                  <a:srgbClr val="0F172A"/>
+              <a:t>Now rewrite each focus word below with space between letters — leave room for your breakdown.</a:t>
+            </a:r>
+            <a:endParaRPr lang="en-US" sz="1200" dirty="0"/>
+          </a:p>
+        </p:txBody>
+      </p:sp>
+      <p:sp>
+        <p:nvSpPr>
+          <p:cNvPr id="15" name="Shape 13"/>
+          <p:cNvSpPr/>
+          <p:nvPr/>
+        </p:nvSpPr>
+        <p:spPr>
+          <a:xfrm>
+            <a:off x="411480" y="3456432"/>
+            <a:ext cx="2499360" cy="1005840"/>
+          </a:xfrm>
+          <a:prstGeom prst="rect">
+            <a:avLst>
+              <a:gd name="adj" fmla="val 7273"/>
+            </a:avLst>
+          </a:prstGeom>
+          <a:solidFill>
+            <a:srgbClr val="F8FAFC"/>
+          </a:solidFill>
+          <a:ln w="12700">
+            <a:solidFill>
+              <a:srgbClr val="E2E8F0"/>
+            </a:solidFill>
+            <a:prstDash val="solid"/>
+          </a:ln>
+        </p:spPr>
+      </p:sp>
+      <p:sp>
+        <p:nvSpPr>
+          <p:cNvPr id="16" name="Shape 14"/>
+          <p:cNvSpPr/>
+          <p:nvPr/>
+        </p:nvSpPr>
+        <p:spPr>
+          <a:xfrm>
+            <a:off x="411480" y="3977640"/>
+            <a:ext cx="2499360" cy="0"/>
+          </a:xfrm>
+          <a:prstGeom prst="line">
+            <a:avLst/>
+          </a:prstGeom>
+          <a:noFill/>
+          <a:ln w="12700">
+            <a:solidFill>
+              <a:srgbClr val="E2E8F0"/>
+            </a:solidFill>
+            <a:prstDash val="dash"/>
+          </a:ln>
+        </p:spPr>
+      </p:sp>
+      <p:sp>
+        <p:nvSpPr>
+          <p:cNvPr id="17" name="Text 15"/>
+          <p:cNvSpPr/>
+          <p:nvPr/>
+        </p:nvSpPr>
+        <p:spPr>
+          <a:xfrm>
+            <a:off x="411480" y="3456432"/>
+            <a:ext cx="2499360" cy="502920"/>
+          </a:xfrm>
+          <a:prstGeom prst="rect">
+            <a:avLst/>
+          </a:prstGeom>
+          <a:noFill/>
+          <a:ln/>
+        </p:spPr>
+        <p:txBody>
+          <a:bodyPr wrap="square" lIns="0" tIns="0" rIns="0" bIns="0" rtlCol="0" anchor="ctr"/>
+          <a:lstStyle/>
+          <a:p>
+            <a:pPr algn="ctr" indent="0" marL="0">
+              <a:buNone/>
+            </a:pPr>
+            <a:r>
+              <a:rPr lang="en-US" sz="1400" b="1" dirty="0">
+                <a:solidFill>
+                  <a:srgbClr val="0D9488"/>
+                </a:solidFill>
+                <a:latin typeface="Trebuchet MS" pitchFamily="34" charset="0"/>
+                <a:ea typeface="Trebuchet MS" pitchFamily="34" charset="-122"/>
+                <a:cs typeface="Trebuchet MS" pitchFamily="34" charset="-120"/>
+              </a:rPr>
+              <a:t>brighten</a:t>
+            </a:r>
+            <a:endParaRPr lang="en-US" sz="1400" dirty="0"/>
+          </a:p>
+        </p:txBody>
+      </p:sp>
+      <p:sp>
+        <p:nvSpPr>
+          <p:cNvPr id="18" name="Text 16"/>
+          <p:cNvSpPr/>
+          <p:nvPr/>
+        </p:nvSpPr>
+        <p:spPr>
+          <a:xfrm>
+            <a:off x="411480" y="4005072"/>
+            <a:ext cx="2499360" cy="457200"/>
+          </a:xfrm>
+          <a:prstGeom prst="rect">
+            <a:avLst/>
+          </a:prstGeom>
+          <a:noFill/>
+          <a:ln/>
+        </p:spPr>
+        <p:txBody>
+          <a:bodyPr wrap="square" lIns="0" tIns="0" rIns="0" bIns="0" rtlCol="0" anchor="ctr"/>
+          <a:lstStyle/>
+          <a:p>
+            <a:pPr algn="ctr" indent="0" marL="0">
+              <a:buNone/>
+            </a:pPr>
+            <a:r>
+              <a:rPr lang="en-US" sz="900" i="1" dirty="0">
+                <a:solidFill>
+                  <a:srgbClr val="475569"/>
                 </a:solidFill>
                 <a:latin typeface="Calibri" pitchFamily="34" charset="0"/>
                 <a:ea typeface="Calibri" pitchFamily="34" charset="-122"/>
                 <a:cs typeface="Calibri" pitchFamily="34" charset="-120"/>
               </a:rPr>
-              <a:t> filled the whole space.</a:t>
-            </a:r>
-            <a:endParaRPr lang="en-US" sz="1800" dirty="0"/>
-          </a:p>
-        </p:txBody>
-      </p:sp>
-      <p:sp>
-        <p:nvSpPr>
-          <p:cNvPr id="13" name="Shape 11"/>
-          <p:cNvSpPr/>
-          <p:nvPr/>
-        </p:nvSpPr>
-        <p:spPr>
-          <a:xfrm>
-            <a:off x="365760" y="2852928"/>
-            <a:ext cx="8412480" cy="475488"/>
+              <a:t>write your breakdown below</a:t>
+            </a:r>
+            <a:endParaRPr lang="en-US" sz="900" dirty="0"/>
+          </a:p>
+        </p:txBody>
+      </p:sp>
+      <p:sp>
+        <p:nvSpPr>
+          <p:cNvPr id="19" name="Shape 17"/>
+          <p:cNvSpPr/>
+          <p:nvPr/>
+        </p:nvSpPr>
+        <p:spPr>
+          <a:xfrm>
+            <a:off x="3185160" y="3456432"/>
+            <a:ext cx="2499360" cy="1005840"/>
           </a:xfrm>
           <a:prstGeom prst="rect">
             <a:avLst>
-              <a:gd name="adj" fmla="val 15385"/>
+              <a:gd name="adj" fmla="val 7273"/>
             </a:avLst>
           </a:prstGeom>
           <a:solidFill>
-            <a:srgbClr val="CCFBF1"/>
-          </a:solidFill>
-          <a:ln w="12700">
-            <a:solidFill>
-              <a:srgbClr val="0D9488"/>
-            </a:solidFill>
-            <a:prstDash val="solid"/>
-          </a:ln>
-        </p:spPr>
-      </p:sp>
-      <p:sp>
-        <p:nvSpPr>
-          <p:cNvPr id="14" name="Text 12"/>
-          <p:cNvSpPr/>
-          <p:nvPr/>
-        </p:nvSpPr>
-        <p:spPr>
-          <a:xfrm>
-            <a:off x="502920" y="2852928"/>
-            <a:ext cx="8229600" cy="475488"/>
-          </a:xfrm>
-          <a:prstGeom prst="rect">
-            <a:avLst/>
-          </a:prstGeom>
-          <a:noFill/>
-          <a:ln/>
-        </p:spPr>
-        <p:txBody>
-          <a:bodyPr wrap="square" rtlCol="0" anchor="ctr"/>
-          <a:lstStyle/>
-          <a:p>
-            <a:pPr algn="l" indent="0" marL="0">
-              <a:buNone/>
-            </a:pPr>
-            <a:r>
-              <a:rPr lang="en-US" sz="1200" b="1" dirty="0">
-                <a:solidFill>
-                  <a:srgbClr val="0F766E"/>
+            <a:srgbClr val="F8FAFC"/>
+          </a:solidFill>
+          <a:ln w="12700">
+            <a:solidFill>
+              <a:srgbClr val="E2E8F0"/>
+            </a:solidFill>
+            <a:prstDash val="solid"/>
+          </a:ln>
+        </p:spPr>
+      </p:sp>
+      <p:sp>
+        <p:nvSpPr>
+          <p:cNvPr id="20" name="Shape 18"/>
+          <p:cNvSpPr/>
+          <p:nvPr/>
+        </p:nvSpPr>
+        <p:spPr>
+          <a:xfrm>
+            <a:off x="3185160" y="3977640"/>
+            <a:ext cx="2499360" cy="0"/>
+          </a:xfrm>
+          <a:prstGeom prst="line">
+            <a:avLst/>
+          </a:prstGeom>
+          <a:noFill/>
+          <a:ln w="12700">
+            <a:solidFill>
+              <a:srgbClr val="E2E8F0"/>
+            </a:solidFill>
+            <a:prstDash val="dash"/>
+          </a:ln>
+        </p:spPr>
+      </p:sp>
+      <p:sp>
+        <p:nvSpPr>
+          <p:cNvPr id="21" name="Text 19"/>
+          <p:cNvSpPr/>
+          <p:nvPr/>
+        </p:nvSpPr>
+        <p:spPr>
+          <a:xfrm>
+            <a:off x="3185160" y="3456432"/>
+            <a:ext cx="2499360" cy="502920"/>
+          </a:xfrm>
+          <a:prstGeom prst="rect">
+            <a:avLst/>
+          </a:prstGeom>
+          <a:noFill/>
+          <a:ln/>
+        </p:spPr>
+        <p:txBody>
+          <a:bodyPr wrap="square" lIns="0" tIns="0" rIns="0" bIns="0" rtlCol="0" anchor="ctr"/>
+          <a:lstStyle/>
+          <a:p>
+            <a:pPr algn="ctr" indent="0" marL="0">
+              <a:buNone/>
+            </a:pPr>
+            <a:r>
+              <a:rPr lang="en-US" sz="1400" b="1" dirty="0">
+                <a:solidFill>
+                  <a:srgbClr val="0D9488"/>
+                </a:solidFill>
+                <a:latin typeface="Trebuchet MS" pitchFamily="34" charset="0"/>
+                <a:ea typeface="Trebuchet MS" pitchFamily="34" charset="-122"/>
+                <a:cs typeface="Trebuchet MS" pitchFamily="34" charset="-120"/>
+              </a:rPr>
+              <a:t>brightness</a:t>
+            </a:r>
+            <a:endParaRPr lang="en-US" sz="1400" dirty="0"/>
+          </a:p>
+        </p:txBody>
+      </p:sp>
+      <p:sp>
+        <p:nvSpPr>
+          <p:cNvPr id="22" name="Text 20"/>
+          <p:cNvSpPr/>
+          <p:nvPr/>
+        </p:nvSpPr>
+        <p:spPr>
+          <a:xfrm>
+            <a:off x="3185160" y="4005072"/>
+            <a:ext cx="2499360" cy="457200"/>
+          </a:xfrm>
+          <a:prstGeom prst="rect">
+            <a:avLst/>
+          </a:prstGeom>
+          <a:noFill/>
+          <a:ln/>
+        </p:spPr>
+        <p:txBody>
+          <a:bodyPr wrap="square" lIns="0" tIns="0" rIns="0" bIns="0" rtlCol="0" anchor="ctr"/>
+          <a:lstStyle/>
+          <a:p>
+            <a:pPr algn="ctr" indent="0" marL="0">
+              <a:buNone/>
+            </a:pPr>
+            <a:r>
+              <a:rPr lang="en-US" sz="900" i="1" dirty="0">
+                <a:solidFill>
+                  <a:srgbClr val="475569"/>
                 </a:solidFill>
                 <a:latin typeface="Calibri" pitchFamily="34" charset="0"/>
                 <a:ea typeface="Calibri" pitchFamily="34" charset="-122"/>
                 <a:cs typeface="Calibri" pitchFamily="34" charset="-120"/>
               </a:rPr>
-              <a:t>Now rewrite each focus word below with space between letters — leave room for your breakdown.</a:t>
-            </a:r>
-            <a:endParaRPr lang="en-US" sz="1200" dirty="0"/>
-          </a:p>
-        </p:txBody>
-      </p:sp>
-      <p:sp>
-        <p:nvSpPr>
-          <p:cNvPr id="15" name="Shape 13"/>
-          <p:cNvSpPr/>
-          <p:nvPr/>
-        </p:nvSpPr>
-        <p:spPr>
-          <a:xfrm>
-            <a:off x="411480" y="3456432"/>
+              <a:t>write your breakdown below</a:t>
+            </a:r>
+            <a:endParaRPr lang="en-US" sz="900" dirty="0"/>
+          </a:p>
+        </p:txBody>
+      </p:sp>
+      <p:sp>
+        <p:nvSpPr>
+          <p:cNvPr id="23" name="Shape 21"/>
+          <p:cNvSpPr/>
+          <p:nvPr/>
+        </p:nvSpPr>
+        <p:spPr>
+          <a:xfrm>
+            <a:off x="5958840" y="3456432"/>
             <a:ext cx="2499360" cy="1005840"/>
           </a:xfrm>
           <a:prstGeom prst="rect">
@@ -17027,13 +17384,13 @@
       </p:sp>
       <p:sp>
         <p:nvSpPr>
-          <p:cNvPr id="16" name="Shape 14"/>
-          <p:cNvSpPr/>
-          <p:nvPr/>
-        </p:nvSpPr>
-        <p:spPr>
-          <a:xfrm>
-            <a:off x="411480" y="3977640"/>
+          <p:cNvPr id="24" name="Shape 22"/>
+          <p:cNvSpPr/>
+          <p:nvPr/>
+        </p:nvSpPr>
+        <p:spPr>
+          <a:xfrm>
+            <a:off x="5958840" y="3977640"/>
             <a:ext cx="2499360" cy="0"/>
           </a:xfrm>
           <a:prstGeom prst="line">
@@ -17050,13 +17407,13 @@
       </p:sp>
       <p:sp>
         <p:nvSpPr>
-          <p:cNvPr id="17" name="Text 15"/>
-          <p:cNvSpPr/>
-          <p:nvPr/>
-        </p:nvSpPr>
-        <p:spPr>
-          <a:xfrm>
-            <a:off x="411480" y="3456432"/>
+          <p:cNvPr id="25" name="Text 23"/>
+          <p:cNvSpPr/>
+          <p:nvPr/>
+        </p:nvSpPr>
+        <p:spPr>
+          <a:xfrm>
+            <a:off x="5958840" y="3456432"/>
             <a:ext cx="2499360" cy="502920"/>
           </a:xfrm>
           <a:prstGeom prst="rect">
@@ -17081,263 +17438,7 @@
                 <a:ea typeface="Trebuchet MS" pitchFamily="34" charset="-122"/>
                 <a:cs typeface="Trebuchet MS" pitchFamily="34" charset="-120"/>
               </a:rPr>
-              <a:t>brightest</a:t>
-            </a:r>
-            <a:endParaRPr lang="en-US" sz="1400" dirty="0"/>
-          </a:p>
-        </p:txBody>
-      </p:sp>
-      <p:sp>
-        <p:nvSpPr>
-          <p:cNvPr id="18" name="Text 16"/>
-          <p:cNvSpPr/>
-          <p:nvPr/>
-        </p:nvSpPr>
-        <p:spPr>
-          <a:xfrm>
-            <a:off x="411480" y="4005072"/>
-            <a:ext cx="2499360" cy="457200"/>
-          </a:xfrm>
-          <a:prstGeom prst="rect">
-            <a:avLst/>
-          </a:prstGeom>
-          <a:noFill/>
-          <a:ln/>
-        </p:spPr>
-        <p:txBody>
-          <a:bodyPr wrap="square" lIns="0" tIns="0" rIns="0" bIns="0" rtlCol="0" anchor="ctr"/>
-          <a:lstStyle/>
-          <a:p>
-            <a:pPr algn="ctr" indent="0" marL="0">
-              <a:buNone/>
-            </a:pPr>
-            <a:r>
-              <a:rPr lang="en-US" sz="900" i="1" dirty="0">
-                <a:solidFill>
-                  <a:srgbClr val="475569"/>
-                </a:solidFill>
-                <a:latin typeface="Calibri" pitchFamily="34" charset="0"/>
-                <a:ea typeface="Calibri" pitchFamily="34" charset="-122"/>
-                <a:cs typeface="Calibri" pitchFamily="34" charset="-120"/>
-              </a:rPr>
-              <a:t>write your breakdown below</a:t>
-            </a:r>
-            <a:endParaRPr lang="en-US" sz="900" dirty="0"/>
-          </a:p>
-        </p:txBody>
-      </p:sp>
-      <p:sp>
-        <p:nvSpPr>
-          <p:cNvPr id="19" name="Shape 17"/>
-          <p:cNvSpPr/>
-          <p:nvPr/>
-        </p:nvSpPr>
-        <p:spPr>
-          <a:xfrm>
-            <a:off x="3185160" y="3456432"/>
-            <a:ext cx="2499360" cy="1005840"/>
-          </a:xfrm>
-          <a:prstGeom prst="rect">
-            <a:avLst>
-              <a:gd name="adj" fmla="val 7273"/>
-            </a:avLst>
-          </a:prstGeom>
-          <a:solidFill>
-            <a:srgbClr val="F8FAFC"/>
-          </a:solidFill>
-          <a:ln w="12700">
-            <a:solidFill>
-              <a:srgbClr val="E2E8F0"/>
-            </a:solidFill>
-            <a:prstDash val="solid"/>
-          </a:ln>
-        </p:spPr>
-      </p:sp>
-      <p:sp>
-        <p:nvSpPr>
-          <p:cNvPr id="20" name="Shape 18"/>
-          <p:cNvSpPr/>
-          <p:nvPr/>
-        </p:nvSpPr>
-        <p:spPr>
-          <a:xfrm>
-            <a:off x="3185160" y="3977640"/>
-            <a:ext cx="2499360" cy="0"/>
-          </a:xfrm>
-          <a:prstGeom prst="line">
-            <a:avLst/>
-          </a:prstGeom>
-          <a:noFill/>
-          <a:ln w="12700">
-            <a:solidFill>
-              <a:srgbClr val="E2E8F0"/>
-            </a:solidFill>
-            <a:prstDash val="dash"/>
-          </a:ln>
-        </p:spPr>
-      </p:sp>
-      <p:sp>
-        <p:nvSpPr>
-          <p:cNvPr id="21" name="Text 19"/>
-          <p:cNvSpPr/>
-          <p:nvPr/>
-        </p:nvSpPr>
-        <p:spPr>
-          <a:xfrm>
-            <a:off x="3185160" y="3456432"/>
-            <a:ext cx="2499360" cy="502920"/>
-          </a:xfrm>
-          <a:prstGeom prst="rect">
-            <a:avLst/>
-          </a:prstGeom>
-          <a:noFill/>
-          <a:ln/>
-        </p:spPr>
-        <p:txBody>
-          <a:bodyPr wrap="square" lIns="0" tIns="0" rIns="0" bIns="0" rtlCol="0" anchor="ctr"/>
-          <a:lstStyle/>
-          <a:p>
-            <a:pPr algn="ctr" indent="0" marL="0">
-              <a:buNone/>
-            </a:pPr>
-            <a:r>
-              <a:rPr lang="en-US" sz="1400" b="1" dirty="0">
-                <a:solidFill>
-                  <a:srgbClr val="0D9488"/>
-                </a:solidFill>
-                <a:latin typeface="Trebuchet MS" pitchFamily="34" charset="0"/>
-                <a:ea typeface="Trebuchet MS" pitchFamily="34" charset="-122"/>
-                <a:cs typeface="Trebuchet MS" pitchFamily="34" charset="-120"/>
-              </a:rPr>
-              <a:t>brighten</a:t>
-            </a:r>
-            <a:endParaRPr lang="en-US" sz="1400" dirty="0"/>
-          </a:p>
-        </p:txBody>
-      </p:sp>
-      <p:sp>
-        <p:nvSpPr>
-          <p:cNvPr id="22" name="Text 20"/>
-          <p:cNvSpPr/>
-          <p:nvPr/>
-        </p:nvSpPr>
-        <p:spPr>
-          <a:xfrm>
-            <a:off x="3185160" y="4005072"/>
-            <a:ext cx="2499360" cy="457200"/>
-          </a:xfrm>
-          <a:prstGeom prst="rect">
-            <a:avLst/>
-          </a:prstGeom>
-          <a:noFill/>
-          <a:ln/>
-        </p:spPr>
-        <p:txBody>
-          <a:bodyPr wrap="square" lIns="0" tIns="0" rIns="0" bIns="0" rtlCol="0" anchor="ctr"/>
-          <a:lstStyle/>
-          <a:p>
-            <a:pPr algn="ctr" indent="0" marL="0">
-              <a:buNone/>
-            </a:pPr>
-            <a:r>
-              <a:rPr lang="en-US" sz="900" i="1" dirty="0">
-                <a:solidFill>
-                  <a:srgbClr val="475569"/>
-                </a:solidFill>
-                <a:latin typeface="Calibri" pitchFamily="34" charset="0"/>
-                <a:ea typeface="Calibri" pitchFamily="34" charset="-122"/>
-                <a:cs typeface="Calibri" pitchFamily="34" charset="-120"/>
-              </a:rPr>
-              <a:t>write your breakdown below</a:t>
-            </a:r>
-            <a:endParaRPr lang="en-US" sz="900" dirty="0"/>
-          </a:p>
-        </p:txBody>
-      </p:sp>
-      <p:sp>
-        <p:nvSpPr>
-          <p:cNvPr id="23" name="Shape 21"/>
-          <p:cNvSpPr/>
-          <p:nvPr/>
-        </p:nvSpPr>
-        <p:spPr>
-          <a:xfrm>
-            <a:off x="5958840" y="3456432"/>
-            <a:ext cx="2499360" cy="1005840"/>
-          </a:xfrm>
-          <a:prstGeom prst="rect">
-            <a:avLst>
-              <a:gd name="adj" fmla="val 7273"/>
-            </a:avLst>
-          </a:prstGeom>
-          <a:solidFill>
-            <a:srgbClr val="F8FAFC"/>
-          </a:solidFill>
-          <a:ln w="12700">
-            <a:solidFill>
-              <a:srgbClr val="E2E8F0"/>
-            </a:solidFill>
-            <a:prstDash val="solid"/>
-          </a:ln>
-        </p:spPr>
-      </p:sp>
-      <p:sp>
-        <p:nvSpPr>
-          <p:cNvPr id="24" name="Shape 22"/>
-          <p:cNvSpPr/>
-          <p:nvPr/>
-        </p:nvSpPr>
-        <p:spPr>
-          <a:xfrm>
-            <a:off x="5958840" y="3977640"/>
-            <a:ext cx="2499360" cy="0"/>
-          </a:xfrm>
-          <a:prstGeom prst="line">
-            <a:avLst/>
-          </a:prstGeom>
-          <a:noFill/>
-          <a:ln w="12700">
-            <a:solidFill>
-              <a:srgbClr val="E2E8F0"/>
-            </a:solidFill>
-            <a:prstDash val="dash"/>
-          </a:ln>
-        </p:spPr>
-      </p:sp>
-      <p:sp>
-        <p:nvSpPr>
-          <p:cNvPr id="25" name="Text 23"/>
-          <p:cNvSpPr/>
-          <p:nvPr/>
-        </p:nvSpPr>
-        <p:spPr>
-          <a:xfrm>
-            <a:off x="5958840" y="3456432"/>
-            <a:ext cx="2499360" cy="502920"/>
-          </a:xfrm>
-          <a:prstGeom prst="rect">
-            <a:avLst/>
-          </a:prstGeom>
-          <a:noFill/>
-          <a:ln/>
-        </p:spPr>
-        <p:txBody>
-          <a:bodyPr wrap="square" lIns="0" tIns="0" rIns="0" bIns="0" rtlCol="0" anchor="ctr"/>
-          <a:lstStyle/>
-          <a:p>
-            <a:pPr algn="ctr" indent="0" marL="0">
-              <a:buNone/>
-            </a:pPr>
-            <a:r>
-              <a:rPr lang="en-US" sz="1400" b="1" dirty="0">
-                <a:solidFill>
-                  <a:srgbClr val="0D9488"/>
-                </a:solidFill>
-                <a:latin typeface="Trebuchet MS" pitchFamily="34" charset="0"/>
-                <a:ea typeface="Trebuchet MS" pitchFamily="34" charset="-122"/>
-                <a:cs typeface="Trebuchet MS" pitchFamily="34" charset="-120"/>
-              </a:rPr>
-              <a:t>brightness</a:t>
+              <a:t>brighter</a:t>
             </a:r>
             <a:endParaRPr lang="en-US" sz="1400" dirty="0"/>
           </a:p>
@@ -17807,7 +17908,7 @@
                 <a:ea typeface="Trebuchet MS" pitchFamily="34" charset="-122"/>
                 <a:cs typeface="Trebuchet MS" pitchFamily="34" charset="-120"/>
               </a:rPr>
-              <a:t>brightest</a:t>
+              <a:t>brighten</a:t>
             </a:r>
             <a:endParaRPr lang="en-US" sz="2800" dirty="0"/>
           </a:p>
@@ -18634,7 +18735,7 @@
                 <a:ea typeface="Trebuchet MS" pitchFamily="34" charset="-122"/>
                 <a:cs typeface="Trebuchet MS" pitchFamily="34" charset="-120"/>
               </a:rPr>
-              <a:t>brightest</a:t>
+              <a:t>brighten</a:t>
             </a:r>
             <a:endParaRPr lang="en-US" sz="2800" dirty="0"/>
           </a:p>
@@ -18885,7 +18986,7 @@
                 <a:ea typeface="Trebuchet MS" pitchFamily="34" charset="-122"/>
                 <a:cs typeface="Trebuchet MS" pitchFamily="34" charset="-120"/>
               </a:rPr>
-              <a:t>est</a:t>
+              <a:t>en</a:t>
             </a:r>
             <a:endParaRPr lang="en-US" sz="1300" dirty="0"/>
           </a:p>
@@ -18924,7 +19025,7 @@
                 <a:ea typeface="Calibri" pitchFamily="34" charset="-122"/>
                 <a:cs typeface="Calibri" pitchFamily="34" charset="-120"/>
               </a:rPr>
-              <a:t>the most</a:t>
+              <a:t>to make or become</a:t>
             </a:r>
             <a:endParaRPr lang="en-US" sz="850" dirty="0"/>
           </a:p>
@@ -19619,7 +19720,7 @@
                 <a:ea typeface="Trebuchet MS" pitchFamily="34" charset="-122"/>
                 <a:cs typeface="Trebuchet MS" pitchFamily="34" charset="-120"/>
               </a:rPr>
-              <a:t>brightest</a:t>
+              <a:t>brighten</a:t>
             </a:r>
             <a:endParaRPr lang="en-US" sz="2800" dirty="0"/>
           </a:p>
@@ -19870,7 +19971,7 @@
                 <a:ea typeface="Trebuchet MS" pitchFamily="34" charset="-122"/>
                 <a:cs typeface="Trebuchet MS" pitchFamily="34" charset="-120"/>
               </a:rPr>
-              <a:t>est</a:t>
+              <a:t>en</a:t>
             </a:r>
             <a:endParaRPr lang="en-US" sz="1300" dirty="0"/>
           </a:p>
@@ -19909,7 +20010,7 @@
                 <a:ea typeface="Calibri" pitchFamily="34" charset="-122"/>
                 <a:cs typeface="Calibri" pitchFamily="34" charset="-120"/>
               </a:rPr>
-              <a:t>the most</a:t>
+              <a:t>to make or become</a:t>
             </a:r>
             <a:endParaRPr lang="en-US" sz="850" dirty="0"/>
           </a:p>
@@ -20173,7 +20274,7 @@
                 <a:ea typeface="Trebuchet MS" pitchFamily="34" charset="-122"/>
                 <a:cs typeface="Trebuchet MS" pitchFamily="34" charset="-120"/>
               </a:rPr>
-              <a:t>est</a:t>
+              <a:t>en</a:t>
             </a:r>
             <a:endParaRPr lang="en-US" sz="1400" dirty="0"/>
           </a:p>
@@ -20736,7 +20837,7 @@
                 <a:ea typeface="Trebuchet MS" pitchFamily="34" charset="-122"/>
                 <a:cs typeface="Trebuchet MS" pitchFamily="34" charset="-120"/>
               </a:rPr>
-              <a:t>brightest</a:t>
+              <a:t>brighten</a:t>
             </a:r>
             <a:endParaRPr lang="en-US" sz="2800" dirty="0"/>
           </a:p>
@@ -20987,7 +21088,7 @@
                 <a:ea typeface="Trebuchet MS" pitchFamily="34" charset="-122"/>
                 <a:cs typeface="Trebuchet MS" pitchFamily="34" charset="-120"/>
               </a:rPr>
-              <a:t>est</a:t>
+              <a:t>en</a:t>
             </a:r>
             <a:endParaRPr lang="en-US" sz="1300" dirty="0"/>
           </a:p>
@@ -21026,7 +21127,7 @@
                 <a:ea typeface="Calibri" pitchFamily="34" charset="-122"/>
                 <a:cs typeface="Calibri" pitchFamily="34" charset="-120"/>
               </a:rPr>
-              <a:t>the most</a:t>
+              <a:t>to make or become</a:t>
             </a:r>
             <a:endParaRPr lang="en-US" sz="850" dirty="0"/>
           </a:p>
@@ -21290,7 +21391,7 @@
                 <a:ea typeface="Trebuchet MS" pitchFamily="34" charset="-122"/>
                 <a:cs typeface="Trebuchet MS" pitchFamily="34" charset="-120"/>
               </a:rPr>
-              <a:t>est</a:t>
+              <a:t>en</a:t>
             </a:r>
             <a:endParaRPr lang="en-US" sz="1400" dirty="0"/>
           </a:p>
@@ -21397,7 +21498,7 @@
         </p:nvSpPr>
         <p:spPr>
           <a:xfrm>
-            <a:off x="2427732" y="4169664"/>
+            <a:off x="2254649" y="4169664"/>
             <a:ext cx="685800" cy="384048"/>
           </a:xfrm>
           <a:prstGeom prst="rect">
@@ -21424,7 +21525,7 @@
         </p:nvSpPr>
         <p:spPr>
           <a:xfrm>
-            <a:off x="2427732" y="4169664"/>
+            <a:off x="2254649" y="4169664"/>
             <a:ext cx="685800" cy="384048"/>
           </a:xfrm>
           <a:prstGeom prst="rect">
@@ -21449,7 +21550,7 @@
                 <a:ea typeface="Trebuchet MS" pitchFamily="34" charset="-122"/>
                 <a:cs typeface="Trebuchet MS" pitchFamily="34" charset="-120"/>
               </a:rPr>
-              <a:t>br</a:t>
+              <a:t>b</a:t>
             </a:r>
             <a:endParaRPr lang="en-US" sz="900" dirty="0"/>
           </a:p>
@@ -21463,7 +21564,7 @@
         </p:nvSpPr>
         <p:spPr>
           <a:xfrm>
-            <a:off x="3639312" y="4169664"/>
+            <a:off x="3293146" y="4169664"/>
             <a:ext cx="685800" cy="384048"/>
           </a:xfrm>
           <a:prstGeom prst="rect">
@@ -21490,7 +21591,7 @@
         </p:nvSpPr>
         <p:spPr>
           <a:xfrm>
-            <a:off x="3639312" y="4169664"/>
+            <a:off x="3293146" y="4169664"/>
             <a:ext cx="685800" cy="384048"/>
           </a:xfrm>
           <a:prstGeom prst="rect">
@@ -21515,6 +21616,72 @@
                 <a:ea typeface="Trebuchet MS" pitchFamily="34" charset="-122"/>
                 <a:cs typeface="Trebuchet MS" pitchFamily="34" charset="-120"/>
               </a:rPr>
+              <a:t>r</a:t>
+            </a:r>
+            <a:endParaRPr lang="en-US" sz="900" dirty="0"/>
+          </a:p>
+        </p:txBody>
+      </p:sp>
+      <p:sp>
+        <p:nvSpPr>
+          <p:cNvPr id="37" name="Shape 35"/>
+          <p:cNvSpPr/>
+          <p:nvPr/>
+        </p:nvSpPr>
+        <p:spPr>
+          <a:xfrm>
+            <a:off x="4331643" y="4169664"/>
+            <a:ext cx="685800" cy="384048"/>
+          </a:xfrm>
+          <a:prstGeom prst="rect">
+            <a:avLst>
+              <a:gd name="adj" fmla="val 9524"/>
+            </a:avLst>
+          </a:prstGeom>
+          <a:solidFill>
+            <a:srgbClr val="FFFFFF"/>
+          </a:solidFill>
+          <a:ln w="12700">
+            <a:solidFill>
+              <a:srgbClr val="DB2777"/>
+            </a:solidFill>
+            <a:prstDash val="solid"/>
+          </a:ln>
+        </p:spPr>
+      </p:sp>
+      <p:sp>
+        <p:nvSpPr>
+          <p:cNvPr id="38" name="Text 36"/>
+          <p:cNvSpPr/>
+          <p:nvPr/>
+        </p:nvSpPr>
+        <p:spPr>
+          <a:xfrm>
+            <a:off x="4331643" y="4169664"/>
+            <a:ext cx="685800" cy="384048"/>
+          </a:xfrm>
+          <a:prstGeom prst="rect">
+            <a:avLst/>
+          </a:prstGeom>
+          <a:noFill/>
+          <a:ln/>
+        </p:spPr>
+        <p:txBody>
+          <a:bodyPr wrap="square" lIns="0" tIns="0" rIns="0" bIns="0" rtlCol="0" anchor="ctr"/>
+          <a:lstStyle/>
+          <a:p>
+            <a:pPr algn="ctr" indent="0" marL="0">
+              <a:buNone/>
+            </a:pPr>
+            <a:r>
+              <a:rPr lang="en-US" sz="900" b="1" dirty="0">
+                <a:solidFill>
+                  <a:srgbClr val="9D174D"/>
+                </a:solidFill>
+                <a:latin typeface="Trebuchet MS" pitchFamily="34" charset="0"/>
+                <a:ea typeface="Trebuchet MS" pitchFamily="34" charset="-122"/>
+                <a:cs typeface="Trebuchet MS" pitchFamily="34" charset="-120"/>
+              </a:rPr>
               <a:t>igh</a:t>
             </a:r>
             <a:endParaRPr lang="en-US" sz="900" dirty="0"/>
@@ -21523,13 +21690,13 @@
       </p:sp>
       <p:sp>
         <p:nvSpPr>
-          <p:cNvPr id="37" name="Text 35"/>
-          <p:cNvSpPr/>
-          <p:nvPr/>
-        </p:nvSpPr>
-        <p:spPr>
-          <a:xfrm>
-            <a:off x="3639312" y="4572000"/>
+          <p:cNvPr id="39" name="Text 37"/>
+          <p:cNvSpPr/>
+          <p:nvPr/>
+        </p:nvSpPr>
+        <p:spPr>
+          <a:xfrm>
+            <a:off x="4331643" y="4572000"/>
             <a:ext cx="685800" cy="219456"/>
           </a:xfrm>
           <a:prstGeom prst="rect">
@@ -21562,13 +21729,13 @@
       </p:sp>
       <p:sp>
         <p:nvSpPr>
-          <p:cNvPr id="38" name="Shape 36"/>
-          <p:cNvSpPr/>
-          <p:nvPr/>
-        </p:nvSpPr>
-        <p:spPr>
-          <a:xfrm>
-            <a:off x="4850892" y="4169664"/>
+          <p:cNvPr id="40" name="Shape 38"/>
+          <p:cNvSpPr/>
+          <p:nvPr/>
+        </p:nvSpPr>
+        <p:spPr>
+          <a:xfrm>
+            <a:off x="5370141" y="4169664"/>
             <a:ext cx="685800" cy="384048"/>
           </a:xfrm>
           <a:prstGeom prst="rect">
@@ -21589,13 +21756,13 @@
       </p:sp>
       <p:sp>
         <p:nvSpPr>
-          <p:cNvPr id="39" name="Text 37"/>
-          <p:cNvSpPr/>
-          <p:nvPr/>
-        </p:nvSpPr>
-        <p:spPr>
-          <a:xfrm>
-            <a:off x="4850892" y="4169664"/>
+          <p:cNvPr id="41" name="Text 39"/>
+          <p:cNvSpPr/>
+          <p:nvPr/>
+        </p:nvSpPr>
+        <p:spPr>
+          <a:xfrm>
+            <a:off x="5370141" y="4169664"/>
             <a:ext cx="685800" cy="384048"/>
           </a:xfrm>
           <a:prstGeom prst="rect">
@@ -21628,13 +21795,13 @@
       </p:sp>
       <p:sp>
         <p:nvSpPr>
-          <p:cNvPr id="40" name="Shape 38"/>
-          <p:cNvSpPr/>
-          <p:nvPr/>
-        </p:nvSpPr>
-        <p:spPr>
-          <a:xfrm>
-            <a:off x="6062472" y="4169664"/>
+          <p:cNvPr id="42" name="Shape 40"/>
+          <p:cNvSpPr/>
+          <p:nvPr/>
+        </p:nvSpPr>
+        <p:spPr>
+          <a:xfrm>
+            <a:off x="6408638" y="4169664"/>
             <a:ext cx="685800" cy="384048"/>
           </a:xfrm>
           <a:prstGeom prst="rect">
@@ -21655,13 +21822,13 @@
       </p:sp>
       <p:sp>
         <p:nvSpPr>
-          <p:cNvPr id="41" name="Text 39"/>
-          <p:cNvSpPr/>
-          <p:nvPr/>
-        </p:nvSpPr>
-        <p:spPr>
-          <a:xfrm>
-            <a:off x="6062472" y="4169664"/>
+          <p:cNvPr id="43" name="Text 41"/>
+          <p:cNvSpPr/>
+          <p:nvPr/>
+        </p:nvSpPr>
+        <p:spPr>
+          <a:xfrm>
+            <a:off x="6408638" y="4169664"/>
             <a:ext cx="685800" cy="384048"/>
           </a:xfrm>
           <a:prstGeom prst="rect">
@@ -21694,13 +21861,13 @@
       </p:sp>
       <p:sp>
         <p:nvSpPr>
-          <p:cNvPr id="42" name="Shape 40"/>
-          <p:cNvSpPr/>
-          <p:nvPr/>
-        </p:nvSpPr>
-        <p:spPr>
-          <a:xfrm>
-            <a:off x="7274052" y="4169664"/>
+          <p:cNvPr id="44" name="Shape 42"/>
+          <p:cNvSpPr/>
+          <p:nvPr/>
+        </p:nvSpPr>
+        <p:spPr>
+          <a:xfrm>
+            <a:off x="7447135" y="4169664"/>
             <a:ext cx="685800" cy="384048"/>
           </a:xfrm>
           <a:prstGeom prst="rect">
@@ -21721,13 +21888,13 @@
       </p:sp>
       <p:sp>
         <p:nvSpPr>
-          <p:cNvPr id="43" name="Text 41"/>
-          <p:cNvSpPr/>
-          <p:nvPr/>
-        </p:nvSpPr>
-        <p:spPr>
-          <a:xfrm>
-            <a:off x="7274052" y="4169664"/>
+          <p:cNvPr id="45" name="Text 43"/>
+          <p:cNvSpPr/>
+          <p:nvPr/>
+        </p:nvSpPr>
+        <p:spPr>
+          <a:xfrm>
+            <a:off x="7447135" y="4169664"/>
             <a:ext cx="685800" cy="384048"/>
           </a:xfrm>
           <a:prstGeom prst="rect">
@@ -21752,7 +21919,7 @@
                 <a:ea typeface="Trebuchet MS" pitchFamily="34" charset="-122"/>
                 <a:cs typeface="Trebuchet MS" pitchFamily="34" charset="-120"/>
               </a:rPr>
-              <a:t>st</a:t>
+              <a:t>n</a:t>
             </a:r>
             <a:endParaRPr lang="en-US" sz="900" dirty="0"/>
           </a:p>
@@ -22183,7 +22350,7 @@
                 <a:ea typeface="Trebuchet MS" pitchFamily="34" charset="-122"/>
                 <a:cs typeface="Trebuchet MS" pitchFamily="34" charset="-120"/>
               </a:rPr>
-              <a:t>brighten</a:t>
+              <a:t>brightness</a:t>
             </a:r>
             <a:endParaRPr lang="en-US" sz="2800" dirty="0"/>
           </a:p>
@@ -23010,7 +23177,7 @@
                 <a:ea typeface="Trebuchet MS" pitchFamily="34" charset="-122"/>
                 <a:cs typeface="Trebuchet MS" pitchFamily="34" charset="-120"/>
               </a:rPr>
-              <a:t>brighten</a:t>
+              <a:t>brightness</a:t>
             </a:r>
             <a:endParaRPr lang="en-US" sz="2800" dirty="0"/>
           </a:p>
@@ -23261,7 +23428,7 @@
                 <a:ea typeface="Trebuchet MS" pitchFamily="34" charset="-122"/>
                 <a:cs typeface="Trebuchet MS" pitchFamily="34" charset="-120"/>
               </a:rPr>
-              <a:t>en</a:t>
+              <a:t>ness</a:t>
             </a:r>
             <a:endParaRPr lang="en-US" sz="1300" dirty="0"/>
           </a:p>
@@ -23300,7 +23467,7 @@
                 <a:ea typeface="Calibri" pitchFamily="34" charset="-122"/>
                 <a:cs typeface="Calibri" pitchFamily="34" charset="-120"/>
               </a:rPr>
-              <a:t>to make or become</a:t>
+              <a:t>state or quality of</a:t>
             </a:r>
             <a:endParaRPr lang="en-US" sz="850" dirty="0"/>
           </a:p>
@@ -24714,7 +24881,7 @@
                 <a:ea typeface="Trebuchet MS" pitchFamily="34" charset="-122"/>
                 <a:cs typeface="Trebuchet MS" pitchFamily="34" charset="-120"/>
               </a:rPr>
-              <a:t>brighten</a:t>
+              <a:t>brightness</a:t>
             </a:r>
             <a:endParaRPr lang="en-US" sz="2800" dirty="0"/>
           </a:p>
@@ -24965,7 +25132,7 @@
                 <a:ea typeface="Trebuchet MS" pitchFamily="34" charset="-122"/>
                 <a:cs typeface="Trebuchet MS" pitchFamily="34" charset="-120"/>
               </a:rPr>
-              <a:t>en</a:t>
+              <a:t>ness</a:t>
             </a:r>
             <a:endParaRPr lang="en-US" sz="1300" dirty="0"/>
           </a:p>
@@ -25004,7 +25171,7 @@
                 <a:ea typeface="Calibri" pitchFamily="34" charset="-122"/>
                 <a:cs typeface="Calibri" pitchFamily="34" charset="-120"/>
               </a:rPr>
-              <a:t>to make or become</a:t>
+              <a:t>state or quality of</a:t>
             </a:r>
             <a:endParaRPr lang="en-US" sz="850" dirty="0"/>
           </a:p>
@@ -25268,7 +25435,7 @@
                 <a:ea typeface="Trebuchet MS" pitchFamily="34" charset="-122"/>
                 <a:cs typeface="Trebuchet MS" pitchFamily="34" charset="-120"/>
               </a:rPr>
-              <a:t>en</a:t>
+              <a:t>ness</a:t>
             </a:r>
             <a:endParaRPr lang="en-US" sz="1400" dirty="0"/>
           </a:p>
@@ -25831,7 +25998,7 @@
                 <a:ea typeface="Trebuchet MS" pitchFamily="34" charset="-122"/>
                 <a:cs typeface="Trebuchet MS" pitchFamily="34" charset="-120"/>
               </a:rPr>
-              <a:t>brighten</a:t>
+              <a:t>brightness</a:t>
             </a:r>
             <a:endParaRPr lang="en-US" sz="2800" dirty="0"/>
           </a:p>
@@ -26082,7 +26249,7 @@
                 <a:ea typeface="Trebuchet MS" pitchFamily="34" charset="-122"/>
                 <a:cs typeface="Trebuchet MS" pitchFamily="34" charset="-120"/>
               </a:rPr>
-              <a:t>en</a:t>
+              <a:t>ness</a:t>
             </a:r>
             <a:endParaRPr lang="en-US" sz="1300" dirty="0"/>
           </a:p>
@@ -26121,7 +26288,7 @@
                 <a:ea typeface="Calibri" pitchFamily="34" charset="-122"/>
                 <a:cs typeface="Calibri" pitchFamily="34" charset="-120"/>
               </a:rPr>
-              <a:t>to make or become</a:t>
+              <a:t>state or quality of</a:t>
             </a:r>
             <a:endParaRPr lang="en-US" sz="850" dirty="0"/>
           </a:p>
@@ -26385,7 +26552,7 @@
                 <a:ea typeface="Trebuchet MS" pitchFamily="34" charset="-122"/>
                 <a:cs typeface="Trebuchet MS" pitchFamily="34" charset="-120"/>
               </a:rPr>
-              <a:t>en</a:t>
+              <a:t>ness</a:t>
             </a:r>
             <a:endParaRPr lang="en-US" sz="1400" dirty="0"/>
           </a:p>
@@ -26492,7 +26659,7 @@
         </p:nvSpPr>
         <p:spPr>
           <a:xfrm>
-            <a:off x="2427732" y="4169664"/>
+            <a:off x="2124837" y="4169664"/>
             <a:ext cx="685800" cy="384048"/>
           </a:xfrm>
           <a:prstGeom prst="rect">
@@ -26519,7 +26686,7 @@
         </p:nvSpPr>
         <p:spPr>
           <a:xfrm>
-            <a:off x="2427732" y="4169664"/>
+            <a:off x="2124837" y="4169664"/>
             <a:ext cx="685800" cy="384048"/>
           </a:xfrm>
           <a:prstGeom prst="rect">
@@ -26544,7 +26711,7 @@
                 <a:ea typeface="Trebuchet MS" pitchFamily="34" charset="-122"/>
                 <a:cs typeface="Trebuchet MS" pitchFamily="34" charset="-120"/>
               </a:rPr>
-              <a:t>br</a:t>
+              <a:t>b</a:t>
             </a:r>
             <a:endParaRPr lang="en-US" sz="900" dirty="0"/>
           </a:p>
@@ -26558,7 +26725,7 @@
         </p:nvSpPr>
         <p:spPr>
           <a:xfrm>
-            <a:off x="3639312" y="4169664"/>
+            <a:off x="3033522" y="4169664"/>
             <a:ext cx="685800" cy="384048"/>
           </a:xfrm>
           <a:prstGeom prst="rect">
@@ -26585,7 +26752,7 @@
         </p:nvSpPr>
         <p:spPr>
           <a:xfrm>
-            <a:off x="3639312" y="4169664"/>
+            <a:off x="3033522" y="4169664"/>
             <a:ext cx="685800" cy="384048"/>
           </a:xfrm>
           <a:prstGeom prst="rect">
@@ -26610,6 +26777,72 @@
                 <a:ea typeface="Trebuchet MS" pitchFamily="34" charset="-122"/>
                 <a:cs typeface="Trebuchet MS" pitchFamily="34" charset="-120"/>
               </a:rPr>
+              <a:t>r</a:t>
+            </a:r>
+            <a:endParaRPr lang="en-US" sz="900" dirty="0"/>
+          </a:p>
+        </p:txBody>
+      </p:sp>
+      <p:sp>
+        <p:nvSpPr>
+          <p:cNvPr id="37" name="Shape 35"/>
+          <p:cNvSpPr/>
+          <p:nvPr/>
+        </p:nvSpPr>
+        <p:spPr>
+          <a:xfrm>
+            <a:off x="3942207" y="4169664"/>
+            <a:ext cx="685800" cy="384048"/>
+          </a:xfrm>
+          <a:prstGeom prst="rect">
+            <a:avLst>
+              <a:gd name="adj" fmla="val 9524"/>
+            </a:avLst>
+          </a:prstGeom>
+          <a:solidFill>
+            <a:srgbClr val="FFFFFF"/>
+          </a:solidFill>
+          <a:ln w="12700">
+            <a:solidFill>
+              <a:srgbClr val="DB2777"/>
+            </a:solidFill>
+            <a:prstDash val="solid"/>
+          </a:ln>
+        </p:spPr>
+      </p:sp>
+      <p:sp>
+        <p:nvSpPr>
+          <p:cNvPr id="38" name="Text 36"/>
+          <p:cNvSpPr/>
+          <p:nvPr/>
+        </p:nvSpPr>
+        <p:spPr>
+          <a:xfrm>
+            <a:off x="3942207" y="4169664"/>
+            <a:ext cx="685800" cy="384048"/>
+          </a:xfrm>
+          <a:prstGeom prst="rect">
+            <a:avLst/>
+          </a:prstGeom>
+          <a:noFill/>
+          <a:ln/>
+        </p:spPr>
+        <p:txBody>
+          <a:bodyPr wrap="square" lIns="0" tIns="0" rIns="0" bIns="0" rtlCol="0" anchor="ctr"/>
+          <a:lstStyle/>
+          <a:p>
+            <a:pPr algn="ctr" indent="0" marL="0">
+              <a:buNone/>
+            </a:pPr>
+            <a:r>
+              <a:rPr lang="en-US" sz="900" b="1" dirty="0">
+                <a:solidFill>
+                  <a:srgbClr val="9D174D"/>
+                </a:solidFill>
+                <a:latin typeface="Trebuchet MS" pitchFamily="34" charset="0"/>
+                <a:ea typeface="Trebuchet MS" pitchFamily="34" charset="-122"/>
+                <a:cs typeface="Trebuchet MS" pitchFamily="34" charset="-120"/>
+              </a:rPr>
               <a:t>igh</a:t>
             </a:r>
             <a:endParaRPr lang="en-US" sz="900" dirty="0"/>
@@ -26618,13 +26851,13 @@
       </p:sp>
       <p:sp>
         <p:nvSpPr>
-          <p:cNvPr id="37" name="Text 35"/>
-          <p:cNvSpPr/>
-          <p:nvPr/>
-        </p:nvSpPr>
-        <p:spPr>
-          <a:xfrm>
-            <a:off x="3639312" y="4572000"/>
+          <p:cNvPr id="39" name="Text 37"/>
+          <p:cNvSpPr/>
+          <p:nvPr/>
+        </p:nvSpPr>
+        <p:spPr>
+          <a:xfrm>
+            <a:off x="3942207" y="4572000"/>
             <a:ext cx="685800" cy="219456"/>
           </a:xfrm>
           <a:prstGeom prst="rect">
@@ -26657,7 +26890,7 @@
       </p:sp>
       <p:sp>
         <p:nvSpPr>
-          <p:cNvPr id="38" name="Shape 36"/>
+          <p:cNvPr id="40" name="Shape 38"/>
           <p:cNvSpPr/>
           <p:nvPr/>
         </p:nvSpPr>
@@ -26684,7 +26917,7 @@
       </p:sp>
       <p:sp>
         <p:nvSpPr>
-          <p:cNvPr id="39" name="Text 37"/>
+          <p:cNvPr id="41" name="Text 39"/>
           <p:cNvSpPr/>
           <p:nvPr/>
         </p:nvSpPr>
@@ -26723,13 +26956,13 @@
       </p:sp>
       <p:sp>
         <p:nvSpPr>
-          <p:cNvPr id="40" name="Shape 38"/>
-          <p:cNvSpPr/>
-          <p:nvPr/>
-        </p:nvSpPr>
-        <p:spPr>
-          <a:xfrm>
-            <a:off x="6062472" y="4169664"/>
+          <p:cNvPr id="42" name="Shape 40"/>
+          <p:cNvSpPr/>
+          <p:nvPr/>
+        </p:nvSpPr>
+        <p:spPr>
+          <a:xfrm>
+            <a:off x="5759577" y="4169664"/>
             <a:ext cx="685800" cy="384048"/>
           </a:xfrm>
           <a:prstGeom prst="rect">
@@ -26750,13 +26983,13 @@
       </p:sp>
       <p:sp>
         <p:nvSpPr>
-          <p:cNvPr id="41" name="Text 39"/>
-          <p:cNvSpPr/>
-          <p:nvPr/>
-        </p:nvSpPr>
-        <p:spPr>
-          <a:xfrm>
-            <a:off x="6062472" y="4169664"/>
+          <p:cNvPr id="43" name="Text 41"/>
+          <p:cNvSpPr/>
+          <p:nvPr/>
+        </p:nvSpPr>
+        <p:spPr>
+          <a:xfrm>
+            <a:off x="5759577" y="4169664"/>
             <a:ext cx="685800" cy="384048"/>
           </a:xfrm>
           <a:prstGeom prst="rect">
@@ -26781,7 +27014,7 @@
                 <a:ea typeface="Trebuchet MS" pitchFamily="34" charset="-122"/>
                 <a:cs typeface="Trebuchet MS" pitchFamily="34" charset="-120"/>
               </a:rPr>
-              <a:t>e</a:t>
+              <a:t>n</a:t>
             </a:r>
             <a:endParaRPr lang="en-US" sz="900" dirty="0"/>
           </a:p>
@@ -26789,13 +27022,13 @@
       </p:sp>
       <p:sp>
         <p:nvSpPr>
-          <p:cNvPr id="42" name="Shape 40"/>
-          <p:cNvSpPr/>
-          <p:nvPr/>
-        </p:nvSpPr>
-        <p:spPr>
-          <a:xfrm>
-            <a:off x="7274052" y="4169664"/>
+          <p:cNvPr id="44" name="Shape 42"/>
+          <p:cNvSpPr/>
+          <p:nvPr/>
+        </p:nvSpPr>
+        <p:spPr>
+          <a:xfrm>
+            <a:off x="6668262" y="4169664"/>
             <a:ext cx="685800" cy="384048"/>
           </a:xfrm>
           <a:prstGeom prst="rect">
@@ -26816,13 +27049,13 @@
       </p:sp>
       <p:sp>
         <p:nvSpPr>
-          <p:cNvPr id="43" name="Text 41"/>
-          <p:cNvSpPr/>
-          <p:nvPr/>
-        </p:nvSpPr>
-        <p:spPr>
-          <a:xfrm>
-            <a:off x="7274052" y="4169664"/>
+          <p:cNvPr id="45" name="Text 43"/>
+          <p:cNvSpPr/>
+          <p:nvPr/>
+        </p:nvSpPr>
+        <p:spPr>
+          <a:xfrm>
+            <a:off x="6668262" y="4169664"/>
             <a:ext cx="685800" cy="384048"/>
           </a:xfrm>
           <a:prstGeom prst="rect">
@@ -26847,7 +27080,73 @@
                 <a:ea typeface="Trebuchet MS" pitchFamily="34" charset="-122"/>
                 <a:cs typeface="Trebuchet MS" pitchFamily="34" charset="-120"/>
               </a:rPr>
-              <a:t>n</a:t>
+              <a:t>e</a:t>
+            </a:r>
+            <a:endParaRPr lang="en-US" sz="900" dirty="0"/>
+          </a:p>
+        </p:txBody>
+      </p:sp>
+      <p:sp>
+        <p:nvSpPr>
+          <p:cNvPr id="46" name="Shape 44"/>
+          <p:cNvSpPr/>
+          <p:nvPr/>
+        </p:nvSpPr>
+        <p:spPr>
+          <a:xfrm>
+            <a:off x="7576947" y="4169664"/>
+            <a:ext cx="685800" cy="384048"/>
+          </a:xfrm>
+          <a:prstGeom prst="rect">
+            <a:avLst>
+              <a:gd name="adj" fmla="val 9524"/>
+            </a:avLst>
+          </a:prstGeom>
+          <a:solidFill>
+            <a:srgbClr val="FFFFFF"/>
+          </a:solidFill>
+          <a:ln w="12700">
+            <a:solidFill>
+              <a:srgbClr val="DB2777"/>
+            </a:solidFill>
+            <a:prstDash val="solid"/>
+          </a:ln>
+        </p:spPr>
+      </p:sp>
+      <p:sp>
+        <p:nvSpPr>
+          <p:cNvPr id="47" name="Text 45"/>
+          <p:cNvSpPr/>
+          <p:nvPr/>
+        </p:nvSpPr>
+        <p:spPr>
+          <a:xfrm>
+            <a:off x="7576947" y="4169664"/>
+            <a:ext cx="685800" cy="384048"/>
+          </a:xfrm>
+          <a:prstGeom prst="rect">
+            <a:avLst/>
+          </a:prstGeom>
+          <a:noFill/>
+          <a:ln/>
+        </p:spPr>
+        <p:txBody>
+          <a:bodyPr wrap="square" lIns="0" tIns="0" rIns="0" bIns="0" rtlCol="0" anchor="ctr"/>
+          <a:lstStyle/>
+          <a:p>
+            <a:pPr algn="ctr" indent="0" marL="0">
+              <a:buNone/>
+            </a:pPr>
+            <a:r>
+              <a:rPr lang="en-US" sz="900" b="1" dirty="0">
+                <a:solidFill>
+                  <a:srgbClr val="9D174D"/>
+                </a:solidFill>
+                <a:latin typeface="Trebuchet MS" pitchFamily="34" charset="0"/>
+                <a:ea typeface="Trebuchet MS" pitchFamily="34" charset="-122"/>
+                <a:cs typeface="Trebuchet MS" pitchFamily="34" charset="-120"/>
+              </a:rPr>
+              <a:t>ss</a:t>
             </a:r>
             <a:endParaRPr lang="en-US" sz="900" dirty="0"/>
           </a:p>
@@ -27278,7 +27577,7 @@
                 <a:ea typeface="Trebuchet MS" pitchFamily="34" charset="-122"/>
                 <a:cs typeface="Trebuchet MS" pitchFamily="34" charset="-120"/>
               </a:rPr>
-              <a:t>brightness</a:t>
+              <a:t>brighter</a:t>
             </a:r>
             <a:endParaRPr lang="en-US" sz="2800" dirty="0"/>
           </a:p>
@@ -28105,7 +28404,7 @@
                 <a:ea typeface="Trebuchet MS" pitchFamily="34" charset="-122"/>
                 <a:cs typeface="Trebuchet MS" pitchFamily="34" charset="-120"/>
               </a:rPr>
-              <a:t>brightness</a:t>
+              <a:t>brighter</a:t>
             </a:r>
             <a:endParaRPr lang="en-US" sz="2800" dirty="0"/>
           </a:p>
@@ -28356,7 +28655,7 @@
                 <a:ea typeface="Trebuchet MS" pitchFamily="34" charset="-122"/>
                 <a:cs typeface="Trebuchet MS" pitchFamily="34" charset="-120"/>
               </a:rPr>
-              <a:t>ness</a:t>
+              <a:t>er</a:t>
             </a:r>
             <a:endParaRPr lang="en-US" sz="1300" dirty="0"/>
           </a:p>
@@ -28395,7 +28694,7 @@
                 <a:ea typeface="Calibri" pitchFamily="34" charset="-122"/>
                 <a:cs typeface="Calibri" pitchFamily="34" charset="-120"/>
               </a:rPr>
-              <a:t>state or quality of</a:t>
+              <a:t>more</a:t>
             </a:r>
             <a:endParaRPr lang="en-US" sz="850" dirty="0"/>
           </a:p>
@@ -29090,7 +29389,7 @@
                 <a:ea typeface="Trebuchet MS" pitchFamily="34" charset="-122"/>
                 <a:cs typeface="Trebuchet MS" pitchFamily="34" charset="-120"/>
               </a:rPr>
-              <a:t>brightness</a:t>
+              <a:t>brighter</a:t>
             </a:r>
             <a:endParaRPr lang="en-US" sz="2800" dirty="0"/>
           </a:p>
@@ -29341,7 +29640,7 @@
                 <a:ea typeface="Trebuchet MS" pitchFamily="34" charset="-122"/>
                 <a:cs typeface="Trebuchet MS" pitchFamily="34" charset="-120"/>
               </a:rPr>
-              <a:t>ness</a:t>
+              <a:t>er</a:t>
             </a:r>
             <a:endParaRPr lang="en-US" sz="1300" dirty="0"/>
           </a:p>
@@ -29380,7 +29679,7 @@
                 <a:ea typeface="Calibri" pitchFamily="34" charset="-122"/>
                 <a:cs typeface="Calibri" pitchFamily="34" charset="-120"/>
               </a:rPr>
-              <a:t>state or quality of</a:t>
+              <a:t>more</a:t>
             </a:r>
             <a:endParaRPr lang="en-US" sz="850" dirty="0"/>
           </a:p>
@@ -29644,7 +29943,7 @@
                 <a:ea typeface="Trebuchet MS" pitchFamily="34" charset="-122"/>
                 <a:cs typeface="Trebuchet MS" pitchFamily="34" charset="-120"/>
               </a:rPr>
-              <a:t>ness</a:t>
+              <a:t>er</a:t>
             </a:r>
             <a:endParaRPr lang="en-US" sz="1400" dirty="0"/>
           </a:p>
@@ -30207,7 +30506,7 @@
                 <a:ea typeface="Trebuchet MS" pitchFamily="34" charset="-122"/>
                 <a:cs typeface="Trebuchet MS" pitchFamily="34" charset="-120"/>
               </a:rPr>
-              <a:t>brightness</a:t>
+              <a:t>brighter</a:t>
             </a:r>
             <a:endParaRPr lang="en-US" sz="2800" dirty="0"/>
           </a:p>
@@ -30458,7 +30757,7 @@
                 <a:ea typeface="Trebuchet MS" pitchFamily="34" charset="-122"/>
                 <a:cs typeface="Trebuchet MS" pitchFamily="34" charset="-120"/>
               </a:rPr>
-              <a:t>ness</a:t>
+              <a:t>er</a:t>
             </a:r>
             <a:endParaRPr lang="en-US" sz="1300" dirty="0"/>
           </a:p>
@@ -30497,7 +30796,7 @@
                 <a:ea typeface="Calibri" pitchFamily="34" charset="-122"/>
                 <a:cs typeface="Calibri" pitchFamily="34" charset="-120"/>
               </a:rPr>
-              <a:t>state or quality of</a:t>
+              <a:t>more</a:t>
             </a:r>
             <a:endParaRPr lang="en-US" sz="850" dirty="0"/>
           </a:p>
@@ -30761,7 +31060,7 @@
                 <a:ea typeface="Trebuchet MS" pitchFamily="34" charset="-122"/>
                 <a:cs typeface="Trebuchet MS" pitchFamily="34" charset="-120"/>
               </a:rPr>
-              <a:t>ness</a:t>
+              <a:t>er</a:t>
             </a:r>
             <a:endParaRPr lang="en-US" sz="1400" dirty="0"/>
           </a:p>
@@ -30868,7 +31167,7 @@
         </p:nvSpPr>
         <p:spPr>
           <a:xfrm>
-            <a:off x="2254649" y="4169664"/>
+            <a:off x="2427732" y="4169664"/>
             <a:ext cx="685800" cy="384048"/>
           </a:xfrm>
           <a:prstGeom prst="rect">
@@ -30895,7 +31194,7 @@
         </p:nvSpPr>
         <p:spPr>
           <a:xfrm>
-            <a:off x="2254649" y="4169664"/>
+            <a:off x="2427732" y="4169664"/>
             <a:ext cx="685800" cy="384048"/>
           </a:xfrm>
           <a:prstGeom prst="rect">
@@ -30920,7 +31219,7 @@
                 <a:ea typeface="Trebuchet MS" pitchFamily="34" charset="-122"/>
                 <a:cs typeface="Trebuchet MS" pitchFamily="34" charset="-120"/>
               </a:rPr>
-              <a:t>br</a:t>
+              <a:t>b</a:t>
             </a:r>
             <a:endParaRPr lang="en-US" sz="900" dirty="0"/>
           </a:p>
@@ -30934,7 +31233,7 @@
         </p:nvSpPr>
         <p:spPr>
           <a:xfrm>
-            <a:off x="3293146" y="4169664"/>
+            <a:off x="3639312" y="4169664"/>
             <a:ext cx="685800" cy="384048"/>
           </a:xfrm>
           <a:prstGeom prst="rect">
@@ -30961,7 +31260,7 @@
         </p:nvSpPr>
         <p:spPr>
           <a:xfrm>
-            <a:off x="3293146" y="4169664"/>
+            <a:off x="3639312" y="4169664"/>
             <a:ext cx="685800" cy="384048"/>
           </a:xfrm>
           <a:prstGeom prst="rect">
@@ -30986,6 +31285,72 @@
                 <a:ea typeface="Trebuchet MS" pitchFamily="34" charset="-122"/>
                 <a:cs typeface="Trebuchet MS" pitchFamily="34" charset="-120"/>
               </a:rPr>
+              <a:t>r</a:t>
+            </a:r>
+            <a:endParaRPr lang="en-US" sz="900" dirty="0"/>
+          </a:p>
+        </p:txBody>
+      </p:sp>
+      <p:sp>
+        <p:nvSpPr>
+          <p:cNvPr id="37" name="Shape 35"/>
+          <p:cNvSpPr/>
+          <p:nvPr/>
+        </p:nvSpPr>
+        <p:spPr>
+          <a:xfrm>
+            <a:off x="4850892" y="4169664"/>
+            <a:ext cx="685800" cy="384048"/>
+          </a:xfrm>
+          <a:prstGeom prst="rect">
+            <a:avLst>
+              <a:gd name="adj" fmla="val 9524"/>
+            </a:avLst>
+          </a:prstGeom>
+          <a:solidFill>
+            <a:srgbClr val="FFFFFF"/>
+          </a:solidFill>
+          <a:ln w="12700">
+            <a:solidFill>
+              <a:srgbClr val="DB2777"/>
+            </a:solidFill>
+            <a:prstDash val="solid"/>
+          </a:ln>
+        </p:spPr>
+      </p:sp>
+      <p:sp>
+        <p:nvSpPr>
+          <p:cNvPr id="38" name="Text 36"/>
+          <p:cNvSpPr/>
+          <p:nvPr/>
+        </p:nvSpPr>
+        <p:spPr>
+          <a:xfrm>
+            <a:off x="4850892" y="4169664"/>
+            <a:ext cx="685800" cy="384048"/>
+          </a:xfrm>
+          <a:prstGeom prst="rect">
+            <a:avLst/>
+          </a:prstGeom>
+          <a:noFill/>
+          <a:ln/>
+        </p:spPr>
+        <p:txBody>
+          <a:bodyPr wrap="square" lIns="0" tIns="0" rIns="0" bIns="0" rtlCol="0" anchor="ctr"/>
+          <a:lstStyle/>
+          <a:p>
+            <a:pPr algn="ctr" indent="0" marL="0">
+              <a:buNone/>
+            </a:pPr>
+            <a:r>
+              <a:rPr lang="en-US" sz="900" b="1" dirty="0">
+                <a:solidFill>
+                  <a:srgbClr val="9D174D"/>
+                </a:solidFill>
+                <a:latin typeface="Trebuchet MS" pitchFamily="34" charset="0"/>
+                <a:ea typeface="Trebuchet MS" pitchFamily="34" charset="-122"/>
+                <a:cs typeface="Trebuchet MS" pitchFamily="34" charset="-120"/>
+              </a:rPr>
               <a:t>igh</a:t>
             </a:r>
             <a:endParaRPr lang="en-US" sz="900" dirty="0"/>
@@ -30994,13 +31359,13 @@
       </p:sp>
       <p:sp>
         <p:nvSpPr>
-          <p:cNvPr id="37" name="Text 35"/>
-          <p:cNvSpPr/>
-          <p:nvPr/>
-        </p:nvSpPr>
-        <p:spPr>
-          <a:xfrm>
-            <a:off x="3293146" y="4572000"/>
+          <p:cNvPr id="39" name="Text 37"/>
+          <p:cNvSpPr/>
+          <p:nvPr/>
+        </p:nvSpPr>
+        <p:spPr>
+          <a:xfrm>
+            <a:off x="4850892" y="4572000"/>
             <a:ext cx="685800" cy="219456"/>
           </a:xfrm>
           <a:prstGeom prst="rect">
@@ -31033,13 +31398,13 @@
       </p:sp>
       <p:sp>
         <p:nvSpPr>
-          <p:cNvPr id="38" name="Shape 36"/>
-          <p:cNvSpPr/>
-          <p:nvPr/>
-        </p:nvSpPr>
-        <p:spPr>
-          <a:xfrm>
-            <a:off x="4331643" y="4169664"/>
+          <p:cNvPr id="40" name="Shape 38"/>
+          <p:cNvSpPr/>
+          <p:nvPr/>
+        </p:nvSpPr>
+        <p:spPr>
+          <a:xfrm>
+            <a:off x="6062472" y="4169664"/>
             <a:ext cx="685800" cy="384048"/>
           </a:xfrm>
           <a:prstGeom prst="rect">
@@ -31060,13 +31425,13 @@
       </p:sp>
       <p:sp>
         <p:nvSpPr>
-          <p:cNvPr id="39" name="Text 37"/>
-          <p:cNvSpPr/>
-          <p:nvPr/>
-        </p:nvSpPr>
-        <p:spPr>
-          <a:xfrm>
-            <a:off x="4331643" y="4169664"/>
+          <p:cNvPr id="41" name="Text 39"/>
+          <p:cNvSpPr/>
+          <p:nvPr/>
+        </p:nvSpPr>
+        <p:spPr>
+          <a:xfrm>
+            <a:off x="6062472" y="4169664"/>
             <a:ext cx="685800" cy="384048"/>
           </a:xfrm>
           <a:prstGeom prst="rect">
@@ -31099,13 +31464,13 @@
       </p:sp>
       <p:sp>
         <p:nvSpPr>
-          <p:cNvPr id="40" name="Shape 38"/>
-          <p:cNvSpPr/>
-          <p:nvPr/>
-        </p:nvSpPr>
-        <p:spPr>
-          <a:xfrm>
-            <a:off x="5370141" y="4169664"/>
+          <p:cNvPr id="42" name="Shape 40"/>
+          <p:cNvSpPr/>
+          <p:nvPr/>
+        </p:nvSpPr>
+        <p:spPr>
+          <a:xfrm>
+            <a:off x="7274052" y="4169664"/>
             <a:ext cx="685800" cy="384048"/>
           </a:xfrm>
           <a:prstGeom prst="rect">
@@ -31126,13 +31491,13 @@
       </p:sp>
       <p:sp>
         <p:nvSpPr>
-          <p:cNvPr id="41" name="Text 39"/>
-          <p:cNvSpPr/>
-          <p:nvPr/>
-        </p:nvSpPr>
-        <p:spPr>
-          <a:xfrm>
-            <a:off x="5370141" y="4169664"/>
+          <p:cNvPr id="43" name="Text 41"/>
+          <p:cNvSpPr/>
+          <p:nvPr/>
+        </p:nvSpPr>
+        <p:spPr>
+          <a:xfrm>
+            <a:off x="7274052" y="4169664"/>
             <a:ext cx="685800" cy="384048"/>
           </a:xfrm>
           <a:prstGeom prst="rect">
@@ -31157,139 +31522,7 @@
                 <a:ea typeface="Trebuchet MS" pitchFamily="34" charset="-122"/>
                 <a:cs typeface="Trebuchet MS" pitchFamily="34" charset="-120"/>
               </a:rPr>
-              <a:t>n</a:t>
-            </a:r>
-            <a:endParaRPr lang="en-US" sz="900" dirty="0"/>
-          </a:p>
-        </p:txBody>
-      </p:sp>
-      <p:sp>
-        <p:nvSpPr>
-          <p:cNvPr id="42" name="Shape 40"/>
-          <p:cNvSpPr/>
-          <p:nvPr/>
-        </p:nvSpPr>
-        <p:spPr>
-          <a:xfrm>
-            <a:off x="6408638" y="4169664"/>
-            <a:ext cx="685800" cy="384048"/>
-          </a:xfrm>
-          <a:prstGeom prst="rect">
-            <a:avLst>
-              <a:gd name="adj" fmla="val 9524"/>
-            </a:avLst>
-          </a:prstGeom>
-          <a:solidFill>
-            <a:srgbClr val="FFFFFF"/>
-          </a:solidFill>
-          <a:ln w="12700">
-            <a:solidFill>
-              <a:srgbClr val="DB2777"/>
-            </a:solidFill>
-            <a:prstDash val="solid"/>
-          </a:ln>
-        </p:spPr>
-      </p:sp>
-      <p:sp>
-        <p:nvSpPr>
-          <p:cNvPr id="43" name="Text 41"/>
-          <p:cNvSpPr/>
-          <p:nvPr/>
-        </p:nvSpPr>
-        <p:spPr>
-          <a:xfrm>
-            <a:off x="6408638" y="4169664"/>
-            <a:ext cx="685800" cy="384048"/>
-          </a:xfrm>
-          <a:prstGeom prst="rect">
-            <a:avLst/>
-          </a:prstGeom>
-          <a:noFill/>
-          <a:ln/>
-        </p:spPr>
-        <p:txBody>
-          <a:bodyPr wrap="square" lIns="0" tIns="0" rIns="0" bIns="0" rtlCol="0" anchor="ctr"/>
-          <a:lstStyle/>
-          <a:p>
-            <a:pPr algn="ctr" indent="0" marL="0">
-              <a:buNone/>
-            </a:pPr>
-            <a:r>
-              <a:rPr lang="en-US" sz="900" b="1" dirty="0">
-                <a:solidFill>
-                  <a:srgbClr val="9D174D"/>
-                </a:solidFill>
-                <a:latin typeface="Trebuchet MS" pitchFamily="34" charset="0"/>
-                <a:ea typeface="Trebuchet MS" pitchFamily="34" charset="-122"/>
-                <a:cs typeface="Trebuchet MS" pitchFamily="34" charset="-120"/>
-              </a:rPr>
-              <a:t>e</a:t>
-            </a:r>
-            <a:endParaRPr lang="en-US" sz="900" dirty="0"/>
-          </a:p>
-        </p:txBody>
-      </p:sp>
-      <p:sp>
-        <p:nvSpPr>
-          <p:cNvPr id="44" name="Shape 42"/>
-          <p:cNvSpPr/>
-          <p:nvPr/>
-        </p:nvSpPr>
-        <p:spPr>
-          <a:xfrm>
-            <a:off x="7447135" y="4169664"/>
-            <a:ext cx="685800" cy="384048"/>
-          </a:xfrm>
-          <a:prstGeom prst="rect">
-            <a:avLst>
-              <a:gd name="adj" fmla="val 9524"/>
-            </a:avLst>
-          </a:prstGeom>
-          <a:solidFill>
-            <a:srgbClr val="FFFFFF"/>
-          </a:solidFill>
-          <a:ln w="12700">
-            <a:solidFill>
-              <a:srgbClr val="DB2777"/>
-            </a:solidFill>
-            <a:prstDash val="solid"/>
-          </a:ln>
-        </p:spPr>
-      </p:sp>
-      <p:sp>
-        <p:nvSpPr>
-          <p:cNvPr id="45" name="Text 43"/>
-          <p:cNvSpPr/>
-          <p:nvPr/>
-        </p:nvSpPr>
-        <p:spPr>
-          <a:xfrm>
-            <a:off x="7447135" y="4169664"/>
-            <a:ext cx="685800" cy="384048"/>
-          </a:xfrm>
-          <a:prstGeom prst="rect">
-            <a:avLst/>
-          </a:prstGeom>
-          <a:noFill/>
-          <a:ln/>
-        </p:spPr>
-        <p:txBody>
-          <a:bodyPr wrap="square" lIns="0" tIns="0" rIns="0" bIns="0" rtlCol="0" anchor="ctr"/>
-          <a:lstStyle/>
-          <a:p>
-            <a:pPr algn="ctr" indent="0" marL="0">
-              <a:buNone/>
-            </a:pPr>
-            <a:r>
-              <a:rPr lang="en-US" sz="900" b="1" dirty="0">
-                <a:solidFill>
-                  <a:srgbClr val="9D174D"/>
-                </a:solidFill>
-                <a:latin typeface="Trebuchet MS" pitchFamily="34" charset="0"/>
-                <a:ea typeface="Trebuchet MS" pitchFamily="34" charset="-122"/>
-                <a:cs typeface="Trebuchet MS" pitchFamily="34" charset="-120"/>
-              </a:rPr>
-              <a:t>ss</a:t>
+              <a:t>er</a:t>
             </a:r>
             <a:endParaRPr lang="en-US" sz="900" dirty="0"/>
           </a:p>
@@ -33332,7 +33565,7 @@
                 <a:ea typeface="Trebuchet MS" pitchFamily="34" charset="-122"/>
                 <a:cs typeface="Trebuchet MS" pitchFamily="34" charset="-120"/>
               </a:rPr>
-              <a:t>-ly</a:t>
+              <a:t>-er</a:t>
             </a:r>
             <a:endParaRPr lang="en-US" sz="1300" dirty="0"/>
           </a:p>
@@ -33396,7 +33629,7 @@
                 <a:ea typeface="Trebuchet MS" pitchFamily="34" charset="-122"/>
                 <a:cs typeface="Trebuchet MS" pitchFamily="34" charset="-120"/>
               </a:rPr>
-              <a:t>super-</a:t>
+              <a:t>out-</a:t>
             </a:r>
             <a:endParaRPr lang="en-US" sz="1300" dirty="0"/>
           </a:p>
@@ -33485,7 +33718,7 @@
                 <a:ea typeface="Trebuchet MS" pitchFamily="34" charset="-122"/>
                 <a:cs typeface="Trebuchet MS" pitchFamily="34" charset="-120"/>
               </a:rPr>
-              <a:t>-ness</a:t>
+              <a:t>-est</a:t>
             </a:r>
             <a:endParaRPr lang="en-US" sz="1300" dirty="0"/>
           </a:p>
@@ -33549,7 +33782,7 @@
                 <a:ea typeface="Trebuchet MS" pitchFamily="34" charset="-122"/>
                 <a:cs typeface="Trebuchet MS" pitchFamily="34" charset="-120"/>
               </a:rPr>
-              <a:t>re-</a:t>
+              <a:t>sun-</a:t>
             </a:r>
             <a:endParaRPr lang="en-US" sz="1300" dirty="0"/>
           </a:p>
@@ -33638,7 +33871,7 @@
                 <a:ea typeface="Trebuchet MS" pitchFamily="34" charset="-122"/>
                 <a:cs typeface="Trebuchet MS" pitchFamily="34" charset="-120"/>
               </a:rPr>
-              <a:t>-er</a:t>
+              <a:t>-ly</a:t>
             </a:r>
             <a:endParaRPr lang="en-US" sz="1300" dirty="0"/>
           </a:p>
@@ -33702,7 +33935,7 @@
                 <a:ea typeface="Trebuchet MS" pitchFamily="34" charset="-122"/>
                 <a:cs typeface="Trebuchet MS" pitchFamily="34" charset="-120"/>
               </a:rPr>
-              <a:t>out-</a:t>
+              <a:t>star-</a:t>
             </a:r>
             <a:endParaRPr lang="en-US" sz="1300" dirty="0"/>
           </a:p>
@@ -33791,7 +34024,7 @@
                 <a:ea typeface="Trebuchet MS" pitchFamily="34" charset="-122"/>
                 <a:cs typeface="Trebuchet MS" pitchFamily="34" charset="-120"/>
               </a:rPr>
-              <a:t>-est</a:t>
+              <a:t>-ness</a:t>
             </a:r>
             <a:endParaRPr lang="en-US" sz="1300" dirty="0"/>
           </a:p>
@@ -33896,7 +34129,7 @@
                 <a:ea typeface="Trebuchet MS" pitchFamily="34" charset="-122"/>
                 <a:cs typeface="Trebuchet MS" pitchFamily="34" charset="-120"/>
               </a:rPr>
-              <a:t>brighten</a:t>
+              <a:t>bright</a:t>
             </a:r>
             <a:endParaRPr lang="en-US" sz="1200" dirty="0"/>
           </a:p>
@@ -33962,7 +34195,7 @@
                 <a:ea typeface="Trebuchet MS" pitchFamily="34" charset="-122"/>
                 <a:cs typeface="Trebuchet MS" pitchFamily="34" charset="-120"/>
               </a:rPr>
-              <a:t>brightly</a:t>
+              <a:t>brighter</a:t>
             </a:r>
             <a:endParaRPr lang="en-US" sz="1200" dirty="0"/>
           </a:p>
@@ -34028,7 +34261,7 @@
                 <a:ea typeface="Trebuchet MS" pitchFamily="34" charset="-122"/>
                 <a:cs typeface="Trebuchet MS" pitchFamily="34" charset="-120"/>
               </a:rPr>
-              <a:t>brightness</a:t>
+              <a:t>brightest</a:t>
             </a:r>
             <a:endParaRPr lang="en-US" sz="1200" dirty="0"/>
           </a:p>
@@ -34094,7 +34327,7 @@
                 <a:ea typeface="Trebuchet MS" pitchFamily="34" charset="-122"/>
                 <a:cs typeface="Trebuchet MS" pitchFamily="34" charset="-120"/>
               </a:rPr>
-              <a:t>brighter</a:t>
+              <a:t>brightly</a:t>
             </a:r>
             <a:endParaRPr lang="en-US" sz="1200" dirty="0"/>
           </a:p>
@@ -34160,7 +34393,7 @@
                 <a:ea typeface="Trebuchet MS" pitchFamily="34" charset="-122"/>
                 <a:cs typeface="Trebuchet MS" pitchFamily="34" charset="-120"/>
               </a:rPr>
-              <a:t>brightest</a:t>
+              <a:t>brightness</a:t>
             </a:r>
             <a:endParaRPr lang="en-US" sz="1200" dirty="0"/>
           </a:p>
@@ -34226,7 +34459,7 @@
                 <a:ea typeface="Trebuchet MS" pitchFamily="34" charset="-122"/>
                 <a:cs typeface="Trebuchet MS" pitchFamily="34" charset="-120"/>
               </a:rPr>
-              <a:t>unbrighten</a:t>
+              <a:t>brighten</a:t>
             </a:r>
             <a:endParaRPr lang="en-US" sz="1200" dirty="0"/>
           </a:p>
@@ -34292,7 +34525,7 @@
                 <a:ea typeface="Trebuchet MS" pitchFamily="34" charset="-122"/>
                 <a:cs typeface="Trebuchet MS" pitchFamily="34" charset="-120"/>
               </a:rPr>
-              <a:t>overbright</a:t>
+              <a:t>unbrighten</a:t>
             </a:r>
             <a:endParaRPr lang="en-US" sz="1200" dirty="0"/>
           </a:p>
@@ -34358,7 +34591,7 @@
                 <a:ea typeface="Trebuchet MS" pitchFamily="34" charset="-122"/>
                 <a:cs typeface="Trebuchet MS" pitchFamily="34" charset="-120"/>
               </a:rPr>
-              <a:t>outbright</a:t>
+              <a:t>brightly-lit</a:t>
             </a:r>
             <a:endParaRPr lang="en-US" sz="1200" dirty="0"/>
           </a:p>
@@ -35546,7 +35779,7 @@
                 <a:ea typeface="Calibri" pitchFamily="34" charset="-122"/>
                 <a:cs typeface="Calibri" pitchFamily="34" charset="-120"/>
               </a:rPr>
-              <a:t>1.  The word 'brightly' contains the root 'bright' and the suffix '-ly'.</a:t>
+              <a:t>1.  Adding '-en' to 'bright' makes the verb 'brighten', meaning to make brighter.</a:t>
             </a:r>
             <a:endParaRPr lang="en-US" sz="1300" dirty="0"/>
           </a:p>
@@ -35685,7 +35918,7 @@
                 <a:ea typeface="Calibri" pitchFamily="34" charset="-122"/>
                 <a:cs typeface="Calibri" pitchFamily="34" charset="-120"/>
               </a:rPr>
-              <a:t>2.  The root 'bright' comes from a Latin word.</a:t>
+              <a:t>2.  The root 'bright' comes from the Latin language.</a:t>
             </a:r>
             <a:endParaRPr lang="en-US" sz="1300" dirty="0"/>
           </a:p>
@@ -35824,7 +36057,7 @@
                 <a:ea typeface="Calibri" pitchFamily="34" charset="-122"/>
                 <a:cs typeface="Calibri" pitchFamily="34" charset="-120"/>
               </a:rPr>
-              <a:t>3.  Adding '-ness' to 'bright' makes the word 'brightness', which is a noun.</a:t>
+              <a:t>3.  The word 'brightly' contains the root 'bright' plus the suffix '-ly'.</a:t>
             </a:r>
             <a:endParaRPr lang="en-US" sz="1300" dirty="0"/>
           </a:p>
@@ -35963,7 +36196,7 @@
                 <a:ea typeface="Calibri" pitchFamily="34" charset="-122"/>
                 <a:cs typeface="Calibri" pitchFamily="34" charset="-120"/>
               </a:rPr>
-              <a:t>4.  The word 'brightest' means the most full of light or the most clever.</a:t>
+              <a:t>4.  The root 'bright' can mean both full of light and very clever.</a:t>
             </a:r>
             <a:endParaRPr lang="en-US" sz="1300" dirty="0"/>
           </a:p>
@@ -36102,7 +36335,7 @@
                 <a:ea typeface="Calibri" pitchFamily="34" charset="-122"/>
                 <a:cs typeface="Calibri" pitchFamily="34" charset="-120"/>
               </a:rPr>
-              <a:t>5.  The prefix 'un-' in 'unbrighten' means 'again'.</a:t>
+              <a:t>5.  The word 'brightness' has only one morpheme.</a:t>
             </a:r>
             <a:endParaRPr lang="en-US" sz="1300" dirty="0"/>
           </a:p>
@@ -36741,7 +36974,7 @@
                 <a:ea typeface="Trebuchet MS" pitchFamily="34" charset="-122"/>
                 <a:cs typeface="Trebuchet MS" pitchFamily="34" charset="-120"/>
               </a:rPr>
-              <a:t>brighten</a:t>
+              <a:t>bright</a:t>
             </a:r>
             <a:endParaRPr lang="en-US" sz="1300" dirty="0"/>
           </a:p>
@@ -36807,7 +37040,7 @@
                 <a:ea typeface="Trebuchet MS" pitchFamily="34" charset="-122"/>
                 <a:cs typeface="Trebuchet MS" pitchFamily="34" charset="-120"/>
               </a:rPr>
-              <a:t>brightly</a:t>
+              <a:t>brighter</a:t>
             </a:r>
             <a:endParaRPr lang="en-US" sz="1300" dirty="0"/>
           </a:p>
@@ -36873,7 +37106,7 @@
                 <a:ea typeface="Trebuchet MS" pitchFamily="34" charset="-122"/>
                 <a:cs typeface="Trebuchet MS" pitchFamily="34" charset="-120"/>
               </a:rPr>
-              <a:t>brightness</a:t>
+              <a:t>brightest</a:t>
             </a:r>
             <a:endParaRPr lang="en-US" sz="1300" dirty="0"/>
           </a:p>
@@ -36939,7 +37172,7 @@
                 <a:ea typeface="Trebuchet MS" pitchFamily="34" charset="-122"/>
                 <a:cs typeface="Trebuchet MS" pitchFamily="34" charset="-120"/>
               </a:rPr>
-              <a:t>brighter</a:t>
+              <a:t>brightly</a:t>
             </a:r>
             <a:endParaRPr lang="en-US" sz="1300" dirty="0"/>
           </a:p>
@@ -37005,7 +37238,7 @@
                 <a:ea typeface="Trebuchet MS" pitchFamily="34" charset="-122"/>
                 <a:cs typeface="Trebuchet MS" pitchFamily="34" charset="-120"/>
               </a:rPr>
-              <a:t>brightest</a:t>
+              <a:t>brightness</a:t>
             </a:r>
             <a:endParaRPr lang="en-US" sz="1300" dirty="0"/>
           </a:p>
@@ -37071,7 +37304,7 @@
                 <a:ea typeface="Trebuchet MS" pitchFamily="34" charset="-122"/>
                 <a:cs typeface="Trebuchet MS" pitchFamily="34" charset="-120"/>
               </a:rPr>
-              <a:t>unbrighten</a:t>
+              <a:t>brighten</a:t>
             </a:r>
             <a:endParaRPr lang="en-US" sz="1300" dirty="0"/>
           </a:p>
@@ -37137,7 +37370,7 @@
                 <a:ea typeface="Trebuchet MS" pitchFamily="34" charset="-122"/>
                 <a:cs typeface="Trebuchet MS" pitchFamily="34" charset="-120"/>
               </a:rPr>
-              <a:t>overbright</a:t>
+              <a:t>unbrighten</a:t>
             </a:r>
             <a:endParaRPr lang="en-US" sz="1300" dirty="0"/>
           </a:p>
@@ -38011,7 +38244,7 @@
                 <a:ea typeface="Trebuchet MS" pitchFamily="34" charset="-122"/>
                 <a:cs typeface="Trebuchet MS" pitchFamily="34" charset="-120"/>
               </a:rPr>
-              <a:t>-ly</a:t>
+              <a:t>-er</a:t>
             </a:r>
             <a:endParaRPr lang="en-US" sz="1300" dirty="0"/>
           </a:p>
@@ -38075,7 +38308,7 @@
                 <a:ea typeface="Trebuchet MS" pitchFamily="34" charset="-122"/>
                 <a:cs typeface="Trebuchet MS" pitchFamily="34" charset="-120"/>
               </a:rPr>
-              <a:t>super-</a:t>
+              <a:t>out-</a:t>
             </a:r>
             <a:endParaRPr lang="en-US" sz="1300" dirty="0"/>
           </a:p>
@@ -38164,7 +38397,7 @@
                 <a:ea typeface="Trebuchet MS" pitchFamily="34" charset="-122"/>
                 <a:cs typeface="Trebuchet MS" pitchFamily="34" charset="-120"/>
               </a:rPr>
-              <a:t>-ness</a:t>
+              <a:t>-est</a:t>
             </a:r>
             <a:endParaRPr lang="en-US" sz="1300" dirty="0"/>
           </a:p>
@@ -38228,7 +38461,7 @@
                 <a:ea typeface="Trebuchet MS" pitchFamily="34" charset="-122"/>
                 <a:cs typeface="Trebuchet MS" pitchFamily="34" charset="-120"/>
               </a:rPr>
-              <a:t>re-</a:t>
+              <a:t>sun-</a:t>
             </a:r>
             <a:endParaRPr lang="en-US" sz="1300" dirty="0"/>
           </a:p>
@@ -38317,7 +38550,7 @@
                 <a:ea typeface="Trebuchet MS" pitchFamily="34" charset="-122"/>
                 <a:cs typeface="Trebuchet MS" pitchFamily="34" charset="-120"/>
               </a:rPr>
-              <a:t>-er</a:t>
+              <a:t>-ly</a:t>
             </a:r>
             <a:endParaRPr lang="en-US" sz="1300" dirty="0"/>
           </a:p>
@@ -38381,7 +38614,7 @@
                 <a:ea typeface="Trebuchet MS" pitchFamily="34" charset="-122"/>
                 <a:cs typeface="Trebuchet MS" pitchFamily="34" charset="-120"/>
               </a:rPr>
-              <a:t>out-</a:t>
+              <a:t>star-</a:t>
             </a:r>
             <a:endParaRPr lang="en-US" sz="1300" dirty="0"/>
           </a:p>
@@ -38470,7 +38703,7 @@
                 <a:ea typeface="Trebuchet MS" pitchFamily="34" charset="-122"/>
                 <a:cs typeface="Trebuchet MS" pitchFamily="34" charset="-120"/>
               </a:rPr>
-              <a:t>-est</a:t>
+              <a:t>-ness</a:t>
             </a:r>
             <a:endParaRPr lang="en-US" sz="1300" dirty="0"/>
           </a:p>
@@ -38911,7 +39144,7 @@
                 <a:ea typeface="Trebuchet MS" pitchFamily="34" charset="-122"/>
                 <a:cs typeface="Trebuchet MS" pitchFamily="34" charset="-120"/>
               </a:rPr>
-              <a:t>brighten</a:t>
+              <a:t>bright</a:t>
             </a:r>
             <a:endParaRPr lang="en-US" sz="1400" dirty="0"/>
           </a:p>
@@ -39315,7 +39548,7 @@
                 <a:ea typeface="Trebuchet MS" pitchFamily="34" charset="-122"/>
                 <a:cs typeface="Trebuchet MS" pitchFamily="34" charset="-120"/>
               </a:rPr>
-              <a:t>brighten</a:t>
+              <a:t>bright</a:t>
             </a:r>
             <a:endParaRPr lang="en-US" sz="1200" dirty="0"/>
           </a:p>
@@ -39381,7 +39614,7 @@
                 <a:ea typeface="Calibri" pitchFamily="34" charset="-122"/>
                 <a:cs typeface="Calibri" pitchFamily="34" charset="-120"/>
               </a:rPr>
-              <a:t>To make something lighter or more cheerful.</a:t>
+              <a:t>Full of light, or very clever and quick to learn.</a:t>
             </a:r>
             <a:endParaRPr lang="en-US" sz="1200" dirty="0"/>
           </a:p>
@@ -39454,7 +39687,7 @@
                 <a:ea typeface="Trebuchet MS" pitchFamily="34" charset="-122"/>
                 <a:cs typeface="Trebuchet MS" pitchFamily="34" charset="-120"/>
               </a:rPr>
-              <a:t>brightly</a:t>
+              <a:t>brighter</a:t>
             </a:r>
             <a:endParaRPr lang="en-US" sz="1200" dirty="0"/>
           </a:p>
@@ -39520,7 +39753,7 @@
                 <a:ea typeface="Calibri" pitchFamily="34" charset="-122"/>
                 <a:cs typeface="Calibri" pitchFamily="34" charset="-120"/>
               </a:rPr>
-              <a:t>The quality of giving off a strong light.</a:t>
+              <a:t>The most full of light or the most clever of all.</a:t>
             </a:r>
             <a:endParaRPr lang="en-US" sz="1200" dirty="0"/>
           </a:p>
@@ -39593,7 +39826,7 @@
                 <a:ea typeface="Trebuchet MS" pitchFamily="34" charset="-122"/>
                 <a:cs typeface="Trebuchet MS" pitchFamily="34" charset="-120"/>
               </a:rPr>
-              <a:t>brightness</a:t>
+              <a:t>brightest</a:t>
             </a:r>
             <a:endParaRPr lang="en-US" sz="1200" dirty="0"/>
           </a:p>
@@ -39659,7 +39892,7 @@
                 <a:ea typeface="Calibri" pitchFamily="34" charset="-122"/>
                 <a:cs typeface="Calibri" pitchFamily="34" charset="-120"/>
               </a:rPr>
-              <a:t>The most full of light or the most clever of all.</a:t>
+              <a:t>The quality of giving off strong light, or how clever someone is.</a:t>
             </a:r>
             <a:endParaRPr lang="en-US" sz="1200" dirty="0"/>
           </a:p>
@@ -39732,7 +39965,7 @@
                 <a:ea typeface="Trebuchet MS" pitchFamily="34" charset="-122"/>
                 <a:cs typeface="Trebuchet MS" pitchFamily="34" charset="-120"/>
               </a:rPr>
-              <a:t>brighter</a:t>
+              <a:t>brightly</a:t>
             </a:r>
             <a:endParaRPr lang="en-US" sz="1200" dirty="0"/>
           </a:p>
@@ -39798,7 +40031,7 @@
                 <a:ea typeface="Calibri" pitchFamily="34" charset="-122"/>
                 <a:cs typeface="Calibri" pitchFamily="34" charset="-120"/>
               </a:rPr>
-              <a:t>To make something less bright or cheerful.</a:t>
+              <a:t>To make something lighter or more cheerful, like brightening a room.</a:t>
             </a:r>
             <a:endParaRPr lang="en-US" sz="1200" dirty="0"/>
           </a:p>
@@ -39871,7 +40104,7 @@
                 <a:ea typeface="Trebuchet MS" pitchFamily="34" charset="-122"/>
                 <a:cs typeface="Trebuchet MS" pitchFamily="34" charset="-120"/>
               </a:rPr>
-              <a:t>brightest</a:t>
+              <a:t>brightness</a:t>
             </a:r>
             <a:endParaRPr lang="en-US" sz="1200" dirty="0"/>
           </a:p>
@@ -39937,7 +40170,7 @@
                 <a:ea typeface="Calibri" pitchFamily="34" charset="-122"/>
                 <a:cs typeface="Calibri" pitchFamily="34" charset="-120"/>
               </a:rPr>
-              <a:t>More full of light or more clever than something else.</a:t>
+              <a:t>In a way that gives off a lot of light, like a star shining brightly.</a:t>
             </a:r>
             <a:endParaRPr lang="en-US" sz="1200" dirty="0"/>
           </a:p>
@@ -40010,7 +40243,7 @@
                 <a:ea typeface="Trebuchet MS" pitchFamily="34" charset="-122"/>
                 <a:cs typeface="Trebuchet MS" pitchFamily="34" charset="-120"/>
               </a:rPr>
-              <a:t>unbrighten</a:t>
+              <a:t>brighten</a:t>
             </a:r>
             <a:endParaRPr lang="en-US" sz="1200" dirty="0"/>
           </a:p>
@@ -40076,7 +40309,7 @@
                 <a:ea typeface="Calibri" pitchFamily="34" charset="-122"/>
                 <a:cs typeface="Calibri" pitchFamily="34" charset="-120"/>
               </a:rPr>
-              <a:t>Too bright or too dazzling to look at comfortably.</a:t>
+              <a:t>To make something less bright or to dull the light.</a:t>
             </a:r>
             <a:endParaRPr lang="en-US" sz="1200" dirty="0"/>
           </a:p>
@@ -40149,7 +40382,7 @@
                 <a:ea typeface="Trebuchet MS" pitchFamily="34" charset="-122"/>
                 <a:cs typeface="Trebuchet MS" pitchFamily="34" charset="-120"/>
               </a:rPr>
-              <a:t>overbright</a:t>
+              <a:t>unbrighten</a:t>
             </a:r>
             <a:endParaRPr lang="en-US" sz="1200" dirty="0"/>
           </a:p>
@@ -40215,7 +40448,7 @@
                 <a:ea typeface="Calibri" pitchFamily="34" charset="-122"/>
                 <a:cs typeface="Calibri" pitchFamily="34" charset="-120"/>
               </a:rPr>
-              <a:t>In a way that gives off a lot of light or colour.</a:t>
+              <a:t>More full of light or more clever than something else.</a:t>
             </a:r>
             <a:endParaRPr lang="en-US" sz="1200" dirty="0"/>
           </a:p>
@@ -40710,7 +40943,7 @@
                 <a:ea typeface="Calibri" pitchFamily="34" charset="-122"/>
                 <a:cs typeface="Calibri" pitchFamily="34" charset="-120"/>
               </a:rPr>
-              <a:t>The brightness of the torch helped us find our way through the dark cave.</a:t>
+              <a:t>The students were told to brighten their writing by using more vivid describing words.</a:t>
             </a:r>
             <a:endParaRPr lang="en-US" sz="1500" dirty="0"/>
           </a:p>
@@ -40874,7 +41107,7 @@
                 <a:ea typeface="Calibri" pitchFamily="34" charset="-122"/>
                 <a:cs typeface="Calibri" pitchFamily="34" charset="-120"/>
               </a:rPr>
-              <a:t>She was the brightest student in the class and always asked great questions.</a:t>
+              <a:t>She was the brightest student in the class and always finished her work early.</a:t>
             </a:r>
             <a:endParaRPr lang="en-US" sz="1500" dirty="0"/>
           </a:p>
@@ -41038,7 +41271,7 @@
                 <a:ea typeface="Calibri" pitchFamily="34" charset="-122"/>
                 <a:cs typeface="Calibri" pitchFamily="34" charset="-120"/>
               </a:rPr>
-              <a:t>After the storm passed, the sky began to brighten and we could see the rainbow.</a:t>
+              <a:t>The torch shone brightly through the dark cave as the explorers moved carefully inside.</a:t>
             </a:r>
             <a:endParaRPr lang="en-US" sz="1500" dirty="0"/>
           </a:p>

--- a/output/wordlabs-bright-3day.pptx
+++ b/output/wordlabs-bright-3day.pptx
@@ -4240,7 +4240,7 @@
                 <a:ea typeface="Calibri" pitchFamily="34" charset="-122"/>
                 <a:cs typeface="Calibri" pitchFamily="34" charset="-120"/>
               </a:rPr>
-              <a:t>"full of light, clever"</a:t>
+              <a:t>"giving out a lot of light; clever"</a:t>
             </a:r>
             <a:endParaRPr lang="en-US" sz="2200" dirty="0"/>
           </a:p>
@@ -4279,7 +4279,7 @@
                 <a:ea typeface="Calibri" pitchFamily="34" charset="-122"/>
                 <a:cs typeface="Calibri" pitchFamily="34" charset="-120"/>
               </a:rPr>
-              <a:t>Origin: Old English: beorht</a:t>
+              <a:t>Origin: Anglo-Saxon (Old English) root</a:t>
             </a:r>
             <a:endParaRPr lang="en-US" sz="1300" dirty="0"/>
           </a:p>
@@ -5288,7 +5288,7 @@
                 <a:ea typeface="Calibri" pitchFamily="34" charset="-122"/>
                 <a:cs typeface="Calibri" pitchFamily="34" charset="-120"/>
               </a:rPr>
-              <a:t>Word Labs  •  wordlabs.app  •  Root: 'bright' = full of light, clever</a:t>
+              <a:t>Word Labs  •  wordlabs.app  •  Root: 'bright' = giving out a lot of light; clever</a:t>
             </a:r>
             <a:endParaRPr lang="en-US" sz="800" dirty="0"/>
           </a:p>
@@ -5928,7 +5928,7 @@
                 <a:ea typeface="Calibri" pitchFamily="34" charset="-122"/>
                 <a:cs typeface="Calibri" pitchFamily="34" charset="-120"/>
               </a:rPr>
-              <a:t>Word Labs  •  wordlabs.app  •  Root: 'bright' = full of light, clever</a:t>
+              <a:t>Word Labs  •  wordlabs.app  •  Root: 'bright' = giving out a lot of light; clever</a:t>
             </a:r>
             <a:endParaRPr lang="en-US" sz="800" dirty="0"/>
           </a:p>
@@ -6040,7 +6040,7 @@
                 <a:ea typeface="Calibri" pitchFamily="34" charset="-122"/>
                 <a:cs typeface="Calibri" pitchFamily="34" charset="-120"/>
               </a:rPr>
-              <a:t>The </a:t>
+              <a:t>The lamp shone </a:t>
             </a:r>
             <a:pPr algn="l" indent="0" marL="0">
               <a:buNone/>
@@ -6057,7 +6057,7 @@
                 <a:ea typeface="Calibri" pitchFamily="34" charset="-122"/>
                 <a:cs typeface="Calibri" pitchFamily="34" charset="-120"/>
               </a:rPr>
-              <a:t>brightest</a:t>
+              <a:t>brightly</a:t>
             </a:r>
             <a:pPr algn="l" indent="0" marL="0">
               <a:buNone/>
@@ -6071,7 +6071,7 @@
                 <a:ea typeface="Calibri" pitchFamily="34" charset="-122"/>
                 <a:cs typeface="Calibri" pitchFamily="34" charset="-120"/>
               </a:rPr>
-              <a:t> star in the sky shone </a:t>
+              <a:t> across the whole room. That star is the </a:t>
             </a:r>
             <a:pPr algn="l" indent="0" marL="0">
               <a:buNone/>
@@ -6088,7 +6088,7 @@
                 <a:ea typeface="Calibri" pitchFamily="34" charset="-122"/>
                 <a:cs typeface="Calibri" pitchFamily="34" charset="-120"/>
               </a:rPr>
-              <a:t>brightly</a:t>
+              <a:t>brightest</a:t>
             </a:r>
             <a:pPr algn="l" indent="0" marL="0">
               <a:buNone/>
@@ -6102,7 +6102,7 @@
                 <a:ea typeface="Calibri" pitchFamily="34" charset="-122"/>
                 <a:cs typeface="Calibri" pitchFamily="34" charset="-120"/>
               </a:rPr>
-              <a:t> over the quiet town.</a:t>
+              <a:t> one in the whole sky tonight.</a:t>
             </a:r>
             <a:endParaRPr lang="en-US" sz="1800" dirty="0"/>
           </a:p>
@@ -6257,7 +6257,7 @@
                 <a:ea typeface="Trebuchet MS" pitchFamily="34" charset="-122"/>
                 <a:cs typeface="Trebuchet MS" pitchFamily="34" charset="-120"/>
               </a:rPr>
-              <a:t>brightest</a:t>
+              <a:t>brightly</a:t>
             </a:r>
             <a:endParaRPr lang="en-US" sz="1400" dirty="0"/>
           </a:p>
@@ -6385,7 +6385,7 @@
                 <a:ea typeface="Trebuchet MS" pitchFamily="34" charset="-122"/>
                 <a:cs typeface="Trebuchet MS" pitchFamily="34" charset="-120"/>
               </a:rPr>
-              <a:t>brightly</a:t>
+              <a:t>brightest</a:t>
             </a:r>
             <a:endParaRPr lang="en-US" sz="1400" dirty="0"/>
           </a:p>
@@ -6716,7 +6716,7 @@
                 <a:ea typeface="Calibri" pitchFamily="34" charset="-122"/>
                 <a:cs typeface="Calibri" pitchFamily="34" charset="-120"/>
               </a:rPr>
-              <a:t>Word Labs  •  wordlabs.app  •  Root: 'bright' = full of light, clever</a:t>
+              <a:t>Word Labs  •  wordlabs.app  •  Root: 'bright' = giving out a lot of light; clever</a:t>
             </a:r>
             <a:endParaRPr lang="en-US" sz="800" dirty="0"/>
           </a:p>
@@ -6855,7 +6855,7 @@
                 <a:ea typeface="Trebuchet MS" pitchFamily="34" charset="-122"/>
                 <a:cs typeface="Trebuchet MS" pitchFamily="34" charset="-120"/>
               </a:rPr>
-              <a:t>brightest</a:t>
+              <a:t>brightly</a:t>
             </a:r>
             <a:endParaRPr lang="en-US" sz="2800" dirty="0"/>
           </a:p>
@@ -7543,7 +7543,7 @@
                 <a:ea typeface="Calibri" pitchFamily="34" charset="-122"/>
                 <a:cs typeface="Calibri" pitchFamily="34" charset="-120"/>
               </a:rPr>
-              <a:t>Word Labs  •  wordlabs.app  •  Root: 'bright' = full of light, clever</a:t>
+              <a:t>Word Labs  •  wordlabs.app  •  Root: 'bright' = giving out a lot of light; clever</a:t>
             </a:r>
             <a:endParaRPr lang="en-US" sz="800" dirty="0"/>
           </a:p>
@@ -7682,7 +7682,7 @@
                 <a:ea typeface="Trebuchet MS" pitchFamily="34" charset="-122"/>
                 <a:cs typeface="Trebuchet MS" pitchFamily="34" charset="-120"/>
               </a:rPr>
-              <a:t>brightest</a:t>
+              <a:t>brightly</a:t>
             </a:r>
             <a:endParaRPr lang="en-US" sz="2800" dirty="0"/>
           </a:p>
@@ -7860,7 +7860,7 @@
                 <a:ea typeface="Calibri" pitchFamily="34" charset="-122"/>
                 <a:cs typeface="Calibri" pitchFamily="34" charset="-120"/>
               </a:rPr>
-              <a:t>full of light, clever</a:t>
+              <a:t>giving out a lot of light; clever</a:t>
             </a:r>
             <a:endParaRPr lang="en-US" sz="850" dirty="0"/>
           </a:p>
@@ -7933,7 +7933,7 @@
                 <a:ea typeface="Trebuchet MS" pitchFamily="34" charset="-122"/>
                 <a:cs typeface="Trebuchet MS" pitchFamily="34" charset="-120"/>
               </a:rPr>
-              <a:t>est</a:t>
+              <a:t>ly</a:t>
             </a:r>
             <a:endParaRPr lang="en-US" sz="1300" dirty="0"/>
           </a:p>
@@ -7972,7 +7972,7 @@
                 <a:ea typeface="Calibri" pitchFamily="34" charset="-122"/>
                 <a:cs typeface="Calibri" pitchFamily="34" charset="-120"/>
               </a:rPr>
-              <a:t>the most</a:t>
+              <a:t>in a way</a:t>
             </a:r>
             <a:endParaRPr lang="en-US" sz="850" dirty="0"/>
           </a:p>
@@ -8528,7 +8528,7 @@
                 <a:ea typeface="Calibri" pitchFamily="34" charset="-122"/>
                 <a:cs typeface="Calibri" pitchFamily="34" charset="-120"/>
               </a:rPr>
-              <a:t>Word Labs  •  wordlabs.app  •  Root: 'bright' = full of light, clever</a:t>
+              <a:t>Word Labs  •  wordlabs.app  •  Root: 'bright' = giving out a lot of light; clever</a:t>
             </a:r>
             <a:endParaRPr lang="en-US" sz="800" dirty="0"/>
           </a:p>
@@ -8667,7 +8667,7 @@
                 <a:ea typeface="Trebuchet MS" pitchFamily="34" charset="-122"/>
                 <a:cs typeface="Trebuchet MS" pitchFamily="34" charset="-120"/>
               </a:rPr>
-              <a:t>brightest</a:t>
+              <a:t>brightly</a:t>
             </a:r>
             <a:endParaRPr lang="en-US" sz="2800" dirty="0"/>
           </a:p>
@@ -8845,7 +8845,7 @@
                 <a:ea typeface="Calibri" pitchFamily="34" charset="-122"/>
                 <a:cs typeface="Calibri" pitchFamily="34" charset="-120"/>
               </a:rPr>
-              <a:t>full of light, clever</a:t>
+              <a:t>giving out a lot of light; clever</a:t>
             </a:r>
             <a:endParaRPr lang="en-US" sz="850" dirty="0"/>
           </a:p>
@@ -8918,7 +8918,7 @@
                 <a:ea typeface="Trebuchet MS" pitchFamily="34" charset="-122"/>
                 <a:cs typeface="Trebuchet MS" pitchFamily="34" charset="-120"/>
               </a:rPr>
-              <a:t>est</a:t>
+              <a:t>ly</a:t>
             </a:r>
             <a:endParaRPr lang="en-US" sz="1300" dirty="0"/>
           </a:p>
@@ -8957,7 +8957,7 @@
                 <a:ea typeface="Calibri" pitchFamily="34" charset="-122"/>
                 <a:cs typeface="Calibri" pitchFamily="34" charset="-120"/>
               </a:rPr>
-              <a:t>the most</a:t>
+              <a:t>in a way</a:t>
             </a:r>
             <a:endParaRPr lang="en-US" sz="850" dirty="0"/>
           </a:p>
@@ -9221,7 +9221,7 @@
                 <a:ea typeface="Trebuchet MS" pitchFamily="34" charset="-122"/>
                 <a:cs typeface="Trebuchet MS" pitchFamily="34" charset="-120"/>
               </a:rPr>
-              <a:t>est</a:t>
+              <a:t>ly</a:t>
             </a:r>
             <a:endParaRPr lang="en-US" sz="1400" dirty="0"/>
           </a:p>
@@ -9645,7 +9645,7 @@
                 <a:ea typeface="Calibri" pitchFamily="34" charset="-122"/>
                 <a:cs typeface="Calibri" pitchFamily="34" charset="-120"/>
               </a:rPr>
-              <a:t>Word Labs  •  wordlabs.app  •  Root: 'bright' = full of light, clever</a:t>
+              <a:t>Word Labs  •  wordlabs.app  •  Root: 'bright' = giving out a lot of light; clever</a:t>
             </a:r>
             <a:endParaRPr lang="en-US" sz="800" dirty="0"/>
           </a:p>
@@ -9784,7 +9784,7 @@
                 <a:ea typeface="Trebuchet MS" pitchFamily="34" charset="-122"/>
                 <a:cs typeface="Trebuchet MS" pitchFamily="34" charset="-120"/>
               </a:rPr>
-              <a:t>brightest</a:t>
+              <a:t>brightly</a:t>
             </a:r>
             <a:endParaRPr lang="en-US" sz="2800" dirty="0"/>
           </a:p>
@@ -9962,7 +9962,7 @@
                 <a:ea typeface="Calibri" pitchFamily="34" charset="-122"/>
                 <a:cs typeface="Calibri" pitchFamily="34" charset="-120"/>
               </a:rPr>
-              <a:t>full of light, clever</a:t>
+              <a:t>giving out a lot of light; clever</a:t>
             </a:r>
             <a:endParaRPr lang="en-US" sz="850" dirty="0"/>
           </a:p>
@@ -10035,7 +10035,7 @@
                 <a:ea typeface="Trebuchet MS" pitchFamily="34" charset="-122"/>
                 <a:cs typeface="Trebuchet MS" pitchFamily="34" charset="-120"/>
               </a:rPr>
-              <a:t>est</a:t>
+              <a:t>ly</a:t>
             </a:r>
             <a:endParaRPr lang="en-US" sz="1300" dirty="0"/>
           </a:p>
@@ -10074,7 +10074,7 @@
                 <a:ea typeface="Calibri" pitchFamily="34" charset="-122"/>
                 <a:cs typeface="Calibri" pitchFamily="34" charset="-120"/>
               </a:rPr>
-              <a:t>the most</a:t>
+              <a:t>in a way</a:t>
             </a:r>
             <a:endParaRPr lang="en-US" sz="850" dirty="0"/>
           </a:p>
@@ -10338,7 +10338,7 @@
                 <a:ea typeface="Trebuchet MS" pitchFamily="34" charset="-122"/>
                 <a:cs typeface="Trebuchet MS" pitchFamily="34" charset="-120"/>
               </a:rPr>
-              <a:t>est</a:t>
+              <a:t>ly</a:t>
             </a:r>
             <a:endParaRPr lang="en-US" sz="1400" dirty="0"/>
           </a:p>
@@ -10419,11 +10419,11 @@
         <p:spPr>
           <a:xfrm>
             <a:off x="1874520" y="4096512"/>
-            <a:ext cx="6903720" cy="804672"/>
+            <a:ext cx="6903720" cy="658368"/>
           </a:xfrm>
           <a:prstGeom prst="rect">
             <a:avLst>
-              <a:gd name="adj" fmla="val 6818"/>
+              <a:gd name="adj" fmla="val 8333"/>
             </a:avLst>
           </a:prstGeom>
           <a:solidFill>
@@ -10445,12 +10445,12 @@
         </p:nvSpPr>
         <p:spPr>
           <a:xfrm>
-            <a:off x="2124837" y="4169664"/>
-            <a:ext cx="685800" cy="384048"/>
+            <a:off x="2254649" y="4169664"/>
+            <a:ext cx="685800" cy="475488"/>
           </a:xfrm>
           <a:prstGeom prst="rect">
             <a:avLst>
-              <a:gd name="adj" fmla="val 9524"/>
+              <a:gd name="adj" fmla="val 7692"/>
             </a:avLst>
           </a:prstGeom>
           <a:solidFill>
@@ -10472,8 +10472,8 @@
         </p:nvSpPr>
         <p:spPr>
           <a:xfrm>
-            <a:off x="2124837" y="4169664"/>
-            <a:ext cx="685800" cy="384048"/>
+            <a:off x="2254649" y="4169664"/>
+            <a:ext cx="685800" cy="475488"/>
           </a:xfrm>
           <a:prstGeom prst="rect">
             <a:avLst/>
@@ -10511,12 +10511,12 @@
         </p:nvSpPr>
         <p:spPr>
           <a:xfrm>
-            <a:off x="3033522" y="4169664"/>
-            <a:ext cx="685800" cy="384048"/>
+            <a:off x="3293146" y="4169664"/>
+            <a:ext cx="685800" cy="475488"/>
           </a:xfrm>
           <a:prstGeom prst="rect">
             <a:avLst>
-              <a:gd name="adj" fmla="val 9524"/>
+              <a:gd name="adj" fmla="val 7692"/>
             </a:avLst>
           </a:prstGeom>
           <a:solidFill>
@@ -10538,8 +10538,8 @@
         </p:nvSpPr>
         <p:spPr>
           <a:xfrm>
-            <a:off x="3033522" y="4169664"/>
-            <a:ext cx="685800" cy="384048"/>
+            <a:off x="3293146" y="4169664"/>
+            <a:ext cx="685800" cy="475488"/>
           </a:xfrm>
           <a:prstGeom prst="rect">
             <a:avLst/>
@@ -10577,12 +10577,12 @@
         </p:nvSpPr>
         <p:spPr>
           <a:xfrm>
-            <a:off x="3942207" y="4169664"/>
-            <a:ext cx="685800" cy="384048"/>
+            <a:off x="4331643" y="4169664"/>
+            <a:ext cx="685800" cy="475488"/>
           </a:xfrm>
           <a:prstGeom prst="rect">
             <a:avLst>
-              <a:gd name="adj" fmla="val 9524"/>
+              <a:gd name="adj" fmla="val 7692"/>
             </a:avLst>
           </a:prstGeom>
           <a:solidFill>
@@ -10604,8 +10604,8 @@
         </p:nvSpPr>
         <p:spPr>
           <a:xfrm>
-            <a:off x="3942207" y="4169664"/>
-            <a:ext cx="685800" cy="384048"/>
+            <a:off x="4331643" y="4169664"/>
+            <a:ext cx="685800" cy="475488"/>
           </a:xfrm>
           <a:prstGeom prst="rect">
             <a:avLst/>
@@ -10637,57 +10637,18 @@
       </p:sp>
       <p:sp>
         <p:nvSpPr>
-          <p:cNvPr id="39" name="Text 37"/>
-          <p:cNvSpPr/>
-          <p:nvPr/>
-        </p:nvSpPr>
-        <p:spPr>
-          <a:xfrm>
-            <a:off x="3942207" y="4572000"/>
-            <a:ext cx="685800" cy="219456"/>
-          </a:xfrm>
-          <a:prstGeom prst="rect">
-            <a:avLst/>
-          </a:prstGeom>
-          <a:noFill/>
-          <a:ln/>
-        </p:spPr>
-        <p:txBody>
-          <a:bodyPr wrap="square" lIns="0" tIns="0" rIns="0" bIns="0" rtlCol="0" anchor="t"/>
-          <a:lstStyle/>
-          <a:p>
-            <a:pPr algn="ctr" indent="0" marL="0">
-              <a:buNone/>
-            </a:pPr>
-            <a:r>
-              <a:rPr lang="en-US" sz="750" i="1" dirty="0">
-                <a:solidFill>
-                  <a:srgbClr val="94A3B8"/>
-                </a:solidFill>
-                <a:latin typeface="Calibri" pitchFamily="34" charset="0"/>
-                <a:ea typeface="Calibri" pitchFamily="34" charset="-122"/>
-                <a:cs typeface="Calibri" pitchFamily="34" charset="-120"/>
-              </a:rPr>
-              <a:t>/ie/</a:t>
-            </a:r>
-            <a:endParaRPr lang="en-US" sz="750" dirty="0"/>
-          </a:p>
-        </p:txBody>
-      </p:sp>
-      <p:sp>
-        <p:nvSpPr>
-          <p:cNvPr id="40" name="Shape 38"/>
-          <p:cNvSpPr/>
-          <p:nvPr/>
-        </p:nvSpPr>
-        <p:spPr>
-          <a:xfrm>
-            <a:off x="4850892" y="4169664"/>
-            <a:ext cx="685800" cy="384048"/>
+          <p:cNvPr id="39" name="Shape 37"/>
+          <p:cNvSpPr/>
+          <p:nvPr/>
+        </p:nvSpPr>
+        <p:spPr>
+          <a:xfrm>
+            <a:off x="5370141" y="4169664"/>
+            <a:ext cx="685800" cy="475488"/>
           </a:xfrm>
           <a:prstGeom prst="rect">
             <a:avLst>
-              <a:gd name="adj" fmla="val 9524"/>
+              <a:gd name="adj" fmla="val 7692"/>
             </a:avLst>
           </a:prstGeom>
           <a:solidFill>
@@ -10703,14 +10664,14 @@
       </p:sp>
       <p:sp>
         <p:nvSpPr>
-          <p:cNvPr id="41" name="Text 39"/>
-          <p:cNvSpPr/>
-          <p:nvPr/>
-        </p:nvSpPr>
-        <p:spPr>
-          <a:xfrm>
-            <a:off x="4850892" y="4169664"/>
-            <a:ext cx="685800" cy="384048"/>
+          <p:cNvPr id="40" name="Text 38"/>
+          <p:cNvSpPr/>
+          <p:nvPr/>
+        </p:nvSpPr>
+        <p:spPr>
+          <a:xfrm>
+            <a:off x="5370141" y="4169664"/>
+            <a:ext cx="685800" cy="475488"/>
           </a:xfrm>
           <a:prstGeom prst="rect">
             <a:avLst/>
@@ -10742,18 +10703,18 @@
       </p:sp>
       <p:sp>
         <p:nvSpPr>
-          <p:cNvPr id="42" name="Shape 40"/>
-          <p:cNvSpPr/>
-          <p:nvPr/>
-        </p:nvSpPr>
-        <p:spPr>
-          <a:xfrm>
-            <a:off x="5759577" y="4169664"/>
-            <a:ext cx="685800" cy="384048"/>
+          <p:cNvPr id="41" name="Shape 39"/>
+          <p:cNvSpPr/>
+          <p:nvPr/>
+        </p:nvSpPr>
+        <p:spPr>
+          <a:xfrm>
+            <a:off x="6408638" y="4169664"/>
+            <a:ext cx="685800" cy="475488"/>
           </a:xfrm>
           <a:prstGeom prst="rect">
             <a:avLst>
-              <a:gd name="adj" fmla="val 9524"/>
+              <a:gd name="adj" fmla="val 7692"/>
             </a:avLst>
           </a:prstGeom>
           <a:solidFill>
@@ -10769,14 +10730,14 @@
       </p:sp>
       <p:sp>
         <p:nvSpPr>
-          <p:cNvPr id="43" name="Text 41"/>
-          <p:cNvSpPr/>
-          <p:nvPr/>
-        </p:nvSpPr>
-        <p:spPr>
-          <a:xfrm>
-            <a:off x="5759577" y="4169664"/>
-            <a:ext cx="685800" cy="384048"/>
+          <p:cNvPr id="42" name="Text 40"/>
+          <p:cNvSpPr/>
+          <p:nvPr/>
+        </p:nvSpPr>
+        <p:spPr>
+          <a:xfrm>
+            <a:off x="6408638" y="4169664"/>
+            <a:ext cx="685800" cy="475488"/>
           </a:xfrm>
           <a:prstGeom prst="rect">
             <a:avLst/>
@@ -10800,7 +10761,7 @@
                 <a:ea typeface="Trebuchet MS" pitchFamily="34" charset="-122"/>
                 <a:cs typeface="Trebuchet MS" pitchFamily="34" charset="-120"/>
               </a:rPr>
-              <a:t>e</a:t>
+              <a:t>l</a:t>
             </a:r>
             <a:endParaRPr lang="en-US" sz="900" dirty="0"/>
           </a:p>
@@ -10808,18 +10769,18 @@
       </p:sp>
       <p:sp>
         <p:nvSpPr>
-          <p:cNvPr id="44" name="Shape 42"/>
-          <p:cNvSpPr/>
-          <p:nvPr/>
-        </p:nvSpPr>
-        <p:spPr>
-          <a:xfrm>
-            <a:off x="6668262" y="4169664"/>
-            <a:ext cx="685800" cy="384048"/>
+          <p:cNvPr id="43" name="Shape 41"/>
+          <p:cNvSpPr/>
+          <p:nvPr/>
+        </p:nvSpPr>
+        <p:spPr>
+          <a:xfrm>
+            <a:off x="7447135" y="4169664"/>
+            <a:ext cx="685800" cy="475488"/>
           </a:xfrm>
           <a:prstGeom prst="rect">
             <a:avLst>
-              <a:gd name="adj" fmla="val 9524"/>
+              <a:gd name="adj" fmla="val 7692"/>
             </a:avLst>
           </a:prstGeom>
           <a:solidFill>
@@ -10835,14 +10796,14 @@
       </p:sp>
       <p:sp>
         <p:nvSpPr>
-          <p:cNvPr id="45" name="Text 43"/>
-          <p:cNvSpPr/>
-          <p:nvPr/>
-        </p:nvSpPr>
-        <p:spPr>
-          <a:xfrm>
-            <a:off x="6668262" y="4169664"/>
-            <a:ext cx="685800" cy="384048"/>
+          <p:cNvPr id="44" name="Text 42"/>
+          <p:cNvSpPr/>
+          <p:nvPr/>
+        </p:nvSpPr>
+        <p:spPr>
+          <a:xfrm>
+            <a:off x="7447135" y="4169664"/>
+            <a:ext cx="685800" cy="475488"/>
           </a:xfrm>
           <a:prstGeom prst="rect">
             <a:avLst/>
@@ -10866,73 +10827,7 @@
                 <a:ea typeface="Trebuchet MS" pitchFamily="34" charset="-122"/>
                 <a:cs typeface="Trebuchet MS" pitchFamily="34" charset="-120"/>
               </a:rPr>
-              <a:t>s</a:t>
-            </a:r>
-            <a:endParaRPr lang="en-US" sz="900" dirty="0"/>
-          </a:p>
-        </p:txBody>
-      </p:sp>
-      <p:sp>
-        <p:nvSpPr>
-          <p:cNvPr id="46" name="Shape 44"/>
-          <p:cNvSpPr/>
-          <p:nvPr/>
-        </p:nvSpPr>
-        <p:spPr>
-          <a:xfrm>
-            <a:off x="7576947" y="4169664"/>
-            <a:ext cx="685800" cy="384048"/>
-          </a:xfrm>
-          <a:prstGeom prst="rect">
-            <a:avLst>
-              <a:gd name="adj" fmla="val 9524"/>
-            </a:avLst>
-          </a:prstGeom>
-          <a:solidFill>
-            <a:srgbClr val="FFFFFF"/>
-          </a:solidFill>
-          <a:ln w="12700">
-            <a:solidFill>
-              <a:srgbClr val="DB2777"/>
-            </a:solidFill>
-            <a:prstDash val="solid"/>
-          </a:ln>
-        </p:spPr>
-      </p:sp>
-      <p:sp>
-        <p:nvSpPr>
-          <p:cNvPr id="47" name="Text 45"/>
-          <p:cNvSpPr/>
-          <p:nvPr/>
-        </p:nvSpPr>
-        <p:spPr>
-          <a:xfrm>
-            <a:off x="7576947" y="4169664"/>
-            <a:ext cx="685800" cy="384048"/>
-          </a:xfrm>
-          <a:prstGeom prst="rect">
-            <a:avLst/>
-          </a:prstGeom>
-          <a:noFill/>
-          <a:ln/>
-        </p:spPr>
-        <p:txBody>
-          <a:bodyPr wrap="square" lIns="0" tIns="0" rIns="0" bIns="0" rtlCol="0" anchor="ctr"/>
-          <a:lstStyle/>
-          <a:p>
-            <a:pPr algn="ctr" indent="0" marL="0">
-              <a:buNone/>
-            </a:pPr>
-            <a:r>
-              <a:rPr lang="en-US" sz="900" b="1" dirty="0">
-                <a:solidFill>
-                  <a:srgbClr val="9D174D"/>
-                </a:solidFill>
-                <a:latin typeface="Trebuchet MS" pitchFamily="34" charset="0"/>
-                <a:ea typeface="Trebuchet MS" pitchFamily="34" charset="-122"/>
-                <a:cs typeface="Trebuchet MS" pitchFamily="34" charset="-120"/>
-              </a:rPr>
-              <a:t>t</a:t>
+              <a:t>y</a:t>
             </a:r>
             <a:endParaRPr lang="en-US" sz="900" dirty="0"/>
           </a:p>
@@ -11224,7 +11119,7 @@
                 <a:ea typeface="Calibri" pitchFamily="34" charset="-122"/>
                 <a:cs typeface="Calibri" pitchFamily="34" charset="-120"/>
               </a:rPr>
-              <a:t>Word Labs  •  wordlabs.app  •  Root: 'bright' = full of light, clever</a:t>
+              <a:t>Word Labs  •  wordlabs.app  •  Root: 'bright' = giving out a lot of light; clever</a:t>
             </a:r>
             <a:endParaRPr lang="en-US" sz="800" dirty="0"/>
           </a:p>
@@ -11363,7 +11258,7 @@
                 <a:ea typeface="Trebuchet MS" pitchFamily="34" charset="-122"/>
                 <a:cs typeface="Trebuchet MS" pitchFamily="34" charset="-120"/>
               </a:rPr>
-              <a:t>brightly</a:t>
+              <a:t>brightest</a:t>
             </a:r>
             <a:endParaRPr lang="en-US" sz="2800" dirty="0"/>
           </a:p>
@@ -12051,7 +11946,7 @@
                 <a:ea typeface="Calibri" pitchFamily="34" charset="-122"/>
                 <a:cs typeface="Calibri" pitchFamily="34" charset="-120"/>
               </a:rPr>
-              <a:t>Word Labs  •  wordlabs.app  •  Root: 'bright' = full of light, clever</a:t>
+              <a:t>Word Labs  •  wordlabs.app  •  Root: 'bright' = giving out a lot of light; clever</a:t>
             </a:r>
             <a:endParaRPr lang="en-US" sz="800" dirty="0"/>
           </a:p>
@@ -12190,7 +12085,7 @@
                 <a:ea typeface="Trebuchet MS" pitchFamily="34" charset="-122"/>
                 <a:cs typeface="Trebuchet MS" pitchFamily="34" charset="-120"/>
               </a:rPr>
-              <a:t>brightly</a:t>
+              <a:t>brightest</a:t>
             </a:r>
             <a:endParaRPr lang="en-US" sz="2800" dirty="0"/>
           </a:p>
@@ -12368,7 +12263,7 @@
                 <a:ea typeface="Calibri" pitchFamily="34" charset="-122"/>
                 <a:cs typeface="Calibri" pitchFamily="34" charset="-120"/>
               </a:rPr>
-              <a:t>full of light, clever</a:t>
+              <a:t>giving out a lot of light; clever</a:t>
             </a:r>
             <a:endParaRPr lang="en-US" sz="850" dirty="0"/>
           </a:p>
@@ -12441,7 +12336,7 @@
                 <a:ea typeface="Trebuchet MS" pitchFamily="34" charset="-122"/>
                 <a:cs typeface="Trebuchet MS" pitchFamily="34" charset="-120"/>
               </a:rPr>
-              <a:t>ly</a:t>
+              <a:t>est</a:t>
             </a:r>
             <a:endParaRPr lang="en-US" sz="1300" dirty="0"/>
           </a:p>
@@ -12480,7 +12375,7 @@
                 <a:ea typeface="Calibri" pitchFamily="34" charset="-122"/>
                 <a:cs typeface="Calibri" pitchFamily="34" charset="-120"/>
               </a:rPr>
-              <a:t>in a way that is</a:t>
+              <a:t>most</a:t>
             </a:r>
             <a:endParaRPr lang="en-US" sz="850" dirty="0"/>
           </a:p>
@@ -13036,7 +12931,7 @@
                 <a:ea typeface="Calibri" pitchFamily="34" charset="-122"/>
                 <a:cs typeface="Calibri" pitchFamily="34" charset="-120"/>
               </a:rPr>
-              <a:t>Word Labs  •  wordlabs.app  •  Root: 'bright' = full of light, clever</a:t>
+              <a:t>Word Labs  •  wordlabs.app  •  Root: 'bright' = giving out a lot of light; clever</a:t>
             </a:r>
             <a:endParaRPr lang="en-US" sz="800" dirty="0"/>
           </a:p>
@@ -13175,7 +13070,7 @@
                 <a:ea typeface="Trebuchet MS" pitchFamily="34" charset="-122"/>
                 <a:cs typeface="Trebuchet MS" pitchFamily="34" charset="-120"/>
               </a:rPr>
-              <a:t>brightly</a:t>
+              <a:t>brightest</a:t>
             </a:r>
             <a:endParaRPr lang="en-US" sz="2800" dirty="0"/>
           </a:p>
@@ -13353,7 +13248,7 @@
                 <a:ea typeface="Calibri" pitchFamily="34" charset="-122"/>
                 <a:cs typeface="Calibri" pitchFamily="34" charset="-120"/>
               </a:rPr>
-              <a:t>full of light, clever</a:t>
+              <a:t>giving out a lot of light; clever</a:t>
             </a:r>
             <a:endParaRPr lang="en-US" sz="850" dirty="0"/>
           </a:p>
@@ -13426,7 +13321,7 @@
                 <a:ea typeface="Trebuchet MS" pitchFamily="34" charset="-122"/>
                 <a:cs typeface="Trebuchet MS" pitchFamily="34" charset="-120"/>
               </a:rPr>
-              <a:t>ly</a:t>
+              <a:t>est</a:t>
             </a:r>
             <a:endParaRPr lang="en-US" sz="1300" dirty="0"/>
           </a:p>
@@ -13465,7 +13360,7 @@
                 <a:ea typeface="Calibri" pitchFamily="34" charset="-122"/>
                 <a:cs typeface="Calibri" pitchFamily="34" charset="-120"/>
               </a:rPr>
-              <a:t>in a way that is</a:t>
+              <a:t>most</a:t>
             </a:r>
             <a:endParaRPr lang="en-US" sz="850" dirty="0"/>
           </a:p>
@@ -13729,7 +13624,7 @@
                 <a:ea typeface="Trebuchet MS" pitchFamily="34" charset="-122"/>
                 <a:cs typeface="Trebuchet MS" pitchFamily="34" charset="-120"/>
               </a:rPr>
-              <a:t>ly</a:t>
+              <a:t>est</a:t>
             </a:r>
             <a:endParaRPr lang="en-US" sz="1400" dirty="0"/>
           </a:p>
@@ -14062,7 +13957,7 @@
                 <a:ea typeface="Calibri" pitchFamily="34" charset="-122"/>
                 <a:cs typeface="Calibri" pitchFamily="34" charset="-120"/>
               </a:rPr>
-              <a:t>Root 'bright' — full of light, clever</a:t>
+              <a:t>Root 'bright' — giving out a lot of light; clever</a:t>
             </a:r>
             <a:endParaRPr lang="en-US" sz="1600" dirty="0"/>
           </a:p>
@@ -14418,7 +14313,7 @@
                 <a:ea typeface="Calibri" pitchFamily="34" charset="-122"/>
                 <a:cs typeface="Calibri" pitchFamily="34" charset="-120"/>
               </a:rPr>
-              <a:t>Word Labs  •  wordlabs.app  •  Root: 'bright' = full of light, clever</a:t>
+              <a:t>Word Labs  •  wordlabs.app  •  Root: 'bright' = giving out a lot of light; clever</a:t>
             </a:r>
             <a:endParaRPr lang="en-US" sz="800" dirty="0"/>
           </a:p>
@@ -14557,7 +14452,7 @@
                 <a:ea typeface="Trebuchet MS" pitchFamily="34" charset="-122"/>
                 <a:cs typeface="Trebuchet MS" pitchFamily="34" charset="-120"/>
               </a:rPr>
-              <a:t>brightly</a:t>
+              <a:t>brightest</a:t>
             </a:r>
             <a:endParaRPr lang="en-US" sz="2800" dirty="0"/>
           </a:p>
@@ -14735,7 +14630,7 @@
                 <a:ea typeface="Calibri" pitchFamily="34" charset="-122"/>
                 <a:cs typeface="Calibri" pitchFamily="34" charset="-120"/>
               </a:rPr>
-              <a:t>full of light, clever</a:t>
+              <a:t>giving out a lot of light; clever</a:t>
             </a:r>
             <a:endParaRPr lang="en-US" sz="850" dirty="0"/>
           </a:p>
@@ -14808,7 +14703,7 @@
                 <a:ea typeface="Trebuchet MS" pitchFamily="34" charset="-122"/>
                 <a:cs typeface="Trebuchet MS" pitchFamily="34" charset="-120"/>
               </a:rPr>
-              <a:t>ly</a:t>
+              <a:t>est</a:t>
             </a:r>
             <a:endParaRPr lang="en-US" sz="1300" dirty="0"/>
           </a:p>
@@ -14847,7 +14742,7 @@
                 <a:ea typeface="Calibri" pitchFamily="34" charset="-122"/>
                 <a:cs typeface="Calibri" pitchFamily="34" charset="-120"/>
               </a:rPr>
-              <a:t>in a way that is</a:t>
+              <a:t>most</a:t>
             </a:r>
             <a:endParaRPr lang="en-US" sz="850" dirty="0"/>
           </a:p>
@@ -15111,7 +15006,7 @@
                 <a:ea typeface="Trebuchet MS" pitchFamily="34" charset="-122"/>
                 <a:cs typeface="Trebuchet MS" pitchFamily="34" charset="-120"/>
               </a:rPr>
-              <a:t>ly</a:t>
+              <a:t>est</a:t>
             </a:r>
             <a:endParaRPr lang="en-US" sz="1400" dirty="0"/>
           </a:p>
@@ -15192,11 +15087,11 @@
         <p:spPr>
           <a:xfrm>
             <a:off x="1874520" y="4096512"/>
-            <a:ext cx="6903720" cy="804672"/>
+            <a:ext cx="6903720" cy="658368"/>
           </a:xfrm>
           <a:prstGeom prst="rect">
             <a:avLst>
-              <a:gd name="adj" fmla="val 6818"/>
+              <a:gd name="adj" fmla="val 8333"/>
             </a:avLst>
           </a:prstGeom>
           <a:solidFill>
@@ -15218,12 +15113,12 @@
         </p:nvSpPr>
         <p:spPr>
           <a:xfrm>
-            <a:off x="2254649" y="4169664"/>
-            <a:ext cx="685800" cy="384048"/>
+            <a:off x="2124837" y="4169664"/>
+            <a:ext cx="685800" cy="475488"/>
           </a:xfrm>
           <a:prstGeom prst="rect">
             <a:avLst>
-              <a:gd name="adj" fmla="val 9524"/>
+              <a:gd name="adj" fmla="val 7692"/>
             </a:avLst>
           </a:prstGeom>
           <a:solidFill>
@@ -15245,8 +15140,8 @@
         </p:nvSpPr>
         <p:spPr>
           <a:xfrm>
-            <a:off x="2254649" y="4169664"/>
-            <a:ext cx="685800" cy="384048"/>
+            <a:off x="2124837" y="4169664"/>
+            <a:ext cx="685800" cy="475488"/>
           </a:xfrm>
           <a:prstGeom prst="rect">
             <a:avLst/>
@@ -15284,12 +15179,12 @@
         </p:nvSpPr>
         <p:spPr>
           <a:xfrm>
-            <a:off x="3293146" y="4169664"/>
-            <a:ext cx="685800" cy="384048"/>
+            <a:off x="3033522" y="4169664"/>
+            <a:ext cx="685800" cy="475488"/>
           </a:xfrm>
           <a:prstGeom prst="rect">
             <a:avLst>
-              <a:gd name="adj" fmla="val 9524"/>
+              <a:gd name="adj" fmla="val 7692"/>
             </a:avLst>
           </a:prstGeom>
           <a:solidFill>
@@ -15311,8 +15206,8 @@
         </p:nvSpPr>
         <p:spPr>
           <a:xfrm>
-            <a:off x="3293146" y="4169664"/>
-            <a:ext cx="685800" cy="384048"/>
+            <a:off x="3033522" y="4169664"/>
+            <a:ext cx="685800" cy="475488"/>
           </a:xfrm>
           <a:prstGeom prst="rect">
             <a:avLst/>
@@ -15350,12 +15245,12 @@
         </p:nvSpPr>
         <p:spPr>
           <a:xfrm>
-            <a:off x="4331643" y="4169664"/>
-            <a:ext cx="685800" cy="384048"/>
+            <a:off x="3942207" y="4169664"/>
+            <a:ext cx="685800" cy="475488"/>
           </a:xfrm>
           <a:prstGeom prst="rect">
             <a:avLst>
-              <a:gd name="adj" fmla="val 9524"/>
+              <a:gd name="adj" fmla="val 7692"/>
             </a:avLst>
           </a:prstGeom>
           <a:solidFill>
@@ -15377,8 +15272,8 @@
         </p:nvSpPr>
         <p:spPr>
           <a:xfrm>
-            <a:off x="4331643" y="4169664"/>
-            <a:ext cx="685800" cy="384048"/>
+            <a:off x="3942207" y="4169664"/>
+            <a:ext cx="685800" cy="475488"/>
           </a:xfrm>
           <a:prstGeom prst="rect">
             <a:avLst/>
@@ -15410,57 +15305,18 @@
       </p:sp>
       <p:sp>
         <p:nvSpPr>
-          <p:cNvPr id="39" name="Text 37"/>
-          <p:cNvSpPr/>
-          <p:nvPr/>
-        </p:nvSpPr>
-        <p:spPr>
-          <a:xfrm>
-            <a:off x="4331643" y="4572000"/>
-            <a:ext cx="685800" cy="219456"/>
-          </a:xfrm>
-          <a:prstGeom prst="rect">
-            <a:avLst/>
-          </a:prstGeom>
-          <a:noFill/>
-          <a:ln/>
-        </p:spPr>
-        <p:txBody>
-          <a:bodyPr wrap="square" lIns="0" tIns="0" rIns="0" bIns="0" rtlCol="0" anchor="t"/>
-          <a:lstStyle/>
-          <a:p>
-            <a:pPr algn="ctr" indent="0" marL="0">
-              <a:buNone/>
-            </a:pPr>
-            <a:r>
-              <a:rPr lang="en-US" sz="750" i="1" dirty="0">
-                <a:solidFill>
-                  <a:srgbClr val="94A3B8"/>
-                </a:solidFill>
-                <a:latin typeface="Calibri" pitchFamily="34" charset="0"/>
-                <a:ea typeface="Calibri" pitchFamily="34" charset="-122"/>
-                <a:cs typeface="Calibri" pitchFamily="34" charset="-120"/>
-              </a:rPr>
-              <a:t>/ie/</a:t>
-            </a:r>
-            <a:endParaRPr lang="en-US" sz="750" dirty="0"/>
-          </a:p>
-        </p:txBody>
-      </p:sp>
-      <p:sp>
-        <p:nvSpPr>
-          <p:cNvPr id="40" name="Shape 38"/>
-          <p:cNvSpPr/>
-          <p:nvPr/>
-        </p:nvSpPr>
-        <p:spPr>
-          <a:xfrm>
-            <a:off x="5370141" y="4169664"/>
-            <a:ext cx="685800" cy="384048"/>
+          <p:cNvPr id="39" name="Shape 37"/>
+          <p:cNvSpPr/>
+          <p:nvPr/>
+        </p:nvSpPr>
+        <p:spPr>
+          <a:xfrm>
+            <a:off x="4850892" y="4169664"/>
+            <a:ext cx="685800" cy="475488"/>
           </a:xfrm>
           <a:prstGeom prst="rect">
             <a:avLst>
-              <a:gd name="adj" fmla="val 9524"/>
+              <a:gd name="adj" fmla="val 7692"/>
             </a:avLst>
           </a:prstGeom>
           <a:solidFill>
@@ -15476,14 +15332,14 @@
       </p:sp>
       <p:sp>
         <p:nvSpPr>
-          <p:cNvPr id="41" name="Text 39"/>
-          <p:cNvSpPr/>
-          <p:nvPr/>
-        </p:nvSpPr>
-        <p:spPr>
-          <a:xfrm>
-            <a:off x="5370141" y="4169664"/>
-            <a:ext cx="685800" cy="384048"/>
+          <p:cNvPr id="40" name="Text 38"/>
+          <p:cNvSpPr/>
+          <p:nvPr/>
+        </p:nvSpPr>
+        <p:spPr>
+          <a:xfrm>
+            <a:off x="4850892" y="4169664"/>
+            <a:ext cx="685800" cy="475488"/>
           </a:xfrm>
           <a:prstGeom prst="rect">
             <a:avLst/>
@@ -15515,18 +15371,18 @@
       </p:sp>
       <p:sp>
         <p:nvSpPr>
-          <p:cNvPr id="42" name="Shape 40"/>
-          <p:cNvSpPr/>
-          <p:nvPr/>
-        </p:nvSpPr>
-        <p:spPr>
-          <a:xfrm>
-            <a:off x="6408638" y="4169664"/>
-            <a:ext cx="685800" cy="384048"/>
+          <p:cNvPr id="41" name="Shape 39"/>
+          <p:cNvSpPr/>
+          <p:nvPr/>
+        </p:nvSpPr>
+        <p:spPr>
+          <a:xfrm>
+            <a:off x="5759577" y="4169664"/>
+            <a:ext cx="685800" cy="475488"/>
           </a:xfrm>
           <a:prstGeom prst="rect">
             <a:avLst>
-              <a:gd name="adj" fmla="val 9524"/>
+              <a:gd name="adj" fmla="val 7692"/>
             </a:avLst>
           </a:prstGeom>
           <a:solidFill>
@@ -15542,14 +15398,14 @@
       </p:sp>
       <p:sp>
         <p:nvSpPr>
-          <p:cNvPr id="43" name="Text 41"/>
-          <p:cNvSpPr/>
-          <p:nvPr/>
-        </p:nvSpPr>
-        <p:spPr>
-          <a:xfrm>
-            <a:off x="6408638" y="4169664"/>
-            <a:ext cx="685800" cy="384048"/>
+          <p:cNvPr id="42" name="Text 40"/>
+          <p:cNvSpPr/>
+          <p:nvPr/>
+        </p:nvSpPr>
+        <p:spPr>
+          <a:xfrm>
+            <a:off x="5759577" y="4169664"/>
+            <a:ext cx="685800" cy="475488"/>
           </a:xfrm>
           <a:prstGeom prst="rect">
             <a:avLst/>
@@ -15573,7 +15429,7 @@
                 <a:ea typeface="Trebuchet MS" pitchFamily="34" charset="-122"/>
                 <a:cs typeface="Trebuchet MS" pitchFamily="34" charset="-120"/>
               </a:rPr>
-              <a:t>l</a:t>
+              <a:t>e</a:t>
             </a:r>
             <a:endParaRPr lang="en-US" sz="900" dirty="0"/>
           </a:p>
@@ -15581,18 +15437,18 @@
       </p:sp>
       <p:sp>
         <p:nvSpPr>
-          <p:cNvPr id="44" name="Shape 42"/>
-          <p:cNvSpPr/>
-          <p:nvPr/>
-        </p:nvSpPr>
-        <p:spPr>
-          <a:xfrm>
-            <a:off x="7447135" y="4169664"/>
-            <a:ext cx="685800" cy="384048"/>
+          <p:cNvPr id="43" name="Shape 41"/>
+          <p:cNvSpPr/>
+          <p:nvPr/>
+        </p:nvSpPr>
+        <p:spPr>
+          <a:xfrm>
+            <a:off x="6668262" y="4169664"/>
+            <a:ext cx="685800" cy="475488"/>
           </a:xfrm>
           <a:prstGeom prst="rect">
             <a:avLst>
-              <a:gd name="adj" fmla="val 9524"/>
+              <a:gd name="adj" fmla="val 7692"/>
             </a:avLst>
           </a:prstGeom>
           <a:solidFill>
@@ -15608,14 +15464,14 @@
       </p:sp>
       <p:sp>
         <p:nvSpPr>
-          <p:cNvPr id="45" name="Text 43"/>
-          <p:cNvSpPr/>
-          <p:nvPr/>
-        </p:nvSpPr>
-        <p:spPr>
-          <a:xfrm>
-            <a:off x="7447135" y="4169664"/>
-            <a:ext cx="685800" cy="384048"/>
+          <p:cNvPr id="44" name="Text 42"/>
+          <p:cNvSpPr/>
+          <p:nvPr/>
+        </p:nvSpPr>
+        <p:spPr>
+          <a:xfrm>
+            <a:off x="6668262" y="4169664"/>
+            <a:ext cx="685800" cy="475488"/>
           </a:xfrm>
           <a:prstGeom prst="rect">
             <a:avLst/>
@@ -15639,7 +15495,73 @@
                 <a:ea typeface="Trebuchet MS" pitchFamily="34" charset="-122"/>
                 <a:cs typeface="Trebuchet MS" pitchFamily="34" charset="-120"/>
               </a:rPr>
-              <a:t>y</a:t>
+              <a:t>s</a:t>
+            </a:r>
+            <a:endParaRPr lang="en-US" sz="900" dirty="0"/>
+          </a:p>
+        </p:txBody>
+      </p:sp>
+      <p:sp>
+        <p:nvSpPr>
+          <p:cNvPr id="45" name="Shape 43"/>
+          <p:cNvSpPr/>
+          <p:nvPr/>
+        </p:nvSpPr>
+        <p:spPr>
+          <a:xfrm>
+            <a:off x="7576947" y="4169664"/>
+            <a:ext cx="685800" cy="475488"/>
+          </a:xfrm>
+          <a:prstGeom prst="rect">
+            <a:avLst>
+              <a:gd name="adj" fmla="val 7692"/>
+            </a:avLst>
+          </a:prstGeom>
+          <a:solidFill>
+            <a:srgbClr val="FFFFFF"/>
+          </a:solidFill>
+          <a:ln w="12700">
+            <a:solidFill>
+              <a:srgbClr val="DB2777"/>
+            </a:solidFill>
+            <a:prstDash val="solid"/>
+          </a:ln>
+        </p:spPr>
+      </p:sp>
+      <p:sp>
+        <p:nvSpPr>
+          <p:cNvPr id="46" name="Text 44"/>
+          <p:cNvSpPr/>
+          <p:nvPr/>
+        </p:nvSpPr>
+        <p:spPr>
+          <a:xfrm>
+            <a:off x="7576947" y="4169664"/>
+            <a:ext cx="685800" cy="475488"/>
+          </a:xfrm>
+          <a:prstGeom prst="rect">
+            <a:avLst/>
+          </a:prstGeom>
+          <a:noFill/>
+          <a:ln/>
+        </p:spPr>
+        <p:txBody>
+          <a:bodyPr wrap="square" lIns="0" tIns="0" rIns="0" bIns="0" rtlCol="0" anchor="ctr"/>
+          <a:lstStyle/>
+          <a:p>
+            <a:pPr algn="ctr" indent="0" marL="0">
+              <a:buNone/>
+            </a:pPr>
+            <a:r>
+              <a:rPr lang="en-US" sz="900" b="1" dirty="0">
+                <a:solidFill>
+                  <a:srgbClr val="9D174D"/>
+                </a:solidFill>
+                <a:latin typeface="Trebuchet MS" pitchFamily="34" charset="0"/>
+                <a:ea typeface="Trebuchet MS" pitchFamily="34" charset="-122"/>
+                <a:cs typeface="Trebuchet MS" pitchFamily="34" charset="-120"/>
+              </a:rPr>
+              <a:t>t</a:t>
             </a:r>
             <a:endParaRPr lang="en-US" sz="900" dirty="0"/>
           </a:p>
@@ -16213,7 +16135,7 @@
                 <a:ea typeface="Calibri" pitchFamily="34" charset="-122"/>
                 <a:cs typeface="Calibri" pitchFamily="34" charset="-120"/>
               </a:rPr>
-              <a:t>Word Labs  •  wordlabs.app  •  Root: 'bright' = full of light, clever</a:t>
+              <a:t>Word Labs  •  wordlabs.app  •  Root: 'bright' = giving out a lot of light; clever</a:t>
             </a:r>
             <a:endParaRPr lang="en-US" sz="800" dirty="0"/>
           </a:p>
@@ -16547,7 +16469,7 @@
                 <a:ea typeface="Trebuchet MS" pitchFamily="34" charset="-122"/>
                 <a:cs typeface="Trebuchet MS" pitchFamily="34" charset="-120"/>
               </a:rPr>
-              <a:t>1</a:t>
+              <a:t>0</a:t>
             </a:r>
             <a:pPr algn="ctr" indent="0" marL="0">
               <a:buNone/>
@@ -16853,7 +16775,7 @@
                 <a:ea typeface="Calibri" pitchFamily="34" charset="-122"/>
                 <a:cs typeface="Calibri" pitchFamily="34" charset="-120"/>
               </a:rPr>
-              <a:t>Word Labs  •  wordlabs.app  •  Root: 'bright' = full of light, clever</a:t>
+              <a:t>Word Labs  •  wordlabs.app  •  Root: 'bright' = giving out a lot of light; clever</a:t>
             </a:r>
             <a:endParaRPr lang="en-US" sz="800" dirty="0"/>
           </a:p>
@@ -16965,7 +16887,7 @@
                 <a:ea typeface="Calibri" pitchFamily="34" charset="-122"/>
                 <a:cs typeface="Calibri" pitchFamily="34" charset="-120"/>
               </a:rPr>
-              <a:t>When she used the torch to </a:t>
+              <a:t>Her smile </a:t>
             </a:r>
             <a:pPr algn="l" indent="0" marL="0">
               <a:buNone/>
@@ -16982,7 +16904,7 @@
                 <a:ea typeface="Calibri" pitchFamily="34" charset="-122"/>
                 <a:cs typeface="Calibri" pitchFamily="34" charset="-120"/>
               </a:rPr>
-              <a:t>brighten</a:t>
+              <a:t>brightened</a:t>
             </a:r>
             <a:pPr algn="l" indent="0" marL="0">
               <a:buNone/>
@@ -16996,7 +16918,7 @@
                 <a:ea typeface="Calibri" pitchFamily="34" charset="-122"/>
                 <a:cs typeface="Calibri" pitchFamily="34" charset="-120"/>
               </a:rPr>
-              <a:t> the room, the </a:t>
+              <a:t> as soon as she saw her friend. Turn down the </a:t>
             </a:r>
             <a:pPr algn="l" indent="0" marL="0">
               <a:buNone/>
@@ -17027,7 +16949,38 @@
                 <a:ea typeface="Calibri" pitchFamily="34" charset="-122"/>
                 <a:cs typeface="Calibri" pitchFamily="34" charset="-120"/>
               </a:rPr>
-              <a:t> made everyone smile!</a:t>
+              <a:t> on your screen before bed. The sky was </a:t>
+            </a:r>
+            <a:pPr algn="l" indent="0" marL="0">
+              <a:buNone/>
+            </a:pPr>
+            <a:r>
+              <a:rPr lang="en-US" sz="1800" b="1" dirty="0">
+                <a:solidFill>
+                  <a:srgbClr val="0D9488"/>
+                </a:solidFill>
+                <a:highlight>
+                  <a:srgbClr val="CCFBF1"/>
+                </a:highlight>
+                <a:latin typeface="Calibri" pitchFamily="34" charset="0"/>
+                <a:ea typeface="Calibri" pitchFamily="34" charset="-122"/>
+                <a:cs typeface="Calibri" pitchFamily="34" charset="-120"/>
+              </a:rPr>
+              <a:t>brightening</a:t>
+            </a:r>
+            <a:pPr algn="l" indent="0" marL="0">
+              <a:buNone/>
+            </a:pPr>
+            <a:r>
+              <a:rPr lang="en-US" sz="1800" dirty="0">
+                <a:solidFill>
+                  <a:srgbClr val="0F172A"/>
+                </a:solidFill>
+                <a:latin typeface="Calibri" pitchFamily="34" charset="0"/>
+                <a:ea typeface="Calibri" pitchFamily="34" charset="-122"/>
+                <a:cs typeface="Calibri" pitchFamily="34" charset="-120"/>
+              </a:rPr>
+              <a:t> as the storm clouds cleared away.</a:t>
             </a:r>
             <a:endParaRPr lang="en-US" sz="1800" dirty="0"/>
           </a:p>
@@ -17182,7 +17135,7 @@
                 <a:ea typeface="Trebuchet MS" pitchFamily="34" charset="-122"/>
                 <a:cs typeface="Trebuchet MS" pitchFamily="34" charset="-120"/>
               </a:rPr>
-              <a:t>brighten</a:t>
+              <a:t>brightened</a:t>
             </a:r>
             <a:endParaRPr lang="en-US" sz="1400" dirty="0"/>
           </a:p>
@@ -17438,7 +17391,7 @@
                 <a:ea typeface="Trebuchet MS" pitchFamily="34" charset="-122"/>
                 <a:cs typeface="Trebuchet MS" pitchFamily="34" charset="-120"/>
               </a:rPr>
-              <a:t>brighter</a:t>
+              <a:t>brightening</a:t>
             </a:r>
             <a:endParaRPr lang="en-US" sz="1400" dirty="0"/>
           </a:p>
@@ -17769,7 +17722,7 @@
                 <a:ea typeface="Calibri" pitchFamily="34" charset="-122"/>
                 <a:cs typeface="Calibri" pitchFamily="34" charset="-120"/>
               </a:rPr>
-              <a:t>Word Labs  •  wordlabs.app  •  Root: 'bright' = full of light, clever</a:t>
+              <a:t>Word Labs  •  wordlabs.app  •  Root: 'bright' = giving out a lot of light; clever</a:t>
             </a:r>
             <a:endParaRPr lang="en-US" sz="800" dirty="0"/>
           </a:p>
@@ -17908,7 +17861,7 @@
                 <a:ea typeface="Trebuchet MS" pitchFamily="34" charset="-122"/>
                 <a:cs typeface="Trebuchet MS" pitchFamily="34" charset="-120"/>
               </a:rPr>
-              <a:t>brighten</a:t>
+              <a:t>brightened</a:t>
             </a:r>
             <a:endParaRPr lang="en-US" sz="2800" dirty="0"/>
           </a:p>
@@ -18596,7 +18549,7 @@
                 <a:ea typeface="Calibri" pitchFamily="34" charset="-122"/>
                 <a:cs typeface="Calibri" pitchFamily="34" charset="-120"/>
               </a:rPr>
-              <a:t>Word Labs  •  wordlabs.app  •  Root: 'bright' = full of light, clever</a:t>
+              <a:t>Word Labs  •  wordlabs.app  •  Root: 'bright' = giving out a lot of light; clever</a:t>
             </a:r>
             <a:endParaRPr lang="en-US" sz="800" dirty="0"/>
           </a:p>
@@ -18735,7 +18688,7 @@
                 <a:ea typeface="Trebuchet MS" pitchFamily="34" charset="-122"/>
                 <a:cs typeface="Trebuchet MS" pitchFamily="34" charset="-120"/>
               </a:rPr>
-              <a:t>brighten</a:t>
+              <a:t>brightened</a:t>
             </a:r>
             <a:endParaRPr lang="en-US" sz="2800" dirty="0"/>
           </a:p>
@@ -18815,7 +18768,7 @@
         </p:nvSpPr>
         <p:spPr>
           <a:xfrm>
-            <a:off x="2938272" y="2258568"/>
+            <a:off x="2221992" y="2258568"/>
             <a:ext cx="1828800" cy="292608"/>
           </a:xfrm>
           <a:prstGeom prst="rect">
@@ -18849,7 +18802,7 @@
         </p:nvSpPr>
         <p:spPr>
           <a:xfrm>
-            <a:off x="2938272" y="2258568"/>
+            <a:off x="2221992" y="2258568"/>
             <a:ext cx="1828800" cy="292608"/>
           </a:xfrm>
           <a:prstGeom prst="rect">
@@ -18888,7 +18841,7 @@
         </p:nvSpPr>
         <p:spPr>
           <a:xfrm>
-            <a:off x="2938272" y="2569464"/>
+            <a:off x="2221992" y="2569464"/>
             <a:ext cx="1828800" cy="201168"/>
           </a:xfrm>
           <a:prstGeom prst="rect">
@@ -18913,7 +18866,7 @@
                 <a:ea typeface="Calibri" pitchFamily="34" charset="-122"/>
                 <a:cs typeface="Calibri" pitchFamily="34" charset="-120"/>
               </a:rPr>
-              <a:t>full of light, clever</a:t>
+              <a:t>giving out a lot of light; clever</a:t>
             </a:r>
             <a:endParaRPr lang="en-US" sz="850" dirty="0"/>
           </a:p>
@@ -18927,7 +18880,7 @@
         </p:nvSpPr>
         <p:spPr>
           <a:xfrm>
-            <a:off x="5803392" y="2258568"/>
+            <a:off x="4370832" y="2258568"/>
             <a:ext cx="1828800" cy="292608"/>
           </a:xfrm>
           <a:prstGeom prst="rect">
@@ -18961,7 +18914,7 @@
         </p:nvSpPr>
         <p:spPr>
           <a:xfrm>
-            <a:off x="5803392" y="2258568"/>
+            <a:off x="4370832" y="2258568"/>
             <a:ext cx="1828800" cy="292608"/>
           </a:xfrm>
           <a:prstGeom prst="rect">
@@ -19000,7 +18953,7 @@
         </p:nvSpPr>
         <p:spPr>
           <a:xfrm>
-            <a:off x="5803392" y="2569464"/>
+            <a:off x="4370832" y="2569464"/>
             <a:ext cx="1828800" cy="201168"/>
           </a:xfrm>
           <a:prstGeom prst="rect">
@@ -19025,7 +18978,7 @@
                 <a:ea typeface="Calibri" pitchFamily="34" charset="-122"/>
                 <a:cs typeface="Calibri" pitchFamily="34" charset="-120"/>
               </a:rPr>
-              <a:t>to make or become</a:t>
+              <a:t>made of; to make</a:t>
             </a:r>
             <a:endParaRPr lang="en-US" sz="850" dirty="0"/>
           </a:p>
@@ -19034,6 +18987,118 @@
       <p:sp>
         <p:nvSpPr>
           <p:cNvPr id="22" name="Shape 20"/>
+          <p:cNvSpPr/>
+          <p:nvPr/>
+        </p:nvSpPr>
+        <p:spPr>
+          <a:xfrm>
+            <a:off x="6519672" y="2258568"/>
+            <a:ext cx="1828800" cy="292608"/>
+          </a:xfrm>
+          <a:prstGeom prst="rect">
+            <a:avLst>
+              <a:gd name="adj" fmla="val 25000"/>
+            </a:avLst>
+          </a:prstGeom>
+          <a:solidFill>
+            <a:srgbClr val="FCE7F3"/>
+          </a:solidFill>
+          <a:ln w="19050">
+            <a:solidFill>
+              <a:srgbClr val="DB2777"/>
+            </a:solidFill>
+            <a:prstDash val="solid"/>
+          </a:ln>
+          <a:effectLst>
+            <a:outerShdw sx="100000" sy="100000" kx="0" ky="0" algn="bl" rotWithShape="0" blurRad="101600" dist="38100" dir="8100000">
+              <a:srgbClr val="000000">
+                <a:alpha val="12000"/>
+              </a:srgbClr>
+            </a:outerShdw>
+          </a:effectLst>
+        </p:spPr>
+      </p:sp>
+      <p:sp>
+        <p:nvSpPr>
+          <p:cNvPr id="23" name="Text 21"/>
+          <p:cNvSpPr/>
+          <p:nvPr/>
+        </p:nvSpPr>
+        <p:spPr>
+          <a:xfrm>
+            <a:off x="6519672" y="2258568"/>
+            <a:ext cx="1828800" cy="292608"/>
+          </a:xfrm>
+          <a:prstGeom prst="rect">
+            <a:avLst/>
+          </a:prstGeom>
+          <a:noFill/>
+          <a:ln/>
+        </p:spPr>
+        <p:txBody>
+          <a:bodyPr wrap="square" lIns="0" tIns="0" rIns="0" bIns="0" rtlCol="0" anchor="ctr"/>
+          <a:lstStyle/>
+          <a:p>
+            <a:pPr algn="ctr" indent="0" marL="0">
+              <a:buNone/>
+            </a:pPr>
+            <a:r>
+              <a:rPr lang="en-US" sz="1300" b="1" dirty="0">
+                <a:solidFill>
+                  <a:srgbClr val="9D174D"/>
+                </a:solidFill>
+                <a:latin typeface="Trebuchet MS" pitchFamily="34" charset="0"/>
+                <a:ea typeface="Trebuchet MS" pitchFamily="34" charset="-122"/>
+                <a:cs typeface="Trebuchet MS" pitchFamily="34" charset="-120"/>
+              </a:rPr>
+              <a:t>ed</a:t>
+            </a:r>
+            <a:endParaRPr lang="en-US" sz="1300" dirty="0"/>
+          </a:p>
+        </p:txBody>
+      </p:sp>
+      <p:sp>
+        <p:nvSpPr>
+          <p:cNvPr id="24" name="Text 22"/>
+          <p:cNvSpPr/>
+          <p:nvPr/>
+        </p:nvSpPr>
+        <p:spPr>
+          <a:xfrm>
+            <a:off x="6519672" y="2569464"/>
+            <a:ext cx="1828800" cy="201168"/>
+          </a:xfrm>
+          <a:prstGeom prst="rect">
+            <a:avLst/>
+          </a:prstGeom>
+          <a:noFill/>
+          <a:ln/>
+        </p:spPr>
+        <p:txBody>
+          <a:bodyPr wrap="square" lIns="0" tIns="0" rIns="0" bIns="0" rtlCol="0" anchor="t"/>
+          <a:lstStyle/>
+          <a:p>
+            <a:pPr algn="ctr" indent="0" marL="0">
+              <a:buNone/>
+            </a:pPr>
+            <a:r>
+              <a:rPr lang="en-US" sz="850" dirty="0">
+                <a:solidFill>
+                  <a:srgbClr val="475569"/>
+                </a:solidFill>
+                <a:latin typeface="Calibri" pitchFamily="34" charset="0"/>
+                <a:ea typeface="Calibri" pitchFamily="34" charset="-122"/>
+                <a:cs typeface="Calibri" pitchFamily="34" charset="-120"/>
+              </a:rPr>
+              <a:t>past tense</a:t>
+            </a:r>
+            <a:endParaRPr lang="en-US" sz="850" dirty="0"/>
+          </a:p>
+        </p:txBody>
+      </p:sp>
+      <p:sp>
+        <p:nvSpPr>
+          <p:cNvPr id="25" name="Shape 23"/>
           <p:cNvSpPr/>
           <p:nvPr/>
         </p:nvSpPr>
@@ -19060,7 +19125,7 @@
       </p:sp>
       <p:sp>
         <p:nvSpPr>
-          <p:cNvPr id="23" name="Text 21"/>
+          <p:cNvPr id="26" name="Text 24"/>
           <p:cNvSpPr/>
           <p:nvPr/>
         </p:nvSpPr>
@@ -19099,7 +19164,7 @@
       </p:sp>
       <p:sp>
         <p:nvSpPr>
-          <p:cNvPr id="24" name="Shape 22"/>
+          <p:cNvPr id="27" name="Shape 25"/>
           <p:cNvSpPr/>
           <p:nvPr/>
         </p:nvSpPr>
@@ -19126,7 +19191,7 @@
       </p:sp>
       <p:sp>
         <p:nvSpPr>
-          <p:cNvPr id="25" name="Text 23"/>
+          <p:cNvPr id="28" name="Text 26"/>
           <p:cNvSpPr/>
           <p:nvPr/>
         </p:nvSpPr>
@@ -19165,7 +19230,7 @@
       </p:sp>
       <p:sp>
         <p:nvSpPr>
-          <p:cNvPr id="26" name="Shape 24"/>
+          <p:cNvPr id="29" name="Shape 27"/>
           <p:cNvSpPr/>
           <p:nvPr/>
         </p:nvSpPr>
@@ -19192,7 +19257,7 @@
       </p:sp>
       <p:sp>
         <p:nvSpPr>
-          <p:cNvPr id="27" name="Text 25"/>
+          <p:cNvPr id="30" name="Text 28"/>
           <p:cNvSpPr/>
           <p:nvPr/>
         </p:nvSpPr>
@@ -19231,7 +19296,7 @@
       </p:sp>
       <p:sp>
         <p:nvSpPr>
-          <p:cNvPr id="28" name="Shape 26"/>
+          <p:cNvPr id="31" name="Shape 29"/>
           <p:cNvSpPr/>
           <p:nvPr/>
         </p:nvSpPr>
@@ -19258,7 +19323,7 @@
       </p:sp>
       <p:sp>
         <p:nvSpPr>
-          <p:cNvPr id="29" name="Text 27"/>
+          <p:cNvPr id="32" name="Text 30"/>
           <p:cNvSpPr/>
           <p:nvPr/>
         </p:nvSpPr>
@@ -19581,7 +19646,7 @@
                 <a:ea typeface="Calibri" pitchFamily="34" charset="-122"/>
                 <a:cs typeface="Calibri" pitchFamily="34" charset="-120"/>
               </a:rPr>
-              <a:t>Word Labs  •  wordlabs.app  •  Root: 'bright' = full of light, clever</a:t>
+              <a:t>Word Labs  •  wordlabs.app  •  Root: 'bright' = giving out a lot of light; clever</a:t>
             </a:r>
             <a:endParaRPr lang="en-US" sz="800" dirty="0"/>
           </a:p>
@@ -19720,7 +19785,7 @@
                 <a:ea typeface="Trebuchet MS" pitchFamily="34" charset="-122"/>
                 <a:cs typeface="Trebuchet MS" pitchFamily="34" charset="-120"/>
               </a:rPr>
-              <a:t>brighten</a:t>
+              <a:t>brightened</a:t>
             </a:r>
             <a:endParaRPr lang="en-US" sz="2800" dirty="0"/>
           </a:p>
@@ -19800,7 +19865,7 @@
         </p:nvSpPr>
         <p:spPr>
           <a:xfrm>
-            <a:off x="2938272" y="2258568"/>
+            <a:off x="2221992" y="2258568"/>
             <a:ext cx="1828800" cy="292608"/>
           </a:xfrm>
           <a:prstGeom prst="rect">
@@ -19834,7 +19899,7 @@
         </p:nvSpPr>
         <p:spPr>
           <a:xfrm>
-            <a:off x="2938272" y="2258568"/>
+            <a:off x="2221992" y="2258568"/>
             <a:ext cx="1828800" cy="292608"/>
           </a:xfrm>
           <a:prstGeom prst="rect">
@@ -19873,7 +19938,7 @@
         </p:nvSpPr>
         <p:spPr>
           <a:xfrm>
-            <a:off x="2938272" y="2569464"/>
+            <a:off x="2221992" y="2569464"/>
             <a:ext cx="1828800" cy="201168"/>
           </a:xfrm>
           <a:prstGeom prst="rect">
@@ -19898,7 +19963,7 @@
                 <a:ea typeface="Calibri" pitchFamily="34" charset="-122"/>
                 <a:cs typeface="Calibri" pitchFamily="34" charset="-120"/>
               </a:rPr>
-              <a:t>full of light, clever</a:t>
+              <a:t>giving out a lot of light; clever</a:t>
             </a:r>
             <a:endParaRPr lang="en-US" sz="850" dirty="0"/>
           </a:p>
@@ -19912,7 +19977,7 @@
         </p:nvSpPr>
         <p:spPr>
           <a:xfrm>
-            <a:off x="5803392" y="2258568"/>
+            <a:off x="4370832" y="2258568"/>
             <a:ext cx="1828800" cy="292608"/>
           </a:xfrm>
           <a:prstGeom prst="rect">
@@ -19946,7 +20011,7 @@
         </p:nvSpPr>
         <p:spPr>
           <a:xfrm>
-            <a:off x="5803392" y="2258568"/>
+            <a:off x="4370832" y="2258568"/>
             <a:ext cx="1828800" cy="292608"/>
           </a:xfrm>
           <a:prstGeom prst="rect">
@@ -19985,7 +20050,7 @@
         </p:nvSpPr>
         <p:spPr>
           <a:xfrm>
-            <a:off x="5803392" y="2569464"/>
+            <a:off x="4370832" y="2569464"/>
             <a:ext cx="1828800" cy="201168"/>
           </a:xfrm>
           <a:prstGeom prst="rect">
@@ -20010,7 +20075,7 @@
                 <a:ea typeface="Calibri" pitchFamily="34" charset="-122"/>
                 <a:cs typeface="Calibri" pitchFamily="34" charset="-120"/>
               </a:rPr>
-              <a:t>to make or become</a:t>
+              <a:t>made of; to make</a:t>
             </a:r>
             <a:endParaRPr lang="en-US" sz="850" dirty="0"/>
           </a:p>
@@ -20019,6 +20084,118 @@
       <p:sp>
         <p:nvSpPr>
           <p:cNvPr id="22" name="Shape 20"/>
+          <p:cNvSpPr/>
+          <p:nvPr/>
+        </p:nvSpPr>
+        <p:spPr>
+          <a:xfrm>
+            <a:off x="6519672" y="2258568"/>
+            <a:ext cx="1828800" cy="292608"/>
+          </a:xfrm>
+          <a:prstGeom prst="rect">
+            <a:avLst>
+              <a:gd name="adj" fmla="val 25000"/>
+            </a:avLst>
+          </a:prstGeom>
+          <a:solidFill>
+            <a:srgbClr val="FCE7F3"/>
+          </a:solidFill>
+          <a:ln w="19050">
+            <a:solidFill>
+              <a:srgbClr val="DB2777"/>
+            </a:solidFill>
+            <a:prstDash val="solid"/>
+          </a:ln>
+          <a:effectLst>
+            <a:outerShdw sx="100000" sy="100000" kx="0" ky="0" algn="bl" rotWithShape="0" blurRad="101600" dist="38100" dir="8100000">
+              <a:srgbClr val="000000">
+                <a:alpha val="12000"/>
+              </a:srgbClr>
+            </a:outerShdw>
+          </a:effectLst>
+        </p:spPr>
+      </p:sp>
+      <p:sp>
+        <p:nvSpPr>
+          <p:cNvPr id="23" name="Text 21"/>
+          <p:cNvSpPr/>
+          <p:nvPr/>
+        </p:nvSpPr>
+        <p:spPr>
+          <a:xfrm>
+            <a:off x="6519672" y="2258568"/>
+            <a:ext cx="1828800" cy="292608"/>
+          </a:xfrm>
+          <a:prstGeom prst="rect">
+            <a:avLst/>
+          </a:prstGeom>
+          <a:noFill/>
+          <a:ln/>
+        </p:spPr>
+        <p:txBody>
+          <a:bodyPr wrap="square" lIns="0" tIns="0" rIns="0" bIns="0" rtlCol="0" anchor="ctr"/>
+          <a:lstStyle/>
+          <a:p>
+            <a:pPr algn="ctr" indent="0" marL="0">
+              <a:buNone/>
+            </a:pPr>
+            <a:r>
+              <a:rPr lang="en-US" sz="1300" b="1" dirty="0">
+                <a:solidFill>
+                  <a:srgbClr val="9D174D"/>
+                </a:solidFill>
+                <a:latin typeface="Trebuchet MS" pitchFamily="34" charset="0"/>
+                <a:ea typeface="Trebuchet MS" pitchFamily="34" charset="-122"/>
+                <a:cs typeface="Trebuchet MS" pitchFamily="34" charset="-120"/>
+              </a:rPr>
+              <a:t>ed</a:t>
+            </a:r>
+            <a:endParaRPr lang="en-US" sz="1300" dirty="0"/>
+          </a:p>
+        </p:txBody>
+      </p:sp>
+      <p:sp>
+        <p:nvSpPr>
+          <p:cNvPr id="24" name="Text 22"/>
+          <p:cNvSpPr/>
+          <p:nvPr/>
+        </p:nvSpPr>
+        <p:spPr>
+          <a:xfrm>
+            <a:off x="6519672" y="2569464"/>
+            <a:ext cx="1828800" cy="201168"/>
+          </a:xfrm>
+          <a:prstGeom prst="rect">
+            <a:avLst/>
+          </a:prstGeom>
+          <a:noFill/>
+          <a:ln/>
+        </p:spPr>
+        <p:txBody>
+          <a:bodyPr wrap="square" lIns="0" tIns="0" rIns="0" bIns="0" rtlCol="0" anchor="t"/>
+          <a:lstStyle/>
+          <a:p>
+            <a:pPr algn="ctr" indent="0" marL="0">
+              <a:buNone/>
+            </a:pPr>
+            <a:r>
+              <a:rPr lang="en-US" sz="850" dirty="0">
+                <a:solidFill>
+                  <a:srgbClr val="475569"/>
+                </a:solidFill>
+                <a:latin typeface="Calibri" pitchFamily="34" charset="0"/>
+                <a:ea typeface="Calibri" pitchFamily="34" charset="-122"/>
+                <a:cs typeface="Calibri" pitchFamily="34" charset="-120"/>
+              </a:rPr>
+              <a:t>past tense</a:t>
+            </a:r>
+            <a:endParaRPr lang="en-US" sz="850" dirty="0"/>
+          </a:p>
+        </p:txBody>
+      </p:sp>
+      <p:sp>
+        <p:nvSpPr>
+          <p:cNvPr id="25" name="Shape 23"/>
           <p:cNvSpPr/>
           <p:nvPr/>
         </p:nvSpPr>
@@ -20045,7 +20222,7 @@
       </p:sp>
       <p:sp>
         <p:nvSpPr>
-          <p:cNvPr id="23" name="Text 21"/>
+          <p:cNvPr id="26" name="Text 24"/>
           <p:cNvSpPr/>
           <p:nvPr/>
         </p:nvSpPr>
@@ -20084,7 +20261,7 @@
       </p:sp>
       <p:sp>
         <p:nvSpPr>
-          <p:cNvPr id="24" name="Shape 22"/>
+          <p:cNvPr id="27" name="Shape 25"/>
           <p:cNvSpPr/>
           <p:nvPr/>
         </p:nvSpPr>
@@ -20111,7 +20288,7 @@
       </p:sp>
       <p:sp>
         <p:nvSpPr>
-          <p:cNvPr id="25" name="Shape 23"/>
+          <p:cNvPr id="28" name="Shape 26"/>
           <p:cNvSpPr/>
           <p:nvPr/>
         </p:nvSpPr>
@@ -20138,7 +20315,7 @@
       </p:sp>
       <p:sp>
         <p:nvSpPr>
-          <p:cNvPr id="26" name="Text 24"/>
+          <p:cNvPr id="29" name="Text 27"/>
           <p:cNvSpPr/>
           <p:nvPr/>
         </p:nvSpPr>
@@ -20177,7 +20354,7 @@
       </p:sp>
       <p:sp>
         <p:nvSpPr>
-          <p:cNvPr id="27" name="Text 25"/>
+          <p:cNvPr id="30" name="Text 28"/>
           <p:cNvSpPr/>
           <p:nvPr/>
         </p:nvSpPr>
@@ -20216,7 +20393,7 @@
       </p:sp>
       <p:sp>
         <p:nvSpPr>
-          <p:cNvPr id="28" name="Shape 26"/>
+          <p:cNvPr id="31" name="Shape 29"/>
           <p:cNvSpPr/>
           <p:nvPr/>
         </p:nvSpPr>
@@ -20243,7 +20420,7 @@
       </p:sp>
       <p:sp>
         <p:nvSpPr>
-          <p:cNvPr id="29" name="Text 27"/>
+          <p:cNvPr id="32" name="Text 30"/>
           <p:cNvSpPr/>
           <p:nvPr/>
         </p:nvSpPr>
@@ -20274,7 +20451,7 @@
                 <a:ea typeface="Trebuchet MS" pitchFamily="34" charset="-122"/>
                 <a:cs typeface="Trebuchet MS" pitchFamily="34" charset="-120"/>
               </a:rPr>
-              <a:t>en</a:t>
+              <a:t>ened</a:t>
             </a:r>
             <a:endParaRPr lang="en-US" sz="1400" dirty="0"/>
           </a:p>
@@ -20282,7 +20459,7 @@
       </p:sp>
       <p:sp>
         <p:nvSpPr>
-          <p:cNvPr id="30" name="Shape 28"/>
+          <p:cNvPr id="33" name="Shape 31"/>
           <p:cNvSpPr/>
           <p:nvPr/>
         </p:nvSpPr>
@@ -20309,7 +20486,7 @@
       </p:sp>
       <p:sp>
         <p:nvSpPr>
-          <p:cNvPr id="31" name="Text 29"/>
+          <p:cNvPr id="34" name="Text 32"/>
           <p:cNvSpPr/>
           <p:nvPr/>
         </p:nvSpPr>
@@ -20348,7 +20525,7 @@
       </p:sp>
       <p:sp>
         <p:nvSpPr>
-          <p:cNvPr id="32" name="Shape 30"/>
+          <p:cNvPr id="35" name="Shape 33"/>
           <p:cNvSpPr/>
           <p:nvPr/>
         </p:nvSpPr>
@@ -20375,7 +20552,7 @@
       </p:sp>
       <p:sp>
         <p:nvSpPr>
-          <p:cNvPr id="33" name="Text 31"/>
+          <p:cNvPr id="36" name="Text 34"/>
           <p:cNvSpPr/>
           <p:nvPr/>
         </p:nvSpPr>
@@ -20698,7 +20875,7 @@
                 <a:ea typeface="Calibri" pitchFamily="34" charset="-122"/>
                 <a:cs typeface="Calibri" pitchFamily="34" charset="-120"/>
               </a:rPr>
-              <a:t>Word Labs  •  wordlabs.app  •  Root: 'bright' = full of light, clever</a:t>
+              <a:t>Word Labs  •  wordlabs.app  •  Root: 'bright' = giving out a lot of light; clever</a:t>
             </a:r>
             <a:endParaRPr lang="en-US" sz="800" dirty="0"/>
           </a:p>
@@ -20837,7 +21014,7 @@
                 <a:ea typeface="Trebuchet MS" pitchFamily="34" charset="-122"/>
                 <a:cs typeface="Trebuchet MS" pitchFamily="34" charset="-120"/>
               </a:rPr>
-              <a:t>brighten</a:t>
+              <a:t>brightened</a:t>
             </a:r>
             <a:endParaRPr lang="en-US" sz="2800" dirty="0"/>
           </a:p>
@@ -20917,7 +21094,7 @@
         </p:nvSpPr>
         <p:spPr>
           <a:xfrm>
-            <a:off x="2938272" y="2258568"/>
+            <a:off x="2221992" y="2258568"/>
             <a:ext cx="1828800" cy="292608"/>
           </a:xfrm>
           <a:prstGeom prst="rect">
@@ -20951,7 +21128,7 @@
         </p:nvSpPr>
         <p:spPr>
           <a:xfrm>
-            <a:off x="2938272" y="2258568"/>
+            <a:off x="2221992" y="2258568"/>
             <a:ext cx="1828800" cy="292608"/>
           </a:xfrm>
           <a:prstGeom prst="rect">
@@ -20990,7 +21167,7 @@
         </p:nvSpPr>
         <p:spPr>
           <a:xfrm>
-            <a:off x="2938272" y="2569464"/>
+            <a:off x="2221992" y="2569464"/>
             <a:ext cx="1828800" cy="201168"/>
           </a:xfrm>
           <a:prstGeom prst="rect">
@@ -21015,7 +21192,7 @@
                 <a:ea typeface="Calibri" pitchFamily="34" charset="-122"/>
                 <a:cs typeface="Calibri" pitchFamily="34" charset="-120"/>
               </a:rPr>
-              <a:t>full of light, clever</a:t>
+              <a:t>giving out a lot of light; clever</a:t>
             </a:r>
             <a:endParaRPr lang="en-US" sz="850" dirty="0"/>
           </a:p>
@@ -21029,7 +21206,7 @@
         </p:nvSpPr>
         <p:spPr>
           <a:xfrm>
-            <a:off x="5803392" y="2258568"/>
+            <a:off x="4370832" y="2258568"/>
             <a:ext cx="1828800" cy="292608"/>
           </a:xfrm>
           <a:prstGeom prst="rect">
@@ -21063,7 +21240,7 @@
         </p:nvSpPr>
         <p:spPr>
           <a:xfrm>
-            <a:off x="5803392" y="2258568"/>
+            <a:off x="4370832" y="2258568"/>
             <a:ext cx="1828800" cy="292608"/>
           </a:xfrm>
           <a:prstGeom prst="rect">
@@ -21102,7 +21279,7 @@
         </p:nvSpPr>
         <p:spPr>
           <a:xfrm>
-            <a:off x="5803392" y="2569464"/>
+            <a:off x="4370832" y="2569464"/>
             <a:ext cx="1828800" cy="201168"/>
           </a:xfrm>
           <a:prstGeom prst="rect">
@@ -21127,7 +21304,7 @@
                 <a:ea typeface="Calibri" pitchFamily="34" charset="-122"/>
                 <a:cs typeface="Calibri" pitchFamily="34" charset="-120"/>
               </a:rPr>
-              <a:t>to make or become</a:t>
+              <a:t>made of; to make</a:t>
             </a:r>
             <a:endParaRPr lang="en-US" sz="850" dirty="0"/>
           </a:p>
@@ -21136,6 +21313,118 @@
       <p:sp>
         <p:nvSpPr>
           <p:cNvPr id="22" name="Shape 20"/>
+          <p:cNvSpPr/>
+          <p:nvPr/>
+        </p:nvSpPr>
+        <p:spPr>
+          <a:xfrm>
+            <a:off x="6519672" y="2258568"/>
+            <a:ext cx="1828800" cy="292608"/>
+          </a:xfrm>
+          <a:prstGeom prst="rect">
+            <a:avLst>
+              <a:gd name="adj" fmla="val 25000"/>
+            </a:avLst>
+          </a:prstGeom>
+          <a:solidFill>
+            <a:srgbClr val="FCE7F3"/>
+          </a:solidFill>
+          <a:ln w="19050">
+            <a:solidFill>
+              <a:srgbClr val="DB2777"/>
+            </a:solidFill>
+            <a:prstDash val="solid"/>
+          </a:ln>
+          <a:effectLst>
+            <a:outerShdw sx="100000" sy="100000" kx="0" ky="0" algn="bl" rotWithShape="0" blurRad="101600" dist="38100" dir="8100000">
+              <a:srgbClr val="000000">
+                <a:alpha val="12000"/>
+              </a:srgbClr>
+            </a:outerShdw>
+          </a:effectLst>
+        </p:spPr>
+      </p:sp>
+      <p:sp>
+        <p:nvSpPr>
+          <p:cNvPr id="23" name="Text 21"/>
+          <p:cNvSpPr/>
+          <p:nvPr/>
+        </p:nvSpPr>
+        <p:spPr>
+          <a:xfrm>
+            <a:off x="6519672" y="2258568"/>
+            <a:ext cx="1828800" cy="292608"/>
+          </a:xfrm>
+          <a:prstGeom prst="rect">
+            <a:avLst/>
+          </a:prstGeom>
+          <a:noFill/>
+          <a:ln/>
+        </p:spPr>
+        <p:txBody>
+          <a:bodyPr wrap="square" lIns="0" tIns="0" rIns="0" bIns="0" rtlCol="0" anchor="ctr"/>
+          <a:lstStyle/>
+          <a:p>
+            <a:pPr algn="ctr" indent="0" marL="0">
+              <a:buNone/>
+            </a:pPr>
+            <a:r>
+              <a:rPr lang="en-US" sz="1300" b="1" dirty="0">
+                <a:solidFill>
+                  <a:srgbClr val="9D174D"/>
+                </a:solidFill>
+                <a:latin typeface="Trebuchet MS" pitchFamily="34" charset="0"/>
+                <a:ea typeface="Trebuchet MS" pitchFamily="34" charset="-122"/>
+                <a:cs typeface="Trebuchet MS" pitchFamily="34" charset="-120"/>
+              </a:rPr>
+              <a:t>ed</a:t>
+            </a:r>
+            <a:endParaRPr lang="en-US" sz="1300" dirty="0"/>
+          </a:p>
+        </p:txBody>
+      </p:sp>
+      <p:sp>
+        <p:nvSpPr>
+          <p:cNvPr id="24" name="Text 22"/>
+          <p:cNvSpPr/>
+          <p:nvPr/>
+        </p:nvSpPr>
+        <p:spPr>
+          <a:xfrm>
+            <a:off x="6519672" y="2569464"/>
+            <a:ext cx="1828800" cy="201168"/>
+          </a:xfrm>
+          <a:prstGeom prst="rect">
+            <a:avLst/>
+          </a:prstGeom>
+          <a:noFill/>
+          <a:ln/>
+        </p:spPr>
+        <p:txBody>
+          <a:bodyPr wrap="square" lIns="0" tIns="0" rIns="0" bIns="0" rtlCol="0" anchor="t"/>
+          <a:lstStyle/>
+          <a:p>
+            <a:pPr algn="ctr" indent="0" marL="0">
+              <a:buNone/>
+            </a:pPr>
+            <a:r>
+              <a:rPr lang="en-US" sz="850" dirty="0">
+                <a:solidFill>
+                  <a:srgbClr val="475569"/>
+                </a:solidFill>
+                <a:latin typeface="Calibri" pitchFamily="34" charset="0"/>
+                <a:ea typeface="Calibri" pitchFamily="34" charset="-122"/>
+                <a:cs typeface="Calibri" pitchFamily="34" charset="-120"/>
+              </a:rPr>
+              <a:t>past tense</a:t>
+            </a:r>
+            <a:endParaRPr lang="en-US" sz="850" dirty="0"/>
+          </a:p>
+        </p:txBody>
+      </p:sp>
+      <p:sp>
+        <p:nvSpPr>
+          <p:cNvPr id="25" name="Shape 23"/>
           <p:cNvSpPr/>
           <p:nvPr/>
         </p:nvSpPr>
@@ -21162,7 +21451,7 @@
       </p:sp>
       <p:sp>
         <p:nvSpPr>
-          <p:cNvPr id="23" name="Text 21"/>
+          <p:cNvPr id="26" name="Text 24"/>
           <p:cNvSpPr/>
           <p:nvPr/>
         </p:nvSpPr>
@@ -21201,7 +21490,7 @@
       </p:sp>
       <p:sp>
         <p:nvSpPr>
-          <p:cNvPr id="24" name="Shape 22"/>
+          <p:cNvPr id="27" name="Shape 25"/>
           <p:cNvSpPr/>
           <p:nvPr/>
         </p:nvSpPr>
@@ -21228,7 +21517,7 @@
       </p:sp>
       <p:sp>
         <p:nvSpPr>
-          <p:cNvPr id="25" name="Shape 23"/>
+          <p:cNvPr id="28" name="Shape 26"/>
           <p:cNvSpPr/>
           <p:nvPr/>
         </p:nvSpPr>
@@ -21255,7 +21544,7 @@
       </p:sp>
       <p:sp>
         <p:nvSpPr>
-          <p:cNvPr id="26" name="Text 24"/>
+          <p:cNvPr id="29" name="Text 27"/>
           <p:cNvSpPr/>
           <p:nvPr/>
         </p:nvSpPr>
@@ -21294,7 +21583,7 @@
       </p:sp>
       <p:sp>
         <p:nvSpPr>
-          <p:cNvPr id="27" name="Text 25"/>
+          <p:cNvPr id="30" name="Text 28"/>
           <p:cNvSpPr/>
           <p:nvPr/>
         </p:nvSpPr>
@@ -21333,7 +21622,7 @@
       </p:sp>
       <p:sp>
         <p:nvSpPr>
-          <p:cNvPr id="28" name="Shape 26"/>
+          <p:cNvPr id="31" name="Shape 29"/>
           <p:cNvSpPr/>
           <p:nvPr/>
         </p:nvSpPr>
@@ -21360,7 +21649,7 @@
       </p:sp>
       <p:sp>
         <p:nvSpPr>
-          <p:cNvPr id="29" name="Text 27"/>
+          <p:cNvPr id="32" name="Text 30"/>
           <p:cNvSpPr/>
           <p:nvPr/>
         </p:nvSpPr>
@@ -21391,7 +21680,7 @@
                 <a:ea typeface="Trebuchet MS" pitchFamily="34" charset="-122"/>
                 <a:cs typeface="Trebuchet MS" pitchFamily="34" charset="-120"/>
               </a:rPr>
-              <a:t>en</a:t>
+              <a:t>ened</a:t>
             </a:r>
             <a:endParaRPr lang="en-US" sz="1400" dirty="0"/>
           </a:p>
@@ -21399,7 +21688,7 @@
       </p:sp>
       <p:sp>
         <p:nvSpPr>
-          <p:cNvPr id="30" name="Shape 28"/>
+          <p:cNvPr id="33" name="Shape 31"/>
           <p:cNvSpPr/>
           <p:nvPr/>
         </p:nvSpPr>
@@ -21426,7 +21715,7 @@
       </p:sp>
       <p:sp>
         <p:nvSpPr>
-          <p:cNvPr id="31" name="Text 29"/>
+          <p:cNvPr id="34" name="Text 32"/>
           <p:cNvSpPr/>
           <p:nvPr/>
         </p:nvSpPr>
@@ -21465,18 +21754,18 @@
       </p:sp>
       <p:sp>
         <p:nvSpPr>
-          <p:cNvPr id="32" name="Shape 30"/>
+          <p:cNvPr id="35" name="Shape 33"/>
           <p:cNvSpPr/>
           <p:nvPr/>
         </p:nvSpPr>
         <p:spPr>
           <a:xfrm>
             <a:off x="1874520" y="4096512"/>
-            <a:ext cx="6903720" cy="804672"/>
+            <a:ext cx="6903720" cy="658368"/>
           </a:xfrm>
           <a:prstGeom prst="rect">
             <a:avLst>
-              <a:gd name="adj" fmla="val 6818"/>
+              <a:gd name="adj" fmla="val 8333"/>
             </a:avLst>
           </a:prstGeom>
           <a:solidFill>
@@ -21492,18 +21781,18 @@
       </p:sp>
       <p:sp>
         <p:nvSpPr>
-          <p:cNvPr id="33" name="Shape 31"/>
-          <p:cNvSpPr/>
-          <p:nvPr/>
-        </p:nvSpPr>
-        <p:spPr>
-          <a:xfrm>
-            <a:off x="2254649" y="4169664"/>
-            <a:ext cx="685800" cy="384048"/>
+          <p:cNvPr id="36" name="Shape 34"/>
+          <p:cNvSpPr/>
+          <p:nvPr/>
+        </p:nvSpPr>
+        <p:spPr>
+          <a:xfrm>
+            <a:off x="2023872" y="4169664"/>
+            <a:ext cx="685800" cy="475488"/>
           </a:xfrm>
           <a:prstGeom prst="rect">
             <a:avLst>
-              <a:gd name="adj" fmla="val 9524"/>
+              <a:gd name="adj" fmla="val 7692"/>
             </a:avLst>
           </a:prstGeom>
           <a:solidFill>
@@ -21519,14 +21808,14 @@
       </p:sp>
       <p:sp>
         <p:nvSpPr>
-          <p:cNvPr id="34" name="Text 32"/>
-          <p:cNvSpPr/>
-          <p:nvPr/>
-        </p:nvSpPr>
-        <p:spPr>
-          <a:xfrm>
-            <a:off x="2254649" y="4169664"/>
-            <a:ext cx="685800" cy="384048"/>
+          <p:cNvPr id="37" name="Text 35"/>
+          <p:cNvSpPr/>
+          <p:nvPr/>
+        </p:nvSpPr>
+        <p:spPr>
+          <a:xfrm>
+            <a:off x="2023872" y="4169664"/>
+            <a:ext cx="685800" cy="475488"/>
           </a:xfrm>
           <a:prstGeom prst="rect">
             <a:avLst/>
@@ -21558,18 +21847,18 @@
       </p:sp>
       <p:sp>
         <p:nvSpPr>
-          <p:cNvPr id="35" name="Shape 33"/>
-          <p:cNvSpPr/>
-          <p:nvPr/>
-        </p:nvSpPr>
-        <p:spPr>
-          <a:xfrm>
-            <a:off x="3293146" y="4169664"/>
-            <a:ext cx="685800" cy="384048"/>
+          <p:cNvPr id="38" name="Shape 36"/>
+          <p:cNvSpPr/>
+          <p:nvPr/>
+        </p:nvSpPr>
+        <p:spPr>
+          <a:xfrm>
+            <a:off x="2831592" y="4169664"/>
+            <a:ext cx="685800" cy="475488"/>
           </a:xfrm>
           <a:prstGeom prst="rect">
             <a:avLst>
-              <a:gd name="adj" fmla="val 9524"/>
+              <a:gd name="adj" fmla="val 7692"/>
             </a:avLst>
           </a:prstGeom>
           <a:solidFill>
@@ -21585,14 +21874,14 @@
       </p:sp>
       <p:sp>
         <p:nvSpPr>
-          <p:cNvPr id="36" name="Text 34"/>
-          <p:cNvSpPr/>
-          <p:nvPr/>
-        </p:nvSpPr>
-        <p:spPr>
-          <a:xfrm>
-            <a:off x="3293146" y="4169664"/>
-            <a:ext cx="685800" cy="384048"/>
+          <p:cNvPr id="39" name="Text 37"/>
+          <p:cNvSpPr/>
+          <p:nvPr/>
+        </p:nvSpPr>
+        <p:spPr>
+          <a:xfrm>
+            <a:off x="2831592" y="4169664"/>
+            <a:ext cx="685800" cy="475488"/>
           </a:xfrm>
           <a:prstGeom prst="rect">
             <a:avLst/>
@@ -21624,18 +21913,18 @@
       </p:sp>
       <p:sp>
         <p:nvSpPr>
-          <p:cNvPr id="37" name="Shape 35"/>
-          <p:cNvSpPr/>
-          <p:nvPr/>
-        </p:nvSpPr>
-        <p:spPr>
-          <a:xfrm>
-            <a:off x="4331643" y="4169664"/>
-            <a:ext cx="685800" cy="384048"/>
+          <p:cNvPr id="40" name="Shape 38"/>
+          <p:cNvSpPr/>
+          <p:nvPr/>
+        </p:nvSpPr>
+        <p:spPr>
+          <a:xfrm>
+            <a:off x="3639312" y="4169664"/>
+            <a:ext cx="685800" cy="475488"/>
           </a:xfrm>
           <a:prstGeom prst="rect">
             <a:avLst>
-              <a:gd name="adj" fmla="val 9524"/>
+              <a:gd name="adj" fmla="val 7692"/>
             </a:avLst>
           </a:prstGeom>
           <a:solidFill>
@@ -21651,14 +21940,14 @@
       </p:sp>
       <p:sp>
         <p:nvSpPr>
-          <p:cNvPr id="38" name="Text 36"/>
-          <p:cNvSpPr/>
-          <p:nvPr/>
-        </p:nvSpPr>
-        <p:spPr>
-          <a:xfrm>
-            <a:off x="4331643" y="4169664"/>
-            <a:ext cx="685800" cy="384048"/>
+          <p:cNvPr id="41" name="Text 39"/>
+          <p:cNvSpPr/>
+          <p:nvPr/>
+        </p:nvSpPr>
+        <p:spPr>
+          <a:xfrm>
+            <a:off x="3639312" y="4169664"/>
+            <a:ext cx="685800" cy="475488"/>
           </a:xfrm>
           <a:prstGeom prst="rect">
             <a:avLst/>
@@ -21690,57 +21979,18 @@
       </p:sp>
       <p:sp>
         <p:nvSpPr>
-          <p:cNvPr id="39" name="Text 37"/>
-          <p:cNvSpPr/>
-          <p:nvPr/>
-        </p:nvSpPr>
-        <p:spPr>
-          <a:xfrm>
-            <a:off x="4331643" y="4572000"/>
-            <a:ext cx="685800" cy="219456"/>
-          </a:xfrm>
-          <a:prstGeom prst="rect">
-            <a:avLst/>
-          </a:prstGeom>
-          <a:noFill/>
-          <a:ln/>
-        </p:spPr>
-        <p:txBody>
-          <a:bodyPr wrap="square" lIns="0" tIns="0" rIns="0" bIns="0" rtlCol="0" anchor="t"/>
-          <a:lstStyle/>
-          <a:p>
-            <a:pPr algn="ctr" indent="0" marL="0">
-              <a:buNone/>
-            </a:pPr>
-            <a:r>
-              <a:rPr lang="en-US" sz="750" i="1" dirty="0">
-                <a:solidFill>
-                  <a:srgbClr val="94A3B8"/>
-                </a:solidFill>
-                <a:latin typeface="Calibri" pitchFamily="34" charset="0"/>
-                <a:ea typeface="Calibri" pitchFamily="34" charset="-122"/>
-                <a:cs typeface="Calibri" pitchFamily="34" charset="-120"/>
-              </a:rPr>
-              <a:t>/ie/</a:t>
-            </a:r>
-            <a:endParaRPr lang="en-US" sz="750" dirty="0"/>
-          </a:p>
-        </p:txBody>
-      </p:sp>
-      <p:sp>
-        <p:nvSpPr>
-          <p:cNvPr id="40" name="Shape 38"/>
-          <p:cNvSpPr/>
-          <p:nvPr/>
-        </p:nvSpPr>
-        <p:spPr>
-          <a:xfrm>
-            <a:off x="5370141" y="4169664"/>
-            <a:ext cx="685800" cy="384048"/>
+          <p:cNvPr id="42" name="Shape 40"/>
+          <p:cNvSpPr/>
+          <p:nvPr/>
+        </p:nvSpPr>
+        <p:spPr>
+          <a:xfrm>
+            <a:off x="4447032" y="4169664"/>
+            <a:ext cx="685800" cy="475488"/>
           </a:xfrm>
           <a:prstGeom prst="rect">
             <a:avLst>
-              <a:gd name="adj" fmla="val 9524"/>
+              <a:gd name="adj" fmla="val 7692"/>
             </a:avLst>
           </a:prstGeom>
           <a:solidFill>
@@ -21756,14 +22006,14 @@
       </p:sp>
       <p:sp>
         <p:nvSpPr>
-          <p:cNvPr id="41" name="Text 39"/>
-          <p:cNvSpPr/>
-          <p:nvPr/>
-        </p:nvSpPr>
-        <p:spPr>
-          <a:xfrm>
-            <a:off x="5370141" y="4169664"/>
-            <a:ext cx="685800" cy="384048"/>
+          <p:cNvPr id="43" name="Text 41"/>
+          <p:cNvSpPr/>
+          <p:nvPr/>
+        </p:nvSpPr>
+        <p:spPr>
+          <a:xfrm>
+            <a:off x="4447032" y="4169664"/>
+            <a:ext cx="685800" cy="475488"/>
           </a:xfrm>
           <a:prstGeom prst="rect">
             <a:avLst/>
@@ -21795,18 +22045,18 @@
       </p:sp>
       <p:sp>
         <p:nvSpPr>
-          <p:cNvPr id="42" name="Shape 40"/>
-          <p:cNvSpPr/>
-          <p:nvPr/>
-        </p:nvSpPr>
-        <p:spPr>
-          <a:xfrm>
-            <a:off x="6408638" y="4169664"/>
-            <a:ext cx="685800" cy="384048"/>
+          <p:cNvPr id="44" name="Shape 42"/>
+          <p:cNvSpPr/>
+          <p:nvPr/>
+        </p:nvSpPr>
+        <p:spPr>
+          <a:xfrm>
+            <a:off x="5254752" y="4169664"/>
+            <a:ext cx="685800" cy="475488"/>
           </a:xfrm>
           <a:prstGeom prst="rect">
             <a:avLst>
-              <a:gd name="adj" fmla="val 9524"/>
+              <a:gd name="adj" fmla="val 7692"/>
             </a:avLst>
           </a:prstGeom>
           <a:solidFill>
@@ -21822,14 +22072,14 @@
       </p:sp>
       <p:sp>
         <p:nvSpPr>
-          <p:cNvPr id="43" name="Text 41"/>
-          <p:cNvSpPr/>
-          <p:nvPr/>
-        </p:nvSpPr>
-        <p:spPr>
-          <a:xfrm>
-            <a:off x="6408638" y="4169664"/>
-            <a:ext cx="685800" cy="384048"/>
+          <p:cNvPr id="45" name="Text 43"/>
+          <p:cNvSpPr/>
+          <p:nvPr/>
+        </p:nvSpPr>
+        <p:spPr>
+          <a:xfrm>
+            <a:off x="5254752" y="4169664"/>
+            <a:ext cx="685800" cy="475488"/>
           </a:xfrm>
           <a:prstGeom prst="rect">
             <a:avLst/>
@@ -21861,18 +22111,18 @@
       </p:sp>
       <p:sp>
         <p:nvSpPr>
-          <p:cNvPr id="44" name="Shape 42"/>
-          <p:cNvSpPr/>
-          <p:nvPr/>
-        </p:nvSpPr>
-        <p:spPr>
-          <a:xfrm>
-            <a:off x="7447135" y="4169664"/>
-            <a:ext cx="685800" cy="384048"/>
+          <p:cNvPr id="46" name="Shape 44"/>
+          <p:cNvSpPr/>
+          <p:nvPr/>
+        </p:nvSpPr>
+        <p:spPr>
+          <a:xfrm>
+            <a:off x="6062472" y="4169664"/>
+            <a:ext cx="685800" cy="475488"/>
           </a:xfrm>
           <a:prstGeom prst="rect">
             <a:avLst>
-              <a:gd name="adj" fmla="val 9524"/>
+              <a:gd name="adj" fmla="val 7692"/>
             </a:avLst>
           </a:prstGeom>
           <a:solidFill>
@@ -21888,14 +22138,14 @@
       </p:sp>
       <p:sp>
         <p:nvSpPr>
-          <p:cNvPr id="45" name="Text 43"/>
-          <p:cNvSpPr/>
-          <p:nvPr/>
-        </p:nvSpPr>
-        <p:spPr>
-          <a:xfrm>
-            <a:off x="7447135" y="4169664"/>
-            <a:ext cx="685800" cy="384048"/>
+          <p:cNvPr id="47" name="Text 45"/>
+          <p:cNvSpPr/>
+          <p:nvPr/>
+        </p:nvSpPr>
+        <p:spPr>
+          <a:xfrm>
+            <a:off x="6062472" y="4169664"/>
+            <a:ext cx="685800" cy="475488"/>
           </a:xfrm>
           <a:prstGeom prst="rect">
             <a:avLst/>
@@ -21920,6 +22170,138 @@
                 <a:cs typeface="Trebuchet MS" pitchFamily="34" charset="-120"/>
               </a:rPr>
               <a:t>n</a:t>
+            </a:r>
+            <a:endParaRPr lang="en-US" sz="900" dirty="0"/>
+          </a:p>
+        </p:txBody>
+      </p:sp>
+      <p:sp>
+        <p:nvSpPr>
+          <p:cNvPr id="48" name="Shape 46"/>
+          <p:cNvSpPr/>
+          <p:nvPr/>
+        </p:nvSpPr>
+        <p:spPr>
+          <a:xfrm>
+            <a:off x="6870192" y="4169664"/>
+            <a:ext cx="685800" cy="475488"/>
+          </a:xfrm>
+          <a:prstGeom prst="rect">
+            <a:avLst>
+              <a:gd name="adj" fmla="val 7692"/>
+            </a:avLst>
+          </a:prstGeom>
+          <a:solidFill>
+            <a:srgbClr val="FFFFFF"/>
+          </a:solidFill>
+          <a:ln w="12700">
+            <a:solidFill>
+              <a:srgbClr val="DB2777"/>
+            </a:solidFill>
+            <a:prstDash val="solid"/>
+          </a:ln>
+        </p:spPr>
+      </p:sp>
+      <p:sp>
+        <p:nvSpPr>
+          <p:cNvPr id="49" name="Text 47"/>
+          <p:cNvSpPr/>
+          <p:nvPr/>
+        </p:nvSpPr>
+        <p:spPr>
+          <a:xfrm>
+            <a:off x="6870192" y="4169664"/>
+            <a:ext cx="685800" cy="475488"/>
+          </a:xfrm>
+          <a:prstGeom prst="rect">
+            <a:avLst/>
+          </a:prstGeom>
+          <a:noFill/>
+          <a:ln/>
+        </p:spPr>
+        <p:txBody>
+          <a:bodyPr wrap="square" lIns="0" tIns="0" rIns="0" bIns="0" rtlCol="0" anchor="ctr"/>
+          <a:lstStyle/>
+          <a:p>
+            <a:pPr algn="ctr" indent="0" marL="0">
+              <a:buNone/>
+            </a:pPr>
+            <a:r>
+              <a:rPr lang="en-US" sz="900" b="1" dirty="0">
+                <a:solidFill>
+                  <a:srgbClr val="9D174D"/>
+                </a:solidFill>
+                <a:latin typeface="Trebuchet MS" pitchFamily="34" charset="0"/>
+                <a:ea typeface="Trebuchet MS" pitchFamily="34" charset="-122"/>
+                <a:cs typeface="Trebuchet MS" pitchFamily="34" charset="-120"/>
+              </a:rPr>
+              <a:t>e</a:t>
+            </a:r>
+            <a:endParaRPr lang="en-US" sz="900" dirty="0"/>
+          </a:p>
+        </p:txBody>
+      </p:sp>
+      <p:sp>
+        <p:nvSpPr>
+          <p:cNvPr id="50" name="Shape 48"/>
+          <p:cNvSpPr/>
+          <p:nvPr/>
+        </p:nvSpPr>
+        <p:spPr>
+          <a:xfrm>
+            <a:off x="7677912" y="4169664"/>
+            <a:ext cx="685800" cy="475488"/>
+          </a:xfrm>
+          <a:prstGeom prst="rect">
+            <a:avLst>
+              <a:gd name="adj" fmla="val 7692"/>
+            </a:avLst>
+          </a:prstGeom>
+          <a:solidFill>
+            <a:srgbClr val="FFFFFF"/>
+          </a:solidFill>
+          <a:ln w="12700">
+            <a:solidFill>
+              <a:srgbClr val="DB2777"/>
+            </a:solidFill>
+            <a:prstDash val="solid"/>
+          </a:ln>
+        </p:spPr>
+      </p:sp>
+      <p:sp>
+        <p:nvSpPr>
+          <p:cNvPr id="51" name="Text 49"/>
+          <p:cNvSpPr/>
+          <p:nvPr/>
+        </p:nvSpPr>
+        <p:spPr>
+          <a:xfrm>
+            <a:off x="7677912" y="4169664"/>
+            <a:ext cx="685800" cy="475488"/>
+          </a:xfrm>
+          <a:prstGeom prst="rect">
+            <a:avLst/>
+          </a:prstGeom>
+          <a:noFill/>
+          <a:ln/>
+        </p:spPr>
+        <p:txBody>
+          <a:bodyPr wrap="square" lIns="0" tIns="0" rIns="0" bIns="0" rtlCol="0" anchor="ctr"/>
+          <a:lstStyle/>
+          <a:p>
+            <a:pPr algn="ctr" indent="0" marL="0">
+              <a:buNone/>
+            </a:pPr>
+            <a:r>
+              <a:rPr lang="en-US" sz="900" b="1" dirty="0">
+                <a:solidFill>
+                  <a:srgbClr val="9D174D"/>
+                </a:solidFill>
+                <a:latin typeface="Trebuchet MS" pitchFamily="34" charset="0"/>
+                <a:ea typeface="Trebuchet MS" pitchFamily="34" charset="-122"/>
+                <a:cs typeface="Trebuchet MS" pitchFamily="34" charset="-120"/>
+              </a:rPr>
+              <a:t>d</a:t>
             </a:r>
             <a:endParaRPr lang="en-US" sz="900" dirty="0"/>
           </a:p>
@@ -22211,7 +22593,7 @@
                 <a:ea typeface="Calibri" pitchFamily="34" charset="-122"/>
                 <a:cs typeface="Calibri" pitchFamily="34" charset="-120"/>
               </a:rPr>
-              <a:t>Word Labs  •  wordlabs.app  •  Root: 'bright' = full of light, clever</a:t>
+              <a:t>Word Labs  •  wordlabs.app  •  Root: 'bright' = giving out a lot of light; clever</a:t>
             </a:r>
             <a:endParaRPr lang="en-US" sz="800" dirty="0"/>
           </a:p>
@@ -23038,7 +23420,7 @@
                 <a:ea typeface="Calibri" pitchFamily="34" charset="-122"/>
                 <a:cs typeface="Calibri" pitchFamily="34" charset="-120"/>
               </a:rPr>
-              <a:t>Word Labs  •  wordlabs.app  •  Root: 'bright' = full of light, clever</a:t>
+              <a:t>Word Labs  •  wordlabs.app  •  Root: 'bright' = giving out a lot of light; clever</a:t>
             </a:r>
             <a:endParaRPr lang="en-US" sz="800" dirty="0"/>
           </a:p>
@@ -23355,7 +23737,7 @@
                 <a:ea typeface="Calibri" pitchFamily="34" charset="-122"/>
                 <a:cs typeface="Calibri" pitchFamily="34" charset="-120"/>
               </a:rPr>
-              <a:t>full of light, clever</a:t>
+              <a:t>giving out a lot of light; clever</a:t>
             </a:r>
             <a:endParaRPr lang="en-US" sz="850" dirty="0"/>
           </a:p>
@@ -23467,7 +23849,7 @@
                 <a:ea typeface="Calibri" pitchFamily="34" charset="-122"/>
                 <a:cs typeface="Calibri" pitchFamily="34" charset="-120"/>
               </a:rPr>
-              <a:t>state or quality of</a:t>
+              <a:t>state of</a:t>
             </a:r>
             <a:endParaRPr lang="en-US" sz="850" dirty="0"/>
           </a:p>
@@ -24023,7 +24405,7 @@
                 <a:ea typeface="Calibri" pitchFamily="34" charset="-122"/>
                 <a:cs typeface="Calibri" pitchFamily="34" charset="-120"/>
               </a:rPr>
-              <a:t>Word Labs  •  wordlabs.app  •  Root: 'bright' = full of light, clever</a:t>
+              <a:t>Word Labs  •  wordlabs.app  •  Root: 'bright' = giving out a lot of light; clever</a:t>
             </a:r>
             <a:endParaRPr lang="en-US" sz="800" dirty="0"/>
           </a:p>
@@ -24096,7 +24478,7 @@
                 <a:ea typeface="Trebuchet MS" pitchFamily="34" charset="-122"/>
                 <a:cs typeface="Trebuchet MS" pitchFamily="34" charset="-120"/>
               </a:rPr>
-              <a:t>We are learning that the root 'bright' means 'full of light, clever'.</a:t>
+              <a:t>We are learning that the root 'bright' means 'giving out a lot of light; clever'.</a:t>
             </a:r>
             <a:endParaRPr lang="en-US" sz="2000" dirty="0"/>
           </a:p>
@@ -24742,7 +25124,7 @@
                 <a:ea typeface="Calibri" pitchFamily="34" charset="-122"/>
                 <a:cs typeface="Calibri" pitchFamily="34" charset="-120"/>
               </a:rPr>
-              <a:t>Word Labs  •  wordlabs.app  •  Root: 'bright' = full of light, clever</a:t>
+              <a:t>Word Labs  •  wordlabs.app  •  Root: 'bright' = giving out a lot of light; clever</a:t>
             </a:r>
             <a:endParaRPr lang="en-US" sz="800" dirty="0"/>
           </a:p>
@@ -25059,7 +25441,7 @@
                 <a:ea typeface="Calibri" pitchFamily="34" charset="-122"/>
                 <a:cs typeface="Calibri" pitchFamily="34" charset="-120"/>
               </a:rPr>
-              <a:t>full of light, clever</a:t>
+              <a:t>giving out a lot of light; clever</a:t>
             </a:r>
             <a:endParaRPr lang="en-US" sz="850" dirty="0"/>
           </a:p>
@@ -25171,7 +25553,7 @@
                 <a:ea typeface="Calibri" pitchFamily="34" charset="-122"/>
                 <a:cs typeface="Calibri" pitchFamily="34" charset="-120"/>
               </a:rPr>
-              <a:t>state or quality of</a:t>
+              <a:t>state of</a:t>
             </a:r>
             <a:endParaRPr lang="en-US" sz="850" dirty="0"/>
           </a:p>
@@ -25859,7 +26241,7 @@
                 <a:ea typeface="Calibri" pitchFamily="34" charset="-122"/>
                 <a:cs typeface="Calibri" pitchFamily="34" charset="-120"/>
               </a:rPr>
-              <a:t>Word Labs  •  wordlabs.app  •  Root: 'bright' = full of light, clever</a:t>
+              <a:t>Word Labs  •  wordlabs.app  •  Root: 'bright' = giving out a lot of light; clever</a:t>
             </a:r>
             <a:endParaRPr lang="en-US" sz="800" dirty="0"/>
           </a:p>
@@ -26176,7 +26558,7 @@
                 <a:ea typeface="Calibri" pitchFamily="34" charset="-122"/>
                 <a:cs typeface="Calibri" pitchFamily="34" charset="-120"/>
               </a:rPr>
-              <a:t>full of light, clever</a:t>
+              <a:t>giving out a lot of light; clever</a:t>
             </a:r>
             <a:endParaRPr lang="en-US" sz="850" dirty="0"/>
           </a:p>
@@ -26288,7 +26670,7 @@
                 <a:ea typeface="Calibri" pitchFamily="34" charset="-122"/>
                 <a:cs typeface="Calibri" pitchFamily="34" charset="-120"/>
               </a:rPr>
-              <a:t>state or quality of</a:t>
+              <a:t>state of</a:t>
             </a:r>
             <a:endParaRPr lang="en-US" sz="850" dirty="0"/>
           </a:p>
@@ -26633,11 +27015,11 @@
         <p:spPr>
           <a:xfrm>
             <a:off x="1874520" y="4096512"/>
-            <a:ext cx="6903720" cy="804672"/>
+            <a:ext cx="6903720" cy="658368"/>
           </a:xfrm>
           <a:prstGeom prst="rect">
             <a:avLst>
-              <a:gd name="adj" fmla="val 6818"/>
+              <a:gd name="adj" fmla="val 8333"/>
             </a:avLst>
           </a:prstGeom>
           <a:solidFill>
@@ -26659,12 +27041,12 @@
         </p:nvSpPr>
         <p:spPr>
           <a:xfrm>
-            <a:off x="2124837" y="4169664"/>
-            <a:ext cx="685800" cy="384048"/>
+            <a:off x="2023872" y="4169664"/>
+            <a:ext cx="685800" cy="475488"/>
           </a:xfrm>
           <a:prstGeom prst="rect">
             <a:avLst>
-              <a:gd name="adj" fmla="val 9524"/>
+              <a:gd name="adj" fmla="val 7692"/>
             </a:avLst>
           </a:prstGeom>
           <a:solidFill>
@@ -26686,8 +27068,8 @@
         </p:nvSpPr>
         <p:spPr>
           <a:xfrm>
-            <a:off x="2124837" y="4169664"/>
-            <a:ext cx="685800" cy="384048"/>
+            <a:off x="2023872" y="4169664"/>
+            <a:ext cx="685800" cy="475488"/>
           </a:xfrm>
           <a:prstGeom prst="rect">
             <a:avLst/>
@@ -26725,12 +27107,12 @@
         </p:nvSpPr>
         <p:spPr>
           <a:xfrm>
-            <a:off x="3033522" y="4169664"/>
-            <a:ext cx="685800" cy="384048"/>
+            <a:off x="2831592" y="4169664"/>
+            <a:ext cx="685800" cy="475488"/>
           </a:xfrm>
           <a:prstGeom prst="rect">
             <a:avLst>
-              <a:gd name="adj" fmla="val 9524"/>
+              <a:gd name="adj" fmla="val 7692"/>
             </a:avLst>
           </a:prstGeom>
           <a:solidFill>
@@ -26752,8 +27134,8 @@
         </p:nvSpPr>
         <p:spPr>
           <a:xfrm>
-            <a:off x="3033522" y="4169664"/>
-            <a:ext cx="685800" cy="384048"/>
+            <a:off x="2831592" y="4169664"/>
+            <a:ext cx="685800" cy="475488"/>
           </a:xfrm>
           <a:prstGeom prst="rect">
             <a:avLst/>
@@ -26791,12 +27173,12 @@
         </p:nvSpPr>
         <p:spPr>
           <a:xfrm>
-            <a:off x="3942207" y="4169664"/>
-            <a:ext cx="685800" cy="384048"/>
+            <a:off x="3639312" y="4169664"/>
+            <a:ext cx="685800" cy="475488"/>
           </a:xfrm>
           <a:prstGeom prst="rect">
             <a:avLst>
-              <a:gd name="adj" fmla="val 9524"/>
+              <a:gd name="adj" fmla="val 7692"/>
             </a:avLst>
           </a:prstGeom>
           <a:solidFill>
@@ -26818,8 +27200,8 @@
         </p:nvSpPr>
         <p:spPr>
           <a:xfrm>
-            <a:off x="3942207" y="4169664"/>
-            <a:ext cx="685800" cy="384048"/>
+            <a:off x="3639312" y="4169664"/>
+            <a:ext cx="685800" cy="475488"/>
           </a:xfrm>
           <a:prstGeom prst="rect">
             <a:avLst/>
@@ -26851,57 +27233,18 @@
       </p:sp>
       <p:sp>
         <p:nvSpPr>
-          <p:cNvPr id="39" name="Text 37"/>
-          <p:cNvSpPr/>
-          <p:nvPr/>
-        </p:nvSpPr>
-        <p:spPr>
-          <a:xfrm>
-            <a:off x="3942207" y="4572000"/>
-            <a:ext cx="685800" cy="219456"/>
-          </a:xfrm>
-          <a:prstGeom prst="rect">
-            <a:avLst/>
-          </a:prstGeom>
-          <a:noFill/>
-          <a:ln/>
-        </p:spPr>
-        <p:txBody>
-          <a:bodyPr wrap="square" lIns="0" tIns="0" rIns="0" bIns="0" rtlCol="0" anchor="t"/>
-          <a:lstStyle/>
-          <a:p>
-            <a:pPr algn="ctr" indent="0" marL="0">
-              <a:buNone/>
-            </a:pPr>
-            <a:r>
-              <a:rPr lang="en-US" sz="750" i="1" dirty="0">
-                <a:solidFill>
-                  <a:srgbClr val="94A3B8"/>
-                </a:solidFill>
-                <a:latin typeface="Calibri" pitchFamily="34" charset="0"/>
-                <a:ea typeface="Calibri" pitchFamily="34" charset="-122"/>
-                <a:cs typeface="Calibri" pitchFamily="34" charset="-120"/>
-              </a:rPr>
-              <a:t>/ie/</a:t>
-            </a:r>
-            <a:endParaRPr lang="en-US" sz="750" dirty="0"/>
-          </a:p>
-        </p:txBody>
-      </p:sp>
-      <p:sp>
-        <p:nvSpPr>
-          <p:cNvPr id="40" name="Shape 38"/>
-          <p:cNvSpPr/>
-          <p:nvPr/>
-        </p:nvSpPr>
-        <p:spPr>
-          <a:xfrm>
-            <a:off x="4850892" y="4169664"/>
-            <a:ext cx="685800" cy="384048"/>
+          <p:cNvPr id="39" name="Shape 37"/>
+          <p:cNvSpPr/>
+          <p:nvPr/>
+        </p:nvSpPr>
+        <p:spPr>
+          <a:xfrm>
+            <a:off x="4447032" y="4169664"/>
+            <a:ext cx="685800" cy="475488"/>
           </a:xfrm>
           <a:prstGeom prst="rect">
             <a:avLst>
-              <a:gd name="adj" fmla="val 9524"/>
+              <a:gd name="adj" fmla="val 7692"/>
             </a:avLst>
           </a:prstGeom>
           <a:solidFill>
@@ -26917,14 +27260,14 @@
       </p:sp>
       <p:sp>
         <p:nvSpPr>
-          <p:cNvPr id="41" name="Text 39"/>
-          <p:cNvSpPr/>
-          <p:nvPr/>
-        </p:nvSpPr>
-        <p:spPr>
-          <a:xfrm>
-            <a:off x="4850892" y="4169664"/>
-            <a:ext cx="685800" cy="384048"/>
+          <p:cNvPr id="40" name="Text 38"/>
+          <p:cNvSpPr/>
+          <p:nvPr/>
+        </p:nvSpPr>
+        <p:spPr>
+          <a:xfrm>
+            <a:off x="4447032" y="4169664"/>
+            <a:ext cx="685800" cy="475488"/>
           </a:xfrm>
           <a:prstGeom prst="rect">
             <a:avLst/>
@@ -26956,18 +27299,18 @@
       </p:sp>
       <p:sp>
         <p:nvSpPr>
-          <p:cNvPr id="42" name="Shape 40"/>
-          <p:cNvSpPr/>
-          <p:nvPr/>
-        </p:nvSpPr>
-        <p:spPr>
-          <a:xfrm>
-            <a:off x="5759577" y="4169664"/>
-            <a:ext cx="685800" cy="384048"/>
+          <p:cNvPr id="41" name="Shape 39"/>
+          <p:cNvSpPr/>
+          <p:nvPr/>
+        </p:nvSpPr>
+        <p:spPr>
+          <a:xfrm>
+            <a:off x="5254752" y="4169664"/>
+            <a:ext cx="685800" cy="475488"/>
           </a:xfrm>
           <a:prstGeom prst="rect">
             <a:avLst>
-              <a:gd name="adj" fmla="val 9524"/>
+              <a:gd name="adj" fmla="val 7692"/>
             </a:avLst>
           </a:prstGeom>
           <a:solidFill>
@@ -26983,14 +27326,14 @@
       </p:sp>
       <p:sp>
         <p:nvSpPr>
-          <p:cNvPr id="43" name="Text 41"/>
-          <p:cNvSpPr/>
-          <p:nvPr/>
-        </p:nvSpPr>
-        <p:spPr>
-          <a:xfrm>
-            <a:off x="5759577" y="4169664"/>
-            <a:ext cx="685800" cy="384048"/>
+          <p:cNvPr id="42" name="Text 40"/>
+          <p:cNvSpPr/>
+          <p:nvPr/>
+        </p:nvSpPr>
+        <p:spPr>
+          <a:xfrm>
+            <a:off x="5254752" y="4169664"/>
+            <a:ext cx="685800" cy="475488"/>
           </a:xfrm>
           <a:prstGeom prst="rect">
             <a:avLst/>
@@ -27022,18 +27365,18 @@
       </p:sp>
       <p:sp>
         <p:nvSpPr>
-          <p:cNvPr id="44" name="Shape 42"/>
-          <p:cNvSpPr/>
-          <p:nvPr/>
-        </p:nvSpPr>
-        <p:spPr>
-          <a:xfrm>
-            <a:off x="6668262" y="4169664"/>
-            <a:ext cx="685800" cy="384048"/>
+          <p:cNvPr id="43" name="Shape 41"/>
+          <p:cNvSpPr/>
+          <p:nvPr/>
+        </p:nvSpPr>
+        <p:spPr>
+          <a:xfrm>
+            <a:off x="6062472" y="4169664"/>
+            <a:ext cx="685800" cy="475488"/>
           </a:xfrm>
           <a:prstGeom prst="rect">
             <a:avLst>
-              <a:gd name="adj" fmla="val 9524"/>
+              <a:gd name="adj" fmla="val 7692"/>
             </a:avLst>
           </a:prstGeom>
           <a:solidFill>
@@ -27049,14 +27392,14 @@
       </p:sp>
       <p:sp>
         <p:nvSpPr>
-          <p:cNvPr id="45" name="Text 43"/>
-          <p:cNvSpPr/>
-          <p:nvPr/>
-        </p:nvSpPr>
-        <p:spPr>
-          <a:xfrm>
-            <a:off x="6668262" y="4169664"/>
-            <a:ext cx="685800" cy="384048"/>
+          <p:cNvPr id="44" name="Text 42"/>
+          <p:cNvSpPr/>
+          <p:nvPr/>
+        </p:nvSpPr>
+        <p:spPr>
+          <a:xfrm>
+            <a:off x="6062472" y="4169664"/>
+            <a:ext cx="685800" cy="475488"/>
           </a:xfrm>
           <a:prstGeom prst="rect">
             <a:avLst/>
@@ -27088,18 +27431,18 @@
       </p:sp>
       <p:sp>
         <p:nvSpPr>
-          <p:cNvPr id="46" name="Shape 44"/>
-          <p:cNvSpPr/>
-          <p:nvPr/>
-        </p:nvSpPr>
-        <p:spPr>
-          <a:xfrm>
-            <a:off x="7576947" y="4169664"/>
-            <a:ext cx="685800" cy="384048"/>
+          <p:cNvPr id="45" name="Shape 43"/>
+          <p:cNvSpPr/>
+          <p:nvPr/>
+        </p:nvSpPr>
+        <p:spPr>
+          <a:xfrm>
+            <a:off x="6870192" y="4169664"/>
+            <a:ext cx="685800" cy="475488"/>
           </a:xfrm>
           <a:prstGeom prst="rect">
             <a:avLst>
-              <a:gd name="adj" fmla="val 9524"/>
+              <a:gd name="adj" fmla="val 7692"/>
             </a:avLst>
           </a:prstGeom>
           <a:solidFill>
@@ -27115,14 +27458,14 @@
       </p:sp>
       <p:sp>
         <p:nvSpPr>
-          <p:cNvPr id="47" name="Text 45"/>
-          <p:cNvSpPr/>
-          <p:nvPr/>
-        </p:nvSpPr>
-        <p:spPr>
-          <a:xfrm>
-            <a:off x="7576947" y="4169664"/>
-            <a:ext cx="685800" cy="384048"/>
+          <p:cNvPr id="46" name="Text 44"/>
+          <p:cNvSpPr/>
+          <p:nvPr/>
+        </p:nvSpPr>
+        <p:spPr>
+          <a:xfrm>
+            <a:off x="6870192" y="4169664"/>
+            <a:ext cx="685800" cy="475488"/>
           </a:xfrm>
           <a:prstGeom prst="rect">
             <a:avLst/>
@@ -27146,7 +27489,73 @@
                 <a:ea typeface="Trebuchet MS" pitchFamily="34" charset="-122"/>
                 <a:cs typeface="Trebuchet MS" pitchFamily="34" charset="-120"/>
               </a:rPr>
-              <a:t>ss</a:t>
+              <a:t>s</a:t>
+            </a:r>
+            <a:endParaRPr lang="en-US" sz="900" dirty="0"/>
+          </a:p>
+        </p:txBody>
+      </p:sp>
+      <p:sp>
+        <p:nvSpPr>
+          <p:cNvPr id="47" name="Shape 45"/>
+          <p:cNvSpPr/>
+          <p:nvPr/>
+        </p:nvSpPr>
+        <p:spPr>
+          <a:xfrm>
+            <a:off x="7677912" y="4169664"/>
+            <a:ext cx="685800" cy="475488"/>
+          </a:xfrm>
+          <a:prstGeom prst="rect">
+            <a:avLst>
+              <a:gd name="adj" fmla="val 7692"/>
+            </a:avLst>
+          </a:prstGeom>
+          <a:solidFill>
+            <a:srgbClr val="FFFFFF"/>
+          </a:solidFill>
+          <a:ln w="12700">
+            <a:solidFill>
+              <a:srgbClr val="DB2777"/>
+            </a:solidFill>
+            <a:prstDash val="solid"/>
+          </a:ln>
+        </p:spPr>
+      </p:sp>
+      <p:sp>
+        <p:nvSpPr>
+          <p:cNvPr id="48" name="Text 46"/>
+          <p:cNvSpPr/>
+          <p:nvPr/>
+        </p:nvSpPr>
+        <p:spPr>
+          <a:xfrm>
+            <a:off x="7677912" y="4169664"/>
+            <a:ext cx="685800" cy="475488"/>
+          </a:xfrm>
+          <a:prstGeom prst="rect">
+            <a:avLst/>
+          </a:prstGeom>
+          <a:noFill/>
+          <a:ln/>
+        </p:spPr>
+        <p:txBody>
+          <a:bodyPr wrap="square" lIns="0" tIns="0" rIns="0" bIns="0" rtlCol="0" anchor="ctr"/>
+          <a:lstStyle/>
+          <a:p>
+            <a:pPr algn="ctr" indent="0" marL="0">
+              <a:buNone/>
+            </a:pPr>
+            <a:r>
+              <a:rPr lang="en-US" sz="900" b="1" dirty="0">
+                <a:solidFill>
+                  <a:srgbClr val="9D174D"/>
+                </a:solidFill>
+                <a:latin typeface="Trebuchet MS" pitchFamily="34" charset="0"/>
+                <a:ea typeface="Trebuchet MS" pitchFamily="34" charset="-122"/>
+                <a:cs typeface="Trebuchet MS" pitchFamily="34" charset="-120"/>
+              </a:rPr>
+              <a:t>s</a:t>
             </a:r>
             <a:endParaRPr lang="en-US" sz="900" dirty="0"/>
           </a:p>
@@ -27438,7 +27847,7 @@
                 <a:ea typeface="Calibri" pitchFamily="34" charset="-122"/>
                 <a:cs typeface="Calibri" pitchFamily="34" charset="-120"/>
               </a:rPr>
-              <a:t>Word Labs  •  wordlabs.app  •  Root: 'bright' = full of light, clever</a:t>
+              <a:t>Word Labs  •  wordlabs.app  •  Root: 'bright' = giving out a lot of light; clever</a:t>
             </a:r>
             <a:endParaRPr lang="en-US" sz="800" dirty="0"/>
           </a:p>
@@ -27577,7 +27986,7 @@
                 <a:ea typeface="Trebuchet MS" pitchFamily="34" charset="-122"/>
                 <a:cs typeface="Trebuchet MS" pitchFamily="34" charset="-120"/>
               </a:rPr>
-              <a:t>brighter</a:t>
+              <a:t>brightening</a:t>
             </a:r>
             <a:endParaRPr lang="en-US" sz="2800" dirty="0"/>
           </a:p>
@@ -28265,7 +28674,7 @@
                 <a:ea typeface="Calibri" pitchFamily="34" charset="-122"/>
                 <a:cs typeface="Calibri" pitchFamily="34" charset="-120"/>
               </a:rPr>
-              <a:t>Word Labs  •  wordlabs.app  •  Root: 'bright' = full of light, clever</a:t>
+              <a:t>Word Labs  •  wordlabs.app  •  Root: 'bright' = giving out a lot of light; clever</a:t>
             </a:r>
             <a:endParaRPr lang="en-US" sz="800" dirty="0"/>
           </a:p>
@@ -28404,7 +28813,7 @@
                 <a:ea typeface="Trebuchet MS" pitchFamily="34" charset="-122"/>
                 <a:cs typeface="Trebuchet MS" pitchFamily="34" charset="-120"/>
               </a:rPr>
-              <a:t>brighter</a:t>
+              <a:t>brightening</a:t>
             </a:r>
             <a:endParaRPr lang="en-US" sz="2800" dirty="0"/>
           </a:p>
@@ -28484,7 +28893,7 @@
         </p:nvSpPr>
         <p:spPr>
           <a:xfrm>
-            <a:off x="2938272" y="2258568"/>
+            <a:off x="2221992" y="2258568"/>
             <a:ext cx="1828800" cy="292608"/>
           </a:xfrm>
           <a:prstGeom prst="rect">
@@ -28518,7 +28927,7 @@
         </p:nvSpPr>
         <p:spPr>
           <a:xfrm>
-            <a:off x="2938272" y="2258568"/>
+            <a:off x="2221992" y="2258568"/>
             <a:ext cx="1828800" cy="292608"/>
           </a:xfrm>
           <a:prstGeom prst="rect">
@@ -28557,7 +28966,7 @@
         </p:nvSpPr>
         <p:spPr>
           <a:xfrm>
-            <a:off x="2938272" y="2569464"/>
+            <a:off x="2221992" y="2569464"/>
             <a:ext cx="1828800" cy="201168"/>
           </a:xfrm>
           <a:prstGeom prst="rect">
@@ -28582,7 +28991,7 @@
                 <a:ea typeface="Calibri" pitchFamily="34" charset="-122"/>
                 <a:cs typeface="Calibri" pitchFamily="34" charset="-120"/>
               </a:rPr>
-              <a:t>full of light, clever</a:t>
+              <a:t>giving out a lot of light; clever</a:t>
             </a:r>
             <a:endParaRPr lang="en-US" sz="850" dirty="0"/>
           </a:p>
@@ -28596,7 +29005,7 @@
         </p:nvSpPr>
         <p:spPr>
           <a:xfrm>
-            <a:off x="5803392" y="2258568"/>
+            <a:off x="4370832" y="2258568"/>
             <a:ext cx="1828800" cy="292608"/>
           </a:xfrm>
           <a:prstGeom prst="rect">
@@ -28630,7 +29039,7 @@
         </p:nvSpPr>
         <p:spPr>
           <a:xfrm>
-            <a:off x="5803392" y="2258568"/>
+            <a:off x="4370832" y="2258568"/>
             <a:ext cx="1828800" cy="292608"/>
           </a:xfrm>
           <a:prstGeom prst="rect">
@@ -28655,7 +29064,7 @@
                 <a:ea typeface="Trebuchet MS" pitchFamily="34" charset="-122"/>
                 <a:cs typeface="Trebuchet MS" pitchFamily="34" charset="-120"/>
               </a:rPr>
-              <a:t>er</a:t>
+              <a:t>en</a:t>
             </a:r>
             <a:endParaRPr lang="en-US" sz="1300" dirty="0"/>
           </a:p>
@@ -28669,7 +29078,7 @@
         </p:nvSpPr>
         <p:spPr>
           <a:xfrm>
-            <a:off x="5803392" y="2569464"/>
+            <a:off x="4370832" y="2569464"/>
             <a:ext cx="1828800" cy="201168"/>
           </a:xfrm>
           <a:prstGeom prst="rect">
@@ -28694,7 +29103,7 @@
                 <a:ea typeface="Calibri" pitchFamily="34" charset="-122"/>
                 <a:cs typeface="Calibri" pitchFamily="34" charset="-120"/>
               </a:rPr>
-              <a:t>more</a:t>
+              <a:t>made of; to make</a:t>
             </a:r>
             <a:endParaRPr lang="en-US" sz="850" dirty="0"/>
           </a:p>
@@ -28703,6 +29112,118 @@
       <p:sp>
         <p:nvSpPr>
           <p:cNvPr id="22" name="Shape 20"/>
+          <p:cNvSpPr/>
+          <p:nvPr/>
+        </p:nvSpPr>
+        <p:spPr>
+          <a:xfrm>
+            <a:off x="6519672" y="2258568"/>
+            <a:ext cx="1828800" cy="292608"/>
+          </a:xfrm>
+          <a:prstGeom prst="rect">
+            <a:avLst>
+              <a:gd name="adj" fmla="val 25000"/>
+            </a:avLst>
+          </a:prstGeom>
+          <a:solidFill>
+            <a:srgbClr val="FCE7F3"/>
+          </a:solidFill>
+          <a:ln w="19050">
+            <a:solidFill>
+              <a:srgbClr val="DB2777"/>
+            </a:solidFill>
+            <a:prstDash val="solid"/>
+          </a:ln>
+          <a:effectLst>
+            <a:outerShdw sx="100000" sy="100000" kx="0" ky="0" algn="bl" rotWithShape="0" blurRad="101600" dist="38100" dir="8100000">
+              <a:srgbClr val="000000">
+                <a:alpha val="12000"/>
+              </a:srgbClr>
+            </a:outerShdw>
+          </a:effectLst>
+        </p:spPr>
+      </p:sp>
+      <p:sp>
+        <p:nvSpPr>
+          <p:cNvPr id="23" name="Text 21"/>
+          <p:cNvSpPr/>
+          <p:nvPr/>
+        </p:nvSpPr>
+        <p:spPr>
+          <a:xfrm>
+            <a:off x="6519672" y="2258568"/>
+            <a:ext cx="1828800" cy="292608"/>
+          </a:xfrm>
+          <a:prstGeom prst="rect">
+            <a:avLst/>
+          </a:prstGeom>
+          <a:noFill/>
+          <a:ln/>
+        </p:spPr>
+        <p:txBody>
+          <a:bodyPr wrap="square" lIns="0" tIns="0" rIns="0" bIns="0" rtlCol="0" anchor="ctr"/>
+          <a:lstStyle/>
+          <a:p>
+            <a:pPr algn="ctr" indent="0" marL="0">
+              <a:buNone/>
+            </a:pPr>
+            <a:r>
+              <a:rPr lang="en-US" sz="1300" b="1" dirty="0">
+                <a:solidFill>
+                  <a:srgbClr val="9D174D"/>
+                </a:solidFill>
+                <a:latin typeface="Trebuchet MS" pitchFamily="34" charset="0"/>
+                <a:ea typeface="Trebuchet MS" pitchFamily="34" charset="-122"/>
+                <a:cs typeface="Trebuchet MS" pitchFamily="34" charset="-120"/>
+              </a:rPr>
+              <a:t>ing</a:t>
+            </a:r>
+            <a:endParaRPr lang="en-US" sz="1300" dirty="0"/>
+          </a:p>
+        </p:txBody>
+      </p:sp>
+      <p:sp>
+        <p:nvSpPr>
+          <p:cNvPr id="24" name="Text 22"/>
+          <p:cNvSpPr/>
+          <p:nvPr/>
+        </p:nvSpPr>
+        <p:spPr>
+          <a:xfrm>
+            <a:off x="6519672" y="2569464"/>
+            <a:ext cx="1828800" cy="201168"/>
+          </a:xfrm>
+          <a:prstGeom prst="rect">
+            <a:avLst/>
+          </a:prstGeom>
+          <a:noFill/>
+          <a:ln/>
+        </p:spPr>
+        <p:txBody>
+          <a:bodyPr wrap="square" lIns="0" tIns="0" rIns="0" bIns="0" rtlCol="0" anchor="t"/>
+          <a:lstStyle/>
+          <a:p>
+            <a:pPr algn="ctr" indent="0" marL="0">
+              <a:buNone/>
+            </a:pPr>
+            <a:r>
+              <a:rPr lang="en-US" sz="850" dirty="0">
+                <a:solidFill>
+                  <a:srgbClr val="475569"/>
+                </a:solidFill>
+                <a:latin typeface="Calibri" pitchFamily="34" charset="0"/>
+                <a:ea typeface="Calibri" pitchFamily="34" charset="-122"/>
+                <a:cs typeface="Calibri" pitchFamily="34" charset="-120"/>
+              </a:rPr>
+              <a:t>happening now</a:t>
+            </a:r>
+            <a:endParaRPr lang="en-US" sz="850" dirty="0"/>
+          </a:p>
+        </p:txBody>
+      </p:sp>
+      <p:sp>
+        <p:nvSpPr>
+          <p:cNvPr id="25" name="Shape 23"/>
           <p:cNvSpPr/>
           <p:nvPr/>
         </p:nvSpPr>
@@ -28729,7 +29250,7 @@
       </p:sp>
       <p:sp>
         <p:nvSpPr>
-          <p:cNvPr id="23" name="Text 21"/>
+          <p:cNvPr id="26" name="Text 24"/>
           <p:cNvSpPr/>
           <p:nvPr/>
         </p:nvSpPr>
@@ -28768,7 +29289,7 @@
       </p:sp>
       <p:sp>
         <p:nvSpPr>
-          <p:cNvPr id="24" name="Shape 22"/>
+          <p:cNvPr id="27" name="Shape 25"/>
           <p:cNvSpPr/>
           <p:nvPr/>
         </p:nvSpPr>
@@ -28795,7 +29316,7 @@
       </p:sp>
       <p:sp>
         <p:nvSpPr>
-          <p:cNvPr id="25" name="Text 23"/>
+          <p:cNvPr id="28" name="Text 26"/>
           <p:cNvSpPr/>
           <p:nvPr/>
         </p:nvSpPr>
@@ -28834,7 +29355,7 @@
       </p:sp>
       <p:sp>
         <p:nvSpPr>
-          <p:cNvPr id="26" name="Shape 24"/>
+          <p:cNvPr id="29" name="Shape 27"/>
           <p:cNvSpPr/>
           <p:nvPr/>
         </p:nvSpPr>
@@ -28861,7 +29382,7 @@
       </p:sp>
       <p:sp>
         <p:nvSpPr>
-          <p:cNvPr id="27" name="Text 25"/>
+          <p:cNvPr id="30" name="Text 28"/>
           <p:cNvSpPr/>
           <p:nvPr/>
         </p:nvSpPr>
@@ -28900,7 +29421,7 @@
       </p:sp>
       <p:sp>
         <p:nvSpPr>
-          <p:cNvPr id="28" name="Shape 26"/>
+          <p:cNvPr id="31" name="Shape 29"/>
           <p:cNvSpPr/>
           <p:nvPr/>
         </p:nvSpPr>
@@ -28927,7 +29448,7 @@
       </p:sp>
       <p:sp>
         <p:nvSpPr>
-          <p:cNvPr id="29" name="Text 27"/>
+          <p:cNvPr id="32" name="Text 30"/>
           <p:cNvSpPr/>
           <p:nvPr/>
         </p:nvSpPr>
@@ -29250,7 +29771,7 @@
                 <a:ea typeface="Calibri" pitchFamily="34" charset="-122"/>
                 <a:cs typeface="Calibri" pitchFamily="34" charset="-120"/>
               </a:rPr>
-              <a:t>Word Labs  •  wordlabs.app  •  Root: 'bright' = full of light, clever</a:t>
+              <a:t>Word Labs  •  wordlabs.app  •  Root: 'bright' = giving out a lot of light; clever</a:t>
             </a:r>
             <a:endParaRPr lang="en-US" sz="800" dirty="0"/>
           </a:p>
@@ -29389,7 +29910,7 @@
                 <a:ea typeface="Trebuchet MS" pitchFamily="34" charset="-122"/>
                 <a:cs typeface="Trebuchet MS" pitchFamily="34" charset="-120"/>
               </a:rPr>
-              <a:t>brighter</a:t>
+              <a:t>brightening</a:t>
             </a:r>
             <a:endParaRPr lang="en-US" sz="2800" dirty="0"/>
           </a:p>
@@ -29469,7 +29990,7 @@
         </p:nvSpPr>
         <p:spPr>
           <a:xfrm>
-            <a:off x="2938272" y="2258568"/>
+            <a:off x="2221992" y="2258568"/>
             <a:ext cx="1828800" cy="292608"/>
           </a:xfrm>
           <a:prstGeom prst="rect">
@@ -29503,7 +30024,7 @@
         </p:nvSpPr>
         <p:spPr>
           <a:xfrm>
-            <a:off x="2938272" y="2258568"/>
+            <a:off x="2221992" y="2258568"/>
             <a:ext cx="1828800" cy="292608"/>
           </a:xfrm>
           <a:prstGeom prst="rect">
@@ -29542,7 +30063,7 @@
         </p:nvSpPr>
         <p:spPr>
           <a:xfrm>
-            <a:off x="2938272" y="2569464"/>
+            <a:off x="2221992" y="2569464"/>
             <a:ext cx="1828800" cy="201168"/>
           </a:xfrm>
           <a:prstGeom prst="rect">
@@ -29567,7 +30088,7 @@
                 <a:ea typeface="Calibri" pitchFamily="34" charset="-122"/>
                 <a:cs typeface="Calibri" pitchFamily="34" charset="-120"/>
               </a:rPr>
-              <a:t>full of light, clever</a:t>
+              <a:t>giving out a lot of light; clever</a:t>
             </a:r>
             <a:endParaRPr lang="en-US" sz="850" dirty="0"/>
           </a:p>
@@ -29581,7 +30102,7 @@
         </p:nvSpPr>
         <p:spPr>
           <a:xfrm>
-            <a:off x="5803392" y="2258568"/>
+            <a:off x="4370832" y="2258568"/>
             <a:ext cx="1828800" cy="292608"/>
           </a:xfrm>
           <a:prstGeom prst="rect">
@@ -29615,7 +30136,7 @@
         </p:nvSpPr>
         <p:spPr>
           <a:xfrm>
-            <a:off x="5803392" y="2258568"/>
+            <a:off x="4370832" y="2258568"/>
             <a:ext cx="1828800" cy="292608"/>
           </a:xfrm>
           <a:prstGeom prst="rect">
@@ -29640,7 +30161,7 @@
                 <a:ea typeface="Trebuchet MS" pitchFamily="34" charset="-122"/>
                 <a:cs typeface="Trebuchet MS" pitchFamily="34" charset="-120"/>
               </a:rPr>
-              <a:t>er</a:t>
+              <a:t>en</a:t>
             </a:r>
             <a:endParaRPr lang="en-US" sz="1300" dirty="0"/>
           </a:p>
@@ -29654,7 +30175,7 @@
         </p:nvSpPr>
         <p:spPr>
           <a:xfrm>
-            <a:off x="5803392" y="2569464"/>
+            <a:off x="4370832" y="2569464"/>
             <a:ext cx="1828800" cy="201168"/>
           </a:xfrm>
           <a:prstGeom prst="rect">
@@ -29679,7 +30200,7 @@
                 <a:ea typeface="Calibri" pitchFamily="34" charset="-122"/>
                 <a:cs typeface="Calibri" pitchFamily="34" charset="-120"/>
               </a:rPr>
-              <a:t>more</a:t>
+              <a:t>made of; to make</a:t>
             </a:r>
             <a:endParaRPr lang="en-US" sz="850" dirty="0"/>
           </a:p>
@@ -29688,6 +30209,118 @@
       <p:sp>
         <p:nvSpPr>
           <p:cNvPr id="22" name="Shape 20"/>
+          <p:cNvSpPr/>
+          <p:nvPr/>
+        </p:nvSpPr>
+        <p:spPr>
+          <a:xfrm>
+            <a:off x="6519672" y="2258568"/>
+            <a:ext cx="1828800" cy="292608"/>
+          </a:xfrm>
+          <a:prstGeom prst="rect">
+            <a:avLst>
+              <a:gd name="adj" fmla="val 25000"/>
+            </a:avLst>
+          </a:prstGeom>
+          <a:solidFill>
+            <a:srgbClr val="FCE7F3"/>
+          </a:solidFill>
+          <a:ln w="19050">
+            <a:solidFill>
+              <a:srgbClr val="DB2777"/>
+            </a:solidFill>
+            <a:prstDash val="solid"/>
+          </a:ln>
+          <a:effectLst>
+            <a:outerShdw sx="100000" sy="100000" kx="0" ky="0" algn="bl" rotWithShape="0" blurRad="101600" dist="38100" dir="8100000">
+              <a:srgbClr val="000000">
+                <a:alpha val="12000"/>
+              </a:srgbClr>
+            </a:outerShdw>
+          </a:effectLst>
+        </p:spPr>
+      </p:sp>
+      <p:sp>
+        <p:nvSpPr>
+          <p:cNvPr id="23" name="Text 21"/>
+          <p:cNvSpPr/>
+          <p:nvPr/>
+        </p:nvSpPr>
+        <p:spPr>
+          <a:xfrm>
+            <a:off x="6519672" y="2258568"/>
+            <a:ext cx="1828800" cy="292608"/>
+          </a:xfrm>
+          <a:prstGeom prst="rect">
+            <a:avLst/>
+          </a:prstGeom>
+          <a:noFill/>
+          <a:ln/>
+        </p:spPr>
+        <p:txBody>
+          <a:bodyPr wrap="square" lIns="0" tIns="0" rIns="0" bIns="0" rtlCol="0" anchor="ctr"/>
+          <a:lstStyle/>
+          <a:p>
+            <a:pPr algn="ctr" indent="0" marL="0">
+              <a:buNone/>
+            </a:pPr>
+            <a:r>
+              <a:rPr lang="en-US" sz="1300" b="1" dirty="0">
+                <a:solidFill>
+                  <a:srgbClr val="9D174D"/>
+                </a:solidFill>
+                <a:latin typeface="Trebuchet MS" pitchFamily="34" charset="0"/>
+                <a:ea typeface="Trebuchet MS" pitchFamily="34" charset="-122"/>
+                <a:cs typeface="Trebuchet MS" pitchFamily="34" charset="-120"/>
+              </a:rPr>
+              <a:t>ing</a:t>
+            </a:r>
+            <a:endParaRPr lang="en-US" sz="1300" dirty="0"/>
+          </a:p>
+        </p:txBody>
+      </p:sp>
+      <p:sp>
+        <p:nvSpPr>
+          <p:cNvPr id="24" name="Text 22"/>
+          <p:cNvSpPr/>
+          <p:nvPr/>
+        </p:nvSpPr>
+        <p:spPr>
+          <a:xfrm>
+            <a:off x="6519672" y="2569464"/>
+            <a:ext cx="1828800" cy="201168"/>
+          </a:xfrm>
+          <a:prstGeom prst="rect">
+            <a:avLst/>
+          </a:prstGeom>
+          <a:noFill/>
+          <a:ln/>
+        </p:spPr>
+        <p:txBody>
+          <a:bodyPr wrap="square" lIns="0" tIns="0" rIns="0" bIns="0" rtlCol="0" anchor="t"/>
+          <a:lstStyle/>
+          <a:p>
+            <a:pPr algn="ctr" indent="0" marL="0">
+              <a:buNone/>
+            </a:pPr>
+            <a:r>
+              <a:rPr lang="en-US" sz="850" dirty="0">
+                <a:solidFill>
+                  <a:srgbClr val="475569"/>
+                </a:solidFill>
+                <a:latin typeface="Calibri" pitchFamily="34" charset="0"/>
+                <a:ea typeface="Calibri" pitchFamily="34" charset="-122"/>
+                <a:cs typeface="Calibri" pitchFamily="34" charset="-120"/>
+              </a:rPr>
+              <a:t>happening now</a:t>
+            </a:r>
+            <a:endParaRPr lang="en-US" sz="850" dirty="0"/>
+          </a:p>
+        </p:txBody>
+      </p:sp>
+      <p:sp>
+        <p:nvSpPr>
+          <p:cNvPr id="25" name="Shape 23"/>
           <p:cNvSpPr/>
           <p:nvPr/>
         </p:nvSpPr>
@@ -29714,7 +30347,7 @@
       </p:sp>
       <p:sp>
         <p:nvSpPr>
-          <p:cNvPr id="23" name="Text 21"/>
+          <p:cNvPr id="26" name="Text 24"/>
           <p:cNvSpPr/>
           <p:nvPr/>
         </p:nvSpPr>
@@ -29753,7 +30386,7 @@
       </p:sp>
       <p:sp>
         <p:nvSpPr>
-          <p:cNvPr id="24" name="Shape 22"/>
+          <p:cNvPr id="27" name="Shape 25"/>
           <p:cNvSpPr/>
           <p:nvPr/>
         </p:nvSpPr>
@@ -29780,13 +30413,13 @@
       </p:sp>
       <p:sp>
         <p:nvSpPr>
-          <p:cNvPr id="25" name="Shape 23"/>
-          <p:cNvSpPr/>
-          <p:nvPr/>
-        </p:nvSpPr>
-        <p:spPr>
-          <a:xfrm>
-            <a:off x="2999232" y="3364992"/>
+          <p:cNvPr id="28" name="Shape 26"/>
+          <p:cNvSpPr/>
+          <p:nvPr/>
+        </p:nvSpPr>
+        <p:spPr>
+          <a:xfrm>
+            <a:off x="2313432" y="3364992"/>
             <a:ext cx="1645920" cy="475488"/>
           </a:xfrm>
           <a:prstGeom prst="rect">
@@ -29807,13 +30440,13 @@
       </p:sp>
       <p:sp>
         <p:nvSpPr>
-          <p:cNvPr id="26" name="Text 24"/>
-          <p:cNvSpPr/>
-          <p:nvPr/>
-        </p:nvSpPr>
-        <p:spPr>
-          <a:xfrm>
-            <a:off x="2999232" y="3364992"/>
+          <p:cNvPr id="29" name="Text 27"/>
+          <p:cNvSpPr/>
+          <p:nvPr/>
+        </p:nvSpPr>
+        <p:spPr>
+          <a:xfrm>
+            <a:off x="2313432" y="3364992"/>
             <a:ext cx="1645920" cy="475488"/>
           </a:xfrm>
           <a:prstGeom prst="rect">
@@ -29846,14 +30479,14 @@
       </p:sp>
       <p:sp>
         <p:nvSpPr>
-          <p:cNvPr id="27" name="Text 25"/>
-          <p:cNvSpPr/>
-          <p:nvPr/>
-        </p:nvSpPr>
-        <p:spPr>
-          <a:xfrm>
-            <a:off x="4645152" y="3364992"/>
-            <a:ext cx="1097280" cy="475488"/>
+          <p:cNvPr id="30" name="Text 28"/>
+          <p:cNvSpPr/>
+          <p:nvPr/>
+        </p:nvSpPr>
+        <p:spPr>
+          <a:xfrm>
+            <a:off x="3959352" y="3364992"/>
+            <a:ext cx="411480" cy="475488"/>
           </a:xfrm>
           <a:prstGeom prst="rect">
             <a:avLst/>
@@ -29885,13 +30518,13 @@
       </p:sp>
       <p:sp>
         <p:nvSpPr>
-          <p:cNvPr id="28" name="Shape 26"/>
-          <p:cNvSpPr/>
-          <p:nvPr/>
-        </p:nvSpPr>
-        <p:spPr>
-          <a:xfrm>
-            <a:off x="5742432" y="3364992"/>
+          <p:cNvPr id="31" name="Shape 29"/>
+          <p:cNvSpPr/>
+          <p:nvPr/>
+        </p:nvSpPr>
+        <p:spPr>
+          <a:xfrm>
+            <a:off x="4370832" y="3364992"/>
             <a:ext cx="1645920" cy="475488"/>
           </a:xfrm>
           <a:prstGeom prst="rect">
@@ -29912,13 +30545,13 @@
       </p:sp>
       <p:sp>
         <p:nvSpPr>
-          <p:cNvPr id="29" name="Text 27"/>
-          <p:cNvSpPr/>
-          <p:nvPr/>
-        </p:nvSpPr>
-        <p:spPr>
-          <a:xfrm>
-            <a:off x="5742432" y="3364992"/>
+          <p:cNvPr id="32" name="Text 30"/>
+          <p:cNvSpPr/>
+          <p:nvPr/>
+        </p:nvSpPr>
+        <p:spPr>
+          <a:xfrm>
+            <a:off x="4370832" y="3364992"/>
             <a:ext cx="1645920" cy="475488"/>
           </a:xfrm>
           <a:prstGeom prst="rect">
@@ -29943,7 +30576,7 @@
                 <a:ea typeface="Trebuchet MS" pitchFamily="34" charset="-122"/>
                 <a:cs typeface="Trebuchet MS" pitchFamily="34" charset="-120"/>
               </a:rPr>
-              <a:t>er</a:t>
+              <a:t>en</a:t>
             </a:r>
             <a:endParaRPr lang="en-US" sz="1400" dirty="0"/>
           </a:p>
@@ -29951,7 +30584,112 @@
       </p:sp>
       <p:sp>
         <p:nvSpPr>
-          <p:cNvPr id="30" name="Shape 28"/>
+          <p:cNvPr id="33" name="Text 31"/>
+          <p:cNvSpPr/>
+          <p:nvPr/>
+        </p:nvSpPr>
+        <p:spPr>
+          <a:xfrm>
+            <a:off x="6016752" y="3364992"/>
+            <a:ext cx="411480" cy="475488"/>
+          </a:xfrm>
+          <a:prstGeom prst="rect">
+            <a:avLst/>
+          </a:prstGeom>
+          <a:noFill/>
+          <a:ln/>
+        </p:spPr>
+        <p:txBody>
+          <a:bodyPr wrap="square" lIns="0" tIns="0" rIns="0" bIns="0" rtlCol="0" anchor="ctr"/>
+          <a:lstStyle/>
+          <a:p>
+            <a:pPr algn="ctr" indent="0" marL="0">
+              <a:buNone/>
+            </a:pPr>
+            <a:r>
+              <a:rPr lang="en-US" sz="1600" b="1" dirty="0">
+                <a:solidFill>
+                  <a:srgbClr val="0D9488"/>
+                </a:solidFill>
+                <a:latin typeface="Trebuchet MS" pitchFamily="34" charset="0"/>
+                <a:ea typeface="Trebuchet MS" pitchFamily="34" charset="-122"/>
+                <a:cs typeface="Trebuchet MS" pitchFamily="34" charset="-120"/>
+              </a:rPr>
+              <a:t>·</a:t>
+            </a:r>
+            <a:endParaRPr lang="en-US" sz="1600" dirty="0"/>
+          </a:p>
+        </p:txBody>
+      </p:sp>
+      <p:sp>
+        <p:nvSpPr>
+          <p:cNvPr id="34" name="Shape 32"/>
+          <p:cNvSpPr/>
+          <p:nvPr/>
+        </p:nvSpPr>
+        <p:spPr>
+          <a:xfrm>
+            <a:off x="6428232" y="3364992"/>
+            <a:ext cx="1645920" cy="475488"/>
+          </a:xfrm>
+          <a:prstGeom prst="rect">
+            <a:avLst>
+              <a:gd name="adj" fmla="val 9615"/>
+            </a:avLst>
+          </a:prstGeom>
+          <a:solidFill>
+            <a:srgbClr val="FFFFFF"/>
+          </a:solidFill>
+          <a:ln w="12700">
+            <a:solidFill>
+              <a:srgbClr val="0D9488"/>
+            </a:solidFill>
+            <a:prstDash val="solid"/>
+          </a:ln>
+        </p:spPr>
+      </p:sp>
+      <p:sp>
+        <p:nvSpPr>
+          <p:cNvPr id="35" name="Text 33"/>
+          <p:cNvSpPr/>
+          <p:nvPr/>
+        </p:nvSpPr>
+        <p:spPr>
+          <a:xfrm>
+            <a:off x="6428232" y="3364992"/>
+            <a:ext cx="1645920" cy="475488"/>
+          </a:xfrm>
+          <a:prstGeom prst="rect">
+            <a:avLst/>
+          </a:prstGeom>
+          <a:noFill/>
+          <a:ln/>
+        </p:spPr>
+        <p:txBody>
+          <a:bodyPr wrap="square" lIns="0" tIns="0" rIns="0" bIns="0" rtlCol="0" anchor="ctr"/>
+          <a:lstStyle/>
+          <a:p>
+            <a:pPr algn="ctr" indent="0" marL="0">
+              <a:buNone/>
+            </a:pPr>
+            <a:r>
+              <a:rPr lang="en-US" sz="1400" b="1" dirty="0">
+                <a:solidFill>
+                  <a:srgbClr val="0D9488"/>
+                </a:solidFill>
+                <a:latin typeface="Trebuchet MS" pitchFamily="34" charset="0"/>
+                <a:ea typeface="Trebuchet MS" pitchFamily="34" charset="-122"/>
+                <a:cs typeface="Trebuchet MS" pitchFamily="34" charset="-120"/>
+              </a:rPr>
+              <a:t>ing</a:t>
+            </a:r>
+            <a:endParaRPr lang="en-US" sz="1400" dirty="0"/>
+          </a:p>
+        </p:txBody>
+      </p:sp>
+      <p:sp>
+        <p:nvSpPr>
+          <p:cNvPr id="36" name="Shape 34"/>
           <p:cNvSpPr/>
           <p:nvPr/>
         </p:nvSpPr>
@@ -29978,7 +30716,7 @@
       </p:sp>
       <p:sp>
         <p:nvSpPr>
-          <p:cNvPr id="31" name="Text 29"/>
+          <p:cNvPr id="37" name="Text 35"/>
           <p:cNvSpPr/>
           <p:nvPr/>
         </p:nvSpPr>
@@ -30017,7 +30755,7 @@
       </p:sp>
       <p:sp>
         <p:nvSpPr>
-          <p:cNvPr id="32" name="Shape 30"/>
+          <p:cNvPr id="38" name="Shape 36"/>
           <p:cNvSpPr/>
           <p:nvPr/>
         </p:nvSpPr>
@@ -30044,7 +30782,7 @@
       </p:sp>
       <p:sp>
         <p:nvSpPr>
-          <p:cNvPr id="33" name="Text 31"/>
+          <p:cNvPr id="39" name="Text 37"/>
           <p:cNvSpPr/>
           <p:nvPr/>
         </p:nvSpPr>
@@ -30367,7 +31105,7 @@
                 <a:ea typeface="Calibri" pitchFamily="34" charset="-122"/>
                 <a:cs typeface="Calibri" pitchFamily="34" charset="-120"/>
               </a:rPr>
-              <a:t>Word Labs  •  wordlabs.app  •  Root: 'bright' = full of light, clever</a:t>
+              <a:t>Word Labs  •  wordlabs.app  •  Root: 'bright' = giving out a lot of light; clever</a:t>
             </a:r>
             <a:endParaRPr lang="en-US" sz="800" dirty="0"/>
           </a:p>
@@ -30506,7 +31244,7 @@
                 <a:ea typeface="Trebuchet MS" pitchFamily="34" charset="-122"/>
                 <a:cs typeface="Trebuchet MS" pitchFamily="34" charset="-120"/>
               </a:rPr>
-              <a:t>brighter</a:t>
+              <a:t>brightening</a:t>
             </a:r>
             <a:endParaRPr lang="en-US" sz="2800" dirty="0"/>
           </a:p>
@@ -30586,7 +31324,7 @@
         </p:nvSpPr>
         <p:spPr>
           <a:xfrm>
-            <a:off x="2938272" y="2258568"/>
+            <a:off x="2221992" y="2258568"/>
             <a:ext cx="1828800" cy="292608"/>
           </a:xfrm>
           <a:prstGeom prst="rect">
@@ -30620,7 +31358,7 @@
         </p:nvSpPr>
         <p:spPr>
           <a:xfrm>
-            <a:off x="2938272" y="2258568"/>
+            <a:off x="2221992" y="2258568"/>
             <a:ext cx="1828800" cy="292608"/>
           </a:xfrm>
           <a:prstGeom prst="rect">
@@ -30659,7 +31397,7 @@
         </p:nvSpPr>
         <p:spPr>
           <a:xfrm>
-            <a:off x="2938272" y="2569464"/>
+            <a:off x="2221992" y="2569464"/>
             <a:ext cx="1828800" cy="201168"/>
           </a:xfrm>
           <a:prstGeom prst="rect">
@@ -30684,7 +31422,7 @@
                 <a:ea typeface="Calibri" pitchFamily="34" charset="-122"/>
                 <a:cs typeface="Calibri" pitchFamily="34" charset="-120"/>
               </a:rPr>
-              <a:t>full of light, clever</a:t>
+              <a:t>giving out a lot of light; clever</a:t>
             </a:r>
             <a:endParaRPr lang="en-US" sz="850" dirty="0"/>
           </a:p>
@@ -30698,7 +31436,7 @@
         </p:nvSpPr>
         <p:spPr>
           <a:xfrm>
-            <a:off x="5803392" y="2258568"/>
+            <a:off x="4370832" y="2258568"/>
             <a:ext cx="1828800" cy="292608"/>
           </a:xfrm>
           <a:prstGeom prst="rect">
@@ -30732,7 +31470,7 @@
         </p:nvSpPr>
         <p:spPr>
           <a:xfrm>
-            <a:off x="5803392" y="2258568"/>
+            <a:off x="4370832" y="2258568"/>
             <a:ext cx="1828800" cy="292608"/>
           </a:xfrm>
           <a:prstGeom prst="rect">
@@ -30757,7 +31495,7 @@
                 <a:ea typeface="Trebuchet MS" pitchFamily="34" charset="-122"/>
                 <a:cs typeface="Trebuchet MS" pitchFamily="34" charset="-120"/>
               </a:rPr>
-              <a:t>er</a:t>
+              <a:t>en</a:t>
             </a:r>
             <a:endParaRPr lang="en-US" sz="1300" dirty="0"/>
           </a:p>
@@ -30771,7 +31509,7 @@
         </p:nvSpPr>
         <p:spPr>
           <a:xfrm>
-            <a:off x="5803392" y="2569464"/>
+            <a:off x="4370832" y="2569464"/>
             <a:ext cx="1828800" cy="201168"/>
           </a:xfrm>
           <a:prstGeom prst="rect">
@@ -30796,7 +31534,7 @@
                 <a:ea typeface="Calibri" pitchFamily="34" charset="-122"/>
                 <a:cs typeface="Calibri" pitchFamily="34" charset="-120"/>
               </a:rPr>
-              <a:t>more</a:t>
+              <a:t>made of; to make</a:t>
             </a:r>
             <a:endParaRPr lang="en-US" sz="850" dirty="0"/>
           </a:p>
@@ -30805,6 +31543,118 @@
       <p:sp>
         <p:nvSpPr>
           <p:cNvPr id="22" name="Shape 20"/>
+          <p:cNvSpPr/>
+          <p:nvPr/>
+        </p:nvSpPr>
+        <p:spPr>
+          <a:xfrm>
+            <a:off x="6519672" y="2258568"/>
+            <a:ext cx="1828800" cy="292608"/>
+          </a:xfrm>
+          <a:prstGeom prst="rect">
+            <a:avLst>
+              <a:gd name="adj" fmla="val 25000"/>
+            </a:avLst>
+          </a:prstGeom>
+          <a:solidFill>
+            <a:srgbClr val="FCE7F3"/>
+          </a:solidFill>
+          <a:ln w="19050">
+            <a:solidFill>
+              <a:srgbClr val="DB2777"/>
+            </a:solidFill>
+            <a:prstDash val="solid"/>
+          </a:ln>
+          <a:effectLst>
+            <a:outerShdw sx="100000" sy="100000" kx="0" ky="0" algn="bl" rotWithShape="0" blurRad="101600" dist="38100" dir="8100000">
+              <a:srgbClr val="000000">
+                <a:alpha val="12000"/>
+              </a:srgbClr>
+            </a:outerShdw>
+          </a:effectLst>
+        </p:spPr>
+      </p:sp>
+      <p:sp>
+        <p:nvSpPr>
+          <p:cNvPr id="23" name="Text 21"/>
+          <p:cNvSpPr/>
+          <p:nvPr/>
+        </p:nvSpPr>
+        <p:spPr>
+          <a:xfrm>
+            <a:off x="6519672" y="2258568"/>
+            <a:ext cx="1828800" cy="292608"/>
+          </a:xfrm>
+          <a:prstGeom prst="rect">
+            <a:avLst/>
+          </a:prstGeom>
+          <a:noFill/>
+          <a:ln/>
+        </p:spPr>
+        <p:txBody>
+          <a:bodyPr wrap="square" lIns="0" tIns="0" rIns="0" bIns="0" rtlCol="0" anchor="ctr"/>
+          <a:lstStyle/>
+          <a:p>
+            <a:pPr algn="ctr" indent="0" marL="0">
+              <a:buNone/>
+            </a:pPr>
+            <a:r>
+              <a:rPr lang="en-US" sz="1300" b="1" dirty="0">
+                <a:solidFill>
+                  <a:srgbClr val="9D174D"/>
+                </a:solidFill>
+                <a:latin typeface="Trebuchet MS" pitchFamily="34" charset="0"/>
+                <a:ea typeface="Trebuchet MS" pitchFamily="34" charset="-122"/>
+                <a:cs typeface="Trebuchet MS" pitchFamily="34" charset="-120"/>
+              </a:rPr>
+              <a:t>ing</a:t>
+            </a:r>
+            <a:endParaRPr lang="en-US" sz="1300" dirty="0"/>
+          </a:p>
+        </p:txBody>
+      </p:sp>
+      <p:sp>
+        <p:nvSpPr>
+          <p:cNvPr id="24" name="Text 22"/>
+          <p:cNvSpPr/>
+          <p:nvPr/>
+        </p:nvSpPr>
+        <p:spPr>
+          <a:xfrm>
+            <a:off x="6519672" y="2569464"/>
+            <a:ext cx="1828800" cy="201168"/>
+          </a:xfrm>
+          <a:prstGeom prst="rect">
+            <a:avLst/>
+          </a:prstGeom>
+          <a:noFill/>
+          <a:ln/>
+        </p:spPr>
+        <p:txBody>
+          <a:bodyPr wrap="square" lIns="0" tIns="0" rIns="0" bIns="0" rtlCol="0" anchor="t"/>
+          <a:lstStyle/>
+          <a:p>
+            <a:pPr algn="ctr" indent="0" marL="0">
+              <a:buNone/>
+            </a:pPr>
+            <a:r>
+              <a:rPr lang="en-US" sz="850" dirty="0">
+                <a:solidFill>
+                  <a:srgbClr val="475569"/>
+                </a:solidFill>
+                <a:latin typeface="Calibri" pitchFamily="34" charset="0"/>
+                <a:ea typeface="Calibri" pitchFamily="34" charset="-122"/>
+                <a:cs typeface="Calibri" pitchFamily="34" charset="-120"/>
+              </a:rPr>
+              <a:t>happening now</a:t>
+            </a:r>
+            <a:endParaRPr lang="en-US" sz="850" dirty="0"/>
+          </a:p>
+        </p:txBody>
+      </p:sp>
+      <p:sp>
+        <p:nvSpPr>
+          <p:cNvPr id="25" name="Shape 23"/>
           <p:cNvSpPr/>
           <p:nvPr/>
         </p:nvSpPr>
@@ -30831,7 +31681,7 @@
       </p:sp>
       <p:sp>
         <p:nvSpPr>
-          <p:cNvPr id="23" name="Text 21"/>
+          <p:cNvPr id="26" name="Text 24"/>
           <p:cNvSpPr/>
           <p:nvPr/>
         </p:nvSpPr>
@@ -30870,7 +31720,7 @@
       </p:sp>
       <p:sp>
         <p:nvSpPr>
-          <p:cNvPr id="24" name="Shape 22"/>
+          <p:cNvPr id="27" name="Shape 25"/>
           <p:cNvSpPr/>
           <p:nvPr/>
         </p:nvSpPr>
@@ -30897,13 +31747,13 @@
       </p:sp>
       <p:sp>
         <p:nvSpPr>
-          <p:cNvPr id="25" name="Shape 23"/>
-          <p:cNvSpPr/>
-          <p:nvPr/>
-        </p:nvSpPr>
-        <p:spPr>
-          <a:xfrm>
-            <a:off x="2999232" y="3364992"/>
+          <p:cNvPr id="28" name="Shape 26"/>
+          <p:cNvSpPr/>
+          <p:nvPr/>
+        </p:nvSpPr>
+        <p:spPr>
+          <a:xfrm>
+            <a:off x="2313432" y="3364992"/>
             <a:ext cx="1645920" cy="475488"/>
           </a:xfrm>
           <a:prstGeom prst="rect">
@@ -30924,13 +31774,13 @@
       </p:sp>
       <p:sp>
         <p:nvSpPr>
-          <p:cNvPr id="26" name="Text 24"/>
-          <p:cNvSpPr/>
-          <p:nvPr/>
-        </p:nvSpPr>
-        <p:spPr>
-          <a:xfrm>
-            <a:off x="2999232" y="3364992"/>
+          <p:cNvPr id="29" name="Text 27"/>
+          <p:cNvSpPr/>
+          <p:nvPr/>
+        </p:nvSpPr>
+        <p:spPr>
+          <a:xfrm>
+            <a:off x="2313432" y="3364992"/>
             <a:ext cx="1645920" cy="475488"/>
           </a:xfrm>
           <a:prstGeom prst="rect">
@@ -30963,14 +31813,14 @@
       </p:sp>
       <p:sp>
         <p:nvSpPr>
-          <p:cNvPr id="27" name="Text 25"/>
-          <p:cNvSpPr/>
-          <p:nvPr/>
-        </p:nvSpPr>
-        <p:spPr>
-          <a:xfrm>
-            <a:off x="4645152" y="3364992"/>
-            <a:ext cx="1097280" cy="475488"/>
+          <p:cNvPr id="30" name="Text 28"/>
+          <p:cNvSpPr/>
+          <p:nvPr/>
+        </p:nvSpPr>
+        <p:spPr>
+          <a:xfrm>
+            <a:off x="3959352" y="3364992"/>
+            <a:ext cx="411480" cy="475488"/>
           </a:xfrm>
           <a:prstGeom prst="rect">
             <a:avLst/>
@@ -31002,13 +31852,13 @@
       </p:sp>
       <p:sp>
         <p:nvSpPr>
-          <p:cNvPr id="28" name="Shape 26"/>
-          <p:cNvSpPr/>
-          <p:nvPr/>
-        </p:nvSpPr>
-        <p:spPr>
-          <a:xfrm>
-            <a:off x="5742432" y="3364992"/>
+          <p:cNvPr id="31" name="Shape 29"/>
+          <p:cNvSpPr/>
+          <p:nvPr/>
+        </p:nvSpPr>
+        <p:spPr>
+          <a:xfrm>
+            <a:off x="4370832" y="3364992"/>
             <a:ext cx="1645920" cy="475488"/>
           </a:xfrm>
           <a:prstGeom prst="rect">
@@ -31029,13 +31879,13 @@
       </p:sp>
       <p:sp>
         <p:nvSpPr>
-          <p:cNvPr id="29" name="Text 27"/>
-          <p:cNvSpPr/>
-          <p:nvPr/>
-        </p:nvSpPr>
-        <p:spPr>
-          <a:xfrm>
-            <a:off x="5742432" y="3364992"/>
+          <p:cNvPr id="32" name="Text 30"/>
+          <p:cNvSpPr/>
+          <p:nvPr/>
+        </p:nvSpPr>
+        <p:spPr>
+          <a:xfrm>
+            <a:off x="4370832" y="3364992"/>
             <a:ext cx="1645920" cy="475488"/>
           </a:xfrm>
           <a:prstGeom prst="rect">
@@ -31060,7 +31910,7 @@
                 <a:ea typeface="Trebuchet MS" pitchFamily="34" charset="-122"/>
                 <a:cs typeface="Trebuchet MS" pitchFamily="34" charset="-120"/>
               </a:rPr>
-              <a:t>er</a:t>
+              <a:t>en</a:t>
             </a:r>
             <a:endParaRPr lang="en-US" sz="1400" dirty="0"/>
           </a:p>
@@ -31068,7 +31918,112 @@
       </p:sp>
       <p:sp>
         <p:nvSpPr>
-          <p:cNvPr id="30" name="Shape 28"/>
+          <p:cNvPr id="33" name="Text 31"/>
+          <p:cNvSpPr/>
+          <p:nvPr/>
+        </p:nvSpPr>
+        <p:spPr>
+          <a:xfrm>
+            <a:off x="6016752" y="3364992"/>
+            <a:ext cx="411480" cy="475488"/>
+          </a:xfrm>
+          <a:prstGeom prst="rect">
+            <a:avLst/>
+          </a:prstGeom>
+          <a:noFill/>
+          <a:ln/>
+        </p:spPr>
+        <p:txBody>
+          <a:bodyPr wrap="square" lIns="0" tIns="0" rIns="0" bIns="0" rtlCol="0" anchor="ctr"/>
+          <a:lstStyle/>
+          <a:p>
+            <a:pPr algn="ctr" indent="0" marL="0">
+              <a:buNone/>
+            </a:pPr>
+            <a:r>
+              <a:rPr lang="en-US" sz="1600" b="1" dirty="0">
+                <a:solidFill>
+                  <a:srgbClr val="0D9488"/>
+                </a:solidFill>
+                <a:latin typeface="Trebuchet MS" pitchFamily="34" charset="0"/>
+                <a:ea typeface="Trebuchet MS" pitchFamily="34" charset="-122"/>
+                <a:cs typeface="Trebuchet MS" pitchFamily="34" charset="-120"/>
+              </a:rPr>
+              <a:t>·</a:t>
+            </a:r>
+            <a:endParaRPr lang="en-US" sz="1600" dirty="0"/>
+          </a:p>
+        </p:txBody>
+      </p:sp>
+      <p:sp>
+        <p:nvSpPr>
+          <p:cNvPr id="34" name="Shape 32"/>
+          <p:cNvSpPr/>
+          <p:nvPr/>
+        </p:nvSpPr>
+        <p:spPr>
+          <a:xfrm>
+            <a:off x="6428232" y="3364992"/>
+            <a:ext cx="1645920" cy="475488"/>
+          </a:xfrm>
+          <a:prstGeom prst="rect">
+            <a:avLst>
+              <a:gd name="adj" fmla="val 9615"/>
+            </a:avLst>
+          </a:prstGeom>
+          <a:solidFill>
+            <a:srgbClr val="FFFFFF"/>
+          </a:solidFill>
+          <a:ln w="12700">
+            <a:solidFill>
+              <a:srgbClr val="0D9488"/>
+            </a:solidFill>
+            <a:prstDash val="solid"/>
+          </a:ln>
+        </p:spPr>
+      </p:sp>
+      <p:sp>
+        <p:nvSpPr>
+          <p:cNvPr id="35" name="Text 33"/>
+          <p:cNvSpPr/>
+          <p:nvPr/>
+        </p:nvSpPr>
+        <p:spPr>
+          <a:xfrm>
+            <a:off x="6428232" y="3364992"/>
+            <a:ext cx="1645920" cy="475488"/>
+          </a:xfrm>
+          <a:prstGeom prst="rect">
+            <a:avLst/>
+          </a:prstGeom>
+          <a:noFill/>
+          <a:ln/>
+        </p:spPr>
+        <p:txBody>
+          <a:bodyPr wrap="square" lIns="0" tIns="0" rIns="0" bIns="0" rtlCol="0" anchor="ctr"/>
+          <a:lstStyle/>
+          <a:p>
+            <a:pPr algn="ctr" indent="0" marL="0">
+              <a:buNone/>
+            </a:pPr>
+            <a:r>
+              <a:rPr lang="en-US" sz="1400" b="1" dirty="0">
+                <a:solidFill>
+                  <a:srgbClr val="0D9488"/>
+                </a:solidFill>
+                <a:latin typeface="Trebuchet MS" pitchFamily="34" charset="0"/>
+                <a:ea typeface="Trebuchet MS" pitchFamily="34" charset="-122"/>
+                <a:cs typeface="Trebuchet MS" pitchFamily="34" charset="-120"/>
+              </a:rPr>
+              <a:t>ing</a:t>
+            </a:r>
+            <a:endParaRPr lang="en-US" sz="1400" dirty="0"/>
+          </a:p>
+        </p:txBody>
+      </p:sp>
+      <p:sp>
+        <p:nvSpPr>
+          <p:cNvPr id="36" name="Shape 34"/>
           <p:cNvSpPr/>
           <p:nvPr/>
         </p:nvSpPr>
@@ -31095,7 +32050,7 @@
       </p:sp>
       <p:sp>
         <p:nvSpPr>
-          <p:cNvPr id="31" name="Text 29"/>
+          <p:cNvPr id="37" name="Text 35"/>
           <p:cNvSpPr/>
           <p:nvPr/>
         </p:nvSpPr>
@@ -31134,18 +32089,18 @@
       </p:sp>
       <p:sp>
         <p:nvSpPr>
-          <p:cNvPr id="32" name="Shape 30"/>
+          <p:cNvPr id="38" name="Shape 36"/>
           <p:cNvSpPr/>
           <p:nvPr/>
         </p:nvSpPr>
         <p:spPr>
           <a:xfrm>
             <a:off x="1874520" y="4096512"/>
-            <a:ext cx="6903720" cy="804672"/>
+            <a:ext cx="6903720" cy="658368"/>
           </a:xfrm>
           <a:prstGeom prst="rect">
             <a:avLst>
-              <a:gd name="adj" fmla="val 6818"/>
+              <a:gd name="adj" fmla="val 8333"/>
             </a:avLst>
           </a:prstGeom>
           <a:solidFill>
@@ -31161,18 +32116,18 @@
       </p:sp>
       <p:sp>
         <p:nvSpPr>
-          <p:cNvPr id="33" name="Shape 31"/>
-          <p:cNvSpPr/>
-          <p:nvPr/>
-        </p:nvSpPr>
-        <p:spPr>
-          <a:xfrm>
-            <a:off x="2427732" y="4169664"/>
-            <a:ext cx="685800" cy="384048"/>
+          <p:cNvPr id="39" name="Shape 37"/>
+          <p:cNvSpPr/>
+          <p:nvPr/>
+        </p:nvSpPr>
+        <p:spPr>
+          <a:xfrm>
+            <a:off x="2023872" y="4169664"/>
+            <a:ext cx="685800" cy="475488"/>
           </a:xfrm>
           <a:prstGeom prst="rect">
             <a:avLst>
-              <a:gd name="adj" fmla="val 9524"/>
+              <a:gd name="adj" fmla="val 7692"/>
             </a:avLst>
           </a:prstGeom>
           <a:solidFill>
@@ -31188,14 +32143,14 @@
       </p:sp>
       <p:sp>
         <p:nvSpPr>
-          <p:cNvPr id="34" name="Text 32"/>
-          <p:cNvSpPr/>
-          <p:nvPr/>
-        </p:nvSpPr>
-        <p:spPr>
-          <a:xfrm>
-            <a:off x="2427732" y="4169664"/>
-            <a:ext cx="685800" cy="384048"/>
+          <p:cNvPr id="40" name="Text 38"/>
+          <p:cNvSpPr/>
+          <p:nvPr/>
+        </p:nvSpPr>
+        <p:spPr>
+          <a:xfrm>
+            <a:off x="2023872" y="4169664"/>
+            <a:ext cx="685800" cy="475488"/>
           </a:xfrm>
           <a:prstGeom prst="rect">
             <a:avLst/>
@@ -31227,18 +32182,18 @@
       </p:sp>
       <p:sp>
         <p:nvSpPr>
-          <p:cNvPr id="35" name="Shape 33"/>
-          <p:cNvSpPr/>
-          <p:nvPr/>
-        </p:nvSpPr>
-        <p:spPr>
-          <a:xfrm>
-            <a:off x="3639312" y="4169664"/>
-            <a:ext cx="685800" cy="384048"/>
+          <p:cNvPr id="41" name="Shape 39"/>
+          <p:cNvSpPr/>
+          <p:nvPr/>
+        </p:nvSpPr>
+        <p:spPr>
+          <a:xfrm>
+            <a:off x="2831592" y="4169664"/>
+            <a:ext cx="685800" cy="475488"/>
           </a:xfrm>
           <a:prstGeom prst="rect">
             <a:avLst>
-              <a:gd name="adj" fmla="val 9524"/>
+              <a:gd name="adj" fmla="val 7692"/>
             </a:avLst>
           </a:prstGeom>
           <a:solidFill>
@@ -31254,14 +32209,14 @@
       </p:sp>
       <p:sp>
         <p:nvSpPr>
-          <p:cNvPr id="36" name="Text 34"/>
-          <p:cNvSpPr/>
-          <p:nvPr/>
-        </p:nvSpPr>
-        <p:spPr>
-          <a:xfrm>
-            <a:off x="3639312" y="4169664"/>
-            <a:ext cx="685800" cy="384048"/>
+          <p:cNvPr id="42" name="Text 40"/>
+          <p:cNvSpPr/>
+          <p:nvPr/>
+        </p:nvSpPr>
+        <p:spPr>
+          <a:xfrm>
+            <a:off x="2831592" y="4169664"/>
+            <a:ext cx="685800" cy="475488"/>
           </a:xfrm>
           <a:prstGeom prst="rect">
             <a:avLst/>
@@ -31293,18 +32248,18 @@
       </p:sp>
       <p:sp>
         <p:nvSpPr>
-          <p:cNvPr id="37" name="Shape 35"/>
-          <p:cNvSpPr/>
-          <p:nvPr/>
-        </p:nvSpPr>
-        <p:spPr>
-          <a:xfrm>
-            <a:off x="4850892" y="4169664"/>
-            <a:ext cx="685800" cy="384048"/>
+          <p:cNvPr id="43" name="Shape 41"/>
+          <p:cNvSpPr/>
+          <p:nvPr/>
+        </p:nvSpPr>
+        <p:spPr>
+          <a:xfrm>
+            <a:off x="3639312" y="4169664"/>
+            <a:ext cx="685800" cy="475488"/>
           </a:xfrm>
           <a:prstGeom prst="rect">
             <a:avLst>
-              <a:gd name="adj" fmla="val 9524"/>
+              <a:gd name="adj" fmla="val 7692"/>
             </a:avLst>
           </a:prstGeom>
           <a:solidFill>
@@ -31320,14 +32275,14 @@
       </p:sp>
       <p:sp>
         <p:nvSpPr>
-          <p:cNvPr id="38" name="Text 36"/>
-          <p:cNvSpPr/>
-          <p:nvPr/>
-        </p:nvSpPr>
-        <p:spPr>
-          <a:xfrm>
-            <a:off x="4850892" y="4169664"/>
-            <a:ext cx="685800" cy="384048"/>
+          <p:cNvPr id="44" name="Text 42"/>
+          <p:cNvSpPr/>
+          <p:nvPr/>
+        </p:nvSpPr>
+        <p:spPr>
+          <a:xfrm>
+            <a:off x="3639312" y="4169664"/>
+            <a:ext cx="685800" cy="475488"/>
           </a:xfrm>
           <a:prstGeom prst="rect">
             <a:avLst/>
@@ -31359,57 +32314,18 @@
       </p:sp>
       <p:sp>
         <p:nvSpPr>
-          <p:cNvPr id="39" name="Text 37"/>
-          <p:cNvSpPr/>
-          <p:nvPr/>
-        </p:nvSpPr>
-        <p:spPr>
-          <a:xfrm>
-            <a:off x="4850892" y="4572000"/>
-            <a:ext cx="685800" cy="219456"/>
-          </a:xfrm>
-          <a:prstGeom prst="rect">
-            <a:avLst/>
-          </a:prstGeom>
-          <a:noFill/>
-          <a:ln/>
-        </p:spPr>
-        <p:txBody>
-          <a:bodyPr wrap="square" lIns="0" tIns="0" rIns="0" bIns="0" rtlCol="0" anchor="t"/>
-          <a:lstStyle/>
-          <a:p>
-            <a:pPr algn="ctr" indent="0" marL="0">
-              <a:buNone/>
-            </a:pPr>
-            <a:r>
-              <a:rPr lang="en-US" sz="750" i="1" dirty="0">
-                <a:solidFill>
-                  <a:srgbClr val="94A3B8"/>
-                </a:solidFill>
-                <a:latin typeface="Calibri" pitchFamily="34" charset="0"/>
-                <a:ea typeface="Calibri" pitchFamily="34" charset="-122"/>
-                <a:cs typeface="Calibri" pitchFamily="34" charset="-120"/>
-              </a:rPr>
-              <a:t>/ie/</a:t>
-            </a:r>
-            <a:endParaRPr lang="en-US" sz="750" dirty="0"/>
-          </a:p>
-        </p:txBody>
-      </p:sp>
-      <p:sp>
-        <p:nvSpPr>
-          <p:cNvPr id="40" name="Shape 38"/>
-          <p:cNvSpPr/>
-          <p:nvPr/>
-        </p:nvSpPr>
-        <p:spPr>
-          <a:xfrm>
-            <a:off x="6062472" y="4169664"/>
-            <a:ext cx="685800" cy="384048"/>
+          <p:cNvPr id="45" name="Shape 43"/>
+          <p:cNvSpPr/>
+          <p:nvPr/>
+        </p:nvSpPr>
+        <p:spPr>
+          <a:xfrm>
+            <a:off x="4447032" y="4169664"/>
+            <a:ext cx="685800" cy="475488"/>
           </a:xfrm>
           <a:prstGeom prst="rect">
             <a:avLst>
-              <a:gd name="adj" fmla="val 9524"/>
+              <a:gd name="adj" fmla="val 7692"/>
             </a:avLst>
           </a:prstGeom>
           <a:solidFill>
@@ -31425,14 +32341,14 @@
       </p:sp>
       <p:sp>
         <p:nvSpPr>
-          <p:cNvPr id="41" name="Text 39"/>
-          <p:cNvSpPr/>
-          <p:nvPr/>
-        </p:nvSpPr>
-        <p:spPr>
-          <a:xfrm>
-            <a:off x="6062472" y="4169664"/>
-            <a:ext cx="685800" cy="384048"/>
+          <p:cNvPr id="46" name="Text 44"/>
+          <p:cNvSpPr/>
+          <p:nvPr/>
+        </p:nvSpPr>
+        <p:spPr>
+          <a:xfrm>
+            <a:off x="4447032" y="4169664"/>
+            <a:ext cx="685800" cy="475488"/>
           </a:xfrm>
           <a:prstGeom prst="rect">
             <a:avLst/>
@@ -31464,18 +32380,18 @@
       </p:sp>
       <p:sp>
         <p:nvSpPr>
-          <p:cNvPr id="42" name="Shape 40"/>
-          <p:cNvSpPr/>
-          <p:nvPr/>
-        </p:nvSpPr>
-        <p:spPr>
-          <a:xfrm>
-            <a:off x="7274052" y="4169664"/>
-            <a:ext cx="685800" cy="384048"/>
+          <p:cNvPr id="47" name="Shape 45"/>
+          <p:cNvSpPr/>
+          <p:nvPr/>
+        </p:nvSpPr>
+        <p:spPr>
+          <a:xfrm>
+            <a:off x="5254752" y="4169664"/>
+            <a:ext cx="685800" cy="475488"/>
           </a:xfrm>
           <a:prstGeom prst="rect">
             <a:avLst>
-              <a:gd name="adj" fmla="val 9524"/>
+              <a:gd name="adj" fmla="val 7692"/>
             </a:avLst>
           </a:prstGeom>
           <a:solidFill>
@@ -31491,14 +32407,14 @@
       </p:sp>
       <p:sp>
         <p:nvSpPr>
-          <p:cNvPr id="43" name="Text 41"/>
-          <p:cNvSpPr/>
-          <p:nvPr/>
-        </p:nvSpPr>
-        <p:spPr>
-          <a:xfrm>
-            <a:off x="7274052" y="4169664"/>
-            <a:ext cx="685800" cy="384048"/>
+          <p:cNvPr id="48" name="Text 46"/>
+          <p:cNvSpPr/>
+          <p:nvPr/>
+        </p:nvSpPr>
+        <p:spPr>
+          <a:xfrm>
+            <a:off x="5254752" y="4169664"/>
+            <a:ext cx="685800" cy="475488"/>
           </a:xfrm>
           <a:prstGeom prst="rect">
             <a:avLst/>
@@ -31522,7 +32438,205 @@
                 <a:ea typeface="Trebuchet MS" pitchFamily="34" charset="-122"/>
                 <a:cs typeface="Trebuchet MS" pitchFamily="34" charset="-120"/>
               </a:rPr>
-              <a:t>er</a:t>
+              <a:t>e</a:t>
+            </a:r>
+            <a:endParaRPr lang="en-US" sz="900" dirty="0"/>
+          </a:p>
+        </p:txBody>
+      </p:sp>
+      <p:sp>
+        <p:nvSpPr>
+          <p:cNvPr id="49" name="Shape 47"/>
+          <p:cNvSpPr/>
+          <p:nvPr/>
+        </p:nvSpPr>
+        <p:spPr>
+          <a:xfrm>
+            <a:off x="6062472" y="4169664"/>
+            <a:ext cx="685800" cy="475488"/>
+          </a:xfrm>
+          <a:prstGeom prst="rect">
+            <a:avLst>
+              <a:gd name="adj" fmla="val 7692"/>
+            </a:avLst>
+          </a:prstGeom>
+          <a:solidFill>
+            <a:srgbClr val="FFFFFF"/>
+          </a:solidFill>
+          <a:ln w="12700">
+            <a:solidFill>
+              <a:srgbClr val="DB2777"/>
+            </a:solidFill>
+            <a:prstDash val="solid"/>
+          </a:ln>
+        </p:spPr>
+      </p:sp>
+      <p:sp>
+        <p:nvSpPr>
+          <p:cNvPr id="50" name="Text 48"/>
+          <p:cNvSpPr/>
+          <p:nvPr/>
+        </p:nvSpPr>
+        <p:spPr>
+          <a:xfrm>
+            <a:off x="6062472" y="4169664"/>
+            <a:ext cx="685800" cy="475488"/>
+          </a:xfrm>
+          <a:prstGeom prst="rect">
+            <a:avLst/>
+          </a:prstGeom>
+          <a:noFill/>
+          <a:ln/>
+        </p:spPr>
+        <p:txBody>
+          <a:bodyPr wrap="square" lIns="0" tIns="0" rIns="0" bIns="0" rtlCol="0" anchor="ctr"/>
+          <a:lstStyle/>
+          <a:p>
+            <a:pPr algn="ctr" indent="0" marL="0">
+              <a:buNone/>
+            </a:pPr>
+            <a:r>
+              <a:rPr lang="en-US" sz="900" b="1" dirty="0">
+                <a:solidFill>
+                  <a:srgbClr val="9D174D"/>
+                </a:solidFill>
+                <a:latin typeface="Trebuchet MS" pitchFamily="34" charset="0"/>
+                <a:ea typeface="Trebuchet MS" pitchFamily="34" charset="-122"/>
+                <a:cs typeface="Trebuchet MS" pitchFamily="34" charset="-120"/>
+              </a:rPr>
+              <a:t>n</a:t>
+            </a:r>
+            <a:endParaRPr lang="en-US" sz="900" dirty="0"/>
+          </a:p>
+        </p:txBody>
+      </p:sp>
+      <p:sp>
+        <p:nvSpPr>
+          <p:cNvPr id="51" name="Shape 49"/>
+          <p:cNvSpPr/>
+          <p:nvPr/>
+        </p:nvSpPr>
+        <p:spPr>
+          <a:xfrm>
+            <a:off x="6870192" y="4169664"/>
+            <a:ext cx="685800" cy="475488"/>
+          </a:xfrm>
+          <a:prstGeom prst="rect">
+            <a:avLst>
+              <a:gd name="adj" fmla="val 7692"/>
+            </a:avLst>
+          </a:prstGeom>
+          <a:solidFill>
+            <a:srgbClr val="FFFFFF"/>
+          </a:solidFill>
+          <a:ln w="12700">
+            <a:solidFill>
+              <a:srgbClr val="DB2777"/>
+            </a:solidFill>
+            <a:prstDash val="solid"/>
+          </a:ln>
+        </p:spPr>
+      </p:sp>
+      <p:sp>
+        <p:nvSpPr>
+          <p:cNvPr id="52" name="Text 50"/>
+          <p:cNvSpPr/>
+          <p:nvPr/>
+        </p:nvSpPr>
+        <p:spPr>
+          <a:xfrm>
+            <a:off x="6870192" y="4169664"/>
+            <a:ext cx="685800" cy="475488"/>
+          </a:xfrm>
+          <a:prstGeom prst="rect">
+            <a:avLst/>
+          </a:prstGeom>
+          <a:noFill/>
+          <a:ln/>
+        </p:spPr>
+        <p:txBody>
+          <a:bodyPr wrap="square" lIns="0" tIns="0" rIns="0" bIns="0" rtlCol="0" anchor="ctr"/>
+          <a:lstStyle/>
+          <a:p>
+            <a:pPr algn="ctr" indent="0" marL="0">
+              <a:buNone/>
+            </a:pPr>
+            <a:r>
+              <a:rPr lang="en-US" sz="900" b="1" dirty="0">
+                <a:solidFill>
+                  <a:srgbClr val="9D174D"/>
+                </a:solidFill>
+                <a:latin typeface="Trebuchet MS" pitchFamily="34" charset="0"/>
+                <a:ea typeface="Trebuchet MS" pitchFamily="34" charset="-122"/>
+                <a:cs typeface="Trebuchet MS" pitchFamily="34" charset="-120"/>
+              </a:rPr>
+              <a:t>i</a:t>
+            </a:r>
+            <a:endParaRPr lang="en-US" sz="900" dirty="0"/>
+          </a:p>
+        </p:txBody>
+      </p:sp>
+      <p:sp>
+        <p:nvSpPr>
+          <p:cNvPr id="53" name="Shape 51"/>
+          <p:cNvSpPr/>
+          <p:nvPr/>
+        </p:nvSpPr>
+        <p:spPr>
+          <a:xfrm>
+            <a:off x="7677912" y="4169664"/>
+            <a:ext cx="685800" cy="475488"/>
+          </a:xfrm>
+          <a:prstGeom prst="rect">
+            <a:avLst>
+              <a:gd name="adj" fmla="val 7692"/>
+            </a:avLst>
+          </a:prstGeom>
+          <a:solidFill>
+            <a:srgbClr val="FFFFFF"/>
+          </a:solidFill>
+          <a:ln w="12700">
+            <a:solidFill>
+              <a:srgbClr val="DB2777"/>
+            </a:solidFill>
+            <a:prstDash val="solid"/>
+          </a:ln>
+        </p:spPr>
+      </p:sp>
+      <p:sp>
+        <p:nvSpPr>
+          <p:cNvPr id="54" name="Text 52"/>
+          <p:cNvSpPr/>
+          <p:nvPr/>
+        </p:nvSpPr>
+        <p:spPr>
+          <a:xfrm>
+            <a:off x="7677912" y="4169664"/>
+            <a:ext cx="685800" cy="475488"/>
+          </a:xfrm>
+          <a:prstGeom prst="rect">
+            <a:avLst/>
+          </a:prstGeom>
+          <a:noFill/>
+          <a:ln/>
+        </p:spPr>
+        <p:txBody>
+          <a:bodyPr wrap="square" lIns="0" tIns="0" rIns="0" bIns="0" rtlCol="0" anchor="ctr"/>
+          <a:lstStyle/>
+          <a:p>
+            <a:pPr algn="ctr" indent="0" marL="0">
+              <a:buNone/>
+            </a:pPr>
+            <a:r>
+              <a:rPr lang="en-US" sz="900" b="1" dirty="0">
+                <a:solidFill>
+                  <a:srgbClr val="9D174D"/>
+                </a:solidFill>
+                <a:latin typeface="Trebuchet MS" pitchFamily="34" charset="0"/>
+                <a:ea typeface="Trebuchet MS" pitchFamily="34" charset="-122"/>
+                <a:cs typeface="Trebuchet MS" pitchFamily="34" charset="-120"/>
+              </a:rPr>
+              <a:t>ng</a:t>
             </a:r>
             <a:endParaRPr lang="en-US" sz="900" dirty="0"/>
           </a:p>
@@ -31814,7 +32928,7 @@
                 <a:ea typeface="Calibri" pitchFamily="34" charset="-122"/>
                 <a:cs typeface="Calibri" pitchFamily="34" charset="-120"/>
               </a:rPr>
-              <a:t>Word Labs  •  wordlabs.app  •  Root: 'bright' = full of light, clever</a:t>
+              <a:t>Word Labs  •  wordlabs.app  •  Root: 'bright' = giving out a lot of light; clever</a:t>
             </a:r>
             <a:endParaRPr lang="en-US" sz="800" dirty="0"/>
           </a:p>
@@ -32983,7 +34097,7 @@
                 <a:ea typeface="Calibri" pitchFamily="34" charset="-122"/>
                 <a:cs typeface="Calibri" pitchFamily="34" charset="-120"/>
               </a:rPr>
-              <a:t>Word Labs  •  wordlabs.app  •  Root: 'bright' = full of light, clever</a:t>
+              <a:t>Word Labs  •  wordlabs.app  •  Root: 'bright' = giving out a lot of light; clever</a:t>
             </a:r>
             <a:endParaRPr lang="en-US" sz="800" dirty="0"/>
           </a:p>
@@ -33241,7 +34355,7 @@
             <a:avLst/>
           </a:prstGeom>
           <a:solidFill>
-            <a:srgbClr val="DDD6FE"/>
+            <a:srgbClr val="F8FAFC"/>
           </a:solidFill>
           <a:ln w="12700">
             <a:solidFill>
@@ -33253,14 +34367,39 @@
       </p:sp>
       <p:sp>
         <p:nvSpPr>
-          <p:cNvPr id="18" name="Text 16"/>
-          <p:cNvSpPr/>
-          <p:nvPr/>
-        </p:nvSpPr>
-        <p:spPr>
-          <a:xfrm>
-            <a:off x="365760" y="1563624"/>
-            <a:ext cx="2468880" cy="402336"/>
+          <p:cNvPr id="18" name="Shape 16"/>
+          <p:cNvSpPr/>
+          <p:nvPr/>
+        </p:nvSpPr>
+        <p:spPr>
+          <a:xfrm>
+            <a:off x="2971800" y="1563624"/>
+            <a:ext cx="2834640" cy="402336"/>
+          </a:xfrm>
+          <a:prstGeom prst="rect">
+            <a:avLst/>
+          </a:prstGeom>
+          <a:solidFill>
+            <a:srgbClr val="CCFBF1"/>
+          </a:solidFill>
+          <a:ln w="12700">
+            <a:solidFill>
+              <a:srgbClr val="E2E8F0"/>
+            </a:solidFill>
+            <a:prstDash val="solid"/>
+          </a:ln>
+        </p:spPr>
+      </p:sp>
+      <p:sp>
+        <p:nvSpPr>
+          <p:cNvPr id="19" name="Text 17"/>
+          <p:cNvSpPr/>
+          <p:nvPr/>
+        </p:nvSpPr>
+        <p:spPr>
+          <a:xfrm>
+            <a:off x="2971800" y="1563624"/>
+            <a:ext cx="2834640" cy="402336"/>
           </a:xfrm>
           <a:prstGeom prst="rect">
             <a:avLst/>
@@ -33278,13 +34417,13 @@
             <a:r>
               <a:rPr lang="en-US" sz="1300" b="1" dirty="0">
                 <a:solidFill>
-                  <a:srgbClr val="4C1D95"/>
+                  <a:srgbClr val="0F766E"/>
                 </a:solidFill>
                 <a:latin typeface="Trebuchet MS" pitchFamily="34" charset="0"/>
                 <a:ea typeface="Trebuchet MS" pitchFamily="34" charset="-122"/>
                 <a:cs typeface="Trebuchet MS" pitchFamily="34" charset="-120"/>
               </a:rPr>
-              <a:t>un-</a:t>
+              <a:t>bright</a:t>
             </a:r>
             <a:endParaRPr lang="en-US" sz="1300" dirty="0"/>
           </a:p>
@@ -33292,20 +34431,20 @@
       </p:sp>
       <p:sp>
         <p:nvSpPr>
-          <p:cNvPr id="19" name="Shape 17"/>
-          <p:cNvSpPr/>
-          <p:nvPr/>
-        </p:nvSpPr>
-        <p:spPr>
-          <a:xfrm>
-            <a:off x="2971800" y="1563624"/>
+          <p:cNvPr id="20" name="Shape 18"/>
+          <p:cNvSpPr/>
+          <p:nvPr/>
+        </p:nvSpPr>
+        <p:spPr>
+          <a:xfrm>
+            <a:off x="5943600" y="1563624"/>
             <a:ext cx="2834640" cy="402336"/>
           </a:xfrm>
           <a:prstGeom prst="rect">
             <a:avLst/>
           </a:prstGeom>
           <a:solidFill>
-            <a:srgbClr val="CCFBF1"/>
+            <a:srgbClr val="FCE7F3"/>
           </a:solidFill>
           <a:ln w="12700">
             <a:solidFill>
@@ -33317,13 +34456,13 @@
       </p:sp>
       <p:sp>
         <p:nvSpPr>
-          <p:cNvPr id="20" name="Text 18"/>
-          <p:cNvSpPr/>
-          <p:nvPr/>
-        </p:nvSpPr>
-        <p:spPr>
-          <a:xfrm>
-            <a:off x="2971800" y="1563624"/>
+          <p:cNvPr id="21" name="Text 19"/>
+          <p:cNvSpPr/>
+          <p:nvPr/>
+        </p:nvSpPr>
+        <p:spPr>
+          <a:xfrm>
+            <a:off x="5943600" y="1563624"/>
             <a:ext cx="2834640" cy="402336"/>
           </a:xfrm>
           <a:prstGeom prst="rect">
@@ -33342,13 +34481,13 @@
             <a:r>
               <a:rPr lang="en-US" sz="1300" b="1" dirty="0">
                 <a:solidFill>
-                  <a:srgbClr val="0F766E"/>
+                  <a:srgbClr val="9D174D"/>
                 </a:solidFill>
                 <a:latin typeface="Trebuchet MS" pitchFamily="34" charset="0"/>
                 <a:ea typeface="Trebuchet MS" pitchFamily="34" charset="-122"/>
                 <a:cs typeface="Trebuchet MS" pitchFamily="34" charset="-120"/>
               </a:rPr>
-              <a:t>bright</a:t>
+              <a:t>-en</a:t>
             </a:r>
             <a:endParaRPr lang="en-US" sz="1300" dirty="0"/>
           </a:p>
@@ -33356,19 +34495,69 @@
       </p:sp>
       <p:sp>
         <p:nvSpPr>
-          <p:cNvPr id="21" name="Shape 19"/>
-          <p:cNvSpPr/>
-          <p:nvPr/>
-        </p:nvSpPr>
-        <p:spPr>
-          <a:xfrm>
-            <a:off x="5943600" y="1563624"/>
+          <p:cNvPr id="22" name="Shape 20"/>
+          <p:cNvSpPr/>
+          <p:nvPr/>
+        </p:nvSpPr>
+        <p:spPr>
+          <a:xfrm>
+            <a:off x="365760" y="1984248"/>
+            <a:ext cx="2468880" cy="402336"/>
+          </a:xfrm>
+          <a:prstGeom prst="rect">
+            <a:avLst/>
+          </a:prstGeom>
+          <a:solidFill>
+            <a:srgbClr val="F1F5F9"/>
+          </a:solidFill>
+          <a:ln w="12700">
+            <a:solidFill>
+              <a:srgbClr val="E2E8F0"/>
+            </a:solidFill>
+            <a:prstDash val="solid"/>
+          </a:ln>
+        </p:spPr>
+      </p:sp>
+      <p:sp>
+        <p:nvSpPr>
+          <p:cNvPr id="23" name="Shape 21"/>
+          <p:cNvSpPr/>
+          <p:nvPr/>
+        </p:nvSpPr>
+        <p:spPr>
+          <a:xfrm>
+            <a:off x="2971800" y="1984248"/>
             <a:ext cx="2834640" cy="402336"/>
           </a:xfrm>
           <a:prstGeom prst="rect">
             <a:avLst/>
           </a:prstGeom>
           <a:solidFill>
+            <a:srgbClr val="F1F5F9"/>
+          </a:solidFill>
+          <a:ln w="12700">
+            <a:solidFill>
+              <a:srgbClr val="E2E8F0"/>
+            </a:solidFill>
+            <a:prstDash val="solid"/>
+          </a:ln>
+        </p:spPr>
+      </p:sp>
+      <p:sp>
+        <p:nvSpPr>
+          <p:cNvPr id="24" name="Shape 22"/>
+          <p:cNvSpPr/>
+          <p:nvPr/>
+        </p:nvSpPr>
+        <p:spPr>
+          <a:xfrm>
+            <a:off x="5943600" y="1984248"/>
+            <a:ext cx="2834640" cy="402336"/>
+          </a:xfrm>
+          <a:prstGeom prst="rect">
+            <a:avLst/>
+          </a:prstGeom>
+          <a:solidFill>
             <a:srgbClr val="FCE7F3"/>
           </a:solidFill>
           <a:ln w="12700">
@@ -33381,13 +34570,13 @@
       </p:sp>
       <p:sp>
         <p:nvSpPr>
-          <p:cNvPr id="22" name="Text 20"/>
-          <p:cNvSpPr/>
-          <p:nvPr/>
-        </p:nvSpPr>
-        <p:spPr>
-          <a:xfrm>
-            <a:off x="5943600" y="1563624"/>
+          <p:cNvPr id="25" name="Text 23"/>
+          <p:cNvSpPr/>
+          <p:nvPr/>
+        </p:nvSpPr>
+        <p:spPr>
+          <a:xfrm>
+            <a:off x="5943600" y="1984248"/>
             <a:ext cx="2834640" cy="402336"/>
           </a:xfrm>
           <a:prstGeom prst="rect">
@@ -33412,7 +34601,7 @@
                 <a:ea typeface="Trebuchet MS" pitchFamily="34" charset="-122"/>
                 <a:cs typeface="Trebuchet MS" pitchFamily="34" charset="-120"/>
               </a:rPr>
-              <a:t>-en</a:t>
+              <a:t>-er</a:t>
             </a:r>
             <a:endParaRPr lang="en-US" sz="1300" dirty="0"/>
           </a:p>
@@ -33420,20 +34609,20 @@
       </p:sp>
       <p:sp>
         <p:nvSpPr>
-          <p:cNvPr id="23" name="Shape 21"/>
-          <p:cNvSpPr/>
-          <p:nvPr/>
-        </p:nvSpPr>
-        <p:spPr>
-          <a:xfrm>
-            <a:off x="365760" y="1984248"/>
+          <p:cNvPr id="26" name="Shape 24"/>
+          <p:cNvSpPr/>
+          <p:nvPr/>
+        </p:nvSpPr>
+        <p:spPr>
+          <a:xfrm>
+            <a:off x="365760" y="2404872"/>
             <a:ext cx="2468880" cy="402336"/>
           </a:xfrm>
           <a:prstGeom prst="rect">
             <a:avLst/>
           </a:prstGeom>
           <a:solidFill>
-            <a:srgbClr val="DDD6FE"/>
+            <a:srgbClr val="F8FAFC"/>
           </a:solidFill>
           <a:ln w="12700">
             <a:solidFill>
@@ -33445,14 +34634,64 @@
       </p:sp>
       <p:sp>
         <p:nvSpPr>
-          <p:cNvPr id="24" name="Text 22"/>
-          <p:cNvSpPr/>
-          <p:nvPr/>
-        </p:nvSpPr>
-        <p:spPr>
-          <a:xfrm>
-            <a:off x="365760" y="1984248"/>
-            <a:ext cx="2468880" cy="402336"/>
+          <p:cNvPr id="27" name="Shape 25"/>
+          <p:cNvSpPr/>
+          <p:nvPr/>
+        </p:nvSpPr>
+        <p:spPr>
+          <a:xfrm>
+            <a:off x="2971800" y="2404872"/>
+            <a:ext cx="2834640" cy="402336"/>
+          </a:xfrm>
+          <a:prstGeom prst="rect">
+            <a:avLst/>
+          </a:prstGeom>
+          <a:solidFill>
+            <a:srgbClr val="F8FAFC"/>
+          </a:solidFill>
+          <a:ln w="12700">
+            <a:solidFill>
+              <a:srgbClr val="E2E8F0"/>
+            </a:solidFill>
+            <a:prstDash val="solid"/>
+          </a:ln>
+        </p:spPr>
+      </p:sp>
+      <p:sp>
+        <p:nvSpPr>
+          <p:cNvPr id="28" name="Shape 26"/>
+          <p:cNvSpPr/>
+          <p:nvPr/>
+        </p:nvSpPr>
+        <p:spPr>
+          <a:xfrm>
+            <a:off x="5943600" y="2404872"/>
+            <a:ext cx="2834640" cy="402336"/>
+          </a:xfrm>
+          <a:prstGeom prst="rect">
+            <a:avLst/>
+          </a:prstGeom>
+          <a:solidFill>
+            <a:srgbClr val="FCE7F3"/>
+          </a:solidFill>
+          <a:ln w="12700">
+            <a:solidFill>
+              <a:srgbClr val="E2E8F0"/>
+            </a:solidFill>
+            <a:prstDash val="solid"/>
+          </a:ln>
+        </p:spPr>
+      </p:sp>
+      <p:sp>
+        <p:nvSpPr>
+          <p:cNvPr id="29" name="Text 27"/>
+          <p:cNvSpPr/>
+          <p:nvPr/>
+        </p:nvSpPr>
+        <p:spPr>
+          <a:xfrm>
+            <a:off x="5943600" y="2404872"/>
+            <a:ext cx="2834640" cy="402336"/>
           </a:xfrm>
           <a:prstGeom prst="rect">
             <a:avLst/>
@@ -33470,13 +34709,13 @@
             <a:r>
               <a:rPr lang="en-US" sz="1300" b="1" dirty="0">
                 <a:solidFill>
-                  <a:srgbClr val="4C1D95"/>
+                  <a:srgbClr val="9D174D"/>
                 </a:solidFill>
                 <a:latin typeface="Trebuchet MS" pitchFamily="34" charset="0"/>
                 <a:ea typeface="Trebuchet MS" pitchFamily="34" charset="-122"/>
                 <a:cs typeface="Trebuchet MS" pitchFamily="34" charset="-120"/>
               </a:rPr>
-              <a:t>over-</a:t>
+              <a:t>-est</a:t>
             </a:r>
             <a:endParaRPr lang="en-US" sz="1300" dirty="0"/>
           </a:p>
@@ -33484,13 +34723,38 @@
       </p:sp>
       <p:sp>
         <p:nvSpPr>
-          <p:cNvPr id="25" name="Shape 23"/>
-          <p:cNvSpPr/>
-          <p:nvPr/>
-        </p:nvSpPr>
-        <p:spPr>
-          <a:xfrm>
-            <a:off x="2971800" y="1984248"/>
+          <p:cNvPr id="30" name="Shape 28"/>
+          <p:cNvSpPr/>
+          <p:nvPr/>
+        </p:nvSpPr>
+        <p:spPr>
+          <a:xfrm>
+            <a:off x="365760" y="2825496"/>
+            <a:ext cx="2468880" cy="402336"/>
+          </a:xfrm>
+          <a:prstGeom prst="rect">
+            <a:avLst/>
+          </a:prstGeom>
+          <a:solidFill>
+            <a:srgbClr val="F1F5F9"/>
+          </a:solidFill>
+          <a:ln w="12700">
+            <a:solidFill>
+              <a:srgbClr val="E2E8F0"/>
+            </a:solidFill>
+            <a:prstDash val="solid"/>
+          </a:ln>
+        </p:spPr>
+      </p:sp>
+      <p:sp>
+        <p:nvSpPr>
+          <p:cNvPr id="31" name="Shape 29"/>
+          <p:cNvSpPr/>
+          <p:nvPr/>
+        </p:nvSpPr>
+        <p:spPr>
+          <a:xfrm>
+            <a:off x="2971800" y="2825496"/>
             <a:ext cx="2834640" cy="402336"/>
           </a:xfrm>
           <a:prstGeom prst="rect">
@@ -33509,13 +34773,13 @@
       </p:sp>
       <p:sp>
         <p:nvSpPr>
-          <p:cNvPr id="26" name="Shape 24"/>
-          <p:cNvSpPr/>
-          <p:nvPr/>
-        </p:nvSpPr>
-        <p:spPr>
-          <a:xfrm>
-            <a:off x="5943600" y="1984248"/>
+          <p:cNvPr id="32" name="Shape 30"/>
+          <p:cNvSpPr/>
+          <p:nvPr/>
+        </p:nvSpPr>
+        <p:spPr>
+          <a:xfrm>
+            <a:off x="5943600" y="2825496"/>
             <a:ext cx="2834640" cy="402336"/>
           </a:xfrm>
           <a:prstGeom prst="rect">
@@ -33534,13 +34798,13 @@
       </p:sp>
       <p:sp>
         <p:nvSpPr>
-          <p:cNvPr id="27" name="Text 25"/>
-          <p:cNvSpPr/>
-          <p:nvPr/>
-        </p:nvSpPr>
-        <p:spPr>
-          <a:xfrm>
-            <a:off x="5943600" y="1984248"/>
+          <p:cNvPr id="33" name="Text 31"/>
+          <p:cNvSpPr/>
+          <p:nvPr/>
+        </p:nvSpPr>
+        <p:spPr>
+          <a:xfrm>
+            <a:off x="5943600" y="2825496"/>
             <a:ext cx="2834640" cy="402336"/>
           </a:xfrm>
           <a:prstGeom prst="rect">
@@ -33565,7 +34829,7 @@
                 <a:ea typeface="Trebuchet MS" pitchFamily="34" charset="-122"/>
                 <a:cs typeface="Trebuchet MS" pitchFamily="34" charset="-120"/>
               </a:rPr>
-              <a:t>-er</a:t>
+              <a:t>-ly</a:t>
             </a:r>
             <a:endParaRPr lang="en-US" sz="1300" dirty="0"/>
           </a:p>
@@ -33573,20 +34837,20 @@
       </p:sp>
       <p:sp>
         <p:nvSpPr>
-          <p:cNvPr id="28" name="Shape 26"/>
-          <p:cNvSpPr/>
-          <p:nvPr/>
-        </p:nvSpPr>
-        <p:spPr>
-          <a:xfrm>
-            <a:off x="365760" y="2404872"/>
+          <p:cNvPr id="34" name="Shape 32"/>
+          <p:cNvSpPr/>
+          <p:nvPr/>
+        </p:nvSpPr>
+        <p:spPr>
+          <a:xfrm>
+            <a:off x="365760" y="3246120"/>
             <a:ext cx="2468880" cy="402336"/>
           </a:xfrm>
           <a:prstGeom prst="rect">
             <a:avLst/>
           </a:prstGeom>
           <a:solidFill>
-            <a:srgbClr val="DDD6FE"/>
+            <a:srgbClr val="F8FAFC"/>
           </a:solidFill>
           <a:ln w="12700">
             <a:solidFill>
@@ -33598,14 +34862,64 @@
       </p:sp>
       <p:sp>
         <p:nvSpPr>
-          <p:cNvPr id="29" name="Text 27"/>
-          <p:cNvSpPr/>
-          <p:nvPr/>
-        </p:nvSpPr>
-        <p:spPr>
-          <a:xfrm>
-            <a:off x="365760" y="2404872"/>
-            <a:ext cx="2468880" cy="402336"/>
+          <p:cNvPr id="35" name="Shape 33"/>
+          <p:cNvSpPr/>
+          <p:nvPr/>
+        </p:nvSpPr>
+        <p:spPr>
+          <a:xfrm>
+            <a:off x="2971800" y="3246120"/>
+            <a:ext cx="2834640" cy="402336"/>
+          </a:xfrm>
+          <a:prstGeom prst="rect">
+            <a:avLst/>
+          </a:prstGeom>
+          <a:solidFill>
+            <a:srgbClr val="F8FAFC"/>
+          </a:solidFill>
+          <a:ln w="12700">
+            <a:solidFill>
+              <a:srgbClr val="E2E8F0"/>
+            </a:solidFill>
+            <a:prstDash val="solid"/>
+          </a:ln>
+        </p:spPr>
+      </p:sp>
+      <p:sp>
+        <p:nvSpPr>
+          <p:cNvPr id="36" name="Shape 34"/>
+          <p:cNvSpPr/>
+          <p:nvPr/>
+        </p:nvSpPr>
+        <p:spPr>
+          <a:xfrm>
+            <a:off x="5943600" y="3246120"/>
+            <a:ext cx="2834640" cy="402336"/>
+          </a:xfrm>
+          <a:prstGeom prst="rect">
+            <a:avLst/>
+          </a:prstGeom>
+          <a:solidFill>
+            <a:srgbClr val="FCE7F3"/>
+          </a:solidFill>
+          <a:ln w="12700">
+            <a:solidFill>
+              <a:srgbClr val="E2E8F0"/>
+            </a:solidFill>
+            <a:prstDash val="solid"/>
+          </a:ln>
+        </p:spPr>
+      </p:sp>
+      <p:sp>
+        <p:nvSpPr>
+          <p:cNvPr id="37" name="Text 35"/>
+          <p:cNvSpPr/>
+          <p:nvPr/>
+        </p:nvSpPr>
+        <p:spPr>
+          <a:xfrm>
+            <a:off x="5943600" y="3246120"/>
+            <a:ext cx="2834640" cy="402336"/>
           </a:xfrm>
           <a:prstGeom prst="rect">
             <a:avLst/>
@@ -33623,13 +34937,13 @@
             <a:r>
               <a:rPr lang="en-US" sz="1300" b="1" dirty="0">
                 <a:solidFill>
-                  <a:srgbClr val="4C1D95"/>
+                  <a:srgbClr val="9D174D"/>
                 </a:solidFill>
                 <a:latin typeface="Trebuchet MS" pitchFamily="34" charset="0"/>
                 <a:ea typeface="Trebuchet MS" pitchFamily="34" charset="-122"/>
                 <a:cs typeface="Trebuchet MS" pitchFamily="34" charset="-120"/>
               </a:rPr>
-              <a:t>out-</a:t>
+              <a:t>-ness</a:t>
             </a:r>
             <a:endParaRPr lang="en-US" sz="1300" dirty="0"/>
           </a:p>
@@ -33637,64 +34951,14 @@
       </p:sp>
       <p:sp>
         <p:nvSpPr>
-          <p:cNvPr id="30" name="Shape 28"/>
-          <p:cNvSpPr/>
-          <p:nvPr/>
-        </p:nvSpPr>
-        <p:spPr>
-          <a:xfrm>
-            <a:off x="2971800" y="2404872"/>
-            <a:ext cx="2834640" cy="402336"/>
-          </a:xfrm>
-          <a:prstGeom prst="rect">
-            <a:avLst/>
-          </a:prstGeom>
-          <a:solidFill>
-            <a:srgbClr val="F8FAFC"/>
-          </a:solidFill>
-          <a:ln w="12700">
-            <a:solidFill>
-              <a:srgbClr val="E2E8F0"/>
-            </a:solidFill>
-            <a:prstDash val="solid"/>
-          </a:ln>
-        </p:spPr>
-      </p:sp>
-      <p:sp>
-        <p:nvSpPr>
-          <p:cNvPr id="31" name="Shape 29"/>
-          <p:cNvSpPr/>
-          <p:nvPr/>
-        </p:nvSpPr>
-        <p:spPr>
-          <a:xfrm>
-            <a:off x="5943600" y="2404872"/>
-            <a:ext cx="2834640" cy="402336"/>
-          </a:xfrm>
-          <a:prstGeom prst="rect">
-            <a:avLst/>
-          </a:prstGeom>
-          <a:solidFill>
-            <a:srgbClr val="FCE7F3"/>
-          </a:solidFill>
-          <a:ln w="12700">
-            <a:solidFill>
-              <a:srgbClr val="E2E8F0"/>
-            </a:solidFill>
-            <a:prstDash val="solid"/>
-          </a:ln>
-        </p:spPr>
-      </p:sp>
-      <p:sp>
-        <p:nvSpPr>
-          <p:cNvPr id="32" name="Text 30"/>
-          <p:cNvSpPr/>
-          <p:nvPr/>
-        </p:nvSpPr>
-        <p:spPr>
-          <a:xfrm>
-            <a:off x="5943600" y="2404872"/>
-            <a:ext cx="2834640" cy="402336"/>
+          <p:cNvPr id="38" name="Text 36"/>
+          <p:cNvSpPr/>
+          <p:nvPr/>
+        </p:nvSpPr>
+        <p:spPr>
+          <a:xfrm>
+            <a:off x="365760" y="3611880"/>
+            <a:ext cx="1828800" cy="347472"/>
           </a:xfrm>
           <a:prstGeom prst="rect">
             <a:avLst/>
@@ -33706,59 +34970,61 @@
           <a:bodyPr wrap="square" lIns="0" tIns="0" rIns="0" bIns="0" rtlCol="0" anchor="ctr"/>
           <a:lstStyle/>
           <a:p>
-            <a:pPr algn="ctr" indent="0" marL="0">
-              <a:buNone/>
-            </a:pPr>
-            <a:r>
-              <a:rPr lang="en-US" sz="1300" b="1" dirty="0">
-                <a:solidFill>
-                  <a:srgbClr val="9D174D"/>
+            <a:pPr algn="l" indent="0" marL="0">
+              <a:buNone/>
+            </a:pPr>
+            <a:r>
+              <a:rPr lang="en-US" sz="1200" b="1" dirty="0">
+                <a:solidFill>
+                  <a:srgbClr val="0F172A"/>
                 </a:solidFill>
                 <a:latin typeface="Trebuchet MS" pitchFamily="34" charset="0"/>
                 <a:ea typeface="Trebuchet MS" pitchFamily="34" charset="-122"/>
                 <a:cs typeface="Trebuchet MS" pitchFamily="34" charset="-120"/>
               </a:rPr>
-              <a:t>-est</a:t>
-            </a:r>
-            <a:endParaRPr lang="en-US" sz="1300" dirty="0"/>
-          </a:p>
-        </p:txBody>
-      </p:sp>
-      <p:sp>
-        <p:nvSpPr>
-          <p:cNvPr id="33" name="Shape 31"/>
-          <p:cNvSpPr/>
-          <p:nvPr/>
-        </p:nvSpPr>
-        <p:spPr>
-          <a:xfrm>
-            <a:off x="365760" y="2825496"/>
-            <a:ext cx="2468880" cy="402336"/>
-          </a:xfrm>
-          <a:prstGeom prst="rect">
-            <a:avLst/>
-          </a:prstGeom>
-          <a:solidFill>
-            <a:srgbClr val="DDD6FE"/>
-          </a:solidFill>
-          <a:ln w="12700">
-            <a:solidFill>
-              <a:srgbClr val="E2E8F0"/>
-            </a:solidFill>
-            <a:prstDash val="solid"/>
-          </a:ln>
-        </p:spPr>
-      </p:sp>
-      <p:sp>
-        <p:nvSpPr>
-          <p:cNvPr id="34" name="Text 32"/>
-          <p:cNvSpPr/>
-          <p:nvPr/>
-        </p:nvSpPr>
-        <p:spPr>
-          <a:xfrm>
-            <a:off x="365760" y="2825496"/>
-            <a:ext cx="2468880" cy="402336"/>
+              <a:t>Sample words:</a:t>
+            </a:r>
+            <a:endParaRPr lang="en-US" sz="1200" dirty="0"/>
+          </a:p>
+        </p:txBody>
+      </p:sp>
+      <p:sp>
+        <p:nvSpPr>
+          <p:cNvPr id="39" name="Shape 37"/>
+          <p:cNvSpPr/>
+          <p:nvPr/>
+        </p:nvSpPr>
+        <p:spPr>
+          <a:xfrm>
+            <a:off x="365760" y="4023360"/>
+            <a:ext cx="2011680" cy="402336"/>
+          </a:xfrm>
+          <a:prstGeom prst="rect">
+            <a:avLst>
+              <a:gd name="adj" fmla="val 13636"/>
+            </a:avLst>
+          </a:prstGeom>
+          <a:solidFill>
+            <a:srgbClr val="EEF2FF"/>
+          </a:solidFill>
+          <a:ln w="12700">
+            <a:solidFill>
+              <a:srgbClr val="6366F1"/>
+            </a:solidFill>
+            <a:prstDash val="solid"/>
+          </a:ln>
+        </p:spPr>
+      </p:sp>
+      <p:sp>
+        <p:nvSpPr>
+          <p:cNvPr id="40" name="Text 38"/>
+          <p:cNvSpPr/>
+          <p:nvPr/>
+        </p:nvSpPr>
+        <p:spPr>
+          <a:xfrm>
+            <a:off x="365760" y="4023360"/>
+            <a:ext cx="2011680" cy="402336"/>
           </a:xfrm>
           <a:prstGeom prst="rect">
             <a:avLst/>
@@ -33774,80 +35040,57 @@
               <a:buNone/>
             </a:pPr>
             <a:r>
-              <a:rPr lang="en-US" sz="1300" b="1" dirty="0">
-                <a:solidFill>
-                  <a:srgbClr val="4C1D95"/>
+              <a:rPr lang="en-US" sz="1200" b="1" dirty="0">
+                <a:solidFill>
+                  <a:srgbClr val="4338CA"/>
                 </a:solidFill>
                 <a:latin typeface="Trebuchet MS" pitchFamily="34" charset="0"/>
                 <a:ea typeface="Trebuchet MS" pitchFamily="34" charset="-122"/>
                 <a:cs typeface="Trebuchet MS" pitchFamily="34" charset="-120"/>
               </a:rPr>
-              <a:t>sun-</a:t>
-            </a:r>
-            <a:endParaRPr lang="en-US" sz="1300" dirty="0"/>
-          </a:p>
-        </p:txBody>
-      </p:sp>
-      <p:sp>
-        <p:nvSpPr>
-          <p:cNvPr id="35" name="Shape 33"/>
-          <p:cNvSpPr/>
-          <p:nvPr/>
-        </p:nvSpPr>
-        <p:spPr>
-          <a:xfrm>
-            <a:off x="2971800" y="2825496"/>
-            <a:ext cx="2834640" cy="402336"/>
-          </a:xfrm>
-          <a:prstGeom prst="rect">
-            <a:avLst/>
-          </a:prstGeom>
-          <a:solidFill>
-            <a:srgbClr val="F1F5F9"/>
-          </a:solidFill>
-          <a:ln w="12700">
-            <a:solidFill>
-              <a:srgbClr val="E2E8F0"/>
-            </a:solidFill>
-            <a:prstDash val="solid"/>
-          </a:ln>
-        </p:spPr>
-      </p:sp>
-      <p:sp>
-        <p:nvSpPr>
-          <p:cNvPr id="36" name="Shape 34"/>
-          <p:cNvSpPr/>
-          <p:nvPr/>
-        </p:nvSpPr>
-        <p:spPr>
-          <a:xfrm>
-            <a:off x="5943600" y="2825496"/>
-            <a:ext cx="2834640" cy="402336"/>
-          </a:xfrm>
-          <a:prstGeom prst="rect">
-            <a:avLst/>
-          </a:prstGeom>
-          <a:solidFill>
-            <a:srgbClr val="FCE7F3"/>
-          </a:solidFill>
-          <a:ln w="12700">
-            <a:solidFill>
-              <a:srgbClr val="E2E8F0"/>
-            </a:solidFill>
-            <a:prstDash val="solid"/>
-          </a:ln>
-        </p:spPr>
-      </p:sp>
-      <p:sp>
-        <p:nvSpPr>
-          <p:cNvPr id="37" name="Text 35"/>
-          <p:cNvSpPr/>
-          <p:nvPr/>
-        </p:nvSpPr>
-        <p:spPr>
-          <a:xfrm>
-            <a:off x="5943600" y="2825496"/>
-            <a:ext cx="2834640" cy="402336"/>
+              <a:t>bright</a:t>
+            </a:r>
+            <a:endParaRPr lang="en-US" sz="1200" dirty="0"/>
+          </a:p>
+        </p:txBody>
+      </p:sp>
+      <p:sp>
+        <p:nvSpPr>
+          <p:cNvPr id="41" name="Shape 39"/>
+          <p:cNvSpPr/>
+          <p:nvPr/>
+        </p:nvSpPr>
+        <p:spPr>
+          <a:xfrm>
+            <a:off x="2542032" y="4023360"/>
+            <a:ext cx="2011680" cy="402336"/>
+          </a:xfrm>
+          <a:prstGeom prst="rect">
+            <a:avLst>
+              <a:gd name="adj" fmla="val 13636"/>
+            </a:avLst>
+          </a:prstGeom>
+          <a:solidFill>
+            <a:srgbClr val="EEF2FF"/>
+          </a:solidFill>
+          <a:ln w="12700">
+            <a:solidFill>
+              <a:srgbClr val="6366F1"/>
+            </a:solidFill>
+            <a:prstDash val="solid"/>
+          </a:ln>
+        </p:spPr>
+      </p:sp>
+      <p:sp>
+        <p:nvSpPr>
+          <p:cNvPr id="42" name="Text 40"/>
+          <p:cNvSpPr/>
+          <p:nvPr/>
+        </p:nvSpPr>
+        <p:spPr>
+          <a:xfrm>
+            <a:off x="2542032" y="4023360"/>
+            <a:ext cx="2011680" cy="402336"/>
           </a:xfrm>
           <a:prstGeom prst="rect">
             <a:avLst/>
@@ -33863,55 +35106,57 @@
               <a:buNone/>
             </a:pPr>
             <a:r>
-              <a:rPr lang="en-US" sz="1300" b="1" dirty="0">
-                <a:solidFill>
-                  <a:srgbClr val="9D174D"/>
+              <a:rPr lang="en-US" sz="1200" b="1" dirty="0">
+                <a:solidFill>
+                  <a:srgbClr val="4338CA"/>
                 </a:solidFill>
                 <a:latin typeface="Trebuchet MS" pitchFamily="34" charset="0"/>
                 <a:ea typeface="Trebuchet MS" pitchFamily="34" charset="-122"/>
                 <a:cs typeface="Trebuchet MS" pitchFamily="34" charset="-120"/>
               </a:rPr>
-              <a:t>-ly</a:t>
-            </a:r>
-            <a:endParaRPr lang="en-US" sz="1300" dirty="0"/>
-          </a:p>
-        </p:txBody>
-      </p:sp>
-      <p:sp>
-        <p:nvSpPr>
-          <p:cNvPr id="38" name="Shape 36"/>
-          <p:cNvSpPr/>
-          <p:nvPr/>
-        </p:nvSpPr>
-        <p:spPr>
-          <a:xfrm>
-            <a:off x="365760" y="3246120"/>
-            <a:ext cx="2468880" cy="402336"/>
-          </a:xfrm>
-          <a:prstGeom prst="rect">
-            <a:avLst/>
-          </a:prstGeom>
-          <a:solidFill>
-            <a:srgbClr val="DDD6FE"/>
-          </a:solidFill>
-          <a:ln w="12700">
-            <a:solidFill>
-              <a:srgbClr val="E2E8F0"/>
-            </a:solidFill>
-            <a:prstDash val="solid"/>
-          </a:ln>
-        </p:spPr>
-      </p:sp>
-      <p:sp>
-        <p:nvSpPr>
-          <p:cNvPr id="39" name="Text 37"/>
-          <p:cNvSpPr/>
-          <p:nvPr/>
-        </p:nvSpPr>
-        <p:spPr>
-          <a:xfrm>
-            <a:off x="365760" y="3246120"/>
-            <a:ext cx="2468880" cy="402336"/>
+              <a:t>brighten</a:t>
+            </a:r>
+            <a:endParaRPr lang="en-US" sz="1200" dirty="0"/>
+          </a:p>
+        </p:txBody>
+      </p:sp>
+      <p:sp>
+        <p:nvSpPr>
+          <p:cNvPr id="43" name="Shape 41"/>
+          <p:cNvSpPr/>
+          <p:nvPr/>
+        </p:nvSpPr>
+        <p:spPr>
+          <a:xfrm>
+            <a:off x="4718304" y="4023360"/>
+            <a:ext cx="2011680" cy="402336"/>
+          </a:xfrm>
+          <a:prstGeom prst="rect">
+            <a:avLst>
+              <a:gd name="adj" fmla="val 13636"/>
+            </a:avLst>
+          </a:prstGeom>
+          <a:solidFill>
+            <a:srgbClr val="EEF2FF"/>
+          </a:solidFill>
+          <a:ln w="12700">
+            <a:solidFill>
+              <a:srgbClr val="6366F1"/>
+            </a:solidFill>
+            <a:prstDash val="solid"/>
+          </a:ln>
+        </p:spPr>
+      </p:sp>
+      <p:sp>
+        <p:nvSpPr>
+          <p:cNvPr id="44" name="Text 42"/>
+          <p:cNvSpPr/>
+          <p:nvPr/>
+        </p:nvSpPr>
+        <p:spPr>
+          <a:xfrm>
+            <a:off x="4718304" y="4023360"/>
+            <a:ext cx="2011680" cy="402336"/>
           </a:xfrm>
           <a:prstGeom prst="rect">
             <a:avLst/>
@@ -33927,671 +35172,15 @@
               <a:buNone/>
             </a:pPr>
             <a:r>
-              <a:rPr lang="en-US" sz="1300" b="1" dirty="0">
-                <a:solidFill>
-                  <a:srgbClr val="4C1D95"/>
+              <a:rPr lang="en-US" sz="1200" b="1" dirty="0">
+                <a:solidFill>
+                  <a:srgbClr val="4338CA"/>
                 </a:solidFill>
                 <a:latin typeface="Trebuchet MS" pitchFamily="34" charset="0"/>
                 <a:ea typeface="Trebuchet MS" pitchFamily="34" charset="-122"/>
                 <a:cs typeface="Trebuchet MS" pitchFamily="34" charset="-120"/>
               </a:rPr>
-              <a:t>star-</a:t>
-            </a:r>
-            <a:endParaRPr lang="en-US" sz="1300" dirty="0"/>
-          </a:p>
-        </p:txBody>
-      </p:sp>
-      <p:sp>
-        <p:nvSpPr>
-          <p:cNvPr id="40" name="Shape 38"/>
-          <p:cNvSpPr/>
-          <p:nvPr/>
-        </p:nvSpPr>
-        <p:spPr>
-          <a:xfrm>
-            <a:off x="2971800" y="3246120"/>
-            <a:ext cx="2834640" cy="402336"/>
-          </a:xfrm>
-          <a:prstGeom prst="rect">
-            <a:avLst/>
-          </a:prstGeom>
-          <a:solidFill>
-            <a:srgbClr val="F8FAFC"/>
-          </a:solidFill>
-          <a:ln w="12700">
-            <a:solidFill>
-              <a:srgbClr val="E2E8F0"/>
-            </a:solidFill>
-            <a:prstDash val="solid"/>
-          </a:ln>
-        </p:spPr>
-      </p:sp>
-      <p:sp>
-        <p:nvSpPr>
-          <p:cNvPr id="41" name="Shape 39"/>
-          <p:cNvSpPr/>
-          <p:nvPr/>
-        </p:nvSpPr>
-        <p:spPr>
-          <a:xfrm>
-            <a:off x="5943600" y="3246120"/>
-            <a:ext cx="2834640" cy="402336"/>
-          </a:xfrm>
-          <a:prstGeom prst="rect">
-            <a:avLst/>
-          </a:prstGeom>
-          <a:solidFill>
-            <a:srgbClr val="FCE7F3"/>
-          </a:solidFill>
-          <a:ln w="12700">
-            <a:solidFill>
-              <a:srgbClr val="E2E8F0"/>
-            </a:solidFill>
-            <a:prstDash val="solid"/>
-          </a:ln>
-        </p:spPr>
-      </p:sp>
-      <p:sp>
-        <p:nvSpPr>
-          <p:cNvPr id="42" name="Text 40"/>
-          <p:cNvSpPr/>
-          <p:nvPr/>
-        </p:nvSpPr>
-        <p:spPr>
-          <a:xfrm>
-            <a:off x="5943600" y="3246120"/>
-            <a:ext cx="2834640" cy="402336"/>
-          </a:xfrm>
-          <a:prstGeom prst="rect">
-            <a:avLst/>
-          </a:prstGeom>
-          <a:noFill/>
-          <a:ln/>
-        </p:spPr>
-        <p:txBody>
-          <a:bodyPr wrap="square" lIns="0" tIns="0" rIns="0" bIns="0" rtlCol="0" anchor="ctr"/>
-          <a:lstStyle/>
-          <a:p>
-            <a:pPr algn="ctr" indent="0" marL="0">
-              <a:buNone/>
-            </a:pPr>
-            <a:r>
-              <a:rPr lang="en-US" sz="1300" b="1" dirty="0">
-                <a:solidFill>
-                  <a:srgbClr val="9D174D"/>
-                </a:solidFill>
-                <a:latin typeface="Trebuchet MS" pitchFamily="34" charset="0"/>
-                <a:ea typeface="Trebuchet MS" pitchFamily="34" charset="-122"/>
-                <a:cs typeface="Trebuchet MS" pitchFamily="34" charset="-120"/>
-              </a:rPr>
-              <a:t>-ness</a:t>
-            </a:r>
-            <a:endParaRPr lang="en-US" sz="1300" dirty="0"/>
-          </a:p>
-        </p:txBody>
-      </p:sp>
-      <p:sp>
-        <p:nvSpPr>
-          <p:cNvPr id="43" name="Text 41"/>
-          <p:cNvSpPr/>
-          <p:nvPr/>
-        </p:nvSpPr>
-        <p:spPr>
-          <a:xfrm>
-            <a:off x="365760" y="3611880"/>
-            <a:ext cx="1828800" cy="347472"/>
-          </a:xfrm>
-          <a:prstGeom prst="rect">
-            <a:avLst/>
-          </a:prstGeom>
-          <a:noFill/>
-          <a:ln/>
-        </p:spPr>
-        <p:txBody>
-          <a:bodyPr wrap="square" lIns="0" tIns="0" rIns="0" bIns="0" rtlCol="0" anchor="ctr"/>
-          <a:lstStyle/>
-          <a:p>
-            <a:pPr algn="l" indent="0" marL="0">
-              <a:buNone/>
-            </a:pPr>
-            <a:r>
-              <a:rPr lang="en-US" sz="1200" b="1" dirty="0">
-                <a:solidFill>
-                  <a:srgbClr val="0F172A"/>
-                </a:solidFill>
-                <a:latin typeface="Trebuchet MS" pitchFamily="34" charset="0"/>
-                <a:ea typeface="Trebuchet MS" pitchFamily="34" charset="-122"/>
-                <a:cs typeface="Trebuchet MS" pitchFamily="34" charset="-120"/>
-              </a:rPr>
-              <a:t>Sample words:</a:t>
-            </a:r>
-            <a:endParaRPr lang="en-US" sz="1200" dirty="0"/>
-          </a:p>
-        </p:txBody>
-      </p:sp>
-      <p:sp>
-        <p:nvSpPr>
-          <p:cNvPr id="44" name="Shape 42"/>
-          <p:cNvSpPr/>
-          <p:nvPr/>
-        </p:nvSpPr>
-        <p:spPr>
-          <a:xfrm>
-            <a:off x="365760" y="4023360"/>
-            <a:ext cx="2011680" cy="402336"/>
-          </a:xfrm>
-          <a:prstGeom prst="rect">
-            <a:avLst>
-              <a:gd name="adj" fmla="val 13636"/>
-            </a:avLst>
-          </a:prstGeom>
-          <a:solidFill>
-            <a:srgbClr val="EEF2FF"/>
-          </a:solidFill>
-          <a:ln w="12700">
-            <a:solidFill>
-              <a:srgbClr val="6366F1"/>
-            </a:solidFill>
-            <a:prstDash val="solid"/>
-          </a:ln>
-        </p:spPr>
-      </p:sp>
-      <p:sp>
-        <p:nvSpPr>
-          <p:cNvPr id="45" name="Text 43"/>
-          <p:cNvSpPr/>
-          <p:nvPr/>
-        </p:nvSpPr>
-        <p:spPr>
-          <a:xfrm>
-            <a:off x="365760" y="4023360"/>
-            <a:ext cx="2011680" cy="402336"/>
-          </a:xfrm>
-          <a:prstGeom prst="rect">
-            <a:avLst/>
-          </a:prstGeom>
-          <a:noFill/>
-          <a:ln/>
-        </p:spPr>
-        <p:txBody>
-          <a:bodyPr wrap="square" lIns="0" tIns="0" rIns="0" bIns="0" rtlCol="0" anchor="ctr"/>
-          <a:lstStyle/>
-          <a:p>
-            <a:pPr algn="ctr" indent="0" marL="0">
-              <a:buNone/>
-            </a:pPr>
-            <a:r>
-              <a:rPr lang="en-US" sz="1200" b="1" dirty="0">
-                <a:solidFill>
-                  <a:srgbClr val="4338CA"/>
-                </a:solidFill>
-                <a:latin typeface="Trebuchet MS" pitchFamily="34" charset="0"/>
-                <a:ea typeface="Trebuchet MS" pitchFamily="34" charset="-122"/>
-                <a:cs typeface="Trebuchet MS" pitchFamily="34" charset="-120"/>
-              </a:rPr>
-              <a:t>bright</a:t>
-            </a:r>
-            <a:endParaRPr lang="en-US" sz="1200" dirty="0"/>
-          </a:p>
-        </p:txBody>
-      </p:sp>
-      <p:sp>
-        <p:nvSpPr>
-          <p:cNvPr id="46" name="Shape 44"/>
-          <p:cNvSpPr/>
-          <p:nvPr/>
-        </p:nvSpPr>
-        <p:spPr>
-          <a:xfrm>
-            <a:off x="2542032" y="4023360"/>
-            <a:ext cx="2011680" cy="402336"/>
-          </a:xfrm>
-          <a:prstGeom prst="rect">
-            <a:avLst>
-              <a:gd name="adj" fmla="val 13636"/>
-            </a:avLst>
-          </a:prstGeom>
-          <a:solidFill>
-            <a:srgbClr val="EEF2FF"/>
-          </a:solidFill>
-          <a:ln w="12700">
-            <a:solidFill>
-              <a:srgbClr val="6366F1"/>
-            </a:solidFill>
-            <a:prstDash val="solid"/>
-          </a:ln>
-        </p:spPr>
-      </p:sp>
-      <p:sp>
-        <p:nvSpPr>
-          <p:cNvPr id="47" name="Text 45"/>
-          <p:cNvSpPr/>
-          <p:nvPr/>
-        </p:nvSpPr>
-        <p:spPr>
-          <a:xfrm>
-            <a:off x="2542032" y="4023360"/>
-            <a:ext cx="2011680" cy="402336"/>
-          </a:xfrm>
-          <a:prstGeom prst="rect">
-            <a:avLst/>
-          </a:prstGeom>
-          <a:noFill/>
-          <a:ln/>
-        </p:spPr>
-        <p:txBody>
-          <a:bodyPr wrap="square" lIns="0" tIns="0" rIns="0" bIns="0" rtlCol="0" anchor="ctr"/>
-          <a:lstStyle/>
-          <a:p>
-            <a:pPr algn="ctr" indent="0" marL="0">
-              <a:buNone/>
-            </a:pPr>
-            <a:r>
-              <a:rPr lang="en-US" sz="1200" b="1" dirty="0">
-                <a:solidFill>
-                  <a:srgbClr val="4338CA"/>
-                </a:solidFill>
-                <a:latin typeface="Trebuchet MS" pitchFamily="34" charset="0"/>
-                <a:ea typeface="Trebuchet MS" pitchFamily="34" charset="-122"/>
-                <a:cs typeface="Trebuchet MS" pitchFamily="34" charset="-120"/>
-              </a:rPr>
               <a:t>brighter</a:t>
-            </a:r>
-            <a:endParaRPr lang="en-US" sz="1200" dirty="0"/>
-          </a:p>
-        </p:txBody>
-      </p:sp>
-      <p:sp>
-        <p:nvSpPr>
-          <p:cNvPr id="48" name="Shape 46"/>
-          <p:cNvSpPr/>
-          <p:nvPr/>
-        </p:nvSpPr>
-        <p:spPr>
-          <a:xfrm>
-            <a:off x="4718304" y="4023360"/>
-            <a:ext cx="2011680" cy="402336"/>
-          </a:xfrm>
-          <a:prstGeom prst="rect">
-            <a:avLst>
-              <a:gd name="adj" fmla="val 13636"/>
-            </a:avLst>
-          </a:prstGeom>
-          <a:solidFill>
-            <a:srgbClr val="EEF2FF"/>
-          </a:solidFill>
-          <a:ln w="12700">
-            <a:solidFill>
-              <a:srgbClr val="6366F1"/>
-            </a:solidFill>
-            <a:prstDash val="solid"/>
-          </a:ln>
-        </p:spPr>
-      </p:sp>
-      <p:sp>
-        <p:nvSpPr>
-          <p:cNvPr id="49" name="Text 47"/>
-          <p:cNvSpPr/>
-          <p:nvPr/>
-        </p:nvSpPr>
-        <p:spPr>
-          <a:xfrm>
-            <a:off x="4718304" y="4023360"/>
-            <a:ext cx="2011680" cy="402336"/>
-          </a:xfrm>
-          <a:prstGeom prst="rect">
-            <a:avLst/>
-          </a:prstGeom>
-          <a:noFill/>
-          <a:ln/>
-        </p:spPr>
-        <p:txBody>
-          <a:bodyPr wrap="square" lIns="0" tIns="0" rIns="0" bIns="0" rtlCol="0" anchor="ctr"/>
-          <a:lstStyle/>
-          <a:p>
-            <a:pPr algn="ctr" indent="0" marL="0">
-              <a:buNone/>
-            </a:pPr>
-            <a:r>
-              <a:rPr lang="en-US" sz="1200" b="1" dirty="0">
-                <a:solidFill>
-                  <a:srgbClr val="4338CA"/>
-                </a:solidFill>
-                <a:latin typeface="Trebuchet MS" pitchFamily="34" charset="0"/>
-                <a:ea typeface="Trebuchet MS" pitchFamily="34" charset="-122"/>
-                <a:cs typeface="Trebuchet MS" pitchFamily="34" charset="-120"/>
-              </a:rPr>
-              <a:t>brightest</a:t>
-            </a:r>
-            <a:endParaRPr lang="en-US" sz="1200" dirty="0"/>
-          </a:p>
-        </p:txBody>
-      </p:sp>
-      <p:sp>
-        <p:nvSpPr>
-          <p:cNvPr id="50" name="Shape 48"/>
-          <p:cNvSpPr/>
-          <p:nvPr/>
-        </p:nvSpPr>
-        <p:spPr>
-          <a:xfrm>
-            <a:off x="6894576" y="4023360"/>
-            <a:ext cx="2011680" cy="402336"/>
-          </a:xfrm>
-          <a:prstGeom prst="rect">
-            <a:avLst>
-              <a:gd name="adj" fmla="val 13636"/>
-            </a:avLst>
-          </a:prstGeom>
-          <a:solidFill>
-            <a:srgbClr val="EEF2FF"/>
-          </a:solidFill>
-          <a:ln w="12700">
-            <a:solidFill>
-              <a:srgbClr val="6366F1"/>
-            </a:solidFill>
-            <a:prstDash val="solid"/>
-          </a:ln>
-        </p:spPr>
-      </p:sp>
-      <p:sp>
-        <p:nvSpPr>
-          <p:cNvPr id="51" name="Text 49"/>
-          <p:cNvSpPr/>
-          <p:nvPr/>
-        </p:nvSpPr>
-        <p:spPr>
-          <a:xfrm>
-            <a:off x="6894576" y="4023360"/>
-            <a:ext cx="2011680" cy="402336"/>
-          </a:xfrm>
-          <a:prstGeom prst="rect">
-            <a:avLst/>
-          </a:prstGeom>
-          <a:noFill/>
-          <a:ln/>
-        </p:spPr>
-        <p:txBody>
-          <a:bodyPr wrap="square" lIns="0" tIns="0" rIns="0" bIns="0" rtlCol="0" anchor="ctr"/>
-          <a:lstStyle/>
-          <a:p>
-            <a:pPr algn="ctr" indent="0" marL="0">
-              <a:buNone/>
-            </a:pPr>
-            <a:r>
-              <a:rPr lang="en-US" sz="1200" b="1" dirty="0">
-                <a:solidFill>
-                  <a:srgbClr val="4338CA"/>
-                </a:solidFill>
-                <a:latin typeface="Trebuchet MS" pitchFamily="34" charset="0"/>
-                <a:ea typeface="Trebuchet MS" pitchFamily="34" charset="-122"/>
-                <a:cs typeface="Trebuchet MS" pitchFamily="34" charset="-120"/>
-              </a:rPr>
-              <a:t>brightly</a:t>
-            </a:r>
-            <a:endParaRPr lang="en-US" sz="1200" dirty="0"/>
-          </a:p>
-        </p:txBody>
-      </p:sp>
-      <p:sp>
-        <p:nvSpPr>
-          <p:cNvPr id="52" name="Shape 50"/>
-          <p:cNvSpPr/>
-          <p:nvPr/>
-        </p:nvSpPr>
-        <p:spPr>
-          <a:xfrm>
-            <a:off x="365760" y="4498848"/>
-            <a:ext cx="2011680" cy="402336"/>
-          </a:xfrm>
-          <a:prstGeom prst="rect">
-            <a:avLst>
-              <a:gd name="adj" fmla="val 13636"/>
-            </a:avLst>
-          </a:prstGeom>
-          <a:solidFill>
-            <a:srgbClr val="EEF2FF"/>
-          </a:solidFill>
-          <a:ln w="12700">
-            <a:solidFill>
-              <a:srgbClr val="6366F1"/>
-            </a:solidFill>
-            <a:prstDash val="solid"/>
-          </a:ln>
-        </p:spPr>
-      </p:sp>
-      <p:sp>
-        <p:nvSpPr>
-          <p:cNvPr id="53" name="Text 51"/>
-          <p:cNvSpPr/>
-          <p:nvPr/>
-        </p:nvSpPr>
-        <p:spPr>
-          <a:xfrm>
-            <a:off x="365760" y="4498848"/>
-            <a:ext cx="2011680" cy="402336"/>
-          </a:xfrm>
-          <a:prstGeom prst="rect">
-            <a:avLst/>
-          </a:prstGeom>
-          <a:noFill/>
-          <a:ln/>
-        </p:spPr>
-        <p:txBody>
-          <a:bodyPr wrap="square" lIns="0" tIns="0" rIns="0" bIns="0" rtlCol="0" anchor="ctr"/>
-          <a:lstStyle/>
-          <a:p>
-            <a:pPr algn="ctr" indent="0" marL="0">
-              <a:buNone/>
-            </a:pPr>
-            <a:r>
-              <a:rPr lang="en-US" sz="1200" b="1" dirty="0">
-                <a:solidFill>
-                  <a:srgbClr val="4338CA"/>
-                </a:solidFill>
-                <a:latin typeface="Trebuchet MS" pitchFamily="34" charset="0"/>
-                <a:ea typeface="Trebuchet MS" pitchFamily="34" charset="-122"/>
-                <a:cs typeface="Trebuchet MS" pitchFamily="34" charset="-120"/>
-              </a:rPr>
-              <a:t>brightness</a:t>
-            </a:r>
-            <a:endParaRPr lang="en-US" sz="1200" dirty="0"/>
-          </a:p>
-        </p:txBody>
-      </p:sp>
-      <p:sp>
-        <p:nvSpPr>
-          <p:cNvPr id="54" name="Shape 52"/>
-          <p:cNvSpPr/>
-          <p:nvPr/>
-        </p:nvSpPr>
-        <p:spPr>
-          <a:xfrm>
-            <a:off x="2542032" y="4498848"/>
-            <a:ext cx="2011680" cy="402336"/>
-          </a:xfrm>
-          <a:prstGeom prst="rect">
-            <a:avLst>
-              <a:gd name="adj" fmla="val 13636"/>
-            </a:avLst>
-          </a:prstGeom>
-          <a:solidFill>
-            <a:srgbClr val="EEF2FF"/>
-          </a:solidFill>
-          <a:ln w="12700">
-            <a:solidFill>
-              <a:srgbClr val="6366F1"/>
-            </a:solidFill>
-            <a:prstDash val="solid"/>
-          </a:ln>
-        </p:spPr>
-      </p:sp>
-      <p:sp>
-        <p:nvSpPr>
-          <p:cNvPr id="55" name="Text 53"/>
-          <p:cNvSpPr/>
-          <p:nvPr/>
-        </p:nvSpPr>
-        <p:spPr>
-          <a:xfrm>
-            <a:off x="2542032" y="4498848"/>
-            <a:ext cx="2011680" cy="402336"/>
-          </a:xfrm>
-          <a:prstGeom prst="rect">
-            <a:avLst/>
-          </a:prstGeom>
-          <a:noFill/>
-          <a:ln/>
-        </p:spPr>
-        <p:txBody>
-          <a:bodyPr wrap="square" lIns="0" tIns="0" rIns="0" bIns="0" rtlCol="0" anchor="ctr"/>
-          <a:lstStyle/>
-          <a:p>
-            <a:pPr algn="ctr" indent="0" marL="0">
-              <a:buNone/>
-            </a:pPr>
-            <a:r>
-              <a:rPr lang="en-US" sz="1200" b="1" dirty="0">
-                <a:solidFill>
-                  <a:srgbClr val="4338CA"/>
-                </a:solidFill>
-                <a:latin typeface="Trebuchet MS" pitchFamily="34" charset="0"/>
-                <a:ea typeface="Trebuchet MS" pitchFamily="34" charset="-122"/>
-                <a:cs typeface="Trebuchet MS" pitchFamily="34" charset="-120"/>
-              </a:rPr>
-              <a:t>brighten</a:t>
-            </a:r>
-            <a:endParaRPr lang="en-US" sz="1200" dirty="0"/>
-          </a:p>
-        </p:txBody>
-      </p:sp>
-      <p:sp>
-        <p:nvSpPr>
-          <p:cNvPr id="56" name="Shape 54"/>
-          <p:cNvSpPr/>
-          <p:nvPr/>
-        </p:nvSpPr>
-        <p:spPr>
-          <a:xfrm>
-            <a:off x="4718304" y="4498848"/>
-            <a:ext cx="2011680" cy="402336"/>
-          </a:xfrm>
-          <a:prstGeom prst="rect">
-            <a:avLst>
-              <a:gd name="adj" fmla="val 13636"/>
-            </a:avLst>
-          </a:prstGeom>
-          <a:solidFill>
-            <a:srgbClr val="EEF2FF"/>
-          </a:solidFill>
-          <a:ln w="12700">
-            <a:solidFill>
-              <a:srgbClr val="6366F1"/>
-            </a:solidFill>
-            <a:prstDash val="solid"/>
-          </a:ln>
-        </p:spPr>
-      </p:sp>
-      <p:sp>
-        <p:nvSpPr>
-          <p:cNvPr id="57" name="Text 55"/>
-          <p:cNvSpPr/>
-          <p:nvPr/>
-        </p:nvSpPr>
-        <p:spPr>
-          <a:xfrm>
-            <a:off x="4718304" y="4498848"/>
-            <a:ext cx="2011680" cy="402336"/>
-          </a:xfrm>
-          <a:prstGeom prst="rect">
-            <a:avLst/>
-          </a:prstGeom>
-          <a:noFill/>
-          <a:ln/>
-        </p:spPr>
-        <p:txBody>
-          <a:bodyPr wrap="square" lIns="0" tIns="0" rIns="0" bIns="0" rtlCol="0" anchor="ctr"/>
-          <a:lstStyle/>
-          <a:p>
-            <a:pPr algn="ctr" indent="0" marL="0">
-              <a:buNone/>
-            </a:pPr>
-            <a:r>
-              <a:rPr lang="en-US" sz="1200" b="1" dirty="0">
-                <a:solidFill>
-                  <a:srgbClr val="4338CA"/>
-                </a:solidFill>
-                <a:latin typeface="Trebuchet MS" pitchFamily="34" charset="0"/>
-                <a:ea typeface="Trebuchet MS" pitchFamily="34" charset="-122"/>
-                <a:cs typeface="Trebuchet MS" pitchFamily="34" charset="-120"/>
-              </a:rPr>
-              <a:t>unbrighten</a:t>
-            </a:r>
-            <a:endParaRPr lang="en-US" sz="1200" dirty="0"/>
-          </a:p>
-        </p:txBody>
-      </p:sp>
-      <p:sp>
-        <p:nvSpPr>
-          <p:cNvPr id="58" name="Shape 56"/>
-          <p:cNvSpPr/>
-          <p:nvPr/>
-        </p:nvSpPr>
-        <p:spPr>
-          <a:xfrm>
-            <a:off x="6894576" y="4498848"/>
-            <a:ext cx="2011680" cy="402336"/>
-          </a:xfrm>
-          <a:prstGeom prst="rect">
-            <a:avLst>
-              <a:gd name="adj" fmla="val 13636"/>
-            </a:avLst>
-          </a:prstGeom>
-          <a:solidFill>
-            <a:srgbClr val="EEF2FF"/>
-          </a:solidFill>
-          <a:ln w="12700">
-            <a:solidFill>
-              <a:srgbClr val="6366F1"/>
-            </a:solidFill>
-            <a:prstDash val="solid"/>
-          </a:ln>
-        </p:spPr>
-      </p:sp>
-      <p:sp>
-        <p:nvSpPr>
-          <p:cNvPr id="59" name="Text 57"/>
-          <p:cNvSpPr/>
-          <p:nvPr/>
-        </p:nvSpPr>
-        <p:spPr>
-          <a:xfrm>
-            <a:off x="6894576" y="4498848"/>
-            <a:ext cx="2011680" cy="402336"/>
-          </a:xfrm>
-          <a:prstGeom prst="rect">
-            <a:avLst/>
-          </a:prstGeom>
-          <a:noFill/>
-          <a:ln/>
-        </p:spPr>
-        <p:txBody>
-          <a:bodyPr wrap="square" lIns="0" tIns="0" rIns="0" bIns="0" rtlCol="0" anchor="ctr"/>
-          <a:lstStyle/>
-          <a:p>
-            <a:pPr algn="ctr" indent="0" marL="0">
-              <a:buNone/>
-            </a:pPr>
-            <a:r>
-              <a:rPr lang="en-US" sz="1200" b="1" dirty="0">
-                <a:solidFill>
-                  <a:srgbClr val="4338CA"/>
-                </a:solidFill>
-                <a:latin typeface="Trebuchet MS" pitchFamily="34" charset="0"/>
-                <a:ea typeface="Trebuchet MS" pitchFamily="34" charset="-122"/>
-                <a:cs typeface="Trebuchet MS" pitchFamily="34" charset="-120"/>
-              </a:rPr>
-              <a:t>brightly-lit</a:t>
             </a:r>
             <a:endParaRPr lang="en-US" sz="1200" dirty="0"/>
           </a:p>
@@ -34883,7 +35472,7 @@
                 <a:ea typeface="Calibri" pitchFamily="34" charset="-122"/>
                 <a:cs typeface="Calibri" pitchFamily="34" charset="-120"/>
               </a:rPr>
-              <a:t>Word Labs  •  wordlabs.app  •  Root: 'bright' = full of light, clever</a:t>
+              <a:t>Word Labs  •  wordlabs.app  •  Root: 'bright' = giving out a lot of light; clever</a:t>
             </a:r>
             <a:endParaRPr lang="en-US" sz="800" dirty="0"/>
           </a:p>
@@ -35047,7 +35636,7 @@
                 <a:ea typeface="Calibri" pitchFamily="34" charset="-122"/>
                 <a:cs typeface="Calibri" pitchFamily="34" charset="-120"/>
               </a:rPr>
-              <a:t>The core part of a word carrying its basic meaning. For example, 'bright' means 'full of light, clever'.</a:t>
+              <a:t>The core part of a word carrying its basic meaning. For example, 'bright' means 'giving out a lot of light; clever'.</a:t>
             </a:r>
             <a:endParaRPr lang="en-US" sz="1350" dirty="0"/>
           </a:p>
@@ -35667,7 +36256,7 @@
                 <a:ea typeface="Calibri" pitchFamily="34" charset="-122"/>
                 <a:cs typeface="Calibri" pitchFamily="34" charset="-120"/>
               </a:rPr>
-              <a:t>Word Labs  •  wordlabs.app  •  Root: 'bright' = full of light, clever</a:t>
+              <a:t>Word Labs  •  wordlabs.app  •  Root: 'bright' = giving out a lot of light; clever</a:t>
             </a:r>
             <a:endParaRPr lang="en-US" sz="800" dirty="0"/>
           </a:p>
@@ -35779,7 +36368,7 @@
                 <a:ea typeface="Calibri" pitchFamily="34" charset="-122"/>
                 <a:cs typeface="Calibri" pitchFamily="34" charset="-120"/>
               </a:rPr>
-              <a:t>1.  Adding '-en' to 'bright' makes the verb 'brighten', meaning to make brighter.</a:t>
+              <a:t>1.  'brighten' means 'to make something heavier'.</a:t>
             </a:r>
             <a:endParaRPr lang="en-US" sz="1300" dirty="0"/>
           </a:p>
@@ -35802,11 +36391,11 @@
             </a:avLst>
           </a:prstGeom>
           <a:solidFill>
-            <a:srgbClr val="DCFCE7"/>
-          </a:solidFill>
-          <a:ln w="12700">
-            <a:solidFill>
-              <a:srgbClr val="16A34A"/>
+            <a:srgbClr val="FEE2E2"/>
+          </a:solidFill>
+          <a:ln w="12700">
+            <a:solidFill>
+              <a:srgbClr val="DC2626"/>
             </a:solidFill>
             <a:prstDash val="solid"/>
           </a:ln>
@@ -35839,13 +36428,13 @@
             <a:r>
               <a:rPr lang="en-US" sz="1100" b="1" dirty="0">
                 <a:solidFill>
-                  <a:srgbClr val="16A34A"/>
+                  <a:srgbClr val="DC2626"/>
                 </a:solidFill>
                 <a:latin typeface="Trebuchet MS" pitchFamily="34" charset="0"/>
                 <a:ea typeface="Trebuchet MS" pitchFamily="34" charset="-122"/>
                 <a:cs typeface="Trebuchet MS" pitchFamily="34" charset="-120"/>
               </a:rPr>
-              <a:t>TRUE</a:t>
+              <a:t>FALSE</a:t>
             </a:r>
             <a:endParaRPr lang="en-US" sz="1100" dirty="0"/>
           </a:p>
@@ -35918,7 +36507,7 @@
                 <a:ea typeface="Calibri" pitchFamily="34" charset="-122"/>
                 <a:cs typeface="Calibri" pitchFamily="34" charset="-120"/>
               </a:rPr>
-              <a:t>2.  The root 'bright' comes from the Latin language.</a:t>
+              <a:t>2.  'brighten' means 'to make or become lighter or more cheerful'.</a:t>
             </a:r>
             <a:endParaRPr lang="en-US" sz="1300" dirty="0"/>
           </a:p>
@@ -35941,11 +36530,11 @@
             </a:avLst>
           </a:prstGeom>
           <a:solidFill>
-            <a:srgbClr val="FEE2E2"/>
-          </a:solidFill>
-          <a:ln w="12700">
-            <a:solidFill>
-              <a:srgbClr val="DC2626"/>
+            <a:srgbClr val="DCFCE7"/>
+          </a:solidFill>
+          <a:ln w="12700">
+            <a:solidFill>
+              <a:srgbClr val="16A34A"/>
             </a:solidFill>
             <a:prstDash val="solid"/>
           </a:ln>
@@ -35978,13 +36567,13 @@
             <a:r>
               <a:rPr lang="en-US" sz="1100" b="1" dirty="0">
                 <a:solidFill>
-                  <a:srgbClr val="DC2626"/>
+                  <a:srgbClr val="16A34A"/>
                 </a:solidFill>
                 <a:latin typeface="Trebuchet MS" pitchFamily="34" charset="0"/>
                 <a:ea typeface="Trebuchet MS" pitchFamily="34" charset="-122"/>
                 <a:cs typeface="Trebuchet MS" pitchFamily="34" charset="-120"/>
               </a:rPr>
-              <a:t>FALSE</a:t>
+              <a:t>TRUE</a:t>
             </a:r>
             <a:endParaRPr lang="en-US" sz="1100" dirty="0"/>
           </a:p>
@@ -36057,7 +36646,7 @@
                 <a:ea typeface="Calibri" pitchFamily="34" charset="-122"/>
                 <a:cs typeface="Calibri" pitchFamily="34" charset="-120"/>
               </a:rPr>
-              <a:t>3.  The word 'brightly' contains the root 'bright' plus the suffix '-ly'.</a:t>
+              <a:t>3.  'bright' means 'giving out a lot of light; shining'.</a:t>
             </a:r>
             <a:endParaRPr lang="en-US" sz="1300" dirty="0"/>
           </a:p>
@@ -36196,7 +36785,7 @@
                 <a:ea typeface="Calibri" pitchFamily="34" charset="-122"/>
                 <a:cs typeface="Calibri" pitchFamily="34" charset="-120"/>
               </a:rPr>
-              <a:t>4.  The root 'bright' can mean both full of light and very clever.</a:t>
+              <a:t>4.  'bright' means 'very quiet and calm'.</a:t>
             </a:r>
             <a:endParaRPr lang="en-US" sz="1300" dirty="0"/>
           </a:p>
@@ -36219,11 +36808,11 @@
             </a:avLst>
           </a:prstGeom>
           <a:solidFill>
-            <a:srgbClr val="DCFCE7"/>
-          </a:solidFill>
-          <a:ln w="12700">
-            <a:solidFill>
-              <a:srgbClr val="16A34A"/>
+            <a:srgbClr val="FEE2E2"/>
+          </a:solidFill>
+          <a:ln w="12700">
+            <a:solidFill>
+              <a:srgbClr val="DC2626"/>
             </a:solidFill>
             <a:prstDash val="solid"/>
           </a:ln>
@@ -36256,13 +36845,13 @@
             <a:r>
               <a:rPr lang="en-US" sz="1100" b="1" dirty="0">
                 <a:solidFill>
-                  <a:srgbClr val="16A34A"/>
+                  <a:srgbClr val="DC2626"/>
                 </a:solidFill>
                 <a:latin typeface="Trebuchet MS" pitchFamily="34" charset="0"/>
                 <a:ea typeface="Trebuchet MS" pitchFamily="34" charset="-122"/>
                 <a:cs typeface="Trebuchet MS" pitchFamily="34" charset="-120"/>
               </a:rPr>
-              <a:t>TRUE</a:t>
+              <a:t>FALSE</a:t>
             </a:r>
             <a:endParaRPr lang="en-US" sz="1100" dirty="0"/>
           </a:p>
@@ -36335,7 +36924,7 @@
                 <a:ea typeface="Calibri" pitchFamily="34" charset="-122"/>
                 <a:cs typeface="Calibri" pitchFamily="34" charset="-120"/>
               </a:rPr>
-              <a:t>5.  The word 'brightness' has only one morpheme.</a:t>
+              <a:t>5.  'bright' means 'giving out a lot of light; clever'.</a:t>
             </a:r>
             <a:endParaRPr lang="en-US" sz="1300" dirty="0"/>
           </a:p>
@@ -36358,11 +36947,11 @@
             </a:avLst>
           </a:prstGeom>
           <a:solidFill>
-            <a:srgbClr val="FEE2E2"/>
-          </a:solidFill>
-          <a:ln w="12700">
-            <a:solidFill>
-              <a:srgbClr val="DC2626"/>
+            <a:srgbClr val="DCFCE7"/>
+          </a:solidFill>
+          <a:ln w="12700">
+            <a:solidFill>
+              <a:srgbClr val="16A34A"/>
             </a:solidFill>
             <a:prstDash val="solid"/>
           </a:ln>
@@ -36395,13 +36984,13 @@
             <a:r>
               <a:rPr lang="en-US" sz="1100" b="1" dirty="0">
                 <a:solidFill>
-                  <a:srgbClr val="DC2626"/>
+                  <a:srgbClr val="16A34A"/>
                 </a:solidFill>
                 <a:latin typeface="Trebuchet MS" pitchFamily="34" charset="0"/>
                 <a:ea typeface="Trebuchet MS" pitchFamily="34" charset="-122"/>
                 <a:cs typeface="Trebuchet MS" pitchFamily="34" charset="-120"/>
               </a:rPr>
-              <a:t>FALSE</a:t>
+              <a:t>TRUE</a:t>
             </a:r>
             <a:endParaRPr lang="en-US" sz="1100" dirty="0"/>
           </a:p>
@@ -36693,7 +37282,7 @@
                 <a:ea typeface="Calibri" pitchFamily="34" charset="-122"/>
                 <a:cs typeface="Calibri" pitchFamily="34" charset="-120"/>
               </a:rPr>
-              <a:t>Word Labs  •  wordlabs.app  •  Root: 'bright' = full of light, clever</a:t>
+              <a:t>Word Labs  •  wordlabs.app  •  Root: 'bright' = giving out a lot of light; clever</a:t>
             </a:r>
             <a:endParaRPr lang="en-US" sz="800" dirty="0"/>
           </a:p>
@@ -36830,7 +37419,7 @@
                 <a:ea typeface="Trebuchet MS" pitchFamily="34" charset="-122"/>
                 <a:cs typeface="Trebuchet MS" pitchFamily="34" charset="-120"/>
               </a:rPr>
-              <a:t>full of light, clever</a:t>
+              <a:t>giving out a lot of light; clever</a:t>
             </a:r>
             <a:endParaRPr lang="en-US" sz="2000" dirty="0"/>
           </a:p>
@@ -36869,7 +37458,7 @@
                 <a:ea typeface="Calibri" pitchFamily="34" charset="-122"/>
                 <a:cs typeface="Calibri" pitchFamily="34" charset="-120"/>
               </a:rPr>
-              <a:t>Origin: Old English: beorht</a:t>
+              <a:t>Origin: Anglo-Saxon (Old English) root</a:t>
             </a:r>
             <a:endParaRPr lang="en-US" sz="1100" dirty="0"/>
           </a:p>
@@ -37040,7 +37629,7 @@
                 <a:ea typeface="Trebuchet MS" pitchFamily="34" charset="-122"/>
                 <a:cs typeface="Trebuchet MS" pitchFamily="34" charset="-120"/>
               </a:rPr>
-              <a:t>brighter</a:t>
+              <a:t>brighten</a:t>
             </a:r>
             <a:endParaRPr lang="en-US" sz="1300" dirty="0"/>
           </a:p>
@@ -37106,271 +37695,7 @@
                 <a:ea typeface="Trebuchet MS" pitchFamily="34" charset="-122"/>
                 <a:cs typeface="Trebuchet MS" pitchFamily="34" charset="-120"/>
               </a:rPr>
-              <a:t>brightest</a:t>
-            </a:r>
-            <a:endParaRPr lang="en-US" sz="1300" dirty="0"/>
-          </a:p>
-        </p:txBody>
-      </p:sp>
-      <p:sp>
-        <p:nvSpPr>
-          <p:cNvPr id="22" name="Shape 20"/>
-          <p:cNvSpPr/>
-          <p:nvPr/>
-        </p:nvSpPr>
-        <p:spPr>
-          <a:xfrm>
-            <a:off x="6812280" y="2743200"/>
-            <a:ext cx="2011680" cy="502920"/>
-          </a:xfrm>
-          <a:prstGeom prst="rect">
-            <a:avLst>
-              <a:gd name="adj" fmla="val 14545"/>
-            </a:avLst>
-          </a:prstGeom>
-          <a:solidFill>
-            <a:srgbClr val="EEF2FF"/>
-          </a:solidFill>
-          <a:ln w="12700">
-            <a:solidFill>
-              <a:srgbClr val="6366F1"/>
-            </a:solidFill>
-            <a:prstDash val="solid"/>
-          </a:ln>
-        </p:spPr>
-      </p:sp>
-      <p:sp>
-        <p:nvSpPr>
-          <p:cNvPr id="23" name="Text 21"/>
-          <p:cNvSpPr/>
-          <p:nvPr/>
-        </p:nvSpPr>
-        <p:spPr>
-          <a:xfrm>
-            <a:off x="6812280" y="2743200"/>
-            <a:ext cx="2011680" cy="502920"/>
-          </a:xfrm>
-          <a:prstGeom prst="rect">
-            <a:avLst/>
-          </a:prstGeom>
-          <a:noFill/>
-          <a:ln/>
-        </p:spPr>
-        <p:txBody>
-          <a:bodyPr wrap="square" lIns="0" tIns="0" rIns="0" bIns="0" rtlCol="0" anchor="ctr"/>
-          <a:lstStyle/>
-          <a:p>
-            <a:pPr algn="ctr" indent="0" marL="0">
-              <a:buNone/>
-            </a:pPr>
-            <a:r>
-              <a:rPr lang="en-US" sz="1300" b="1" dirty="0">
-                <a:solidFill>
-                  <a:srgbClr val="4338CA"/>
-                </a:solidFill>
-                <a:latin typeface="Trebuchet MS" pitchFamily="34" charset="0"/>
-                <a:ea typeface="Trebuchet MS" pitchFamily="34" charset="-122"/>
-                <a:cs typeface="Trebuchet MS" pitchFamily="34" charset="-120"/>
-              </a:rPr>
-              <a:t>brightly</a:t>
-            </a:r>
-            <a:endParaRPr lang="en-US" sz="1300" dirty="0"/>
-          </a:p>
-        </p:txBody>
-      </p:sp>
-      <p:sp>
-        <p:nvSpPr>
-          <p:cNvPr id="24" name="Shape 22"/>
-          <p:cNvSpPr/>
-          <p:nvPr/>
-        </p:nvSpPr>
-        <p:spPr>
-          <a:xfrm>
-            <a:off x="365760" y="3401568"/>
-            <a:ext cx="2011680" cy="502920"/>
-          </a:xfrm>
-          <a:prstGeom prst="rect">
-            <a:avLst>
-              <a:gd name="adj" fmla="val 14545"/>
-            </a:avLst>
-          </a:prstGeom>
-          <a:solidFill>
-            <a:srgbClr val="EEF2FF"/>
-          </a:solidFill>
-          <a:ln w="12700">
-            <a:solidFill>
-              <a:srgbClr val="6366F1"/>
-            </a:solidFill>
-            <a:prstDash val="solid"/>
-          </a:ln>
-        </p:spPr>
-      </p:sp>
-      <p:sp>
-        <p:nvSpPr>
-          <p:cNvPr id="25" name="Text 23"/>
-          <p:cNvSpPr/>
-          <p:nvPr/>
-        </p:nvSpPr>
-        <p:spPr>
-          <a:xfrm>
-            <a:off x="365760" y="3401568"/>
-            <a:ext cx="2011680" cy="502920"/>
-          </a:xfrm>
-          <a:prstGeom prst="rect">
-            <a:avLst/>
-          </a:prstGeom>
-          <a:noFill/>
-          <a:ln/>
-        </p:spPr>
-        <p:txBody>
-          <a:bodyPr wrap="square" lIns="0" tIns="0" rIns="0" bIns="0" rtlCol="0" anchor="ctr"/>
-          <a:lstStyle/>
-          <a:p>
-            <a:pPr algn="ctr" indent="0" marL="0">
-              <a:buNone/>
-            </a:pPr>
-            <a:r>
-              <a:rPr lang="en-US" sz="1300" b="1" dirty="0">
-                <a:solidFill>
-                  <a:srgbClr val="4338CA"/>
-                </a:solidFill>
-                <a:latin typeface="Trebuchet MS" pitchFamily="34" charset="0"/>
-                <a:ea typeface="Trebuchet MS" pitchFamily="34" charset="-122"/>
-                <a:cs typeface="Trebuchet MS" pitchFamily="34" charset="-120"/>
-              </a:rPr>
-              <a:t>brightness</a:t>
-            </a:r>
-            <a:endParaRPr lang="en-US" sz="1300" dirty="0"/>
-          </a:p>
-        </p:txBody>
-      </p:sp>
-      <p:sp>
-        <p:nvSpPr>
-          <p:cNvPr id="26" name="Shape 24"/>
-          <p:cNvSpPr/>
-          <p:nvPr/>
-        </p:nvSpPr>
-        <p:spPr>
-          <a:xfrm>
-            <a:off x="2514600" y="3401568"/>
-            <a:ext cx="2011680" cy="502920"/>
-          </a:xfrm>
-          <a:prstGeom prst="rect">
-            <a:avLst>
-              <a:gd name="adj" fmla="val 14545"/>
-            </a:avLst>
-          </a:prstGeom>
-          <a:solidFill>
-            <a:srgbClr val="EEF2FF"/>
-          </a:solidFill>
-          <a:ln w="12700">
-            <a:solidFill>
-              <a:srgbClr val="6366F1"/>
-            </a:solidFill>
-            <a:prstDash val="solid"/>
-          </a:ln>
-        </p:spPr>
-      </p:sp>
-      <p:sp>
-        <p:nvSpPr>
-          <p:cNvPr id="27" name="Text 25"/>
-          <p:cNvSpPr/>
-          <p:nvPr/>
-        </p:nvSpPr>
-        <p:spPr>
-          <a:xfrm>
-            <a:off x="2514600" y="3401568"/>
-            <a:ext cx="2011680" cy="502920"/>
-          </a:xfrm>
-          <a:prstGeom prst="rect">
-            <a:avLst/>
-          </a:prstGeom>
-          <a:noFill/>
-          <a:ln/>
-        </p:spPr>
-        <p:txBody>
-          <a:bodyPr wrap="square" lIns="0" tIns="0" rIns="0" bIns="0" rtlCol="0" anchor="ctr"/>
-          <a:lstStyle/>
-          <a:p>
-            <a:pPr algn="ctr" indent="0" marL="0">
-              <a:buNone/>
-            </a:pPr>
-            <a:r>
-              <a:rPr lang="en-US" sz="1300" b="1" dirty="0">
-                <a:solidFill>
-                  <a:srgbClr val="4338CA"/>
-                </a:solidFill>
-                <a:latin typeface="Trebuchet MS" pitchFamily="34" charset="0"/>
-                <a:ea typeface="Trebuchet MS" pitchFamily="34" charset="-122"/>
-                <a:cs typeface="Trebuchet MS" pitchFamily="34" charset="-120"/>
-              </a:rPr>
-              <a:t>brighten</a:t>
-            </a:r>
-            <a:endParaRPr lang="en-US" sz="1300" dirty="0"/>
-          </a:p>
-        </p:txBody>
-      </p:sp>
-      <p:sp>
-        <p:nvSpPr>
-          <p:cNvPr id="28" name="Shape 26"/>
-          <p:cNvSpPr/>
-          <p:nvPr/>
-        </p:nvSpPr>
-        <p:spPr>
-          <a:xfrm>
-            <a:off x="4663440" y="3401568"/>
-            <a:ext cx="2011680" cy="502920"/>
-          </a:xfrm>
-          <a:prstGeom prst="rect">
-            <a:avLst>
-              <a:gd name="adj" fmla="val 14545"/>
-            </a:avLst>
-          </a:prstGeom>
-          <a:solidFill>
-            <a:srgbClr val="EEF2FF"/>
-          </a:solidFill>
-          <a:ln w="12700">
-            <a:solidFill>
-              <a:srgbClr val="6366F1"/>
-            </a:solidFill>
-            <a:prstDash val="solid"/>
-          </a:ln>
-        </p:spPr>
-      </p:sp>
-      <p:sp>
-        <p:nvSpPr>
-          <p:cNvPr id="29" name="Text 27"/>
-          <p:cNvSpPr/>
-          <p:nvPr/>
-        </p:nvSpPr>
-        <p:spPr>
-          <a:xfrm>
-            <a:off x="4663440" y="3401568"/>
-            <a:ext cx="2011680" cy="502920"/>
-          </a:xfrm>
-          <a:prstGeom prst="rect">
-            <a:avLst/>
-          </a:prstGeom>
-          <a:noFill/>
-          <a:ln/>
-        </p:spPr>
-        <p:txBody>
-          <a:bodyPr wrap="square" lIns="0" tIns="0" rIns="0" bIns="0" rtlCol="0" anchor="ctr"/>
-          <a:lstStyle/>
-          <a:p>
-            <a:pPr algn="ctr" indent="0" marL="0">
-              <a:buNone/>
-            </a:pPr>
-            <a:r>
-              <a:rPr lang="en-US" sz="1300" b="1" dirty="0">
-                <a:solidFill>
-                  <a:srgbClr val="4338CA"/>
-                </a:solidFill>
-                <a:latin typeface="Trebuchet MS" pitchFamily="34" charset="0"/>
-                <a:ea typeface="Trebuchet MS" pitchFamily="34" charset="-122"/>
-                <a:cs typeface="Trebuchet MS" pitchFamily="34" charset="-120"/>
-              </a:rPr>
-              <a:t>unbrighten</a:t>
+              <a:t>brighter</a:t>
             </a:r>
             <a:endParaRPr lang="en-US" sz="1300" dirty="0"/>
           </a:p>
@@ -37662,7 +37987,7 @@
                 <a:ea typeface="Calibri" pitchFamily="34" charset="-122"/>
                 <a:cs typeface="Calibri" pitchFamily="34" charset="-120"/>
               </a:rPr>
-              <a:t>Word Labs  •  wordlabs.app  •  Root: 'bright' = full of light, clever</a:t>
+              <a:t>Word Labs  •  wordlabs.app  •  Root: 'bright' = giving out a lot of light; clever</a:t>
             </a:r>
             <a:endParaRPr lang="en-US" sz="800" dirty="0"/>
           </a:p>
@@ -37920,7 +38245,7 @@
             <a:avLst/>
           </a:prstGeom>
           <a:solidFill>
-            <a:srgbClr val="DDD6FE"/>
+            <a:srgbClr val="F8FAFC"/>
           </a:solidFill>
           <a:ln w="12700">
             <a:solidFill>
@@ -37932,14 +38257,39 @@
       </p:sp>
       <p:sp>
         <p:nvSpPr>
-          <p:cNvPr id="18" name="Text 16"/>
-          <p:cNvSpPr/>
-          <p:nvPr/>
-        </p:nvSpPr>
-        <p:spPr>
-          <a:xfrm>
-            <a:off x="640080" y="1755648"/>
-            <a:ext cx="1463040" cy="420624"/>
+          <p:cNvPr id="18" name="Shape 16"/>
+          <p:cNvSpPr/>
+          <p:nvPr/>
+        </p:nvSpPr>
+        <p:spPr>
+          <a:xfrm>
+            <a:off x="3291840" y="1755648"/>
+            <a:ext cx="1645920" cy="420624"/>
+          </a:xfrm>
+          <a:prstGeom prst="rect">
+            <a:avLst/>
+          </a:prstGeom>
+          <a:solidFill>
+            <a:srgbClr val="CCFBF1"/>
+          </a:solidFill>
+          <a:ln w="12700">
+            <a:solidFill>
+              <a:srgbClr val="E5E7EB"/>
+            </a:solidFill>
+            <a:prstDash val="solid"/>
+          </a:ln>
+        </p:spPr>
+      </p:sp>
+      <p:sp>
+        <p:nvSpPr>
+          <p:cNvPr id="19" name="Text 17"/>
+          <p:cNvSpPr/>
+          <p:nvPr/>
+        </p:nvSpPr>
+        <p:spPr>
+          <a:xfrm>
+            <a:off x="3291840" y="1755648"/>
+            <a:ext cx="1645920" cy="420624"/>
           </a:xfrm>
           <a:prstGeom prst="rect">
             <a:avLst/>
@@ -37957,13 +38307,13 @@
             <a:r>
               <a:rPr lang="en-US" sz="1300" b="1" dirty="0">
                 <a:solidFill>
-                  <a:srgbClr val="4C1D95"/>
+                  <a:srgbClr val="0F766E"/>
                 </a:solidFill>
                 <a:latin typeface="Trebuchet MS" pitchFamily="34" charset="0"/>
                 <a:ea typeface="Trebuchet MS" pitchFamily="34" charset="-122"/>
                 <a:cs typeface="Trebuchet MS" pitchFamily="34" charset="-120"/>
               </a:rPr>
-              <a:t>un-</a:t>
+              <a:t>bright</a:t>
             </a:r>
             <a:endParaRPr lang="en-US" sz="1300" dirty="0"/>
           </a:p>
@@ -37971,20 +38321,20 @@
       </p:sp>
       <p:sp>
         <p:nvSpPr>
-          <p:cNvPr id="19" name="Shape 17"/>
-          <p:cNvSpPr/>
-          <p:nvPr/>
-        </p:nvSpPr>
-        <p:spPr>
-          <a:xfrm>
-            <a:off x="3291840" y="1755648"/>
-            <a:ext cx="1645920" cy="420624"/>
-          </a:xfrm>
-          <a:prstGeom prst="rect">
-            <a:avLst/>
-          </a:prstGeom>
-          <a:solidFill>
-            <a:srgbClr val="CCFBF1"/>
+          <p:cNvPr id="20" name="Shape 18"/>
+          <p:cNvSpPr/>
+          <p:nvPr/>
+        </p:nvSpPr>
+        <p:spPr>
+          <a:xfrm>
+            <a:off x="5943600" y="1755648"/>
+            <a:ext cx="1463040" cy="420624"/>
+          </a:xfrm>
+          <a:prstGeom prst="rect">
+            <a:avLst/>
+          </a:prstGeom>
+          <a:solidFill>
+            <a:srgbClr val="FCE7F3"/>
           </a:solidFill>
           <a:ln w="12700">
             <a:solidFill>
@@ -37996,14 +38346,14 @@
       </p:sp>
       <p:sp>
         <p:nvSpPr>
-          <p:cNvPr id="20" name="Text 18"/>
-          <p:cNvSpPr/>
-          <p:nvPr/>
-        </p:nvSpPr>
-        <p:spPr>
-          <a:xfrm>
-            <a:off x="3291840" y="1755648"/>
-            <a:ext cx="1645920" cy="420624"/>
+          <p:cNvPr id="21" name="Text 19"/>
+          <p:cNvSpPr/>
+          <p:nvPr/>
+        </p:nvSpPr>
+        <p:spPr>
+          <a:xfrm>
+            <a:off x="5943600" y="1755648"/>
+            <a:ext cx="1463040" cy="420624"/>
           </a:xfrm>
           <a:prstGeom prst="rect">
             <a:avLst/>
@@ -38021,13 +38371,13 @@
             <a:r>
               <a:rPr lang="en-US" sz="1300" b="1" dirty="0">
                 <a:solidFill>
-                  <a:srgbClr val="0F766E"/>
+                  <a:srgbClr val="9D174D"/>
                 </a:solidFill>
                 <a:latin typeface="Trebuchet MS" pitchFamily="34" charset="0"/>
                 <a:ea typeface="Trebuchet MS" pitchFamily="34" charset="-122"/>
                 <a:cs typeface="Trebuchet MS" pitchFamily="34" charset="-120"/>
               </a:rPr>
-              <a:t>bright</a:t>
+              <a:t>-en</a:t>
             </a:r>
             <a:endParaRPr lang="en-US" sz="1300" dirty="0"/>
           </a:p>
@@ -38035,19 +38385,69 @@
       </p:sp>
       <p:sp>
         <p:nvSpPr>
-          <p:cNvPr id="21" name="Shape 19"/>
-          <p:cNvSpPr/>
-          <p:nvPr/>
-        </p:nvSpPr>
-        <p:spPr>
-          <a:xfrm>
-            <a:off x="5943600" y="1755648"/>
+          <p:cNvPr id="22" name="Shape 20"/>
+          <p:cNvSpPr/>
+          <p:nvPr/>
+        </p:nvSpPr>
+        <p:spPr>
+          <a:xfrm>
+            <a:off x="640080" y="2212848"/>
             <a:ext cx="1463040" cy="420624"/>
           </a:xfrm>
           <a:prstGeom prst="rect">
             <a:avLst/>
           </a:prstGeom>
           <a:solidFill>
+            <a:srgbClr val="F1F5F9"/>
+          </a:solidFill>
+          <a:ln w="12700">
+            <a:solidFill>
+              <a:srgbClr val="E5E7EB"/>
+            </a:solidFill>
+            <a:prstDash val="solid"/>
+          </a:ln>
+        </p:spPr>
+      </p:sp>
+      <p:sp>
+        <p:nvSpPr>
+          <p:cNvPr id="23" name="Shape 21"/>
+          <p:cNvSpPr/>
+          <p:nvPr/>
+        </p:nvSpPr>
+        <p:spPr>
+          <a:xfrm>
+            <a:off x="3291840" y="2212848"/>
+            <a:ext cx="1645920" cy="420624"/>
+          </a:xfrm>
+          <a:prstGeom prst="rect">
+            <a:avLst/>
+          </a:prstGeom>
+          <a:solidFill>
+            <a:srgbClr val="F1F5F9"/>
+          </a:solidFill>
+          <a:ln w="12700">
+            <a:solidFill>
+              <a:srgbClr val="E5E7EB"/>
+            </a:solidFill>
+            <a:prstDash val="solid"/>
+          </a:ln>
+        </p:spPr>
+      </p:sp>
+      <p:sp>
+        <p:nvSpPr>
+          <p:cNvPr id="24" name="Shape 22"/>
+          <p:cNvSpPr/>
+          <p:nvPr/>
+        </p:nvSpPr>
+        <p:spPr>
+          <a:xfrm>
+            <a:off x="5943600" y="2212848"/>
+            <a:ext cx="1463040" cy="420624"/>
+          </a:xfrm>
+          <a:prstGeom prst="rect">
+            <a:avLst/>
+          </a:prstGeom>
+          <a:solidFill>
             <a:srgbClr val="FCE7F3"/>
           </a:solidFill>
           <a:ln w="12700">
@@ -38060,13 +38460,13 @@
       </p:sp>
       <p:sp>
         <p:nvSpPr>
-          <p:cNvPr id="22" name="Text 20"/>
-          <p:cNvSpPr/>
-          <p:nvPr/>
-        </p:nvSpPr>
-        <p:spPr>
-          <a:xfrm>
-            <a:off x="5943600" y="1755648"/>
+          <p:cNvPr id="25" name="Text 23"/>
+          <p:cNvSpPr/>
+          <p:nvPr/>
+        </p:nvSpPr>
+        <p:spPr>
+          <a:xfrm>
+            <a:off x="5943600" y="2212848"/>
             <a:ext cx="1463040" cy="420624"/>
           </a:xfrm>
           <a:prstGeom prst="rect">
@@ -38091,7 +38491,7 @@
                 <a:ea typeface="Trebuchet MS" pitchFamily="34" charset="-122"/>
                 <a:cs typeface="Trebuchet MS" pitchFamily="34" charset="-120"/>
               </a:rPr>
-              <a:t>-en</a:t>
+              <a:t>-er</a:t>
             </a:r>
             <a:endParaRPr lang="en-US" sz="1300" dirty="0"/>
           </a:p>
@@ -38099,20 +38499,20 @@
       </p:sp>
       <p:sp>
         <p:nvSpPr>
-          <p:cNvPr id="23" name="Shape 21"/>
-          <p:cNvSpPr/>
-          <p:nvPr/>
-        </p:nvSpPr>
-        <p:spPr>
-          <a:xfrm>
-            <a:off x="640080" y="2212848"/>
+          <p:cNvPr id="26" name="Shape 24"/>
+          <p:cNvSpPr/>
+          <p:nvPr/>
+        </p:nvSpPr>
+        <p:spPr>
+          <a:xfrm>
+            <a:off x="640080" y="2670048"/>
             <a:ext cx="1463040" cy="420624"/>
           </a:xfrm>
           <a:prstGeom prst="rect">
             <a:avLst/>
           </a:prstGeom>
           <a:solidFill>
-            <a:srgbClr val="DDD6FE"/>
+            <a:srgbClr val="F8FAFC"/>
           </a:solidFill>
           <a:ln w="12700">
             <a:solidFill>
@@ -38124,18 +38524,68 @@
       </p:sp>
       <p:sp>
         <p:nvSpPr>
-          <p:cNvPr id="24" name="Text 22"/>
-          <p:cNvSpPr/>
-          <p:nvPr/>
-        </p:nvSpPr>
-        <p:spPr>
-          <a:xfrm>
-            <a:off x="640080" y="2212848"/>
+          <p:cNvPr id="27" name="Shape 25"/>
+          <p:cNvSpPr/>
+          <p:nvPr/>
+        </p:nvSpPr>
+        <p:spPr>
+          <a:xfrm>
+            <a:off x="3291840" y="2670048"/>
+            <a:ext cx="1645920" cy="420624"/>
+          </a:xfrm>
+          <a:prstGeom prst="rect">
+            <a:avLst/>
+          </a:prstGeom>
+          <a:solidFill>
+            <a:srgbClr val="F8FAFC"/>
+          </a:solidFill>
+          <a:ln w="12700">
+            <a:solidFill>
+              <a:srgbClr val="E5E7EB"/>
+            </a:solidFill>
+            <a:prstDash val="solid"/>
+          </a:ln>
+        </p:spPr>
+      </p:sp>
+      <p:sp>
+        <p:nvSpPr>
+          <p:cNvPr id="28" name="Shape 26"/>
+          <p:cNvSpPr/>
+          <p:nvPr/>
+        </p:nvSpPr>
+        <p:spPr>
+          <a:xfrm>
+            <a:off x="5943600" y="2670048"/>
             <a:ext cx="1463040" cy="420624"/>
           </a:xfrm>
           <a:prstGeom prst="rect">
             <a:avLst/>
           </a:prstGeom>
+          <a:solidFill>
+            <a:srgbClr val="FCE7F3"/>
+          </a:solidFill>
+          <a:ln w="12700">
+            <a:solidFill>
+              <a:srgbClr val="E5E7EB"/>
+            </a:solidFill>
+            <a:prstDash val="solid"/>
+          </a:ln>
+        </p:spPr>
+      </p:sp>
+      <p:sp>
+        <p:nvSpPr>
+          <p:cNvPr id="29" name="Text 27"/>
+          <p:cNvSpPr/>
+          <p:nvPr/>
+        </p:nvSpPr>
+        <p:spPr>
+          <a:xfrm>
+            <a:off x="5943600" y="2670048"/>
+            <a:ext cx="1463040" cy="420624"/>
+          </a:xfrm>
+          <a:prstGeom prst="rect">
+            <a:avLst/>
+          </a:prstGeom>
           <a:noFill/>
           <a:ln/>
         </p:spPr>
@@ -38149,13 +38599,13 @@
             <a:r>
               <a:rPr lang="en-US" sz="1300" b="1" dirty="0">
                 <a:solidFill>
-                  <a:srgbClr val="4C1D95"/>
+                  <a:srgbClr val="9D174D"/>
                 </a:solidFill>
                 <a:latin typeface="Trebuchet MS" pitchFamily="34" charset="0"/>
                 <a:ea typeface="Trebuchet MS" pitchFamily="34" charset="-122"/>
                 <a:cs typeface="Trebuchet MS" pitchFamily="34" charset="-120"/>
               </a:rPr>
-              <a:t>over-</a:t>
+              <a:t>-est</a:t>
             </a:r>
             <a:endParaRPr lang="en-US" sz="1300" dirty="0"/>
           </a:p>
@@ -38163,13 +38613,38 @@
       </p:sp>
       <p:sp>
         <p:nvSpPr>
-          <p:cNvPr id="25" name="Shape 23"/>
-          <p:cNvSpPr/>
-          <p:nvPr/>
-        </p:nvSpPr>
-        <p:spPr>
-          <a:xfrm>
-            <a:off x="3291840" y="2212848"/>
+          <p:cNvPr id="30" name="Shape 28"/>
+          <p:cNvSpPr/>
+          <p:nvPr/>
+        </p:nvSpPr>
+        <p:spPr>
+          <a:xfrm>
+            <a:off x="640080" y="3127248"/>
+            <a:ext cx="1463040" cy="420624"/>
+          </a:xfrm>
+          <a:prstGeom prst="rect">
+            <a:avLst/>
+          </a:prstGeom>
+          <a:solidFill>
+            <a:srgbClr val="F1F5F9"/>
+          </a:solidFill>
+          <a:ln w="12700">
+            <a:solidFill>
+              <a:srgbClr val="E5E7EB"/>
+            </a:solidFill>
+            <a:prstDash val="solid"/>
+          </a:ln>
+        </p:spPr>
+      </p:sp>
+      <p:sp>
+        <p:nvSpPr>
+          <p:cNvPr id="31" name="Shape 29"/>
+          <p:cNvSpPr/>
+          <p:nvPr/>
+        </p:nvSpPr>
+        <p:spPr>
+          <a:xfrm>
+            <a:off x="3291840" y="3127248"/>
             <a:ext cx="1645920" cy="420624"/>
           </a:xfrm>
           <a:prstGeom prst="rect">
@@ -38188,13 +38663,13 @@
       </p:sp>
       <p:sp>
         <p:nvSpPr>
-          <p:cNvPr id="26" name="Shape 24"/>
-          <p:cNvSpPr/>
-          <p:nvPr/>
-        </p:nvSpPr>
-        <p:spPr>
-          <a:xfrm>
-            <a:off x="5943600" y="2212848"/>
+          <p:cNvPr id="32" name="Shape 30"/>
+          <p:cNvSpPr/>
+          <p:nvPr/>
+        </p:nvSpPr>
+        <p:spPr>
+          <a:xfrm>
+            <a:off x="5943600" y="3127248"/>
             <a:ext cx="1463040" cy="420624"/>
           </a:xfrm>
           <a:prstGeom prst="rect">
@@ -38213,13 +38688,13 @@
       </p:sp>
       <p:sp>
         <p:nvSpPr>
-          <p:cNvPr id="27" name="Text 25"/>
-          <p:cNvSpPr/>
-          <p:nvPr/>
-        </p:nvSpPr>
-        <p:spPr>
-          <a:xfrm>
-            <a:off x="5943600" y="2212848"/>
+          <p:cNvPr id="33" name="Text 31"/>
+          <p:cNvSpPr/>
+          <p:nvPr/>
+        </p:nvSpPr>
+        <p:spPr>
+          <a:xfrm>
+            <a:off x="5943600" y="3127248"/>
             <a:ext cx="1463040" cy="420624"/>
           </a:xfrm>
           <a:prstGeom prst="rect">
@@ -38244,7 +38719,7 @@
                 <a:ea typeface="Trebuchet MS" pitchFamily="34" charset="-122"/>
                 <a:cs typeface="Trebuchet MS" pitchFamily="34" charset="-120"/>
               </a:rPr>
-              <a:t>-er</a:t>
+              <a:t>-ly</a:t>
             </a:r>
             <a:endParaRPr lang="en-US" sz="1300" dirty="0"/>
           </a:p>
@@ -38252,20 +38727,20 @@
       </p:sp>
       <p:sp>
         <p:nvSpPr>
-          <p:cNvPr id="28" name="Shape 26"/>
-          <p:cNvSpPr/>
-          <p:nvPr/>
-        </p:nvSpPr>
-        <p:spPr>
-          <a:xfrm>
-            <a:off x="640080" y="2670048"/>
+          <p:cNvPr id="34" name="Shape 32"/>
+          <p:cNvSpPr/>
+          <p:nvPr/>
+        </p:nvSpPr>
+        <p:spPr>
+          <a:xfrm>
+            <a:off x="640080" y="3584448"/>
             <a:ext cx="1463040" cy="420624"/>
           </a:xfrm>
           <a:prstGeom prst="rect">
             <a:avLst/>
           </a:prstGeom>
           <a:solidFill>
-            <a:srgbClr val="DDD6FE"/>
+            <a:srgbClr val="F8FAFC"/>
           </a:solidFill>
           <a:ln w="12700">
             <a:solidFill>
@@ -38277,18 +38752,68 @@
       </p:sp>
       <p:sp>
         <p:nvSpPr>
-          <p:cNvPr id="29" name="Text 27"/>
-          <p:cNvSpPr/>
-          <p:nvPr/>
-        </p:nvSpPr>
-        <p:spPr>
-          <a:xfrm>
-            <a:off x="640080" y="2670048"/>
+          <p:cNvPr id="35" name="Shape 33"/>
+          <p:cNvSpPr/>
+          <p:nvPr/>
+        </p:nvSpPr>
+        <p:spPr>
+          <a:xfrm>
+            <a:off x="3291840" y="3584448"/>
+            <a:ext cx="1645920" cy="420624"/>
+          </a:xfrm>
+          <a:prstGeom prst="rect">
+            <a:avLst/>
+          </a:prstGeom>
+          <a:solidFill>
+            <a:srgbClr val="F8FAFC"/>
+          </a:solidFill>
+          <a:ln w="12700">
+            <a:solidFill>
+              <a:srgbClr val="E5E7EB"/>
+            </a:solidFill>
+            <a:prstDash val="solid"/>
+          </a:ln>
+        </p:spPr>
+      </p:sp>
+      <p:sp>
+        <p:nvSpPr>
+          <p:cNvPr id="36" name="Shape 34"/>
+          <p:cNvSpPr/>
+          <p:nvPr/>
+        </p:nvSpPr>
+        <p:spPr>
+          <a:xfrm>
+            <a:off x="5943600" y="3584448"/>
             <a:ext cx="1463040" cy="420624"/>
           </a:xfrm>
           <a:prstGeom prst="rect">
             <a:avLst/>
           </a:prstGeom>
+          <a:solidFill>
+            <a:srgbClr val="FCE7F3"/>
+          </a:solidFill>
+          <a:ln w="12700">
+            <a:solidFill>
+              <a:srgbClr val="E5E7EB"/>
+            </a:solidFill>
+            <a:prstDash val="solid"/>
+          </a:ln>
+        </p:spPr>
+      </p:sp>
+      <p:sp>
+        <p:nvSpPr>
+          <p:cNvPr id="37" name="Text 35"/>
+          <p:cNvSpPr/>
+          <p:nvPr/>
+        </p:nvSpPr>
+        <p:spPr>
+          <a:xfrm>
+            <a:off x="5943600" y="3584448"/>
+            <a:ext cx="1463040" cy="420624"/>
+          </a:xfrm>
+          <a:prstGeom prst="rect">
+            <a:avLst/>
+          </a:prstGeom>
           <a:noFill/>
           <a:ln/>
         </p:spPr>
@@ -38302,13 +38827,13 @@
             <a:r>
               <a:rPr lang="en-US" sz="1300" b="1" dirty="0">
                 <a:solidFill>
-                  <a:srgbClr val="4C1D95"/>
+                  <a:srgbClr val="9D174D"/>
                 </a:solidFill>
                 <a:latin typeface="Trebuchet MS" pitchFamily="34" charset="0"/>
                 <a:ea typeface="Trebuchet MS" pitchFamily="34" charset="-122"/>
                 <a:cs typeface="Trebuchet MS" pitchFamily="34" charset="-120"/>
               </a:rPr>
-              <a:t>out-</a:t>
+              <a:t>-ness</a:t>
             </a:r>
             <a:endParaRPr lang="en-US" sz="1300" dirty="0"/>
           </a:p>
@@ -38316,402 +38841,7 @@
       </p:sp>
       <p:sp>
         <p:nvSpPr>
-          <p:cNvPr id="30" name="Shape 28"/>
-          <p:cNvSpPr/>
-          <p:nvPr/>
-        </p:nvSpPr>
-        <p:spPr>
-          <a:xfrm>
-            <a:off x="3291840" y="2670048"/>
-            <a:ext cx="1645920" cy="420624"/>
-          </a:xfrm>
-          <a:prstGeom prst="rect">
-            <a:avLst/>
-          </a:prstGeom>
-          <a:solidFill>
-            <a:srgbClr val="F8FAFC"/>
-          </a:solidFill>
-          <a:ln w="12700">
-            <a:solidFill>
-              <a:srgbClr val="E5E7EB"/>
-            </a:solidFill>
-            <a:prstDash val="solid"/>
-          </a:ln>
-        </p:spPr>
-      </p:sp>
-      <p:sp>
-        <p:nvSpPr>
-          <p:cNvPr id="31" name="Shape 29"/>
-          <p:cNvSpPr/>
-          <p:nvPr/>
-        </p:nvSpPr>
-        <p:spPr>
-          <a:xfrm>
-            <a:off x="5943600" y="2670048"/>
-            <a:ext cx="1463040" cy="420624"/>
-          </a:xfrm>
-          <a:prstGeom prst="rect">
-            <a:avLst/>
-          </a:prstGeom>
-          <a:solidFill>
-            <a:srgbClr val="FCE7F3"/>
-          </a:solidFill>
-          <a:ln w="12700">
-            <a:solidFill>
-              <a:srgbClr val="E5E7EB"/>
-            </a:solidFill>
-            <a:prstDash val="solid"/>
-          </a:ln>
-        </p:spPr>
-      </p:sp>
-      <p:sp>
-        <p:nvSpPr>
-          <p:cNvPr id="32" name="Text 30"/>
-          <p:cNvSpPr/>
-          <p:nvPr/>
-        </p:nvSpPr>
-        <p:spPr>
-          <a:xfrm>
-            <a:off x="5943600" y="2670048"/>
-            <a:ext cx="1463040" cy="420624"/>
-          </a:xfrm>
-          <a:prstGeom prst="rect">
-            <a:avLst/>
-          </a:prstGeom>
-          <a:noFill/>
-          <a:ln/>
-        </p:spPr>
-        <p:txBody>
-          <a:bodyPr wrap="square" lIns="0" tIns="0" rIns="0" bIns="0" rtlCol="0" anchor="ctr"/>
-          <a:lstStyle/>
-          <a:p>
-            <a:pPr algn="ctr" indent="0" marL="0">
-              <a:buNone/>
-            </a:pPr>
-            <a:r>
-              <a:rPr lang="en-US" sz="1300" b="1" dirty="0">
-                <a:solidFill>
-                  <a:srgbClr val="9D174D"/>
-                </a:solidFill>
-                <a:latin typeface="Trebuchet MS" pitchFamily="34" charset="0"/>
-                <a:ea typeface="Trebuchet MS" pitchFamily="34" charset="-122"/>
-                <a:cs typeface="Trebuchet MS" pitchFamily="34" charset="-120"/>
-              </a:rPr>
-              <a:t>-est</a:t>
-            </a:r>
-            <a:endParaRPr lang="en-US" sz="1300" dirty="0"/>
-          </a:p>
-        </p:txBody>
-      </p:sp>
-      <p:sp>
-        <p:nvSpPr>
-          <p:cNvPr id="33" name="Shape 31"/>
-          <p:cNvSpPr/>
-          <p:nvPr/>
-        </p:nvSpPr>
-        <p:spPr>
-          <a:xfrm>
-            <a:off x="640080" y="3127248"/>
-            <a:ext cx="1463040" cy="420624"/>
-          </a:xfrm>
-          <a:prstGeom prst="rect">
-            <a:avLst/>
-          </a:prstGeom>
-          <a:solidFill>
-            <a:srgbClr val="DDD6FE"/>
-          </a:solidFill>
-          <a:ln w="12700">
-            <a:solidFill>
-              <a:srgbClr val="E5E7EB"/>
-            </a:solidFill>
-            <a:prstDash val="solid"/>
-          </a:ln>
-        </p:spPr>
-      </p:sp>
-      <p:sp>
-        <p:nvSpPr>
-          <p:cNvPr id="34" name="Text 32"/>
-          <p:cNvSpPr/>
-          <p:nvPr/>
-        </p:nvSpPr>
-        <p:spPr>
-          <a:xfrm>
-            <a:off x="640080" y="3127248"/>
-            <a:ext cx="1463040" cy="420624"/>
-          </a:xfrm>
-          <a:prstGeom prst="rect">
-            <a:avLst/>
-          </a:prstGeom>
-          <a:noFill/>
-          <a:ln/>
-        </p:spPr>
-        <p:txBody>
-          <a:bodyPr wrap="square" lIns="0" tIns="0" rIns="0" bIns="0" rtlCol="0" anchor="ctr"/>
-          <a:lstStyle/>
-          <a:p>
-            <a:pPr algn="ctr" indent="0" marL="0">
-              <a:buNone/>
-            </a:pPr>
-            <a:r>
-              <a:rPr lang="en-US" sz="1300" b="1" dirty="0">
-                <a:solidFill>
-                  <a:srgbClr val="4C1D95"/>
-                </a:solidFill>
-                <a:latin typeface="Trebuchet MS" pitchFamily="34" charset="0"/>
-                <a:ea typeface="Trebuchet MS" pitchFamily="34" charset="-122"/>
-                <a:cs typeface="Trebuchet MS" pitchFamily="34" charset="-120"/>
-              </a:rPr>
-              <a:t>sun-</a:t>
-            </a:r>
-            <a:endParaRPr lang="en-US" sz="1300" dirty="0"/>
-          </a:p>
-        </p:txBody>
-      </p:sp>
-      <p:sp>
-        <p:nvSpPr>
-          <p:cNvPr id="35" name="Shape 33"/>
-          <p:cNvSpPr/>
-          <p:nvPr/>
-        </p:nvSpPr>
-        <p:spPr>
-          <a:xfrm>
-            <a:off x="3291840" y="3127248"/>
-            <a:ext cx="1645920" cy="420624"/>
-          </a:xfrm>
-          <a:prstGeom prst="rect">
-            <a:avLst/>
-          </a:prstGeom>
-          <a:solidFill>
-            <a:srgbClr val="F1F5F9"/>
-          </a:solidFill>
-          <a:ln w="12700">
-            <a:solidFill>
-              <a:srgbClr val="E5E7EB"/>
-            </a:solidFill>
-            <a:prstDash val="solid"/>
-          </a:ln>
-        </p:spPr>
-      </p:sp>
-      <p:sp>
-        <p:nvSpPr>
-          <p:cNvPr id="36" name="Shape 34"/>
-          <p:cNvSpPr/>
-          <p:nvPr/>
-        </p:nvSpPr>
-        <p:spPr>
-          <a:xfrm>
-            <a:off x="5943600" y="3127248"/>
-            <a:ext cx="1463040" cy="420624"/>
-          </a:xfrm>
-          <a:prstGeom prst="rect">
-            <a:avLst/>
-          </a:prstGeom>
-          <a:solidFill>
-            <a:srgbClr val="FCE7F3"/>
-          </a:solidFill>
-          <a:ln w="12700">
-            <a:solidFill>
-              <a:srgbClr val="E5E7EB"/>
-            </a:solidFill>
-            <a:prstDash val="solid"/>
-          </a:ln>
-        </p:spPr>
-      </p:sp>
-      <p:sp>
-        <p:nvSpPr>
-          <p:cNvPr id="37" name="Text 35"/>
-          <p:cNvSpPr/>
-          <p:nvPr/>
-        </p:nvSpPr>
-        <p:spPr>
-          <a:xfrm>
-            <a:off x="5943600" y="3127248"/>
-            <a:ext cx="1463040" cy="420624"/>
-          </a:xfrm>
-          <a:prstGeom prst="rect">
-            <a:avLst/>
-          </a:prstGeom>
-          <a:noFill/>
-          <a:ln/>
-        </p:spPr>
-        <p:txBody>
-          <a:bodyPr wrap="square" lIns="0" tIns="0" rIns="0" bIns="0" rtlCol="0" anchor="ctr"/>
-          <a:lstStyle/>
-          <a:p>
-            <a:pPr algn="ctr" indent="0" marL="0">
-              <a:buNone/>
-            </a:pPr>
-            <a:r>
-              <a:rPr lang="en-US" sz="1300" b="1" dirty="0">
-                <a:solidFill>
-                  <a:srgbClr val="9D174D"/>
-                </a:solidFill>
-                <a:latin typeface="Trebuchet MS" pitchFamily="34" charset="0"/>
-                <a:ea typeface="Trebuchet MS" pitchFamily="34" charset="-122"/>
-                <a:cs typeface="Trebuchet MS" pitchFamily="34" charset="-120"/>
-              </a:rPr>
-              <a:t>-ly</a:t>
-            </a:r>
-            <a:endParaRPr lang="en-US" sz="1300" dirty="0"/>
-          </a:p>
-        </p:txBody>
-      </p:sp>
-      <p:sp>
-        <p:nvSpPr>
-          <p:cNvPr id="38" name="Shape 36"/>
-          <p:cNvSpPr/>
-          <p:nvPr/>
-        </p:nvSpPr>
-        <p:spPr>
-          <a:xfrm>
-            <a:off x="640080" y="3584448"/>
-            <a:ext cx="1463040" cy="420624"/>
-          </a:xfrm>
-          <a:prstGeom prst="rect">
-            <a:avLst/>
-          </a:prstGeom>
-          <a:solidFill>
-            <a:srgbClr val="DDD6FE"/>
-          </a:solidFill>
-          <a:ln w="12700">
-            <a:solidFill>
-              <a:srgbClr val="E5E7EB"/>
-            </a:solidFill>
-            <a:prstDash val="solid"/>
-          </a:ln>
-        </p:spPr>
-      </p:sp>
-      <p:sp>
-        <p:nvSpPr>
-          <p:cNvPr id="39" name="Text 37"/>
-          <p:cNvSpPr/>
-          <p:nvPr/>
-        </p:nvSpPr>
-        <p:spPr>
-          <a:xfrm>
-            <a:off x="640080" y="3584448"/>
-            <a:ext cx="1463040" cy="420624"/>
-          </a:xfrm>
-          <a:prstGeom prst="rect">
-            <a:avLst/>
-          </a:prstGeom>
-          <a:noFill/>
-          <a:ln/>
-        </p:spPr>
-        <p:txBody>
-          <a:bodyPr wrap="square" lIns="0" tIns="0" rIns="0" bIns="0" rtlCol="0" anchor="ctr"/>
-          <a:lstStyle/>
-          <a:p>
-            <a:pPr algn="ctr" indent="0" marL="0">
-              <a:buNone/>
-            </a:pPr>
-            <a:r>
-              <a:rPr lang="en-US" sz="1300" b="1" dirty="0">
-                <a:solidFill>
-                  <a:srgbClr val="4C1D95"/>
-                </a:solidFill>
-                <a:latin typeface="Trebuchet MS" pitchFamily="34" charset="0"/>
-                <a:ea typeface="Trebuchet MS" pitchFamily="34" charset="-122"/>
-                <a:cs typeface="Trebuchet MS" pitchFamily="34" charset="-120"/>
-              </a:rPr>
-              <a:t>star-</a:t>
-            </a:r>
-            <a:endParaRPr lang="en-US" sz="1300" dirty="0"/>
-          </a:p>
-        </p:txBody>
-      </p:sp>
-      <p:sp>
-        <p:nvSpPr>
-          <p:cNvPr id="40" name="Shape 38"/>
-          <p:cNvSpPr/>
-          <p:nvPr/>
-        </p:nvSpPr>
-        <p:spPr>
-          <a:xfrm>
-            <a:off x="3291840" y="3584448"/>
-            <a:ext cx="1645920" cy="420624"/>
-          </a:xfrm>
-          <a:prstGeom prst="rect">
-            <a:avLst/>
-          </a:prstGeom>
-          <a:solidFill>
-            <a:srgbClr val="F8FAFC"/>
-          </a:solidFill>
-          <a:ln w="12700">
-            <a:solidFill>
-              <a:srgbClr val="E5E7EB"/>
-            </a:solidFill>
-            <a:prstDash val="solid"/>
-          </a:ln>
-        </p:spPr>
-      </p:sp>
-      <p:sp>
-        <p:nvSpPr>
-          <p:cNvPr id="41" name="Shape 39"/>
-          <p:cNvSpPr/>
-          <p:nvPr/>
-        </p:nvSpPr>
-        <p:spPr>
-          <a:xfrm>
-            <a:off x="5943600" y="3584448"/>
-            <a:ext cx="1463040" cy="420624"/>
-          </a:xfrm>
-          <a:prstGeom prst="rect">
-            <a:avLst/>
-          </a:prstGeom>
-          <a:solidFill>
-            <a:srgbClr val="FCE7F3"/>
-          </a:solidFill>
-          <a:ln w="12700">
-            <a:solidFill>
-              <a:srgbClr val="E5E7EB"/>
-            </a:solidFill>
-            <a:prstDash val="solid"/>
-          </a:ln>
-        </p:spPr>
-      </p:sp>
-      <p:sp>
-        <p:nvSpPr>
-          <p:cNvPr id="42" name="Text 40"/>
-          <p:cNvSpPr/>
-          <p:nvPr/>
-        </p:nvSpPr>
-        <p:spPr>
-          <a:xfrm>
-            <a:off x="5943600" y="3584448"/>
-            <a:ext cx="1463040" cy="420624"/>
-          </a:xfrm>
-          <a:prstGeom prst="rect">
-            <a:avLst/>
-          </a:prstGeom>
-          <a:noFill/>
-          <a:ln/>
-        </p:spPr>
-        <p:txBody>
-          <a:bodyPr wrap="square" lIns="0" tIns="0" rIns="0" bIns="0" rtlCol="0" anchor="ctr"/>
-          <a:lstStyle/>
-          <a:p>
-            <a:pPr algn="ctr" indent="0" marL="0">
-              <a:buNone/>
-            </a:pPr>
-            <a:r>
-              <a:rPr lang="en-US" sz="1300" b="1" dirty="0">
-                <a:solidFill>
-                  <a:srgbClr val="9D174D"/>
-                </a:solidFill>
-                <a:latin typeface="Trebuchet MS" pitchFamily="34" charset="0"/>
-                <a:ea typeface="Trebuchet MS" pitchFamily="34" charset="-122"/>
-                <a:cs typeface="Trebuchet MS" pitchFamily="34" charset="-120"/>
-              </a:rPr>
-              <a:t>-ness</a:t>
-            </a:r>
-            <a:endParaRPr lang="en-US" sz="1300" dirty="0"/>
-          </a:p>
-        </p:txBody>
-      </p:sp>
-      <p:sp>
-        <p:nvSpPr>
-          <p:cNvPr id="43" name="Text 41"/>
+          <p:cNvPr id="38" name="Text 36"/>
           <p:cNvSpPr/>
           <p:nvPr/>
         </p:nvSpPr>
@@ -38750,14 +38880,14 @@
       </p:sp>
       <p:sp>
         <p:nvSpPr>
-          <p:cNvPr id="44" name="Shape 42"/>
+          <p:cNvPr id="39" name="Shape 37"/>
           <p:cNvSpPr/>
           <p:nvPr/>
         </p:nvSpPr>
         <p:spPr>
           <a:xfrm>
             <a:off x="1508760" y="4178808"/>
-            <a:ext cx="822960" cy="420624"/>
+            <a:ext cx="1536192" cy="420624"/>
           </a:xfrm>
           <a:prstGeom prst="rect">
             <a:avLst>
@@ -38765,11 +38895,11 @@
             </a:avLst>
           </a:prstGeom>
           <a:solidFill>
-            <a:srgbClr val="DDD6FE"/>
+            <a:srgbClr val="CCFBF1"/>
           </a:solidFill>
           <a:ln w="19050">
             <a:solidFill>
-              <a:srgbClr val="7C3AED"/>
+              <a:srgbClr val="0D9488"/>
             </a:solidFill>
             <a:prstDash val="solid"/>
           </a:ln>
@@ -38784,14 +38914,14 @@
       </p:sp>
       <p:sp>
         <p:nvSpPr>
-          <p:cNvPr id="45" name="Text 43"/>
+          <p:cNvPr id="40" name="Text 38"/>
           <p:cNvSpPr/>
           <p:nvPr/>
         </p:nvSpPr>
         <p:spPr>
           <a:xfrm>
             <a:off x="1508760" y="4178808"/>
-            <a:ext cx="822960" cy="420624"/>
+            <a:ext cx="1536192" cy="420624"/>
           </a:xfrm>
           <a:prstGeom prst="rect">
             <a:avLst/>
@@ -38809,13 +38939,13 @@
             <a:r>
               <a:rPr lang="en-US" sz="1300" b="1" dirty="0">
                 <a:solidFill>
-                  <a:srgbClr val="4C1D95"/>
+                  <a:srgbClr val="0F766E"/>
                 </a:solidFill>
                 <a:latin typeface="Trebuchet MS" pitchFamily="34" charset="0"/>
                 <a:ea typeface="Trebuchet MS" pitchFamily="34" charset="-122"/>
                 <a:cs typeface="Trebuchet MS" pitchFamily="34" charset="-120"/>
               </a:rPr>
-              <a:t>un-</a:t>
+              <a:t>'bright'</a:t>
             </a:r>
             <a:endParaRPr lang="en-US" sz="1300" dirty="0"/>
           </a:p>
@@ -38823,13 +38953,13 @@
       </p:sp>
       <p:sp>
         <p:nvSpPr>
-          <p:cNvPr id="46" name="Text 44"/>
-          <p:cNvSpPr/>
-          <p:nvPr/>
-        </p:nvSpPr>
-        <p:spPr>
-          <a:xfrm>
-            <a:off x="2359152" y="4178808"/>
+          <p:cNvPr id="41" name="Text 39"/>
+          <p:cNvSpPr/>
+          <p:nvPr/>
+        </p:nvSpPr>
+        <p:spPr>
+          <a:xfrm>
+            <a:off x="3072384" y="4178808"/>
             <a:ext cx="320040" cy="420624"/>
           </a:xfrm>
           <a:prstGeom prst="rect">
@@ -38862,14 +38992,14 @@
       </p:sp>
       <p:sp>
         <p:nvSpPr>
-          <p:cNvPr id="47" name="Shape 45"/>
-          <p:cNvSpPr/>
-          <p:nvPr/>
-        </p:nvSpPr>
-        <p:spPr>
-          <a:xfrm>
-            <a:off x="2706624" y="4178808"/>
-            <a:ext cx="1536192" cy="420624"/>
+          <p:cNvPr id="42" name="Shape 40"/>
+          <p:cNvSpPr/>
+          <p:nvPr/>
+        </p:nvSpPr>
+        <p:spPr>
+          <a:xfrm>
+            <a:off x="3419856" y="4178808"/>
+            <a:ext cx="822960" cy="420624"/>
           </a:xfrm>
           <a:prstGeom prst="rect">
             <a:avLst>
@@ -38877,11 +39007,11 @@
             </a:avLst>
           </a:prstGeom>
           <a:solidFill>
-            <a:srgbClr val="CCFBF1"/>
+            <a:srgbClr val="FCE7F3"/>
           </a:solidFill>
           <a:ln w="19050">
             <a:solidFill>
-              <a:srgbClr val="0D9488"/>
+              <a:srgbClr val="DB2777"/>
             </a:solidFill>
             <a:prstDash val="solid"/>
           </a:ln>
@@ -38896,14 +39026,14 @@
       </p:sp>
       <p:sp>
         <p:nvSpPr>
-          <p:cNvPr id="48" name="Text 46"/>
-          <p:cNvSpPr/>
-          <p:nvPr/>
-        </p:nvSpPr>
-        <p:spPr>
-          <a:xfrm>
-            <a:off x="2706624" y="4178808"/>
-            <a:ext cx="1536192" cy="420624"/>
+          <p:cNvPr id="43" name="Text 41"/>
+          <p:cNvSpPr/>
+          <p:nvPr/>
+        </p:nvSpPr>
+        <p:spPr>
+          <a:xfrm>
+            <a:off x="3419856" y="4178808"/>
+            <a:ext cx="822960" cy="420624"/>
           </a:xfrm>
           <a:prstGeom prst="rect">
             <a:avLst/>
@@ -38921,13 +39051,13 @@
             <a:r>
               <a:rPr lang="en-US" sz="1300" b="1" dirty="0">
                 <a:solidFill>
-                  <a:srgbClr val="0F766E"/>
+                  <a:srgbClr val="9D174D"/>
                 </a:solidFill>
                 <a:latin typeface="Trebuchet MS" pitchFamily="34" charset="0"/>
                 <a:ea typeface="Trebuchet MS" pitchFamily="34" charset="-122"/>
                 <a:cs typeface="Trebuchet MS" pitchFamily="34" charset="-120"/>
               </a:rPr>
-              <a:t>'bright'</a:t>
+              <a:t>-en</a:t>
             </a:r>
             <a:endParaRPr lang="en-US" sz="1300" dirty="0"/>
           </a:p>
@@ -38935,14 +39065,14 @@
       </p:sp>
       <p:sp>
         <p:nvSpPr>
-          <p:cNvPr id="49" name="Text 47"/>
-          <p:cNvSpPr/>
-          <p:nvPr/>
-        </p:nvSpPr>
-        <p:spPr>
-          <a:xfrm>
-            <a:off x="4270248" y="4178808"/>
-            <a:ext cx="320040" cy="420624"/>
+          <p:cNvPr id="44" name="Text 42"/>
+          <p:cNvSpPr/>
+          <p:nvPr/>
+        </p:nvSpPr>
+        <p:spPr>
+          <a:xfrm>
+            <a:off x="4315968" y="4178808"/>
+            <a:ext cx="365760" cy="420624"/>
           </a:xfrm>
           <a:prstGeom prst="rect">
             <a:avLst/>
@@ -38958,30 +39088,30 @@
               <a:buNone/>
             </a:pPr>
             <a:r>
-              <a:rPr lang="en-US" sz="1400" dirty="0">
-                <a:solidFill>
-                  <a:srgbClr val="475569"/>
+              <a:rPr lang="en-US" sz="1800" b="1" dirty="0">
+                <a:solidFill>
+                  <a:srgbClr val="0D9488"/>
                 </a:solidFill>
                 <a:latin typeface="Trebuchet MS" pitchFamily="34" charset="0"/>
                 <a:ea typeface="Trebuchet MS" pitchFamily="34" charset="-122"/>
                 <a:cs typeface="Trebuchet MS" pitchFamily="34" charset="-120"/>
               </a:rPr>
-              <a:t>+</a:t>
-            </a:r>
-            <a:endParaRPr lang="en-US" sz="1400" dirty="0"/>
-          </a:p>
-        </p:txBody>
-      </p:sp>
-      <p:sp>
-        <p:nvSpPr>
-          <p:cNvPr id="50" name="Shape 48"/>
-          <p:cNvSpPr/>
-          <p:nvPr/>
-        </p:nvSpPr>
-        <p:spPr>
-          <a:xfrm>
-            <a:off x="4617720" y="4178808"/>
-            <a:ext cx="822960" cy="420624"/>
+              <a:t>=</a:t>
+            </a:r>
+            <a:endParaRPr lang="en-US" sz="1800" dirty="0"/>
+          </a:p>
+        </p:txBody>
+      </p:sp>
+      <p:sp>
+        <p:nvSpPr>
+          <p:cNvPr id="45" name="Shape 43"/>
+          <p:cNvSpPr/>
+          <p:nvPr/>
+        </p:nvSpPr>
+        <p:spPr>
+          <a:xfrm>
+            <a:off x="4727448" y="4178808"/>
+            <a:ext cx="2194560" cy="420624"/>
           </a:xfrm>
           <a:prstGeom prst="rect">
             <a:avLst>
@@ -38989,118 +39119,6 @@
             </a:avLst>
           </a:prstGeom>
           <a:solidFill>
-            <a:srgbClr val="FCE7F3"/>
-          </a:solidFill>
-          <a:ln w="19050">
-            <a:solidFill>
-              <a:srgbClr val="DB2777"/>
-            </a:solidFill>
-            <a:prstDash val="solid"/>
-          </a:ln>
-          <a:effectLst>
-            <a:outerShdw sx="100000" sy="100000" kx="0" ky="0" algn="bl" rotWithShape="0" blurRad="101600" dist="38100" dir="8100000">
-              <a:srgbClr val="000000">
-                <a:alpha val="12000"/>
-              </a:srgbClr>
-            </a:outerShdw>
-          </a:effectLst>
-        </p:spPr>
-      </p:sp>
-      <p:sp>
-        <p:nvSpPr>
-          <p:cNvPr id="51" name="Text 49"/>
-          <p:cNvSpPr/>
-          <p:nvPr/>
-        </p:nvSpPr>
-        <p:spPr>
-          <a:xfrm>
-            <a:off x="4617720" y="4178808"/>
-            <a:ext cx="822960" cy="420624"/>
-          </a:xfrm>
-          <a:prstGeom prst="rect">
-            <a:avLst/>
-          </a:prstGeom>
-          <a:noFill/>
-          <a:ln/>
-        </p:spPr>
-        <p:txBody>
-          <a:bodyPr wrap="square" lIns="0" tIns="0" rIns="0" bIns="0" rtlCol="0" anchor="ctr"/>
-          <a:lstStyle/>
-          <a:p>
-            <a:pPr algn="ctr" indent="0" marL="0">
-              <a:buNone/>
-            </a:pPr>
-            <a:r>
-              <a:rPr lang="en-US" sz="1300" b="1" dirty="0">
-                <a:solidFill>
-                  <a:srgbClr val="9D174D"/>
-                </a:solidFill>
-                <a:latin typeface="Trebuchet MS" pitchFamily="34" charset="0"/>
-                <a:ea typeface="Trebuchet MS" pitchFamily="34" charset="-122"/>
-                <a:cs typeface="Trebuchet MS" pitchFamily="34" charset="-120"/>
-              </a:rPr>
-              <a:t>-en</a:t>
-            </a:r>
-            <a:endParaRPr lang="en-US" sz="1300" dirty="0"/>
-          </a:p>
-        </p:txBody>
-      </p:sp>
-      <p:sp>
-        <p:nvSpPr>
-          <p:cNvPr id="52" name="Text 50"/>
-          <p:cNvSpPr/>
-          <p:nvPr/>
-        </p:nvSpPr>
-        <p:spPr>
-          <a:xfrm>
-            <a:off x="5513832" y="4178808"/>
-            <a:ext cx="365760" cy="420624"/>
-          </a:xfrm>
-          <a:prstGeom prst="rect">
-            <a:avLst/>
-          </a:prstGeom>
-          <a:noFill/>
-          <a:ln/>
-        </p:spPr>
-        <p:txBody>
-          <a:bodyPr wrap="square" lIns="0" tIns="0" rIns="0" bIns="0" rtlCol="0" anchor="ctr"/>
-          <a:lstStyle/>
-          <a:p>
-            <a:pPr algn="ctr" indent="0" marL="0">
-              <a:buNone/>
-            </a:pPr>
-            <a:r>
-              <a:rPr lang="en-US" sz="1800" b="1" dirty="0">
-                <a:solidFill>
-                  <a:srgbClr val="0D9488"/>
-                </a:solidFill>
-                <a:latin typeface="Trebuchet MS" pitchFamily="34" charset="0"/>
-                <a:ea typeface="Trebuchet MS" pitchFamily="34" charset="-122"/>
-                <a:cs typeface="Trebuchet MS" pitchFamily="34" charset="-120"/>
-              </a:rPr>
-              <a:t>=</a:t>
-            </a:r>
-            <a:endParaRPr lang="en-US" sz="1800" dirty="0"/>
-          </a:p>
-        </p:txBody>
-      </p:sp>
-      <p:sp>
-        <p:nvSpPr>
-          <p:cNvPr id="53" name="Shape 51"/>
-          <p:cNvSpPr/>
-          <p:nvPr/>
-        </p:nvSpPr>
-        <p:spPr>
-          <a:xfrm>
-            <a:off x="5925312" y="4178808"/>
-            <a:ext cx="2194560" cy="420624"/>
-          </a:xfrm>
-          <a:prstGeom prst="rect">
-            <a:avLst>
-              <a:gd name="adj" fmla="val 17391"/>
-            </a:avLst>
-          </a:prstGeom>
-          <a:solidFill>
             <a:srgbClr val="0D9488"/>
           </a:solidFill>
           <a:ln w="12700">
@@ -39113,13 +39131,13 @@
       </p:sp>
       <p:sp>
         <p:nvSpPr>
-          <p:cNvPr id="54" name="Text 52"/>
-          <p:cNvSpPr/>
-          <p:nvPr/>
-        </p:nvSpPr>
-        <p:spPr>
-          <a:xfrm>
-            <a:off x="5925312" y="4178808"/>
+          <p:cNvPr id="46" name="Text 44"/>
+          <p:cNvSpPr/>
+          <p:nvPr/>
+        </p:nvSpPr>
+        <p:spPr>
+          <a:xfrm>
+            <a:off x="4727448" y="4178808"/>
             <a:ext cx="2194560" cy="420624"/>
           </a:xfrm>
           <a:prstGeom prst="rect">
@@ -39436,7 +39454,7 @@
                 <a:ea typeface="Calibri" pitchFamily="34" charset="-122"/>
                 <a:cs typeface="Calibri" pitchFamily="34" charset="-120"/>
               </a:rPr>
-              <a:t>Word Labs  •  wordlabs.app  •  Root: 'bright' = full of light, clever</a:t>
+              <a:t>Word Labs  •  wordlabs.app  •  Root: 'bright' = giving out a lot of light; clever</a:t>
             </a:r>
             <a:endParaRPr lang="en-US" sz="800" dirty="0"/>
           </a:p>
@@ -39614,7 +39632,7 @@
                 <a:ea typeface="Calibri" pitchFamily="34" charset="-122"/>
                 <a:cs typeface="Calibri" pitchFamily="34" charset="-120"/>
               </a:rPr>
-              <a:t>Full of light, or very clever and quick to learn.</a:t>
+              <a:t>giving out a lot of light; shining</a:t>
             </a:r>
             <a:endParaRPr lang="en-US" sz="1200" dirty="0"/>
           </a:p>
@@ -39687,7 +39705,7 @@
                 <a:ea typeface="Trebuchet MS" pitchFamily="34" charset="-122"/>
                 <a:cs typeface="Trebuchet MS" pitchFamily="34" charset="-120"/>
               </a:rPr>
-              <a:t>brighter</a:t>
+              <a:t>brighten</a:t>
             </a:r>
             <a:endParaRPr lang="en-US" sz="1200" dirty="0"/>
           </a:p>
@@ -39753,7 +39771,7 @@
                 <a:ea typeface="Calibri" pitchFamily="34" charset="-122"/>
                 <a:cs typeface="Calibri" pitchFamily="34" charset="-120"/>
               </a:rPr>
-              <a:t>The most full of light or the most clever of all.</a:t>
+              <a:t>giving out more light than something else; more shining</a:t>
             </a:r>
             <a:endParaRPr lang="en-US" sz="1200" dirty="0"/>
           </a:p>
@@ -39826,7 +39844,7 @@
                 <a:ea typeface="Trebuchet MS" pitchFamily="34" charset="-122"/>
                 <a:cs typeface="Trebuchet MS" pitchFamily="34" charset="-120"/>
               </a:rPr>
-              <a:t>brightest</a:t>
+              <a:t>brighter</a:t>
             </a:r>
             <a:endParaRPr lang="en-US" sz="1200" dirty="0"/>
           </a:p>
@@ -39892,563 +39910,7 @@
                 <a:ea typeface="Calibri" pitchFamily="34" charset="-122"/>
                 <a:cs typeface="Calibri" pitchFamily="34" charset="-120"/>
               </a:rPr>
-              <a:t>The quality of giving off strong light, or how clever someone is.</a:t>
-            </a:r>
-            <a:endParaRPr lang="en-US" sz="1200" dirty="0"/>
-          </a:p>
-        </p:txBody>
-      </p:sp>
-      <p:sp>
-        <p:nvSpPr>
-          <p:cNvPr id="23" name="Shape 21"/>
-          <p:cNvSpPr/>
-          <p:nvPr/>
-        </p:nvSpPr>
-        <p:spPr>
-          <a:xfrm>
-            <a:off x="365760" y="2779776"/>
-            <a:ext cx="2011680" cy="457200"/>
-          </a:xfrm>
-          <a:prstGeom prst="rect">
-            <a:avLst>
-              <a:gd name="adj" fmla="val 12000"/>
-            </a:avLst>
-          </a:prstGeom>
-          <a:solidFill>
-            <a:srgbClr val="EEF2FF"/>
-          </a:solidFill>
-          <a:ln w="12700">
-            <a:solidFill>
-              <a:srgbClr val="6366F1"/>
-            </a:solidFill>
-            <a:prstDash val="solid"/>
-          </a:ln>
-          <a:effectLst>
-            <a:outerShdw sx="100000" sy="100000" kx="0" ky="0" algn="bl" rotWithShape="0" blurRad="101600" dist="38100" dir="8100000">
-              <a:srgbClr val="000000">
-                <a:alpha val="12000"/>
-              </a:srgbClr>
-            </a:outerShdw>
-          </a:effectLst>
-        </p:spPr>
-      </p:sp>
-      <p:sp>
-        <p:nvSpPr>
-          <p:cNvPr id="24" name="Text 22"/>
-          <p:cNvSpPr/>
-          <p:nvPr/>
-        </p:nvSpPr>
-        <p:spPr>
-          <a:xfrm>
-            <a:off x="365760" y="2779776"/>
-            <a:ext cx="2011680" cy="457200"/>
-          </a:xfrm>
-          <a:prstGeom prst="rect">
-            <a:avLst/>
-          </a:prstGeom>
-          <a:noFill/>
-          <a:ln/>
-        </p:spPr>
-        <p:txBody>
-          <a:bodyPr wrap="square" lIns="0" tIns="0" rIns="0" bIns="0" rtlCol="0" anchor="ctr"/>
-          <a:lstStyle/>
-          <a:p>
-            <a:pPr algn="ctr" indent="0" marL="0">
-              <a:buNone/>
-            </a:pPr>
-            <a:r>
-              <a:rPr lang="en-US" sz="1200" b="1" dirty="0">
-                <a:solidFill>
-                  <a:srgbClr val="4338CA"/>
-                </a:solidFill>
-                <a:latin typeface="Trebuchet MS" pitchFamily="34" charset="0"/>
-                <a:ea typeface="Trebuchet MS" pitchFamily="34" charset="-122"/>
-                <a:cs typeface="Trebuchet MS" pitchFamily="34" charset="-120"/>
-              </a:rPr>
-              <a:t>brightly</a:t>
-            </a:r>
-            <a:endParaRPr lang="en-US" sz="1200" dirty="0"/>
-          </a:p>
-        </p:txBody>
-      </p:sp>
-      <p:sp>
-        <p:nvSpPr>
-          <p:cNvPr id="25" name="Shape 23"/>
-          <p:cNvSpPr/>
-          <p:nvPr/>
-        </p:nvSpPr>
-        <p:spPr>
-          <a:xfrm>
-            <a:off x="2514600" y="2779776"/>
-            <a:ext cx="6263640" cy="457200"/>
-          </a:xfrm>
-          <a:prstGeom prst="rect">
-            <a:avLst>
-              <a:gd name="adj" fmla="val 12000"/>
-            </a:avLst>
-          </a:prstGeom>
-          <a:solidFill>
-            <a:srgbClr val="F8FAFC"/>
-          </a:solidFill>
-          <a:ln w="12700">
-            <a:solidFill>
-              <a:srgbClr val="E2E8F0"/>
-            </a:solidFill>
-            <a:prstDash val="solid"/>
-          </a:ln>
-        </p:spPr>
-      </p:sp>
-      <p:sp>
-        <p:nvSpPr>
-          <p:cNvPr id="26" name="Text 24"/>
-          <p:cNvSpPr/>
-          <p:nvPr/>
-        </p:nvSpPr>
-        <p:spPr>
-          <a:xfrm>
-            <a:off x="2651760" y="2779776"/>
-            <a:ext cx="6035040" cy="457200"/>
-          </a:xfrm>
-          <a:prstGeom prst="rect">
-            <a:avLst/>
-          </a:prstGeom>
-          <a:noFill/>
-          <a:ln/>
-        </p:spPr>
-        <p:txBody>
-          <a:bodyPr wrap="square" rtlCol="0" anchor="ctr"/>
-          <a:lstStyle/>
-          <a:p>
-            <a:pPr algn="l" indent="0" marL="0">
-              <a:buNone/>
-            </a:pPr>
-            <a:r>
-              <a:rPr lang="en-US" sz="1200" dirty="0">
-                <a:solidFill>
-                  <a:srgbClr val="0F172A"/>
-                </a:solidFill>
-                <a:latin typeface="Calibri" pitchFamily="34" charset="0"/>
-                <a:ea typeface="Calibri" pitchFamily="34" charset="-122"/>
-                <a:cs typeface="Calibri" pitchFamily="34" charset="-120"/>
-              </a:rPr>
-              <a:t>To make something lighter or more cheerful, like brightening a room.</a:t>
-            </a:r>
-            <a:endParaRPr lang="en-US" sz="1200" dirty="0"/>
-          </a:p>
-        </p:txBody>
-      </p:sp>
-      <p:sp>
-        <p:nvSpPr>
-          <p:cNvPr id="27" name="Shape 25"/>
-          <p:cNvSpPr/>
-          <p:nvPr/>
-        </p:nvSpPr>
-        <p:spPr>
-          <a:xfrm>
-            <a:off x="365760" y="3310128"/>
-            <a:ext cx="2011680" cy="457200"/>
-          </a:xfrm>
-          <a:prstGeom prst="rect">
-            <a:avLst>
-              <a:gd name="adj" fmla="val 12000"/>
-            </a:avLst>
-          </a:prstGeom>
-          <a:solidFill>
-            <a:srgbClr val="EEF2FF"/>
-          </a:solidFill>
-          <a:ln w="12700">
-            <a:solidFill>
-              <a:srgbClr val="6366F1"/>
-            </a:solidFill>
-            <a:prstDash val="solid"/>
-          </a:ln>
-          <a:effectLst>
-            <a:outerShdw sx="100000" sy="100000" kx="0" ky="0" algn="bl" rotWithShape="0" blurRad="101600" dist="38100" dir="8100000">
-              <a:srgbClr val="000000">
-                <a:alpha val="12000"/>
-              </a:srgbClr>
-            </a:outerShdw>
-          </a:effectLst>
-        </p:spPr>
-      </p:sp>
-      <p:sp>
-        <p:nvSpPr>
-          <p:cNvPr id="28" name="Text 26"/>
-          <p:cNvSpPr/>
-          <p:nvPr/>
-        </p:nvSpPr>
-        <p:spPr>
-          <a:xfrm>
-            <a:off x="365760" y="3310128"/>
-            <a:ext cx="2011680" cy="457200"/>
-          </a:xfrm>
-          <a:prstGeom prst="rect">
-            <a:avLst/>
-          </a:prstGeom>
-          <a:noFill/>
-          <a:ln/>
-        </p:spPr>
-        <p:txBody>
-          <a:bodyPr wrap="square" lIns="0" tIns="0" rIns="0" bIns="0" rtlCol="0" anchor="ctr"/>
-          <a:lstStyle/>
-          <a:p>
-            <a:pPr algn="ctr" indent="0" marL="0">
-              <a:buNone/>
-            </a:pPr>
-            <a:r>
-              <a:rPr lang="en-US" sz="1200" b="1" dirty="0">
-                <a:solidFill>
-                  <a:srgbClr val="4338CA"/>
-                </a:solidFill>
-                <a:latin typeface="Trebuchet MS" pitchFamily="34" charset="0"/>
-                <a:ea typeface="Trebuchet MS" pitchFamily="34" charset="-122"/>
-                <a:cs typeface="Trebuchet MS" pitchFamily="34" charset="-120"/>
-              </a:rPr>
-              <a:t>brightness</a:t>
-            </a:r>
-            <a:endParaRPr lang="en-US" sz="1200" dirty="0"/>
-          </a:p>
-        </p:txBody>
-      </p:sp>
-      <p:sp>
-        <p:nvSpPr>
-          <p:cNvPr id="29" name="Shape 27"/>
-          <p:cNvSpPr/>
-          <p:nvPr/>
-        </p:nvSpPr>
-        <p:spPr>
-          <a:xfrm>
-            <a:off x="2514600" y="3310128"/>
-            <a:ext cx="6263640" cy="457200"/>
-          </a:xfrm>
-          <a:prstGeom prst="rect">
-            <a:avLst>
-              <a:gd name="adj" fmla="val 12000"/>
-            </a:avLst>
-          </a:prstGeom>
-          <a:solidFill>
-            <a:srgbClr val="F8FAFC"/>
-          </a:solidFill>
-          <a:ln w="12700">
-            <a:solidFill>
-              <a:srgbClr val="E2E8F0"/>
-            </a:solidFill>
-            <a:prstDash val="solid"/>
-          </a:ln>
-        </p:spPr>
-      </p:sp>
-      <p:sp>
-        <p:nvSpPr>
-          <p:cNvPr id="30" name="Text 28"/>
-          <p:cNvSpPr/>
-          <p:nvPr/>
-        </p:nvSpPr>
-        <p:spPr>
-          <a:xfrm>
-            <a:off x="2651760" y="3310128"/>
-            <a:ext cx="6035040" cy="457200"/>
-          </a:xfrm>
-          <a:prstGeom prst="rect">
-            <a:avLst/>
-          </a:prstGeom>
-          <a:noFill/>
-          <a:ln/>
-        </p:spPr>
-        <p:txBody>
-          <a:bodyPr wrap="square" rtlCol="0" anchor="ctr"/>
-          <a:lstStyle/>
-          <a:p>
-            <a:pPr algn="l" indent="0" marL="0">
-              <a:buNone/>
-            </a:pPr>
-            <a:r>
-              <a:rPr lang="en-US" sz="1200" dirty="0">
-                <a:solidFill>
-                  <a:srgbClr val="0F172A"/>
-                </a:solidFill>
-                <a:latin typeface="Calibri" pitchFamily="34" charset="0"/>
-                <a:ea typeface="Calibri" pitchFamily="34" charset="-122"/>
-                <a:cs typeface="Calibri" pitchFamily="34" charset="-120"/>
-              </a:rPr>
-              <a:t>In a way that gives off a lot of light, like a star shining brightly.</a:t>
-            </a:r>
-            <a:endParaRPr lang="en-US" sz="1200" dirty="0"/>
-          </a:p>
-        </p:txBody>
-      </p:sp>
-      <p:sp>
-        <p:nvSpPr>
-          <p:cNvPr id="31" name="Shape 29"/>
-          <p:cNvSpPr/>
-          <p:nvPr/>
-        </p:nvSpPr>
-        <p:spPr>
-          <a:xfrm>
-            <a:off x="365760" y="3840480"/>
-            <a:ext cx="2011680" cy="457200"/>
-          </a:xfrm>
-          <a:prstGeom prst="rect">
-            <a:avLst>
-              <a:gd name="adj" fmla="val 12000"/>
-            </a:avLst>
-          </a:prstGeom>
-          <a:solidFill>
-            <a:srgbClr val="EEF2FF"/>
-          </a:solidFill>
-          <a:ln w="12700">
-            <a:solidFill>
-              <a:srgbClr val="6366F1"/>
-            </a:solidFill>
-            <a:prstDash val="solid"/>
-          </a:ln>
-          <a:effectLst>
-            <a:outerShdw sx="100000" sy="100000" kx="0" ky="0" algn="bl" rotWithShape="0" blurRad="101600" dist="38100" dir="8100000">
-              <a:srgbClr val="000000">
-                <a:alpha val="12000"/>
-              </a:srgbClr>
-            </a:outerShdw>
-          </a:effectLst>
-        </p:spPr>
-      </p:sp>
-      <p:sp>
-        <p:nvSpPr>
-          <p:cNvPr id="32" name="Text 30"/>
-          <p:cNvSpPr/>
-          <p:nvPr/>
-        </p:nvSpPr>
-        <p:spPr>
-          <a:xfrm>
-            <a:off x="365760" y="3840480"/>
-            <a:ext cx="2011680" cy="457200"/>
-          </a:xfrm>
-          <a:prstGeom prst="rect">
-            <a:avLst/>
-          </a:prstGeom>
-          <a:noFill/>
-          <a:ln/>
-        </p:spPr>
-        <p:txBody>
-          <a:bodyPr wrap="square" lIns="0" tIns="0" rIns="0" bIns="0" rtlCol="0" anchor="ctr"/>
-          <a:lstStyle/>
-          <a:p>
-            <a:pPr algn="ctr" indent="0" marL="0">
-              <a:buNone/>
-            </a:pPr>
-            <a:r>
-              <a:rPr lang="en-US" sz="1200" b="1" dirty="0">
-                <a:solidFill>
-                  <a:srgbClr val="4338CA"/>
-                </a:solidFill>
-                <a:latin typeface="Trebuchet MS" pitchFamily="34" charset="0"/>
-                <a:ea typeface="Trebuchet MS" pitchFamily="34" charset="-122"/>
-                <a:cs typeface="Trebuchet MS" pitchFamily="34" charset="-120"/>
-              </a:rPr>
-              <a:t>brighten</a:t>
-            </a:r>
-            <a:endParaRPr lang="en-US" sz="1200" dirty="0"/>
-          </a:p>
-        </p:txBody>
-      </p:sp>
-      <p:sp>
-        <p:nvSpPr>
-          <p:cNvPr id="33" name="Shape 31"/>
-          <p:cNvSpPr/>
-          <p:nvPr/>
-        </p:nvSpPr>
-        <p:spPr>
-          <a:xfrm>
-            <a:off x="2514600" y="3840480"/>
-            <a:ext cx="6263640" cy="457200"/>
-          </a:xfrm>
-          <a:prstGeom prst="rect">
-            <a:avLst>
-              <a:gd name="adj" fmla="val 12000"/>
-            </a:avLst>
-          </a:prstGeom>
-          <a:solidFill>
-            <a:srgbClr val="F8FAFC"/>
-          </a:solidFill>
-          <a:ln w="12700">
-            <a:solidFill>
-              <a:srgbClr val="E2E8F0"/>
-            </a:solidFill>
-            <a:prstDash val="solid"/>
-          </a:ln>
-        </p:spPr>
-      </p:sp>
-      <p:sp>
-        <p:nvSpPr>
-          <p:cNvPr id="34" name="Text 32"/>
-          <p:cNvSpPr/>
-          <p:nvPr/>
-        </p:nvSpPr>
-        <p:spPr>
-          <a:xfrm>
-            <a:off x="2651760" y="3840480"/>
-            <a:ext cx="6035040" cy="457200"/>
-          </a:xfrm>
-          <a:prstGeom prst="rect">
-            <a:avLst/>
-          </a:prstGeom>
-          <a:noFill/>
-          <a:ln/>
-        </p:spPr>
-        <p:txBody>
-          <a:bodyPr wrap="square" rtlCol="0" anchor="ctr"/>
-          <a:lstStyle/>
-          <a:p>
-            <a:pPr algn="l" indent="0" marL="0">
-              <a:buNone/>
-            </a:pPr>
-            <a:r>
-              <a:rPr lang="en-US" sz="1200" dirty="0">
-                <a:solidFill>
-                  <a:srgbClr val="0F172A"/>
-                </a:solidFill>
-                <a:latin typeface="Calibri" pitchFamily="34" charset="0"/>
-                <a:ea typeface="Calibri" pitchFamily="34" charset="-122"/>
-                <a:cs typeface="Calibri" pitchFamily="34" charset="-120"/>
-              </a:rPr>
-              <a:t>To make something less bright or to dull the light.</a:t>
-            </a:r>
-            <a:endParaRPr lang="en-US" sz="1200" dirty="0"/>
-          </a:p>
-        </p:txBody>
-      </p:sp>
-      <p:sp>
-        <p:nvSpPr>
-          <p:cNvPr id="35" name="Shape 33"/>
-          <p:cNvSpPr/>
-          <p:nvPr/>
-        </p:nvSpPr>
-        <p:spPr>
-          <a:xfrm>
-            <a:off x="365760" y="4370832"/>
-            <a:ext cx="2011680" cy="457200"/>
-          </a:xfrm>
-          <a:prstGeom prst="rect">
-            <a:avLst>
-              <a:gd name="adj" fmla="val 12000"/>
-            </a:avLst>
-          </a:prstGeom>
-          <a:solidFill>
-            <a:srgbClr val="EEF2FF"/>
-          </a:solidFill>
-          <a:ln w="12700">
-            <a:solidFill>
-              <a:srgbClr val="6366F1"/>
-            </a:solidFill>
-            <a:prstDash val="solid"/>
-          </a:ln>
-          <a:effectLst>
-            <a:outerShdw sx="100000" sy="100000" kx="0" ky="0" algn="bl" rotWithShape="0" blurRad="101600" dist="38100" dir="8100000">
-              <a:srgbClr val="000000">
-                <a:alpha val="12000"/>
-              </a:srgbClr>
-            </a:outerShdw>
-          </a:effectLst>
-        </p:spPr>
-      </p:sp>
-      <p:sp>
-        <p:nvSpPr>
-          <p:cNvPr id="36" name="Text 34"/>
-          <p:cNvSpPr/>
-          <p:nvPr/>
-        </p:nvSpPr>
-        <p:spPr>
-          <a:xfrm>
-            <a:off x="365760" y="4370832"/>
-            <a:ext cx="2011680" cy="457200"/>
-          </a:xfrm>
-          <a:prstGeom prst="rect">
-            <a:avLst/>
-          </a:prstGeom>
-          <a:noFill/>
-          <a:ln/>
-        </p:spPr>
-        <p:txBody>
-          <a:bodyPr wrap="square" lIns="0" tIns="0" rIns="0" bIns="0" rtlCol="0" anchor="ctr"/>
-          <a:lstStyle/>
-          <a:p>
-            <a:pPr algn="ctr" indent="0" marL="0">
-              <a:buNone/>
-            </a:pPr>
-            <a:r>
-              <a:rPr lang="en-US" sz="1200" b="1" dirty="0">
-                <a:solidFill>
-                  <a:srgbClr val="4338CA"/>
-                </a:solidFill>
-                <a:latin typeface="Trebuchet MS" pitchFamily="34" charset="0"/>
-                <a:ea typeface="Trebuchet MS" pitchFamily="34" charset="-122"/>
-                <a:cs typeface="Trebuchet MS" pitchFamily="34" charset="-120"/>
-              </a:rPr>
-              <a:t>unbrighten</a:t>
-            </a:r>
-            <a:endParaRPr lang="en-US" sz="1200" dirty="0"/>
-          </a:p>
-        </p:txBody>
-      </p:sp>
-      <p:sp>
-        <p:nvSpPr>
-          <p:cNvPr id="37" name="Shape 35"/>
-          <p:cNvSpPr/>
-          <p:nvPr/>
-        </p:nvSpPr>
-        <p:spPr>
-          <a:xfrm>
-            <a:off x="2514600" y="4370832"/>
-            <a:ext cx="6263640" cy="457200"/>
-          </a:xfrm>
-          <a:prstGeom prst="rect">
-            <a:avLst>
-              <a:gd name="adj" fmla="val 12000"/>
-            </a:avLst>
-          </a:prstGeom>
-          <a:solidFill>
-            <a:srgbClr val="F8FAFC"/>
-          </a:solidFill>
-          <a:ln w="12700">
-            <a:solidFill>
-              <a:srgbClr val="E2E8F0"/>
-            </a:solidFill>
-            <a:prstDash val="solid"/>
-          </a:ln>
-        </p:spPr>
-      </p:sp>
-      <p:sp>
-        <p:nvSpPr>
-          <p:cNvPr id="38" name="Text 36"/>
-          <p:cNvSpPr/>
-          <p:nvPr/>
-        </p:nvSpPr>
-        <p:spPr>
-          <a:xfrm>
-            <a:off x="2651760" y="4370832"/>
-            <a:ext cx="6035040" cy="457200"/>
-          </a:xfrm>
-          <a:prstGeom prst="rect">
-            <a:avLst/>
-          </a:prstGeom>
-          <a:noFill/>
-          <a:ln/>
-        </p:spPr>
-        <p:txBody>
-          <a:bodyPr wrap="square" rtlCol="0" anchor="ctr"/>
-          <a:lstStyle/>
-          <a:p>
-            <a:pPr algn="l" indent="0" marL="0">
-              <a:buNone/>
-            </a:pPr>
-            <a:r>
-              <a:rPr lang="en-US" sz="1200" dirty="0">
-                <a:solidFill>
-                  <a:srgbClr val="0F172A"/>
-                </a:solidFill>
-                <a:latin typeface="Calibri" pitchFamily="34" charset="0"/>
-                <a:ea typeface="Calibri" pitchFamily="34" charset="-122"/>
-                <a:cs typeface="Calibri" pitchFamily="34" charset="-120"/>
-              </a:rPr>
-              <a:t>More full of light or more clever than something else.</a:t>
+              <a:t>to make or become lighter or more cheerful</a:t>
             </a:r>
             <a:endParaRPr lang="en-US" sz="1200" dirty="0"/>
           </a:p>
@@ -40740,7 +40202,7 @@
                 <a:ea typeface="Calibri" pitchFamily="34" charset="-122"/>
                 <a:cs typeface="Calibri" pitchFamily="34" charset="-120"/>
               </a:rPr>
-              <a:t>Word Labs  •  wordlabs.app  •  Root: 'bright' = full of light, clever</a:t>
+              <a:t>Word Labs  •  wordlabs.app  •  Root: 'bright' = giving out a lot of light; clever</a:t>
             </a:r>
             <a:endParaRPr lang="en-US" sz="800" dirty="0"/>
           </a:p>
@@ -40943,7 +40405,7 @@
                 <a:ea typeface="Calibri" pitchFamily="34" charset="-122"/>
                 <a:cs typeface="Calibri" pitchFamily="34" charset="-120"/>
               </a:rPr>
-              <a:t>The students were told to brighten their writing by using more vivid describing words.</a:t>
+              <a:t>The bright sun made everyone squint.</a:t>
             </a:r>
             <a:endParaRPr lang="en-US" sz="1500" dirty="0"/>
           </a:p>
@@ -41107,7 +40569,7 @@
                 <a:ea typeface="Calibri" pitchFamily="34" charset="-122"/>
                 <a:cs typeface="Calibri" pitchFamily="34" charset="-120"/>
               </a:rPr>
-              <a:t>She was the brightest student in the class and always finished her work early.</a:t>
+              <a:t>Opening the curtains will brighten the room.</a:t>
             </a:r>
             <a:endParaRPr lang="en-US" sz="1500" dirty="0"/>
           </a:p>
@@ -41271,7 +40733,7 @@
                 <a:ea typeface="Calibri" pitchFamily="34" charset="-122"/>
                 <a:cs typeface="Calibri" pitchFamily="34" charset="-120"/>
               </a:rPr>
-              <a:t>The torch shone brightly through the dark cave as the explorers moved carefully inside.</a:t>
+              <a:t>This torch is brighter than the old one.</a:t>
             </a:r>
             <a:endParaRPr lang="en-US" sz="1500" dirty="0"/>
           </a:p>
